--- a/docs/pptx/auc3/jx-auc3-linsubhr-ratio-hosp3.pptx
+++ b/docs/pptx/auc3/jx-auc3-linsubhr-ratio-hosp3.pptx
@@ -2271,7 +2271,7 @@
           </p:nvSpPr>
           <p:spPr>
             <a:xfrm>
-              <a:off x="817517" y="5114368"/>
+              <a:off x="817517" y="5142518"/>
               <a:ext cx="7799693" cy="0"/>
             </a:xfrm>
             <a:custGeom>
@@ -2314,7 +2314,7 @@
           </p:nvSpPr>
           <p:spPr>
             <a:xfrm>
-              <a:off x="817517" y="4244691"/>
+              <a:off x="817517" y="4313054"/>
               <a:ext cx="7799693" cy="0"/>
             </a:xfrm>
             <a:custGeom>
@@ -2357,7 +2357,7 @@
           </p:nvSpPr>
           <p:spPr>
             <a:xfrm>
-              <a:off x="817517" y="3375014"/>
+              <a:off x="817517" y="3483591"/>
               <a:ext cx="7799693" cy="0"/>
             </a:xfrm>
             <a:custGeom>
@@ -2400,7 +2400,7 @@
           </p:nvSpPr>
           <p:spPr>
             <a:xfrm>
-              <a:off x="817517" y="2505337"/>
+              <a:off x="817517" y="2654127"/>
               <a:ext cx="7799693" cy="0"/>
             </a:xfrm>
             <a:custGeom>
@@ -2443,15 +2443,15 @@
           </p:nvSpPr>
           <p:spPr>
             <a:xfrm>
-              <a:off x="1615213" y="1896563"/>
-              <a:ext cx="0" cy="3826579"/>
+              <a:off x="1615213" y="2073503"/>
+              <a:ext cx="0" cy="3649639"/>
             </a:xfrm>
             <a:custGeom>
               <a:avLst/>
               <a:pathLst>
-                <a:path w="0" h="3826579">
+                <a:path w="0" h="3649639">
                   <a:moveTo>
-                    <a:pt x="0" y="3826579"/>
+                    <a:pt x="0" y="3649639"/>
                   </a:moveTo>
                   <a:lnTo>
                     <a:pt x="0" y="0"/>
@@ -2486,15 +2486,15 @@
           </p:nvSpPr>
           <p:spPr>
             <a:xfrm>
-              <a:off x="3387871" y="1896563"/>
-              <a:ext cx="0" cy="3826579"/>
+              <a:off x="3387871" y="2073503"/>
+              <a:ext cx="0" cy="3649639"/>
             </a:xfrm>
             <a:custGeom>
               <a:avLst/>
               <a:pathLst>
-                <a:path w="0" h="3826579">
+                <a:path w="0" h="3649639">
                   <a:moveTo>
-                    <a:pt x="0" y="3826579"/>
+                    <a:pt x="0" y="3649639"/>
                   </a:moveTo>
                   <a:lnTo>
                     <a:pt x="0" y="0"/>
@@ -2529,15 +2529,15 @@
           </p:nvSpPr>
           <p:spPr>
             <a:xfrm>
-              <a:off x="5160528" y="1896563"/>
-              <a:ext cx="0" cy="3826579"/>
+              <a:off x="5160528" y="2073503"/>
+              <a:ext cx="0" cy="3649639"/>
             </a:xfrm>
             <a:custGeom>
               <a:avLst/>
               <a:pathLst>
-                <a:path w="0" h="3826579">
+                <a:path w="0" h="3649639">
                   <a:moveTo>
-                    <a:pt x="0" y="3826579"/>
+                    <a:pt x="0" y="3649639"/>
                   </a:moveTo>
                   <a:lnTo>
                     <a:pt x="0" y="0"/>
@@ -2572,15 +2572,15 @@
           </p:nvSpPr>
           <p:spPr>
             <a:xfrm>
-              <a:off x="6933186" y="1896563"/>
-              <a:ext cx="0" cy="3826579"/>
+              <a:off x="6933186" y="2073503"/>
+              <a:ext cx="0" cy="3649639"/>
             </a:xfrm>
             <a:custGeom>
               <a:avLst/>
               <a:pathLst>
-                <a:path w="0" h="3826579">
+                <a:path w="0" h="3649639">
                   <a:moveTo>
-                    <a:pt x="0" y="3826579"/>
+                    <a:pt x="0" y="3649639"/>
                   </a:moveTo>
                   <a:lnTo>
                     <a:pt x="0" y="0"/>
@@ -2615,7 +2615,7 @@
           </p:nvSpPr>
           <p:spPr>
             <a:xfrm>
-              <a:off x="817517" y="5549207"/>
+              <a:off x="817517" y="5557249"/>
               <a:ext cx="7799693" cy="0"/>
             </a:xfrm>
             <a:custGeom>
@@ -2658,7 +2658,7 @@
           </p:nvSpPr>
           <p:spPr>
             <a:xfrm>
-              <a:off x="817517" y="4679530"/>
+              <a:off x="817517" y="4727786"/>
               <a:ext cx="7799693" cy="0"/>
             </a:xfrm>
             <a:custGeom>
@@ -2701,7 +2701,7 @@
           </p:nvSpPr>
           <p:spPr>
             <a:xfrm>
-              <a:off x="817517" y="3809853"/>
+              <a:off x="817517" y="3898322"/>
               <a:ext cx="7799693" cy="0"/>
             </a:xfrm>
             <a:custGeom>
@@ -2744,7 +2744,7 @@
           </p:nvSpPr>
           <p:spPr>
             <a:xfrm>
-              <a:off x="817517" y="2940175"/>
+              <a:off x="817517" y="3068859"/>
               <a:ext cx="7799693" cy="0"/>
             </a:xfrm>
             <a:custGeom>
@@ -2787,7 +2787,7 @@
           </p:nvSpPr>
           <p:spPr>
             <a:xfrm>
-              <a:off x="817517" y="2070498"/>
+              <a:off x="817517" y="2239395"/>
               <a:ext cx="7799693" cy="0"/>
             </a:xfrm>
             <a:custGeom>
@@ -2830,15 +2830,15 @@
           </p:nvSpPr>
           <p:spPr>
             <a:xfrm>
-              <a:off x="2501542" y="1896563"/>
-              <a:ext cx="0" cy="3826579"/>
+              <a:off x="2501542" y="2073503"/>
+              <a:ext cx="0" cy="3649639"/>
             </a:xfrm>
             <a:custGeom>
               <a:avLst/>
               <a:pathLst>
-                <a:path w="0" h="3826579">
+                <a:path w="0" h="3649639">
                   <a:moveTo>
-                    <a:pt x="0" y="3826579"/>
+                    <a:pt x="0" y="3649639"/>
                   </a:moveTo>
                   <a:lnTo>
                     <a:pt x="0" y="0"/>
@@ -2873,15 +2873,15 @@
           </p:nvSpPr>
           <p:spPr>
             <a:xfrm>
-              <a:off x="4274200" y="1896563"/>
-              <a:ext cx="0" cy="3826579"/>
+              <a:off x="4274200" y="2073503"/>
+              <a:ext cx="0" cy="3649639"/>
             </a:xfrm>
             <a:custGeom>
               <a:avLst/>
               <a:pathLst>
-                <a:path w="0" h="3826579">
+                <a:path w="0" h="3649639">
                   <a:moveTo>
-                    <a:pt x="0" y="3826579"/>
+                    <a:pt x="0" y="3649639"/>
                   </a:moveTo>
                   <a:lnTo>
                     <a:pt x="0" y="0"/>
@@ -2916,15 +2916,15 @@
           </p:nvSpPr>
           <p:spPr>
             <a:xfrm>
-              <a:off x="6046857" y="1896563"/>
-              <a:ext cx="0" cy="3826579"/>
+              <a:off x="6046857" y="2073503"/>
+              <a:ext cx="0" cy="3649639"/>
             </a:xfrm>
             <a:custGeom>
               <a:avLst/>
               <a:pathLst>
-                <a:path w="0" h="3826579">
+                <a:path w="0" h="3649639">
                   <a:moveTo>
-                    <a:pt x="0" y="3826579"/>
+                    <a:pt x="0" y="3649639"/>
                   </a:moveTo>
                   <a:lnTo>
                     <a:pt x="0" y="0"/>
@@ -2959,15 +2959,15 @@
           </p:nvSpPr>
           <p:spPr>
             <a:xfrm>
-              <a:off x="7819515" y="1896563"/>
-              <a:ext cx="0" cy="3826579"/>
+              <a:off x="7819515" y="2073503"/>
+              <a:ext cx="0" cy="3649639"/>
             </a:xfrm>
             <a:custGeom>
               <a:avLst/>
               <a:pathLst>
-                <a:path w="0" h="3826579">
+                <a:path w="0" h="3649639">
                   <a:moveTo>
-                    <a:pt x="0" y="3826579"/>
+                    <a:pt x="0" y="3649639"/>
                   </a:moveTo>
                   <a:lnTo>
                     <a:pt x="0" y="0"/>
@@ -3002,498 +3002,498 @@
           </p:nvSpPr>
           <p:spPr>
             <a:xfrm>
-              <a:off x="817517" y="1896563"/>
-              <a:ext cx="7392041" cy="3652163"/>
+              <a:off x="817517" y="2073503"/>
+              <a:ext cx="7392041" cy="3483289"/>
             </a:xfrm>
             <a:custGeom>
               <a:avLst/>
               <a:pathLst>
-                <a:path w="7392041" h="3652163">
+                <a:path w="7392041" h="3483289">
                   <a:moveTo>
                     <a:pt x="2517748" y="0"/>
                   </a:moveTo>
                   <a:lnTo>
-                    <a:pt x="2525696" y="56298"/>
-                  </a:lnTo>
-                  <a:lnTo>
-                    <a:pt x="2602939" y="531188"/>
-                  </a:lnTo>
-                  <a:lnTo>
-                    <a:pt x="2680183" y="943370"/>
-                  </a:lnTo>
-                  <a:lnTo>
-                    <a:pt x="2757426" y="1301124"/>
-                  </a:lnTo>
-                  <a:lnTo>
-                    <a:pt x="2834670" y="1611637"/>
-                  </a:lnTo>
-                  <a:lnTo>
-                    <a:pt x="2911914" y="1881147"/>
-                  </a:lnTo>
-                  <a:lnTo>
-                    <a:pt x="2989157" y="2115070"/>
-                  </a:lnTo>
-                  <a:lnTo>
-                    <a:pt x="3066401" y="2318103"/>
-                  </a:lnTo>
-                  <a:lnTo>
-                    <a:pt x="3143644" y="2494326"/>
-                  </a:lnTo>
-                  <a:lnTo>
-                    <a:pt x="3220888" y="2647280"/>
-                  </a:lnTo>
-                  <a:lnTo>
-                    <a:pt x="3298131" y="2780036"/>
-                  </a:lnTo>
-                  <a:lnTo>
-                    <a:pt x="3375375" y="2801454"/>
-                  </a:lnTo>
-                  <a:lnTo>
-                    <a:pt x="3452619" y="2819985"/>
-                  </a:lnTo>
-                  <a:lnTo>
-                    <a:pt x="3529862" y="2838112"/>
-                  </a:lnTo>
-                  <a:lnTo>
-                    <a:pt x="3607106" y="2855844"/>
-                  </a:lnTo>
-                  <a:lnTo>
-                    <a:pt x="3684349" y="2873190"/>
-                  </a:lnTo>
-                  <a:lnTo>
-                    <a:pt x="3761593" y="2890159"/>
-                  </a:lnTo>
-                  <a:lnTo>
-                    <a:pt x="3838836" y="2906758"/>
-                  </a:lnTo>
-                  <a:lnTo>
-                    <a:pt x="3916080" y="2922996"/>
-                  </a:lnTo>
-                  <a:lnTo>
-                    <a:pt x="3993324" y="2938880"/>
-                  </a:lnTo>
-                  <a:lnTo>
-                    <a:pt x="4070567" y="2954419"/>
-                  </a:lnTo>
-                  <a:lnTo>
-                    <a:pt x="4147811" y="2969619"/>
-                  </a:lnTo>
-                  <a:lnTo>
-                    <a:pt x="4225054" y="2984489"/>
-                  </a:lnTo>
-                  <a:lnTo>
-                    <a:pt x="4302298" y="2999035"/>
-                  </a:lnTo>
-                  <a:lnTo>
-                    <a:pt x="4379541" y="3013264"/>
-                  </a:lnTo>
-                  <a:lnTo>
-                    <a:pt x="4456785" y="3027183"/>
-                  </a:lnTo>
-                  <a:lnTo>
-                    <a:pt x="4534029" y="3040799"/>
-                  </a:lnTo>
-                  <a:lnTo>
-                    <a:pt x="4611272" y="3054119"/>
-                  </a:lnTo>
-                  <a:lnTo>
-                    <a:pt x="4688516" y="3067149"/>
-                  </a:lnTo>
-                  <a:lnTo>
-                    <a:pt x="4765759" y="3079895"/>
-                  </a:lnTo>
-                  <a:lnTo>
-                    <a:pt x="4843003" y="3092364"/>
-                  </a:lnTo>
-                  <a:lnTo>
-                    <a:pt x="4920246" y="3104561"/>
-                  </a:lnTo>
-                  <a:lnTo>
-                    <a:pt x="4997490" y="3116493"/>
-                  </a:lnTo>
-                  <a:lnTo>
-                    <a:pt x="5074734" y="3128165"/>
-                  </a:lnTo>
-                  <a:lnTo>
-                    <a:pt x="5151977" y="3139583"/>
-                  </a:lnTo>
-                  <a:lnTo>
-                    <a:pt x="5229221" y="3150752"/>
-                  </a:lnTo>
-                  <a:lnTo>
-                    <a:pt x="5306464" y="3161678"/>
-                  </a:lnTo>
-                  <a:lnTo>
-                    <a:pt x="5383708" y="3172366"/>
-                  </a:lnTo>
-                  <a:lnTo>
-                    <a:pt x="5460951" y="3182822"/>
-                  </a:lnTo>
-                  <a:lnTo>
-                    <a:pt x="5538195" y="3193050"/>
-                  </a:lnTo>
-                  <a:lnTo>
-                    <a:pt x="5615439" y="3203055"/>
-                  </a:lnTo>
-                  <a:lnTo>
-                    <a:pt x="5692682" y="3212843"/>
-                  </a:lnTo>
-                  <a:lnTo>
-                    <a:pt x="5769926" y="3222417"/>
-                  </a:lnTo>
-                  <a:lnTo>
-                    <a:pt x="5847169" y="3231783"/>
-                  </a:lnTo>
-                  <a:lnTo>
-                    <a:pt x="5924413" y="3240946"/>
-                  </a:lnTo>
-                  <a:lnTo>
-                    <a:pt x="6001656" y="3249908"/>
-                  </a:lnTo>
-                  <a:lnTo>
-                    <a:pt x="6078900" y="3258676"/>
-                  </a:lnTo>
-                  <a:lnTo>
-                    <a:pt x="6156144" y="3267252"/>
-                  </a:lnTo>
-                  <a:lnTo>
-                    <a:pt x="6233387" y="3275642"/>
-                  </a:lnTo>
-                  <a:lnTo>
-                    <a:pt x="6310631" y="3283850"/>
-                  </a:lnTo>
-                  <a:lnTo>
-                    <a:pt x="6387874" y="3291878"/>
-                  </a:lnTo>
-                  <a:lnTo>
-                    <a:pt x="6465118" y="3299732"/>
-                  </a:lnTo>
-                  <a:lnTo>
-                    <a:pt x="6542361" y="3307415"/>
-                  </a:lnTo>
-                  <a:lnTo>
-                    <a:pt x="6619605" y="3314931"/>
-                  </a:lnTo>
-                  <a:lnTo>
-                    <a:pt x="6696849" y="3322283"/>
-                  </a:lnTo>
-                  <a:lnTo>
-                    <a:pt x="6774092" y="3329475"/>
-                  </a:lnTo>
-                  <a:lnTo>
-                    <a:pt x="6851336" y="3336510"/>
-                  </a:lnTo>
-                  <a:lnTo>
-                    <a:pt x="6928579" y="3343392"/>
-                  </a:lnTo>
-                  <a:lnTo>
-                    <a:pt x="7005823" y="3350125"/>
-                  </a:lnTo>
-                  <a:lnTo>
-                    <a:pt x="7083066" y="3356710"/>
-                  </a:lnTo>
-                  <a:lnTo>
-                    <a:pt x="7160310" y="3363153"/>
-                  </a:lnTo>
-                  <a:lnTo>
-                    <a:pt x="7237554" y="3369455"/>
-                  </a:lnTo>
-                  <a:lnTo>
-                    <a:pt x="7314797" y="3375620"/>
-                  </a:lnTo>
-                  <a:lnTo>
-                    <a:pt x="7392041" y="3381651"/>
-                  </a:lnTo>
-                  <a:lnTo>
-                    <a:pt x="7392041" y="3652163"/>
-                  </a:lnTo>
-                  <a:lnTo>
-                    <a:pt x="7314797" y="3652090"/>
-                  </a:lnTo>
-                  <a:lnTo>
-                    <a:pt x="7237554" y="3652006"/>
-                  </a:lnTo>
-                  <a:lnTo>
-                    <a:pt x="7160310" y="3651909"/>
-                  </a:lnTo>
-                  <a:lnTo>
-                    <a:pt x="7083066" y="3651798"/>
-                  </a:lnTo>
-                  <a:lnTo>
-                    <a:pt x="7005823" y="3651669"/>
-                  </a:lnTo>
-                  <a:lnTo>
-                    <a:pt x="6928579" y="3651521"/>
-                  </a:lnTo>
-                  <a:lnTo>
-                    <a:pt x="6851336" y="3651350"/>
-                  </a:lnTo>
-                  <a:lnTo>
-                    <a:pt x="6774092" y="3651154"/>
-                  </a:lnTo>
-                  <a:lnTo>
-                    <a:pt x="6696849" y="3650927"/>
-                  </a:lnTo>
-                  <a:lnTo>
-                    <a:pt x="6619605" y="3650666"/>
-                  </a:lnTo>
-                  <a:lnTo>
-                    <a:pt x="6542361" y="3650365"/>
-                  </a:lnTo>
-                  <a:lnTo>
-                    <a:pt x="6465118" y="3650018"/>
-                  </a:lnTo>
-                  <a:lnTo>
-                    <a:pt x="6387874" y="3649619"/>
-                  </a:lnTo>
-                  <a:lnTo>
-                    <a:pt x="6310631" y="3649159"/>
-                  </a:lnTo>
-                  <a:lnTo>
-                    <a:pt x="6233387" y="3648629"/>
-                  </a:lnTo>
-                  <a:lnTo>
-                    <a:pt x="6156144" y="3648018"/>
-                  </a:lnTo>
-                  <a:lnTo>
-                    <a:pt x="6078900" y="3647314"/>
-                  </a:lnTo>
-                  <a:lnTo>
-                    <a:pt x="6001656" y="3646503"/>
-                  </a:lnTo>
-                  <a:lnTo>
-                    <a:pt x="5924413" y="3645569"/>
-                  </a:lnTo>
-                  <a:lnTo>
-                    <a:pt x="5847169" y="3644493"/>
-                  </a:lnTo>
-                  <a:lnTo>
-                    <a:pt x="5769926" y="3643253"/>
-                  </a:lnTo>
-                  <a:lnTo>
-                    <a:pt x="5692682" y="3641824"/>
-                  </a:lnTo>
-                  <a:lnTo>
-                    <a:pt x="5615439" y="3640178"/>
-                  </a:lnTo>
-                  <a:lnTo>
-                    <a:pt x="5538195" y="3638282"/>
-                  </a:lnTo>
-                  <a:lnTo>
-                    <a:pt x="5460951" y="3636097"/>
-                  </a:lnTo>
-                  <a:lnTo>
-                    <a:pt x="5383708" y="3633580"/>
-                  </a:lnTo>
-                  <a:lnTo>
-                    <a:pt x="5306464" y="3630679"/>
-                  </a:lnTo>
-                  <a:lnTo>
-                    <a:pt x="5229221" y="3627338"/>
-                  </a:lnTo>
-                  <a:lnTo>
-                    <a:pt x="5151977" y="3623488"/>
-                  </a:lnTo>
-                  <a:lnTo>
-                    <a:pt x="5074734" y="3619052"/>
-                  </a:lnTo>
-                  <a:lnTo>
-                    <a:pt x="4997490" y="3613942"/>
-                  </a:lnTo>
-                  <a:lnTo>
-                    <a:pt x="4920246" y="3608054"/>
-                  </a:lnTo>
-                  <a:lnTo>
-                    <a:pt x="4843003" y="3601270"/>
-                  </a:lnTo>
-                  <a:lnTo>
-                    <a:pt x="4765759" y="3593455"/>
-                  </a:lnTo>
-                  <a:lnTo>
-                    <a:pt x="4688516" y="3584450"/>
-                  </a:lnTo>
-                  <a:lnTo>
-                    <a:pt x="4611272" y="3574075"/>
-                  </a:lnTo>
-                  <a:lnTo>
-                    <a:pt x="4534029" y="3562122"/>
-                  </a:lnTo>
-                  <a:lnTo>
-                    <a:pt x="4456785" y="3548350"/>
-                  </a:lnTo>
-                  <a:lnTo>
-                    <a:pt x="4379541" y="3532483"/>
-                  </a:lnTo>
-                  <a:lnTo>
-                    <a:pt x="4302298" y="3514203"/>
-                  </a:lnTo>
-                  <a:lnTo>
-                    <a:pt x="4225054" y="3493141"/>
-                  </a:lnTo>
-                  <a:lnTo>
-                    <a:pt x="4147811" y="3468874"/>
-                  </a:lnTo>
-                  <a:lnTo>
-                    <a:pt x="4070567" y="3440916"/>
-                  </a:lnTo>
-                  <a:lnTo>
-                    <a:pt x="3993324" y="3408705"/>
-                  </a:lnTo>
-                  <a:lnTo>
-                    <a:pt x="3916080" y="3371592"/>
-                  </a:lnTo>
-                  <a:lnTo>
-                    <a:pt x="3838836" y="3328834"/>
-                  </a:lnTo>
-                  <a:lnTo>
-                    <a:pt x="3761593" y="3279571"/>
-                  </a:lnTo>
-                  <a:lnTo>
-                    <a:pt x="3684349" y="3222812"/>
-                  </a:lnTo>
-                  <a:lnTo>
-                    <a:pt x="3607106" y="3157419"/>
-                  </a:lnTo>
-                  <a:lnTo>
-                    <a:pt x="3529862" y="3082077"/>
-                  </a:lnTo>
-                  <a:lnTo>
-                    <a:pt x="3452619" y="2995273"/>
-                  </a:lnTo>
-                  <a:lnTo>
-                    <a:pt x="3375375" y="2895262"/>
-                  </a:lnTo>
-                  <a:lnTo>
-                    <a:pt x="3298131" y="2782511"/>
-                  </a:lnTo>
-                  <a:lnTo>
-                    <a:pt x="3220888" y="2763147"/>
-                  </a:lnTo>
-                  <a:lnTo>
-                    <a:pt x="3143644" y="2743352"/>
-                  </a:lnTo>
-                  <a:lnTo>
-                    <a:pt x="3066401" y="2723116"/>
-                  </a:lnTo>
-                  <a:lnTo>
-                    <a:pt x="2989157" y="2702430"/>
-                  </a:lnTo>
-                  <a:lnTo>
-                    <a:pt x="2911914" y="2681283"/>
-                  </a:lnTo>
-                  <a:lnTo>
-                    <a:pt x="2834670" y="2659666"/>
-                  </a:lnTo>
-                  <a:lnTo>
-                    <a:pt x="2757426" y="2637568"/>
-                  </a:lnTo>
-                  <a:lnTo>
-                    <a:pt x="2680183" y="2614978"/>
-                  </a:lnTo>
-                  <a:lnTo>
-                    <a:pt x="2602939" y="2591886"/>
-                  </a:lnTo>
-                  <a:lnTo>
-                    <a:pt x="2525696" y="2568279"/>
-                  </a:lnTo>
-                  <a:lnTo>
-                    <a:pt x="2448452" y="2544147"/>
-                  </a:lnTo>
-                  <a:lnTo>
-                    <a:pt x="2371209" y="2519478"/>
-                  </a:lnTo>
-                  <a:lnTo>
-                    <a:pt x="2293965" y="2494260"/>
-                  </a:lnTo>
-                  <a:lnTo>
-                    <a:pt x="2216721" y="2468481"/>
-                  </a:lnTo>
-                  <a:lnTo>
-                    <a:pt x="2139478" y="2442128"/>
-                  </a:lnTo>
-                  <a:lnTo>
-                    <a:pt x="2062234" y="2415189"/>
-                  </a:lnTo>
-                  <a:lnTo>
-                    <a:pt x="1984991" y="2387650"/>
-                  </a:lnTo>
-                  <a:lnTo>
-                    <a:pt x="1907747" y="2359498"/>
-                  </a:lnTo>
-                  <a:lnTo>
-                    <a:pt x="1830504" y="2330720"/>
-                  </a:lnTo>
-                  <a:lnTo>
-                    <a:pt x="1753260" y="2301301"/>
-                  </a:lnTo>
-                  <a:lnTo>
-                    <a:pt x="1676016" y="2271228"/>
-                  </a:lnTo>
-                  <a:lnTo>
-                    <a:pt x="1598773" y="2240485"/>
-                  </a:lnTo>
-                  <a:lnTo>
-                    <a:pt x="1521529" y="2209058"/>
-                  </a:lnTo>
-                  <a:lnTo>
-                    <a:pt x="1444286" y="2176932"/>
-                  </a:lnTo>
-                  <a:lnTo>
-                    <a:pt x="1367042" y="2144091"/>
-                  </a:lnTo>
-                  <a:lnTo>
-                    <a:pt x="1289799" y="2110519"/>
-                  </a:lnTo>
-                  <a:lnTo>
-                    <a:pt x="1212555" y="2076199"/>
-                  </a:lnTo>
-                  <a:lnTo>
-                    <a:pt x="1135311" y="2041117"/>
-                  </a:lnTo>
-                  <a:lnTo>
-                    <a:pt x="1058068" y="2005253"/>
-                  </a:lnTo>
-                  <a:lnTo>
-                    <a:pt x="980824" y="1968591"/>
-                  </a:lnTo>
-                  <a:lnTo>
-                    <a:pt x="903581" y="1931113"/>
-                  </a:lnTo>
-                  <a:lnTo>
-                    <a:pt x="826337" y="1892802"/>
-                  </a:lnTo>
-                  <a:lnTo>
-                    <a:pt x="749094" y="1853637"/>
-                  </a:lnTo>
-                  <a:lnTo>
-                    <a:pt x="671850" y="1813601"/>
-                  </a:lnTo>
-                  <a:lnTo>
-                    <a:pt x="594606" y="1772675"/>
-                  </a:lnTo>
-                  <a:lnTo>
-                    <a:pt x="517363" y="1730837"/>
-                  </a:lnTo>
-                  <a:lnTo>
-                    <a:pt x="440119" y="1688068"/>
-                  </a:lnTo>
-                  <a:lnTo>
-                    <a:pt x="362876" y="1644347"/>
-                  </a:lnTo>
-                  <a:lnTo>
-                    <a:pt x="285632" y="1599654"/>
-                  </a:lnTo>
-                  <a:lnTo>
-                    <a:pt x="208389" y="1553966"/>
-                  </a:lnTo>
-                  <a:lnTo>
-                    <a:pt x="131145" y="1507261"/>
-                  </a:lnTo>
-                  <a:lnTo>
-                    <a:pt x="53901" y="1459516"/>
-                  </a:lnTo>
-                  <a:lnTo>
-                    <a:pt x="0" y="1425458"/>
+                    <a:pt x="2525696" y="53695"/>
+                  </a:lnTo>
+                  <a:lnTo>
+                    <a:pt x="2602939" y="506626"/>
+                  </a:lnTo>
+                  <a:lnTo>
+                    <a:pt x="2680183" y="899749"/>
+                  </a:lnTo>
+                  <a:lnTo>
+                    <a:pt x="2757426" y="1240960"/>
+                  </a:lnTo>
+                  <a:lnTo>
+                    <a:pt x="2834670" y="1537115"/>
+                  </a:lnTo>
+                  <a:lnTo>
+                    <a:pt x="2911914" y="1794164"/>
+                  </a:lnTo>
+                  <a:lnTo>
+                    <a:pt x="2989157" y="2017270"/>
+                  </a:lnTo>
+                  <a:lnTo>
+                    <a:pt x="3066401" y="2210915"/>
+                  </a:lnTo>
+                  <a:lnTo>
+                    <a:pt x="3143644" y="2378990"/>
+                  </a:lnTo>
+                  <a:lnTo>
+                    <a:pt x="3220888" y="2524870"/>
+                  </a:lnTo>
+                  <a:lnTo>
+                    <a:pt x="3298131" y="2651488"/>
+                  </a:lnTo>
+                  <a:lnTo>
+                    <a:pt x="3375375" y="2671916"/>
+                  </a:lnTo>
+                  <a:lnTo>
+                    <a:pt x="3452619" y="2689589"/>
+                  </a:lnTo>
+                  <a:lnTo>
+                    <a:pt x="3529862" y="2706878"/>
+                  </a:lnTo>
+                  <a:lnTo>
+                    <a:pt x="3607106" y="2723791"/>
+                  </a:lnTo>
+                  <a:lnTo>
+                    <a:pt x="3684349" y="2740335"/>
+                  </a:lnTo>
+                  <a:lnTo>
+                    <a:pt x="3761593" y="2756519"/>
+                  </a:lnTo>
+                  <a:lnTo>
+                    <a:pt x="3838836" y="2772351"/>
+                  </a:lnTo>
+                  <a:lnTo>
+                    <a:pt x="3916080" y="2787838"/>
+                  </a:lnTo>
+                  <a:lnTo>
+                    <a:pt x="3993324" y="2802988"/>
+                  </a:lnTo>
+                  <a:lnTo>
+                    <a:pt x="4070567" y="2817808"/>
+                  </a:lnTo>
+                  <a:lnTo>
+                    <a:pt x="4147811" y="2832305"/>
+                  </a:lnTo>
+                  <a:lnTo>
+                    <a:pt x="4225054" y="2846487"/>
+                  </a:lnTo>
+                  <a:lnTo>
+                    <a:pt x="4302298" y="2860360"/>
+                  </a:lnTo>
+                  <a:lnTo>
+                    <a:pt x="4379541" y="2873931"/>
+                  </a:lnTo>
+                  <a:lnTo>
+                    <a:pt x="4456785" y="2887207"/>
+                  </a:lnTo>
+                  <a:lnTo>
+                    <a:pt x="4534029" y="2900194"/>
+                  </a:lnTo>
+                  <a:lnTo>
+                    <a:pt x="4611272" y="2912898"/>
+                  </a:lnTo>
+                  <a:lnTo>
+                    <a:pt x="4688516" y="2925325"/>
+                  </a:lnTo>
+                  <a:lnTo>
+                    <a:pt x="4765759" y="2937482"/>
+                  </a:lnTo>
+                  <a:lnTo>
+                    <a:pt x="4843003" y="2949374"/>
+                  </a:lnTo>
+                  <a:lnTo>
+                    <a:pt x="4920246" y="2961007"/>
+                  </a:lnTo>
+                  <a:lnTo>
+                    <a:pt x="4997490" y="2972387"/>
+                  </a:lnTo>
+                  <a:lnTo>
+                    <a:pt x="5074734" y="2983520"/>
+                  </a:lnTo>
+                  <a:lnTo>
+                    <a:pt x="5151977" y="2994410"/>
+                  </a:lnTo>
+                  <a:lnTo>
+                    <a:pt x="5229221" y="3005062"/>
+                  </a:lnTo>
+                  <a:lnTo>
+                    <a:pt x="5306464" y="3015483"/>
+                  </a:lnTo>
+                  <a:lnTo>
+                    <a:pt x="5383708" y="3025677"/>
+                  </a:lnTo>
+                  <a:lnTo>
+                    <a:pt x="5460951" y="3035650"/>
+                  </a:lnTo>
+                  <a:lnTo>
+                    <a:pt x="5538195" y="3045405"/>
+                  </a:lnTo>
+                  <a:lnTo>
+                    <a:pt x="5615439" y="3054947"/>
+                  </a:lnTo>
+                  <a:lnTo>
+                    <a:pt x="5692682" y="3064282"/>
+                  </a:lnTo>
+                  <a:lnTo>
+                    <a:pt x="5769926" y="3073414"/>
+                  </a:lnTo>
+                  <a:lnTo>
+                    <a:pt x="5847169" y="3082347"/>
+                  </a:lnTo>
+                  <a:lnTo>
+                    <a:pt x="5924413" y="3091085"/>
+                  </a:lnTo>
+                  <a:lnTo>
+                    <a:pt x="6001656" y="3099634"/>
+                  </a:lnTo>
+                  <a:lnTo>
+                    <a:pt x="6078900" y="3107996"/>
+                  </a:lnTo>
+                  <a:lnTo>
+                    <a:pt x="6156144" y="3116176"/>
+                  </a:lnTo>
+                  <a:lnTo>
+                    <a:pt x="6233387" y="3124178"/>
+                  </a:lnTo>
+                  <a:lnTo>
+                    <a:pt x="6310631" y="3132006"/>
+                  </a:lnTo>
+                  <a:lnTo>
+                    <a:pt x="6387874" y="3139663"/>
+                  </a:lnTo>
+                  <a:lnTo>
+                    <a:pt x="6465118" y="3147154"/>
+                  </a:lnTo>
+                  <a:lnTo>
+                    <a:pt x="6542361" y="3154481"/>
+                  </a:lnTo>
+                  <a:lnTo>
+                    <a:pt x="6619605" y="3161649"/>
+                  </a:lnTo>
+                  <a:lnTo>
+                    <a:pt x="6696849" y="3168661"/>
+                  </a:lnTo>
+                  <a:lnTo>
+                    <a:pt x="6774092" y="3175521"/>
+                  </a:lnTo>
+                  <a:lnTo>
+                    <a:pt x="6851336" y="3182231"/>
+                  </a:lnTo>
+                  <a:lnTo>
+                    <a:pt x="6928579" y="3188795"/>
+                  </a:lnTo>
+                  <a:lnTo>
+                    <a:pt x="7005823" y="3195216"/>
+                  </a:lnTo>
+                  <a:lnTo>
+                    <a:pt x="7083066" y="3201497"/>
+                  </a:lnTo>
+                  <a:lnTo>
+                    <a:pt x="7160310" y="3207642"/>
+                  </a:lnTo>
+                  <a:lnTo>
+                    <a:pt x="7237554" y="3213653"/>
+                  </a:lnTo>
+                  <a:lnTo>
+                    <a:pt x="7314797" y="3219533"/>
+                  </a:lnTo>
+                  <a:lnTo>
+                    <a:pt x="7392041" y="3225285"/>
+                  </a:lnTo>
+                  <a:lnTo>
+                    <a:pt x="7392041" y="3483289"/>
+                  </a:lnTo>
+                  <a:lnTo>
+                    <a:pt x="7314797" y="3483219"/>
+                  </a:lnTo>
+                  <a:lnTo>
+                    <a:pt x="7237554" y="3483139"/>
+                  </a:lnTo>
+                  <a:lnTo>
+                    <a:pt x="7160310" y="3483046"/>
+                  </a:lnTo>
+                  <a:lnTo>
+                    <a:pt x="7083066" y="3482940"/>
+                  </a:lnTo>
+                  <a:lnTo>
+                    <a:pt x="7005823" y="3482817"/>
+                  </a:lnTo>
+                  <a:lnTo>
+                    <a:pt x="6928579" y="3482676"/>
+                  </a:lnTo>
+                  <a:lnTo>
+                    <a:pt x="6851336" y="3482513"/>
+                  </a:lnTo>
+                  <a:lnTo>
+                    <a:pt x="6774092" y="3482325"/>
+                  </a:lnTo>
+                  <a:lnTo>
+                    <a:pt x="6696849" y="3482109"/>
+                  </a:lnTo>
+                  <a:lnTo>
+                    <a:pt x="6619605" y="3481860"/>
+                  </a:lnTo>
+                  <a:lnTo>
+                    <a:pt x="6542361" y="3481573"/>
+                  </a:lnTo>
+                  <a:lnTo>
+                    <a:pt x="6465118" y="3481243"/>
+                  </a:lnTo>
+                  <a:lnTo>
+                    <a:pt x="6387874" y="3480862"/>
+                  </a:lnTo>
+                  <a:lnTo>
+                    <a:pt x="6310631" y="3480423"/>
+                  </a:lnTo>
+                  <a:lnTo>
+                    <a:pt x="6233387" y="3479917"/>
+                  </a:lnTo>
+                  <a:lnTo>
+                    <a:pt x="6156144" y="3479335"/>
+                  </a:lnTo>
+                  <a:lnTo>
+                    <a:pt x="6078900" y="3478664"/>
+                  </a:lnTo>
+                  <a:lnTo>
+                    <a:pt x="6001656" y="3477890"/>
+                  </a:lnTo>
+                  <a:lnTo>
+                    <a:pt x="5924413" y="3476999"/>
+                  </a:lnTo>
+                  <a:lnTo>
+                    <a:pt x="5847169" y="3475973"/>
+                  </a:lnTo>
+                  <a:lnTo>
+                    <a:pt x="5769926" y="3474790"/>
+                  </a:lnTo>
+                  <a:lnTo>
+                    <a:pt x="5692682" y="3473428"/>
+                  </a:lnTo>
+                  <a:lnTo>
+                    <a:pt x="5615439" y="3471858"/>
+                  </a:lnTo>
+                  <a:lnTo>
+                    <a:pt x="5538195" y="3470049"/>
+                  </a:lnTo>
+                  <a:lnTo>
+                    <a:pt x="5460951" y="3467965"/>
+                  </a:lnTo>
+                  <a:lnTo>
+                    <a:pt x="5383708" y="3465564"/>
+                  </a:lnTo>
+                  <a:lnTo>
+                    <a:pt x="5306464" y="3462798"/>
+                  </a:lnTo>
+                  <a:lnTo>
+                    <a:pt x="5229221" y="3459611"/>
+                  </a:lnTo>
+                  <a:lnTo>
+                    <a:pt x="5151977" y="3455939"/>
+                  </a:lnTo>
+                  <a:lnTo>
+                    <a:pt x="5074734" y="3451709"/>
+                  </a:lnTo>
+                  <a:lnTo>
+                    <a:pt x="4997490" y="3446835"/>
+                  </a:lnTo>
+                  <a:lnTo>
+                    <a:pt x="4920246" y="3441219"/>
+                  </a:lnTo>
+                  <a:lnTo>
+                    <a:pt x="4843003" y="3434749"/>
+                  </a:lnTo>
+                  <a:lnTo>
+                    <a:pt x="4765759" y="3427295"/>
+                  </a:lnTo>
+                  <a:lnTo>
+                    <a:pt x="4688516" y="3418706"/>
+                  </a:lnTo>
+                  <a:lnTo>
+                    <a:pt x="4611272" y="3408811"/>
+                  </a:lnTo>
+                  <a:lnTo>
+                    <a:pt x="4534029" y="3397411"/>
+                  </a:lnTo>
+                  <a:lnTo>
+                    <a:pt x="4456785" y="3384276"/>
+                  </a:lnTo>
+                  <a:lnTo>
+                    <a:pt x="4379541" y="3369143"/>
+                  </a:lnTo>
+                  <a:lnTo>
+                    <a:pt x="4302298" y="3351707"/>
+                  </a:lnTo>
+                  <a:lnTo>
+                    <a:pt x="4225054" y="3331619"/>
+                  </a:lnTo>
+                  <a:lnTo>
+                    <a:pt x="4147811" y="3308475"/>
+                  </a:lnTo>
+                  <a:lnTo>
+                    <a:pt x="4070567" y="3281810"/>
+                  </a:lnTo>
+                  <a:lnTo>
+                    <a:pt x="3993324" y="3251087"/>
+                  </a:lnTo>
+                  <a:lnTo>
+                    <a:pt x="3916080" y="3215691"/>
+                  </a:lnTo>
+                  <a:lnTo>
+                    <a:pt x="3838836" y="3174910"/>
+                  </a:lnTo>
+                  <a:lnTo>
+                    <a:pt x="3761593" y="3127925"/>
+                  </a:lnTo>
+                  <a:lnTo>
+                    <a:pt x="3684349" y="3073791"/>
+                  </a:lnTo>
+                  <a:lnTo>
+                    <a:pt x="3607106" y="3011421"/>
+                  </a:lnTo>
+                  <a:lnTo>
+                    <a:pt x="3529862" y="2939563"/>
+                  </a:lnTo>
+                  <a:lnTo>
+                    <a:pt x="3452619" y="2856772"/>
+                  </a:lnTo>
+                  <a:lnTo>
+                    <a:pt x="3375375" y="2761386"/>
+                  </a:lnTo>
+                  <a:lnTo>
+                    <a:pt x="3298131" y="2653849"/>
+                  </a:lnTo>
+                  <a:lnTo>
+                    <a:pt x="3220888" y="2635380"/>
+                  </a:lnTo>
+                  <a:lnTo>
+                    <a:pt x="3143644" y="2616500"/>
+                  </a:lnTo>
+                  <a:lnTo>
+                    <a:pt x="3066401" y="2597200"/>
+                  </a:lnTo>
+                  <a:lnTo>
+                    <a:pt x="2989157" y="2577471"/>
+                  </a:lnTo>
+                  <a:lnTo>
+                    <a:pt x="2911914" y="2557302"/>
+                  </a:lnTo>
+                  <a:lnTo>
+                    <a:pt x="2834670" y="2536684"/>
+                  </a:lnTo>
+                  <a:lnTo>
+                    <a:pt x="2757426" y="2515608"/>
+                  </a:lnTo>
+                  <a:lnTo>
+                    <a:pt x="2680183" y="2494063"/>
+                  </a:lnTo>
+                  <a:lnTo>
+                    <a:pt x="2602939" y="2472038"/>
+                  </a:lnTo>
+                  <a:lnTo>
+                    <a:pt x="2525696" y="2449523"/>
+                  </a:lnTo>
+                  <a:lnTo>
+                    <a:pt x="2448452" y="2426507"/>
+                  </a:lnTo>
+                  <a:lnTo>
+                    <a:pt x="2371209" y="2402978"/>
+                  </a:lnTo>
+                  <a:lnTo>
+                    <a:pt x="2293965" y="2378926"/>
+                  </a:lnTo>
+                  <a:lnTo>
+                    <a:pt x="2216721" y="2354339"/>
+                  </a:lnTo>
+                  <a:lnTo>
+                    <a:pt x="2139478" y="2329205"/>
+                  </a:lnTo>
+                  <a:lnTo>
+                    <a:pt x="2062234" y="2303511"/>
+                  </a:lnTo>
+                  <a:lnTo>
+                    <a:pt x="1984991" y="2277246"/>
+                  </a:lnTo>
+                  <a:lnTo>
+                    <a:pt x="1907747" y="2250396"/>
+                  </a:lnTo>
+                  <a:lnTo>
+                    <a:pt x="1830504" y="2222948"/>
+                  </a:lnTo>
+                  <a:lnTo>
+                    <a:pt x="1753260" y="2194890"/>
+                  </a:lnTo>
+                  <a:lnTo>
+                    <a:pt x="1676016" y="2166207"/>
+                  </a:lnTo>
+                  <a:lnTo>
+                    <a:pt x="1598773" y="2136886"/>
+                  </a:lnTo>
+                  <a:lnTo>
+                    <a:pt x="1521529" y="2106912"/>
+                  </a:lnTo>
+                  <a:lnTo>
+                    <a:pt x="1444286" y="2076271"/>
+                  </a:lnTo>
+                  <a:lnTo>
+                    <a:pt x="1367042" y="2044949"/>
+                  </a:lnTo>
+                  <a:lnTo>
+                    <a:pt x="1289799" y="2012929"/>
+                  </a:lnTo>
+                  <a:lnTo>
+                    <a:pt x="1212555" y="1980197"/>
+                  </a:lnTo>
+                  <a:lnTo>
+                    <a:pt x="1135311" y="1946736"/>
+                  </a:lnTo>
+                  <a:lnTo>
+                    <a:pt x="1058068" y="1912531"/>
+                  </a:lnTo>
+                  <a:lnTo>
+                    <a:pt x="980824" y="1877564"/>
+                  </a:lnTo>
+                  <a:lnTo>
+                    <a:pt x="903581" y="1841819"/>
+                  </a:lnTo>
+                  <a:lnTo>
+                    <a:pt x="826337" y="1805279"/>
+                  </a:lnTo>
+                  <a:lnTo>
+                    <a:pt x="749094" y="1767926"/>
+                  </a:lnTo>
+                  <a:lnTo>
+                    <a:pt x="671850" y="1729741"/>
+                  </a:lnTo>
+                  <a:lnTo>
+                    <a:pt x="594606" y="1690707"/>
+                  </a:lnTo>
+                  <a:lnTo>
+                    <a:pt x="517363" y="1650804"/>
+                  </a:lnTo>
+                  <a:lnTo>
+                    <a:pt x="440119" y="1610012"/>
+                  </a:lnTo>
+                  <a:lnTo>
+                    <a:pt x="362876" y="1568313"/>
+                  </a:lnTo>
+                  <a:lnTo>
+                    <a:pt x="285632" y="1525686"/>
+                  </a:lnTo>
+                  <a:lnTo>
+                    <a:pt x="208389" y="1482111"/>
+                  </a:lnTo>
+                  <a:lnTo>
+                    <a:pt x="131145" y="1437566"/>
+                  </a:lnTo>
+                  <a:lnTo>
+                    <a:pt x="53901" y="1392029"/>
+                  </a:lnTo>
+                  <a:lnTo>
+                    <a:pt x="0" y="1359545"/>
                   </a:lnTo>
                   <a:close/>
                 </a:path>
@@ -3519,207 +3519,207 @@
           </p:nvSpPr>
           <p:spPr>
             <a:xfrm>
-              <a:off x="3335266" y="1896563"/>
-              <a:ext cx="4874293" cy="3381651"/>
+              <a:off x="3335266" y="2073503"/>
+              <a:ext cx="4874293" cy="3225285"/>
             </a:xfrm>
             <a:custGeom>
               <a:avLst/>
               <a:pathLst>
-                <a:path w="4874293" h="3381651">
+                <a:path w="4874293" h="3225285">
                   <a:moveTo>
                     <a:pt x="0" y="0"/>
                   </a:moveTo>
                   <a:lnTo>
-                    <a:pt x="7948" y="56298"/>
-                  </a:lnTo>
-                  <a:lnTo>
-                    <a:pt x="85191" y="531188"/>
-                  </a:lnTo>
-                  <a:lnTo>
-                    <a:pt x="162435" y="943370"/>
-                  </a:lnTo>
-                  <a:lnTo>
-                    <a:pt x="239678" y="1301124"/>
-                  </a:lnTo>
-                  <a:lnTo>
-                    <a:pt x="316922" y="1611637"/>
-                  </a:lnTo>
-                  <a:lnTo>
-                    <a:pt x="394165" y="1881147"/>
-                  </a:lnTo>
-                  <a:lnTo>
-                    <a:pt x="471409" y="2115070"/>
-                  </a:lnTo>
-                  <a:lnTo>
-                    <a:pt x="548653" y="2318103"/>
-                  </a:lnTo>
-                  <a:lnTo>
-                    <a:pt x="625896" y="2494326"/>
-                  </a:lnTo>
-                  <a:lnTo>
-                    <a:pt x="703140" y="2647280"/>
-                  </a:lnTo>
-                  <a:lnTo>
-                    <a:pt x="780383" y="2780036"/>
-                  </a:lnTo>
-                  <a:lnTo>
-                    <a:pt x="857627" y="2801454"/>
-                  </a:lnTo>
-                  <a:lnTo>
-                    <a:pt x="934870" y="2819985"/>
-                  </a:lnTo>
-                  <a:lnTo>
-                    <a:pt x="1012114" y="2838112"/>
-                  </a:lnTo>
-                  <a:lnTo>
-                    <a:pt x="1089358" y="2855844"/>
-                  </a:lnTo>
-                  <a:lnTo>
-                    <a:pt x="1166601" y="2873190"/>
-                  </a:lnTo>
-                  <a:lnTo>
-                    <a:pt x="1243845" y="2890159"/>
-                  </a:lnTo>
-                  <a:lnTo>
-                    <a:pt x="1321088" y="2906758"/>
-                  </a:lnTo>
-                  <a:lnTo>
-                    <a:pt x="1398332" y="2922996"/>
-                  </a:lnTo>
-                  <a:lnTo>
-                    <a:pt x="1475575" y="2938880"/>
-                  </a:lnTo>
-                  <a:lnTo>
-                    <a:pt x="1552819" y="2954419"/>
-                  </a:lnTo>
-                  <a:lnTo>
-                    <a:pt x="1630063" y="2969619"/>
-                  </a:lnTo>
-                  <a:lnTo>
-                    <a:pt x="1707306" y="2984489"/>
-                  </a:lnTo>
-                  <a:lnTo>
-                    <a:pt x="1784550" y="2999035"/>
-                  </a:lnTo>
-                  <a:lnTo>
-                    <a:pt x="1861793" y="3013264"/>
-                  </a:lnTo>
-                  <a:lnTo>
-                    <a:pt x="1939037" y="3027183"/>
-                  </a:lnTo>
-                  <a:lnTo>
-                    <a:pt x="2016280" y="3040799"/>
-                  </a:lnTo>
-                  <a:lnTo>
-                    <a:pt x="2093524" y="3054119"/>
-                  </a:lnTo>
-                  <a:lnTo>
-                    <a:pt x="2170768" y="3067149"/>
-                  </a:lnTo>
-                  <a:lnTo>
-                    <a:pt x="2248011" y="3079895"/>
-                  </a:lnTo>
-                  <a:lnTo>
-                    <a:pt x="2325255" y="3092364"/>
-                  </a:lnTo>
-                  <a:lnTo>
-                    <a:pt x="2402498" y="3104561"/>
-                  </a:lnTo>
-                  <a:lnTo>
-                    <a:pt x="2479742" y="3116493"/>
-                  </a:lnTo>
-                  <a:lnTo>
-                    <a:pt x="2556985" y="3128165"/>
-                  </a:lnTo>
-                  <a:lnTo>
-                    <a:pt x="2634229" y="3139583"/>
-                  </a:lnTo>
-                  <a:lnTo>
-                    <a:pt x="2711473" y="3150752"/>
-                  </a:lnTo>
-                  <a:lnTo>
-                    <a:pt x="2788716" y="3161678"/>
-                  </a:lnTo>
-                  <a:lnTo>
-                    <a:pt x="2865960" y="3172366"/>
-                  </a:lnTo>
-                  <a:lnTo>
-                    <a:pt x="2943203" y="3182822"/>
-                  </a:lnTo>
-                  <a:lnTo>
-                    <a:pt x="3020447" y="3193050"/>
-                  </a:lnTo>
-                  <a:lnTo>
-                    <a:pt x="3097690" y="3203055"/>
-                  </a:lnTo>
-                  <a:lnTo>
-                    <a:pt x="3174934" y="3212843"/>
-                  </a:lnTo>
-                  <a:lnTo>
-                    <a:pt x="3252178" y="3222417"/>
-                  </a:lnTo>
-                  <a:lnTo>
-                    <a:pt x="3329421" y="3231783"/>
-                  </a:lnTo>
-                  <a:lnTo>
-                    <a:pt x="3406665" y="3240946"/>
-                  </a:lnTo>
-                  <a:lnTo>
-                    <a:pt x="3483908" y="3249908"/>
-                  </a:lnTo>
-                  <a:lnTo>
-                    <a:pt x="3561152" y="3258676"/>
-                  </a:lnTo>
-                  <a:lnTo>
-                    <a:pt x="3638395" y="3267252"/>
-                  </a:lnTo>
-                  <a:lnTo>
-                    <a:pt x="3715639" y="3275642"/>
-                  </a:lnTo>
-                  <a:lnTo>
-                    <a:pt x="3792883" y="3283850"/>
-                  </a:lnTo>
-                  <a:lnTo>
-                    <a:pt x="3870126" y="3291878"/>
-                  </a:lnTo>
-                  <a:lnTo>
-                    <a:pt x="3947370" y="3299732"/>
-                  </a:lnTo>
-                  <a:lnTo>
-                    <a:pt x="4024613" y="3307415"/>
-                  </a:lnTo>
-                  <a:lnTo>
-                    <a:pt x="4101857" y="3314931"/>
-                  </a:lnTo>
-                  <a:lnTo>
-                    <a:pt x="4179100" y="3322283"/>
-                  </a:lnTo>
-                  <a:lnTo>
-                    <a:pt x="4256344" y="3329475"/>
-                  </a:lnTo>
-                  <a:lnTo>
-                    <a:pt x="4333588" y="3336510"/>
-                  </a:lnTo>
-                  <a:lnTo>
-                    <a:pt x="4410831" y="3343392"/>
-                  </a:lnTo>
-                  <a:lnTo>
-                    <a:pt x="4488075" y="3350125"/>
-                  </a:lnTo>
-                  <a:lnTo>
-                    <a:pt x="4565318" y="3356710"/>
-                  </a:lnTo>
-                  <a:lnTo>
-                    <a:pt x="4642562" y="3363153"/>
-                  </a:lnTo>
-                  <a:lnTo>
-                    <a:pt x="4719805" y="3369455"/>
-                  </a:lnTo>
-                  <a:lnTo>
-                    <a:pt x="4797049" y="3375620"/>
-                  </a:lnTo>
-                  <a:lnTo>
-                    <a:pt x="4874293" y="3381651"/>
+                    <a:pt x="7948" y="53695"/>
+                  </a:lnTo>
+                  <a:lnTo>
+                    <a:pt x="85191" y="506626"/>
+                  </a:lnTo>
+                  <a:lnTo>
+                    <a:pt x="162435" y="899749"/>
+                  </a:lnTo>
+                  <a:lnTo>
+                    <a:pt x="239678" y="1240960"/>
+                  </a:lnTo>
+                  <a:lnTo>
+                    <a:pt x="316922" y="1537115"/>
+                  </a:lnTo>
+                  <a:lnTo>
+                    <a:pt x="394165" y="1794164"/>
+                  </a:lnTo>
+                  <a:lnTo>
+                    <a:pt x="471409" y="2017270"/>
+                  </a:lnTo>
+                  <a:lnTo>
+                    <a:pt x="548653" y="2210915"/>
+                  </a:lnTo>
+                  <a:lnTo>
+                    <a:pt x="625896" y="2378990"/>
+                  </a:lnTo>
+                  <a:lnTo>
+                    <a:pt x="703140" y="2524870"/>
+                  </a:lnTo>
+                  <a:lnTo>
+                    <a:pt x="780383" y="2651488"/>
+                  </a:lnTo>
+                  <a:lnTo>
+                    <a:pt x="857627" y="2671916"/>
+                  </a:lnTo>
+                  <a:lnTo>
+                    <a:pt x="934870" y="2689589"/>
+                  </a:lnTo>
+                  <a:lnTo>
+                    <a:pt x="1012114" y="2706878"/>
+                  </a:lnTo>
+                  <a:lnTo>
+                    <a:pt x="1089358" y="2723791"/>
+                  </a:lnTo>
+                  <a:lnTo>
+                    <a:pt x="1166601" y="2740335"/>
+                  </a:lnTo>
+                  <a:lnTo>
+                    <a:pt x="1243845" y="2756519"/>
+                  </a:lnTo>
+                  <a:lnTo>
+                    <a:pt x="1321088" y="2772351"/>
+                  </a:lnTo>
+                  <a:lnTo>
+                    <a:pt x="1398332" y="2787838"/>
+                  </a:lnTo>
+                  <a:lnTo>
+                    <a:pt x="1475575" y="2802988"/>
+                  </a:lnTo>
+                  <a:lnTo>
+                    <a:pt x="1552819" y="2817808"/>
+                  </a:lnTo>
+                  <a:lnTo>
+                    <a:pt x="1630063" y="2832305"/>
+                  </a:lnTo>
+                  <a:lnTo>
+                    <a:pt x="1707306" y="2846487"/>
+                  </a:lnTo>
+                  <a:lnTo>
+                    <a:pt x="1784550" y="2860360"/>
+                  </a:lnTo>
+                  <a:lnTo>
+                    <a:pt x="1861793" y="2873931"/>
+                  </a:lnTo>
+                  <a:lnTo>
+                    <a:pt x="1939037" y="2887207"/>
+                  </a:lnTo>
+                  <a:lnTo>
+                    <a:pt x="2016280" y="2900194"/>
+                  </a:lnTo>
+                  <a:lnTo>
+                    <a:pt x="2093524" y="2912898"/>
+                  </a:lnTo>
+                  <a:lnTo>
+                    <a:pt x="2170768" y="2925325"/>
+                  </a:lnTo>
+                  <a:lnTo>
+                    <a:pt x="2248011" y="2937482"/>
+                  </a:lnTo>
+                  <a:lnTo>
+                    <a:pt x="2325255" y="2949374"/>
+                  </a:lnTo>
+                  <a:lnTo>
+                    <a:pt x="2402498" y="2961007"/>
+                  </a:lnTo>
+                  <a:lnTo>
+                    <a:pt x="2479742" y="2972387"/>
+                  </a:lnTo>
+                  <a:lnTo>
+                    <a:pt x="2556985" y="2983520"/>
+                  </a:lnTo>
+                  <a:lnTo>
+                    <a:pt x="2634229" y="2994410"/>
+                  </a:lnTo>
+                  <a:lnTo>
+                    <a:pt x="2711473" y="3005062"/>
+                  </a:lnTo>
+                  <a:lnTo>
+                    <a:pt x="2788716" y="3015483"/>
+                  </a:lnTo>
+                  <a:lnTo>
+                    <a:pt x="2865960" y="3025677"/>
+                  </a:lnTo>
+                  <a:lnTo>
+                    <a:pt x="2943203" y="3035650"/>
+                  </a:lnTo>
+                  <a:lnTo>
+                    <a:pt x="3020447" y="3045405"/>
+                  </a:lnTo>
+                  <a:lnTo>
+                    <a:pt x="3097690" y="3054947"/>
+                  </a:lnTo>
+                  <a:lnTo>
+                    <a:pt x="3174934" y="3064282"/>
+                  </a:lnTo>
+                  <a:lnTo>
+                    <a:pt x="3252178" y="3073414"/>
+                  </a:lnTo>
+                  <a:lnTo>
+                    <a:pt x="3329421" y="3082347"/>
+                  </a:lnTo>
+                  <a:lnTo>
+                    <a:pt x="3406665" y="3091085"/>
+                  </a:lnTo>
+                  <a:lnTo>
+                    <a:pt x="3483908" y="3099634"/>
+                  </a:lnTo>
+                  <a:lnTo>
+                    <a:pt x="3561152" y="3107996"/>
+                  </a:lnTo>
+                  <a:lnTo>
+                    <a:pt x="3638395" y="3116176"/>
+                  </a:lnTo>
+                  <a:lnTo>
+                    <a:pt x="3715639" y="3124178"/>
+                  </a:lnTo>
+                  <a:lnTo>
+                    <a:pt x="3792883" y="3132006"/>
+                  </a:lnTo>
+                  <a:lnTo>
+                    <a:pt x="3870126" y="3139663"/>
+                  </a:lnTo>
+                  <a:lnTo>
+                    <a:pt x="3947370" y="3147154"/>
+                  </a:lnTo>
+                  <a:lnTo>
+                    <a:pt x="4024613" y="3154481"/>
+                  </a:lnTo>
+                  <a:lnTo>
+                    <a:pt x="4101857" y="3161649"/>
+                  </a:lnTo>
+                  <a:lnTo>
+                    <a:pt x="4179100" y="3168661"/>
+                  </a:lnTo>
+                  <a:lnTo>
+                    <a:pt x="4256344" y="3175521"/>
+                  </a:lnTo>
+                  <a:lnTo>
+                    <a:pt x="4333588" y="3182231"/>
+                  </a:lnTo>
+                  <a:lnTo>
+                    <a:pt x="4410831" y="3188795"/>
+                  </a:lnTo>
+                  <a:lnTo>
+                    <a:pt x="4488075" y="3195216"/>
+                  </a:lnTo>
+                  <a:lnTo>
+                    <a:pt x="4565318" y="3201497"/>
+                  </a:lnTo>
+                  <a:lnTo>
+                    <a:pt x="4642562" y="3207642"/>
+                  </a:lnTo>
+                  <a:lnTo>
+                    <a:pt x="4719805" y="3213653"/>
+                  </a:lnTo>
+                  <a:lnTo>
+                    <a:pt x="4797049" y="3219533"/>
+                  </a:lnTo>
+                  <a:lnTo>
+                    <a:pt x="4874293" y="3225285"/>
                   </a:lnTo>
                 </a:path>
               </a:pathLst>
@@ -3739,300 +3739,300 @@
           </p:nvSpPr>
           <p:spPr>
             <a:xfrm>
-              <a:off x="817517" y="3322022"/>
-              <a:ext cx="7392041" cy="2226705"/>
+              <a:off x="817517" y="3433049"/>
+              <a:ext cx="7392041" cy="2123743"/>
             </a:xfrm>
             <a:custGeom>
               <a:avLst/>
               <a:pathLst>
-                <a:path w="7392041" h="2226705">
+                <a:path w="7392041" h="2123743">
                   <a:moveTo>
-                    <a:pt x="7392041" y="2226705"/>
+                    <a:pt x="7392041" y="2123743"/>
                   </a:moveTo>
                   <a:lnTo>
-                    <a:pt x="7314797" y="2226632"/>
-                  </a:lnTo>
-                  <a:lnTo>
-                    <a:pt x="7237554" y="2226548"/>
-                  </a:lnTo>
-                  <a:lnTo>
-                    <a:pt x="7160310" y="2226451"/>
-                  </a:lnTo>
-                  <a:lnTo>
-                    <a:pt x="7083066" y="2226339"/>
-                  </a:lnTo>
-                  <a:lnTo>
-                    <a:pt x="7005823" y="2226211"/>
-                  </a:lnTo>
-                  <a:lnTo>
-                    <a:pt x="6928579" y="2226062"/>
-                  </a:lnTo>
-                  <a:lnTo>
-                    <a:pt x="6851336" y="2225892"/>
-                  </a:lnTo>
-                  <a:lnTo>
-                    <a:pt x="6774092" y="2225695"/>
-                  </a:lnTo>
-                  <a:lnTo>
-                    <a:pt x="6696849" y="2225468"/>
-                  </a:lnTo>
-                  <a:lnTo>
-                    <a:pt x="6619605" y="2225207"/>
-                  </a:lnTo>
-                  <a:lnTo>
-                    <a:pt x="6542361" y="2224906"/>
-                  </a:lnTo>
-                  <a:lnTo>
-                    <a:pt x="6465118" y="2224560"/>
-                  </a:lnTo>
-                  <a:lnTo>
-                    <a:pt x="6387874" y="2224160"/>
-                  </a:lnTo>
-                  <a:lnTo>
-                    <a:pt x="6310631" y="2223700"/>
-                  </a:lnTo>
-                  <a:lnTo>
-                    <a:pt x="6233387" y="2223170"/>
-                  </a:lnTo>
-                  <a:lnTo>
-                    <a:pt x="6156144" y="2222559"/>
-                  </a:lnTo>
-                  <a:lnTo>
-                    <a:pt x="6078900" y="2221855"/>
-                  </a:lnTo>
-                  <a:lnTo>
-                    <a:pt x="6001656" y="2221045"/>
-                  </a:lnTo>
-                  <a:lnTo>
-                    <a:pt x="5924413" y="2220111"/>
-                  </a:lnTo>
-                  <a:lnTo>
-                    <a:pt x="5847169" y="2219034"/>
-                  </a:lnTo>
-                  <a:lnTo>
-                    <a:pt x="5769926" y="2217794"/>
-                  </a:lnTo>
-                  <a:lnTo>
-                    <a:pt x="5692682" y="2216366"/>
-                  </a:lnTo>
-                  <a:lnTo>
-                    <a:pt x="5615439" y="2214720"/>
-                  </a:lnTo>
-                  <a:lnTo>
-                    <a:pt x="5538195" y="2212823"/>
-                  </a:lnTo>
-                  <a:lnTo>
-                    <a:pt x="5460951" y="2210638"/>
-                  </a:lnTo>
-                  <a:lnTo>
-                    <a:pt x="5383708" y="2208121"/>
-                  </a:lnTo>
-                  <a:lnTo>
-                    <a:pt x="5306464" y="2205221"/>
-                  </a:lnTo>
-                  <a:lnTo>
-                    <a:pt x="5229221" y="2201879"/>
-                  </a:lnTo>
-                  <a:lnTo>
-                    <a:pt x="5151977" y="2198029"/>
-                  </a:lnTo>
-                  <a:lnTo>
-                    <a:pt x="5074734" y="2193594"/>
-                  </a:lnTo>
-                  <a:lnTo>
-                    <a:pt x="4997490" y="2188483"/>
-                  </a:lnTo>
-                  <a:lnTo>
-                    <a:pt x="4920246" y="2182595"/>
-                  </a:lnTo>
-                  <a:lnTo>
-                    <a:pt x="4843003" y="2175812"/>
-                  </a:lnTo>
-                  <a:lnTo>
-                    <a:pt x="4765759" y="2167996"/>
-                  </a:lnTo>
-                  <a:lnTo>
-                    <a:pt x="4688516" y="2158991"/>
-                  </a:lnTo>
-                  <a:lnTo>
-                    <a:pt x="4611272" y="2148616"/>
-                  </a:lnTo>
-                  <a:lnTo>
-                    <a:pt x="4534029" y="2136663"/>
-                  </a:lnTo>
-                  <a:lnTo>
-                    <a:pt x="4456785" y="2122892"/>
-                  </a:lnTo>
-                  <a:lnTo>
-                    <a:pt x="4379541" y="2107025"/>
-                  </a:lnTo>
-                  <a:lnTo>
-                    <a:pt x="4302298" y="2088744"/>
-                  </a:lnTo>
-                  <a:lnTo>
-                    <a:pt x="4225054" y="2067682"/>
-                  </a:lnTo>
-                  <a:lnTo>
-                    <a:pt x="4147811" y="2043416"/>
-                  </a:lnTo>
-                  <a:lnTo>
-                    <a:pt x="4070567" y="2015458"/>
-                  </a:lnTo>
-                  <a:lnTo>
-                    <a:pt x="3993324" y="1983246"/>
-                  </a:lnTo>
-                  <a:lnTo>
-                    <a:pt x="3916080" y="1946134"/>
-                  </a:lnTo>
-                  <a:lnTo>
-                    <a:pt x="3838836" y="1903375"/>
-                  </a:lnTo>
-                  <a:lnTo>
-                    <a:pt x="3761593" y="1854112"/>
-                  </a:lnTo>
-                  <a:lnTo>
-                    <a:pt x="3684349" y="1797354"/>
-                  </a:lnTo>
-                  <a:lnTo>
-                    <a:pt x="3607106" y="1731960"/>
-                  </a:lnTo>
-                  <a:lnTo>
-                    <a:pt x="3529862" y="1656618"/>
-                  </a:lnTo>
-                  <a:lnTo>
-                    <a:pt x="3452619" y="1569814"/>
-                  </a:lnTo>
-                  <a:lnTo>
-                    <a:pt x="3375375" y="1469803"/>
-                  </a:lnTo>
-                  <a:lnTo>
-                    <a:pt x="3298131" y="1357053"/>
-                  </a:lnTo>
-                  <a:lnTo>
-                    <a:pt x="3220888" y="1337688"/>
-                  </a:lnTo>
-                  <a:lnTo>
-                    <a:pt x="3143644" y="1317893"/>
-                  </a:lnTo>
-                  <a:lnTo>
-                    <a:pt x="3066401" y="1297657"/>
-                  </a:lnTo>
-                  <a:lnTo>
-                    <a:pt x="2989157" y="1276971"/>
-                  </a:lnTo>
-                  <a:lnTo>
-                    <a:pt x="2911914" y="1255825"/>
-                  </a:lnTo>
-                  <a:lnTo>
-                    <a:pt x="2834670" y="1234208"/>
-                  </a:lnTo>
-                  <a:lnTo>
-                    <a:pt x="2757426" y="1212110"/>
-                  </a:lnTo>
-                  <a:lnTo>
-                    <a:pt x="2680183" y="1189520"/>
-                  </a:lnTo>
-                  <a:lnTo>
-                    <a:pt x="2602939" y="1166427"/>
-                  </a:lnTo>
-                  <a:lnTo>
-                    <a:pt x="2525696" y="1142820"/>
-                  </a:lnTo>
-                  <a:lnTo>
-                    <a:pt x="2448452" y="1118688"/>
-                  </a:lnTo>
-                  <a:lnTo>
-                    <a:pt x="2371209" y="1094019"/>
-                  </a:lnTo>
-                  <a:lnTo>
-                    <a:pt x="2293965" y="1068801"/>
-                  </a:lnTo>
-                  <a:lnTo>
-                    <a:pt x="2216721" y="1043022"/>
-                  </a:lnTo>
-                  <a:lnTo>
-                    <a:pt x="2139478" y="1016669"/>
-                  </a:lnTo>
-                  <a:lnTo>
-                    <a:pt x="2062234" y="989730"/>
-                  </a:lnTo>
-                  <a:lnTo>
-                    <a:pt x="1984991" y="962191"/>
-                  </a:lnTo>
-                  <a:lnTo>
-                    <a:pt x="1907747" y="934039"/>
-                  </a:lnTo>
-                  <a:lnTo>
-                    <a:pt x="1830504" y="905261"/>
-                  </a:lnTo>
-                  <a:lnTo>
-                    <a:pt x="1753260" y="875842"/>
-                  </a:lnTo>
-                  <a:lnTo>
-                    <a:pt x="1676016" y="845769"/>
-                  </a:lnTo>
-                  <a:lnTo>
-                    <a:pt x="1598773" y="815026"/>
-                  </a:lnTo>
-                  <a:lnTo>
-                    <a:pt x="1521529" y="783599"/>
-                  </a:lnTo>
-                  <a:lnTo>
-                    <a:pt x="1444286" y="751473"/>
-                  </a:lnTo>
-                  <a:lnTo>
-                    <a:pt x="1367042" y="718632"/>
-                  </a:lnTo>
-                  <a:lnTo>
-                    <a:pt x="1289799" y="685060"/>
-                  </a:lnTo>
-                  <a:lnTo>
-                    <a:pt x="1212555" y="650741"/>
-                  </a:lnTo>
-                  <a:lnTo>
-                    <a:pt x="1135311" y="615658"/>
-                  </a:lnTo>
-                  <a:lnTo>
-                    <a:pt x="1058068" y="579794"/>
-                  </a:lnTo>
-                  <a:lnTo>
-                    <a:pt x="980824" y="543132"/>
-                  </a:lnTo>
-                  <a:lnTo>
-                    <a:pt x="903581" y="505655"/>
-                  </a:lnTo>
-                  <a:lnTo>
-                    <a:pt x="826337" y="467343"/>
-                  </a:lnTo>
-                  <a:lnTo>
-                    <a:pt x="749094" y="428179"/>
-                  </a:lnTo>
-                  <a:lnTo>
-                    <a:pt x="671850" y="388143"/>
-                  </a:lnTo>
-                  <a:lnTo>
-                    <a:pt x="594606" y="347216"/>
-                  </a:lnTo>
-                  <a:lnTo>
-                    <a:pt x="517363" y="305378"/>
-                  </a:lnTo>
-                  <a:lnTo>
-                    <a:pt x="440119" y="262609"/>
-                  </a:lnTo>
-                  <a:lnTo>
-                    <a:pt x="362876" y="218889"/>
-                  </a:lnTo>
-                  <a:lnTo>
-                    <a:pt x="285632" y="174195"/>
-                  </a:lnTo>
-                  <a:lnTo>
-                    <a:pt x="208389" y="128507"/>
-                  </a:lnTo>
-                  <a:lnTo>
-                    <a:pt x="131145" y="81802"/>
-                  </a:lnTo>
-                  <a:lnTo>
-                    <a:pt x="53901" y="34058"/>
+                    <a:pt x="7314797" y="2123673"/>
+                  </a:lnTo>
+                  <a:lnTo>
+                    <a:pt x="7237554" y="2123593"/>
+                  </a:lnTo>
+                  <a:lnTo>
+                    <a:pt x="7160310" y="2123501"/>
+                  </a:lnTo>
+                  <a:lnTo>
+                    <a:pt x="7083066" y="2123394"/>
+                  </a:lnTo>
+                  <a:lnTo>
+                    <a:pt x="7005823" y="2123271"/>
+                  </a:lnTo>
+                  <a:lnTo>
+                    <a:pt x="6928579" y="2123130"/>
+                  </a:lnTo>
+                  <a:lnTo>
+                    <a:pt x="6851336" y="2122967"/>
+                  </a:lnTo>
+                  <a:lnTo>
+                    <a:pt x="6774092" y="2122780"/>
+                  </a:lnTo>
+                  <a:lnTo>
+                    <a:pt x="6696849" y="2122563"/>
+                  </a:lnTo>
+                  <a:lnTo>
+                    <a:pt x="6619605" y="2122314"/>
+                  </a:lnTo>
+                  <a:lnTo>
+                    <a:pt x="6542361" y="2122027"/>
+                  </a:lnTo>
+                  <a:lnTo>
+                    <a:pt x="6465118" y="2121697"/>
+                  </a:lnTo>
+                  <a:lnTo>
+                    <a:pt x="6387874" y="2121316"/>
+                  </a:lnTo>
+                  <a:lnTo>
+                    <a:pt x="6310631" y="2120877"/>
+                  </a:lnTo>
+                  <a:lnTo>
+                    <a:pt x="6233387" y="2120371"/>
+                  </a:lnTo>
+                  <a:lnTo>
+                    <a:pt x="6156144" y="2119789"/>
+                  </a:lnTo>
+                  <a:lnTo>
+                    <a:pt x="6078900" y="2119118"/>
+                  </a:lnTo>
+                  <a:lnTo>
+                    <a:pt x="6001656" y="2118344"/>
+                  </a:lnTo>
+                  <a:lnTo>
+                    <a:pt x="5924413" y="2117453"/>
+                  </a:lnTo>
+                  <a:lnTo>
+                    <a:pt x="5847169" y="2116427"/>
+                  </a:lnTo>
+                  <a:lnTo>
+                    <a:pt x="5769926" y="2115244"/>
+                  </a:lnTo>
+                  <a:lnTo>
+                    <a:pt x="5692682" y="2113882"/>
+                  </a:lnTo>
+                  <a:lnTo>
+                    <a:pt x="5615439" y="2112312"/>
+                  </a:lnTo>
+                  <a:lnTo>
+                    <a:pt x="5538195" y="2110503"/>
+                  </a:lnTo>
+                  <a:lnTo>
+                    <a:pt x="5460951" y="2108419"/>
+                  </a:lnTo>
+                  <a:lnTo>
+                    <a:pt x="5383708" y="2106018"/>
+                  </a:lnTo>
+                  <a:lnTo>
+                    <a:pt x="5306464" y="2103252"/>
+                  </a:lnTo>
+                  <a:lnTo>
+                    <a:pt x="5229221" y="2100065"/>
+                  </a:lnTo>
+                  <a:lnTo>
+                    <a:pt x="5151977" y="2096393"/>
+                  </a:lnTo>
+                  <a:lnTo>
+                    <a:pt x="5074734" y="2092163"/>
+                  </a:lnTo>
+                  <a:lnTo>
+                    <a:pt x="4997490" y="2087289"/>
+                  </a:lnTo>
+                  <a:lnTo>
+                    <a:pt x="4920246" y="2081673"/>
+                  </a:lnTo>
+                  <a:lnTo>
+                    <a:pt x="4843003" y="2075203"/>
+                  </a:lnTo>
+                  <a:lnTo>
+                    <a:pt x="4765759" y="2067749"/>
+                  </a:lnTo>
+                  <a:lnTo>
+                    <a:pt x="4688516" y="2059160"/>
+                  </a:lnTo>
+                  <a:lnTo>
+                    <a:pt x="4611272" y="2049265"/>
+                  </a:lnTo>
+                  <a:lnTo>
+                    <a:pt x="4534029" y="2037865"/>
+                  </a:lnTo>
+                  <a:lnTo>
+                    <a:pt x="4456785" y="2024730"/>
+                  </a:lnTo>
+                  <a:lnTo>
+                    <a:pt x="4379541" y="2009597"/>
+                  </a:lnTo>
+                  <a:lnTo>
+                    <a:pt x="4302298" y="1992161"/>
+                  </a:lnTo>
+                  <a:lnTo>
+                    <a:pt x="4225054" y="1972073"/>
+                  </a:lnTo>
+                  <a:lnTo>
+                    <a:pt x="4147811" y="1948929"/>
+                  </a:lnTo>
+                  <a:lnTo>
+                    <a:pt x="4070567" y="1922264"/>
+                  </a:lnTo>
+                  <a:lnTo>
+                    <a:pt x="3993324" y="1891541"/>
+                  </a:lnTo>
+                  <a:lnTo>
+                    <a:pt x="3916080" y="1856145"/>
+                  </a:lnTo>
+                  <a:lnTo>
+                    <a:pt x="3838836" y="1815364"/>
+                  </a:lnTo>
+                  <a:lnTo>
+                    <a:pt x="3761593" y="1768379"/>
+                  </a:lnTo>
+                  <a:lnTo>
+                    <a:pt x="3684349" y="1714245"/>
+                  </a:lnTo>
+                  <a:lnTo>
+                    <a:pt x="3607106" y="1651875"/>
+                  </a:lnTo>
+                  <a:lnTo>
+                    <a:pt x="3529862" y="1580017"/>
+                  </a:lnTo>
+                  <a:lnTo>
+                    <a:pt x="3452619" y="1497226"/>
+                  </a:lnTo>
+                  <a:lnTo>
+                    <a:pt x="3375375" y="1401840"/>
+                  </a:lnTo>
+                  <a:lnTo>
+                    <a:pt x="3298131" y="1294303"/>
+                  </a:lnTo>
+                  <a:lnTo>
+                    <a:pt x="3220888" y="1275834"/>
+                  </a:lnTo>
+                  <a:lnTo>
+                    <a:pt x="3143644" y="1256954"/>
+                  </a:lnTo>
+                  <a:lnTo>
+                    <a:pt x="3066401" y="1237654"/>
+                  </a:lnTo>
+                  <a:lnTo>
+                    <a:pt x="2989157" y="1217925"/>
+                  </a:lnTo>
+                  <a:lnTo>
+                    <a:pt x="2911914" y="1197756"/>
+                  </a:lnTo>
+                  <a:lnTo>
+                    <a:pt x="2834670" y="1177138"/>
+                  </a:lnTo>
+                  <a:lnTo>
+                    <a:pt x="2757426" y="1156062"/>
+                  </a:lnTo>
+                  <a:lnTo>
+                    <a:pt x="2680183" y="1134517"/>
+                  </a:lnTo>
+                  <a:lnTo>
+                    <a:pt x="2602939" y="1112492"/>
+                  </a:lnTo>
+                  <a:lnTo>
+                    <a:pt x="2525696" y="1089977"/>
+                  </a:lnTo>
+                  <a:lnTo>
+                    <a:pt x="2448452" y="1066961"/>
+                  </a:lnTo>
+                  <a:lnTo>
+                    <a:pt x="2371209" y="1043432"/>
+                  </a:lnTo>
+                  <a:lnTo>
+                    <a:pt x="2293965" y="1019380"/>
+                  </a:lnTo>
+                  <a:lnTo>
+                    <a:pt x="2216721" y="994793"/>
+                  </a:lnTo>
+                  <a:lnTo>
+                    <a:pt x="2139478" y="969659"/>
+                  </a:lnTo>
+                  <a:lnTo>
+                    <a:pt x="2062234" y="943965"/>
+                  </a:lnTo>
+                  <a:lnTo>
+                    <a:pt x="1984991" y="917700"/>
+                  </a:lnTo>
+                  <a:lnTo>
+                    <a:pt x="1907747" y="890850"/>
+                  </a:lnTo>
+                  <a:lnTo>
+                    <a:pt x="1830504" y="863402"/>
+                  </a:lnTo>
+                  <a:lnTo>
+                    <a:pt x="1753260" y="835344"/>
+                  </a:lnTo>
+                  <a:lnTo>
+                    <a:pt x="1676016" y="806661"/>
+                  </a:lnTo>
+                  <a:lnTo>
+                    <a:pt x="1598773" y="777340"/>
+                  </a:lnTo>
+                  <a:lnTo>
+                    <a:pt x="1521529" y="747366"/>
+                  </a:lnTo>
+                  <a:lnTo>
+                    <a:pt x="1444286" y="716725"/>
+                  </a:lnTo>
+                  <a:lnTo>
+                    <a:pt x="1367042" y="685403"/>
+                  </a:lnTo>
+                  <a:lnTo>
+                    <a:pt x="1289799" y="653383"/>
+                  </a:lnTo>
+                  <a:lnTo>
+                    <a:pt x="1212555" y="620651"/>
+                  </a:lnTo>
+                  <a:lnTo>
+                    <a:pt x="1135311" y="587190"/>
+                  </a:lnTo>
+                  <a:lnTo>
+                    <a:pt x="1058068" y="552985"/>
+                  </a:lnTo>
+                  <a:lnTo>
+                    <a:pt x="980824" y="518018"/>
+                  </a:lnTo>
+                  <a:lnTo>
+                    <a:pt x="903581" y="482273"/>
+                  </a:lnTo>
+                  <a:lnTo>
+                    <a:pt x="826337" y="445733"/>
+                  </a:lnTo>
+                  <a:lnTo>
+                    <a:pt x="749094" y="408380"/>
+                  </a:lnTo>
+                  <a:lnTo>
+                    <a:pt x="671850" y="370195"/>
+                  </a:lnTo>
+                  <a:lnTo>
+                    <a:pt x="594606" y="331161"/>
+                  </a:lnTo>
+                  <a:lnTo>
+                    <a:pt x="517363" y="291258"/>
+                  </a:lnTo>
+                  <a:lnTo>
+                    <a:pt x="440119" y="250466"/>
+                  </a:lnTo>
+                  <a:lnTo>
+                    <a:pt x="362876" y="208767"/>
+                  </a:lnTo>
+                  <a:lnTo>
+                    <a:pt x="285632" y="166141"/>
+                  </a:lnTo>
+                  <a:lnTo>
+                    <a:pt x="208389" y="122565"/>
+                  </a:lnTo>
+                  <a:lnTo>
+                    <a:pt x="131145" y="78020"/>
+                  </a:lnTo>
+                  <a:lnTo>
+                    <a:pt x="53901" y="32483"/>
                   </a:lnTo>
                   <a:lnTo>
                     <a:pt x="0" y="0"/>
@@ -4055,228 +4055,228 @@
           </p:nvSpPr>
           <p:spPr>
             <a:xfrm>
-              <a:off x="2763368" y="1896563"/>
-              <a:ext cx="5446190" cy="3641240"/>
+              <a:off x="2763368" y="2073503"/>
+              <a:ext cx="5446190" cy="3472871"/>
             </a:xfrm>
             <a:custGeom>
               <a:avLst/>
               <a:pathLst>
-                <a:path w="5446190" h="3641240">
+                <a:path w="5446190" h="3472871">
                   <a:moveTo>
                     <a:pt x="0" y="0"/>
                   </a:moveTo>
                   <a:lnTo>
-                    <a:pt x="39140" y="151259"/>
-                  </a:lnTo>
-                  <a:lnTo>
-                    <a:pt x="116384" y="426318"/>
-                  </a:lnTo>
-                  <a:lnTo>
-                    <a:pt x="193627" y="679770"/>
-                  </a:lnTo>
-                  <a:lnTo>
-                    <a:pt x="270871" y="913310"/>
-                  </a:lnTo>
-                  <a:lnTo>
-                    <a:pt x="348114" y="1128505"/>
-                  </a:lnTo>
-                  <a:lnTo>
-                    <a:pt x="425358" y="1326794"/>
-                  </a:lnTo>
-                  <a:lnTo>
-                    <a:pt x="502602" y="1509506"/>
-                  </a:lnTo>
-                  <a:lnTo>
-                    <a:pt x="579845" y="1677865"/>
-                  </a:lnTo>
-                  <a:lnTo>
-                    <a:pt x="657089" y="1832998"/>
-                  </a:lnTo>
-                  <a:lnTo>
-                    <a:pt x="734332" y="1975945"/>
-                  </a:lnTo>
-                  <a:lnTo>
-                    <a:pt x="811576" y="2107661"/>
-                  </a:lnTo>
-                  <a:lnTo>
-                    <a:pt x="888820" y="2229031"/>
-                  </a:lnTo>
-                  <a:lnTo>
-                    <a:pt x="966063" y="2340866"/>
-                  </a:lnTo>
-                  <a:lnTo>
-                    <a:pt x="1043307" y="2443915"/>
-                  </a:lnTo>
-                  <a:lnTo>
-                    <a:pt x="1120550" y="2538870"/>
-                  </a:lnTo>
-                  <a:lnTo>
-                    <a:pt x="1197794" y="2626365"/>
-                  </a:lnTo>
-                  <a:lnTo>
-                    <a:pt x="1275037" y="2706986"/>
-                  </a:lnTo>
-                  <a:lnTo>
-                    <a:pt x="1352281" y="2781275"/>
-                  </a:lnTo>
-                  <a:lnTo>
-                    <a:pt x="1429525" y="2849727"/>
-                  </a:lnTo>
-                  <a:lnTo>
-                    <a:pt x="1506768" y="2912802"/>
-                  </a:lnTo>
-                  <a:lnTo>
-                    <a:pt x="1584012" y="2970922"/>
-                  </a:lnTo>
-                  <a:lnTo>
-                    <a:pt x="1661255" y="3024476"/>
-                  </a:lnTo>
-                  <a:lnTo>
-                    <a:pt x="1738499" y="3073823"/>
-                  </a:lnTo>
-                  <a:lnTo>
-                    <a:pt x="1815742" y="3119293"/>
-                  </a:lnTo>
-                  <a:lnTo>
-                    <a:pt x="1892986" y="3161192"/>
-                  </a:lnTo>
-                  <a:lnTo>
-                    <a:pt x="1970230" y="3199799"/>
-                  </a:lnTo>
-                  <a:lnTo>
-                    <a:pt x="2047473" y="3235373"/>
-                  </a:lnTo>
-                  <a:lnTo>
-                    <a:pt x="2124717" y="3268153"/>
-                  </a:lnTo>
-                  <a:lnTo>
-                    <a:pt x="2201960" y="3298357"/>
-                  </a:lnTo>
-                  <a:lnTo>
-                    <a:pt x="2279204" y="3326189"/>
-                  </a:lnTo>
-                  <a:lnTo>
-                    <a:pt x="2356447" y="3351834"/>
-                  </a:lnTo>
-                  <a:lnTo>
-                    <a:pt x="2433691" y="3375465"/>
-                  </a:lnTo>
-                  <a:lnTo>
-                    <a:pt x="2510935" y="3397239"/>
-                  </a:lnTo>
-                  <a:lnTo>
-                    <a:pt x="2588178" y="3417303"/>
-                  </a:lnTo>
-                  <a:lnTo>
-                    <a:pt x="2665422" y="3435791"/>
-                  </a:lnTo>
-                  <a:lnTo>
-                    <a:pt x="2742665" y="3452826"/>
-                  </a:lnTo>
-                  <a:lnTo>
-                    <a:pt x="2819909" y="3468523"/>
-                  </a:lnTo>
-                  <a:lnTo>
-                    <a:pt x="2897152" y="3482987"/>
-                  </a:lnTo>
-                  <a:lnTo>
-                    <a:pt x="2974396" y="3496315"/>
-                  </a:lnTo>
-                  <a:lnTo>
-                    <a:pt x="3051640" y="3508596"/>
-                  </a:lnTo>
-                  <a:lnTo>
-                    <a:pt x="3128883" y="3519912"/>
-                  </a:lnTo>
-                  <a:lnTo>
-                    <a:pt x="3206127" y="3530339"/>
-                  </a:lnTo>
-                  <a:lnTo>
-                    <a:pt x="3283370" y="3539947"/>
-                  </a:lnTo>
-                  <a:lnTo>
-                    <a:pt x="3360614" y="3548800"/>
-                  </a:lnTo>
-                  <a:lnTo>
-                    <a:pt x="3437857" y="3556957"/>
-                  </a:lnTo>
-                  <a:lnTo>
-                    <a:pt x="3515101" y="3564474"/>
-                  </a:lnTo>
-                  <a:lnTo>
-                    <a:pt x="3592345" y="3571401"/>
-                  </a:lnTo>
-                  <a:lnTo>
-                    <a:pt x="3669588" y="3577783"/>
-                  </a:lnTo>
-                  <a:lnTo>
-                    <a:pt x="3746832" y="3583664"/>
-                  </a:lnTo>
-                  <a:lnTo>
-                    <a:pt x="3824075" y="3589082"/>
-                  </a:lnTo>
-                  <a:lnTo>
-                    <a:pt x="3901319" y="3594076"/>
-                  </a:lnTo>
-                  <a:lnTo>
-                    <a:pt x="3978562" y="3598677"/>
-                  </a:lnTo>
-                  <a:lnTo>
-                    <a:pt x="4055806" y="3602916"/>
-                  </a:lnTo>
-                  <a:lnTo>
-                    <a:pt x="4133050" y="3606822"/>
-                  </a:lnTo>
-                  <a:lnTo>
-                    <a:pt x="4210293" y="3610422"/>
-                  </a:lnTo>
-                  <a:lnTo>
-                    <a:pt x="4287537" y="3613739"/>
-                  </a:lnTo>
-                  <a:lnTo>
-                    <a:pt x="4364780" y="3616795"/>
-                  </a:lnTo>
-                  <a:lnTo>
-                    <a:pt x="4442024" y="3619611"/>
-                  </a:lnTo>
-                  <a:lnTo>
-                    <a:pt x="4519267" y="3622206"/>
-                  </a:lnTo>
-                  <a:lnTo>
-                    <a:pt x="4596511" y="3624597"/>
-                  </a:lnTo>
-                  <a:lnTo>
-                    <a:pt x="4673755" y="3626800"/>
-                  </a:lnTo>
-                  <a:lnTo>
-                    <a:pt x="4750998" y="3628831"/>
-                  </a:lnTo>
-                  <a:lnTo>
-                    <a:pt x="4828242" y="3630701"/>
-                  </a:lnTo>
-                  <a:lnTo>
-                    <a:pt x="4905485" y="3632425"/>
-                  </a:lnTo>
-                  <a:lnTo>
-                    <a:pt x="4982729" y="3634013"/>
-                  </a:lnTo>
-                  <a:lnTo>
-                    <a:pt x="5059972" y="3635477"/>
-                  </a:lnTo>
-                  <a:lnTo>
-                    <a:pt x="5137216" y="3636825"/>
-                  </a:lnTo>
-                  <a:lnTo>
-                    <a:pt x="5214460" y="3638068"/>
-                  </a:lnTo>
-                  <a:lnTo>
-                    <a:pt x="5291703" y="3639213"/>
-                  </a:lnTo>
-                  <a:lnTo>
-                    <a:pt x="5368947" y="3640268"/>
-                  </a:lnTo>
-                  <a:lnTo>
-                    <a:pt x="5446190" y="3641240"/>
+                    <a:pt x="39140" y="144265"/>
+                  </a:lnTo>
+                  <a:lnTo>
+                    <a:pt x="116384" y="406606"/>
+                  </a:lnTo>
+                  <a:lnTo>
+                    <a:pt x="193627" y="648337"/>
+                  </a:lnTo>
+                  <a:lnTo>
+                    <a:pt x="270871" y="871079"/>
+                  </a:lnTo>
+                  <a:lnTo>
+                    <a:pt x="348114" y="1076323"/>
+                  </a:lnTo>
+                  <a:lnTo>
+                    <a:pt x="425358" y="1265444"/>
+                  </a:lnTo>
+                  <a:lnTo>
+                    <a:pt x="502602" y="1439707"/>
+                  </a:lnTo>
+                  <a:lnTo>
+                    <a:pt x="579845" y="1600281"/>
+                  </a:lnTo>
+                  <a:lnTo>
+                    <a:pt x="657089" y="1748241"/>
+                  </a:lnTo>
+                  <a:lnTo>
+                    <a:pt x="734332" y="1884578"/>
+                  </a:lnTo>
+                  <a:lnTo>
+                    <a:pt x="811576" y="2010204"/>
+                  </a:lnTo>
+                  <a:lnTo>
+                    <a:pt x="888820" y="2125961"/>
+                  </a:lnTo>
+                  <a:lnTo>
+                    <a:pt x="966063" y="2232625"/>
+                  </a:lnTo>
+                  <a:lnTo>
+                    <a:pt x="1043307" y="2330910"/>
+                  </a:lnTo>
+                  <a:lnTo>
+                    <a:pt x="1120550" y="2421473"/>
+                  </a:lnTo>
+                  <a:lnTo>
+                    <a:pt x="1197794" y="2504923"/>
+                  </a:lnTo>
+                  <a:lnTo>
+                    <a:pt x="1275037" y="2581816"/>
+                  </a:lnTo>
+                  <a:lnTo>
+                    <a:pt x="1352281" y="2652669"/>
+                  </a:lnTo>
+                  <a:lnTo>
+                    <a:pt x="1429525" y="2717957"/>
+                  </a:lnTo>
+                  <a:lnTo>
+                    <a:pt x="1506768" y="2778115"/>
+                  </a:lnTo>
+                  <a:lnTo>
+                    <a:pt x="1584012" y="2833547"/>
+                  </a:lnTo>
+                  <a:lnTo>
+                    <a:pt x="1661255" y="2884625"/>
+                  </a:lnTo>
+                  <a:lnTo>
+                    <a:pt x="1738499" y="2931690"/>
+                  </a:lnTo>
+                  <a:lnTo>
+                    <a:pt x="1815742" y="2975058"/>
+                  </a:lnTo>
+                  <a:lnTo>
+                    <a:pt x="1892986" y="3015020"/>
+                  </a:lnTo>
+                  <a:lnTo>
+                    <a:pt x="1970230" y="3051841"/>
+                  </a:lnTo>
+                  <a:lnTo>
+                    <a:pt x="2047473" y="3085771"/>
+                  </a:lnTo>
+                  <a:lnTo>
+                    <a:pt x="2124717" y="3117035"/>
+                  </a:lnTo>
+                  <a:lnTo>
+                    <a:pt x="2201960" y="3145842"/>
+                  </a:lnTo>
+                  <a:lnTo>
+                    <a:pt x="2279204" y="3172387"/>
+                  </a:lnTo>
+                  <a:lnTo>
+                    <a:pt x="2356447" y="3196847"/>
+                  </a:lnTo>
+                  <a:lnTo>
+                    <a:pt x="2433691" y="3219385"/>
+                  </a:lnTo>
+                  <a:lnTo>
+                    <a:pt x="2510935" y="3240152"/>
+                  </a:lnTo>
+                  <a:lnTo>
+                    <a:pt x="2588178" y="3259288"/>
+                  </a:lnTo>
+                  <a:lnTo>
+                    <a:pt x="2665422" y="3276921"/>
+                  </a:lnTo>
+                  <a:lnTo>
+                    <a:pt x="2742665" y="3293169"/>
+                  </a:lnTo>
+                  <a:lnTo>
+                    <a:pt x="2819909" y="3308140"/>
+                  </a:lnTo>
+                  <a:lnTo>
+                    <a:pt x="2897152" y="3321935"/>
+                  </a:lnTo>
+                  <a:lnTo>
+                    <a:pt x="2974396" y="3334647"/>
+                  </a:lnTo>
+                  <a:lnTo>
+                    <a:pt x="3051640" y="3346359"/>
+                  </a:lnTo>
+                  <a:lnTo>
+                    <a:pt x="3128883" y="3357152"/>
+                  </a:lnTo>
+                  <a:lnTo>
+                    <a:pt x="3206127" y="3367097"/>
+                  </a:lnTo>
+                  <a:lnTo>
+                    <a:pt x="3283370" y="3376261"/>
+                  </a:lnTo>
+                  <a:lnTo>
+                    <a:pt x="3360614" y="3384705"/>
+                  </a:lnTo>
+                  <a:lnTo>
+                    <a:pt x="3437857" y="3392485"/>
+                  </a:lnTo>
+                  <a:lnTo>
+                    <a:pt x="3515101" y="3399654"/>
+                  </a:lnTo>
+                  <a:lnTo>
+                    <a:pt x="3592345" y="3406260"/>
+                  </a:lnTo>
+                  <a:lnTo>
+                    <a:pt x="3669588" y="3412347"/>
+                  </a:lnTo>
+                  <a:lnTo>
+                    <a:pt x="3746832" y="3417956"/>
+                  </a:lnTo>
+                  <a:lnTo>
+                    <a:pt x="3824075" y="3423125"/>
+                  </a:lnTo>
+                  <a:lnTo>
+                    <a:pt x="3901319" y="3427887"/>
+                  </a:lnTo>
+                  <a:lnTo>
+                    <a:pt x="3978562" y="3432275"/>
+                  </a:lnTo>
+                  <a:lnTo>
+                    <a:pt x="4055806" y="3436318"/>
+                  </a:lnTo>
+                  <a:lnTo>
+                    <a:pt x="4133050" y="3440044"/>
+                  </a:lnTo>
+                  <a:lnTo>
+                    <a:pt x="4210293" y="3443477"/>
+                  </a:lnTo>
+                  <a:lnTo>
+                    <a:pt x="4287537" y="3446641"/>
+                  </a:lnTo>
+                  <a:lnTo>
+                    <a:pt x="4364780" y="3449556"/>
+                  </a:lnTo>
+                  <a:lnTo>
+                    <a:pt x="4442024" y="3452242"/>
+                  </a:lnTo>
+                  <a:lnTo>
+                    <a:pt x="4519267" y="3454717"/>
+                  </a:lnTo>
+                  <a:lnTo>
+                    <a:pt x="4596511" y="3456997"/>
+                  </a:lnTo>
+                  <a:lnTo>
+                    <a:pt x="4673755" y="3459098"/>
+                  </a:lnTo>
+                  <a:lnTo>
+                    <a:pt x="4750998" y="3461035"/>
+                  </a:lnTo>
+                  <a:lnTo>
+                    <a:pt x="4828242" y="3462819"/>
+                  </a:lnTo>
+                  <a:lnTo>
+                    <a:pt x="4905485" y="3464463"/>
+                  </a:lnTo>
+                  <a:lnTo>
+                    <a:pt x="4982729" y="3465978"/>
+                  </a:lnTo>
+                  <a:lnTo>
+                    <a:pt x="5059972" y="3467374"/>
+                  </a:lnTo>
+                  <a:lnTo>
+                    <a:pt x="5137216" y="3468660"/>
+                  </a:lnTo>
+                  <a:lnTo>
+                    <a:pt x="5214460" y="3469845"/>
+                  </a:lnTo>
+                  <a:lnTo>
+                    <a:pt x="5291703" y="3470937"/>
+                  </a:lnTo>
+                  <a:lnTo>
+                    <a:pt x="5368947" y="3471943"/>
+                  </a:lnTo>
+                  <a:lnTo>
+                    <a:pt x="5446190" y="3472871"/>
                   </a:lnTo>
                 </a:path>
               </a:pathLst>
@@ -4305,7 +4305,7 @@
           </p:nvSpPr>
           <p:spPr>
             <a:xfrm>
-              <a:off x="817517" y="4679530"/>
+              <a:off x="817517" y="4727786"/>
               <a:ext cx="7799693" cy="0"/>
             </a:xfrm>
             <a:custGeom>
@@ -4348,15 +4348,15 @@
           </p:nvSpPr>
           <p:spPr>
             <a:xfrm>
-              <a:off x="4117484" y="1896563"/>
-              <a:ext cx="0" cy="3826579"/>
+              <a:off x="4117484" y="2073503"/>
+              <a:ext cx="0" cy="3649639"/>
             </a:xfrm>
             <a:custGeom>
               <a:avLst/>
               <a:pathLst>
-                <a:path w="0" h="3826579">
+                <a:path w="0" h="3649639">
                   <a:moveTo>
-                    <a:pt x="0" y="3826579"/>
+                    <a:pt x="0" y="3649639"/>
                   </a:moveTo>
                   <a:lnTo>
                     <a:pt x="0" y="0"/>
@@ -4391,7 +4391,7 @@
           </p:nvSpPr>
           <p:spPr>
             <a:xfrm>
-              <a:off x="692708" y="5509156"/>
+              <a:off x="692708" y="5517199"/>
               <a:ext cx="62179" cy="80101"/>
             </a:xfrm>
             <a:prstGeom prst="rect">
@@ -4437,7 +4437,7 @@
           </p:nvSpPr>
           <p:spPr>
             <a:xfrm>
-              <a:off x="692708" y="4639479"/>
+              <a:off x="692708" y="4687735"/>
               <a:ext cx="62179" cy="80101"/>
             </a:xfrm>
             <a:prstGeom prst="rect">
@@ -4483,7 +4483,7 @@
           </p:nvSpPr>
           <p:spPr>
             <a:xfrm>
-              <a:off x="692708" y="3769802"/>
+              <a:off x="692708" y="3858272"/>
               <a:ext cx="62179" cy="80101"/>
             </a:xfrm>
             <a:prstGeom prst="rect">
@@ -4529,7 +4529,7 @@
           </p:nvSpPr>
           <p:spPr>
             <a:xfrm>
-              <a:off x="692708" y="2900125"/>
+              <a:off x="692708" y="3028808"/>
               <a:ext cx="62179" cy="80101"/>
             </a:xfrm>
             <a:prstGeom prst="rect">
@@ -4575,7 +4575,7 @@
           </p:nvSpPr>
           <p:spPr>
             <a:xfrm>
-              <a:off x="692708" y="2030448"/>
+              <a:off x="692708" y="2199345"/>
               <a:ext cx="62179" cy="80101"/>
             </a:xfrm>
             <a:prstGeom prst="rect">
@@ -4851,7 +4851,7 @@
           </p:nvSpPr>
           <p:spPr>
             <a:xfrm rot="-5400000">
-              <a:off x="68446" y="3759743"/>
+              <a:off x="68446" y="3848213"/>
               <a:ext cx="1016904" cy="100218"/>
             </a:xfrm>
             <a:prstGeom prst="rect">
@@ -4892,6 +4892,52 @@
         <p:sp>
           <p:nvSpPr>
             <p:cNvPr id="38" name="tx38"/>
+            <p:cNvSpPr/>
+            <p:nvPr/>
+          </p:nvSpPr>
+          <p:spPr>
+            <a:xfrm>
+              <a:off x="817517" y="1896563"/>
+              <a:ext cx="5816864" cy="82021"/>
+            </a:xfrm>
+            <a:prstGeom prst="rect">
+              <a:avLst/>
+            </a:prstGeom>
+            <a:noFill/>
+          </p:spPr>
+          <p:txBody>
+            <a:bodyPr lIns="0" rIns="0" tIns="0" bIns="0" anchorCtr="1" anchor="ctr" wrap="none"/>
+            <a:lstStyle/>
+            <a:p>
+              <a:pPr algn="l" marL="0" marR="0" indent="0">
+                <a:lnSpc>
+                  <a:spcPts val="900"/>
+                </a:lnSpc>
+                <a:spcBef>
+                  <a:spcPts val="0"/>
+                </a:spcBef>
+                <a:spcAft>
+                  <a:spcPts val="0"/>
+                </a:spcAft>
+              </a:pPr>
+              <a:r>
+                <a:rPr sz="900">
+                  <a:solidFill>
+                    <a:srgbClr val="404040">
+                      <a:alpha val="100000"/>
+                    </a:srgbClr>
+                  </a:solidFill>
+                  <a:latin typeface="Helvetica"/>
+                  <a:cs typeface="Helvetica"/>
+                </a:rPr>
+                <a:t>subHR per 0.1 ratio decline: 2.56 (1.29-5.08)  |  per IQR decline (Δ = 0.30): 16.00 (2.11-121.46)  |  IQR: [0.84, 1.14]</a:t>
+              </a:r>
+            </a:p>
+          </p:txBody>
+        </p:sp>
+        <p:sp>
+          <p:nvSpPr>
+            <p:cNvPr id="39" name="tx39"/>
             <p:cNvSpPr/>
             <p:nvPr/>
           </p:nvSpPr>

--- a/docs/pptx/auc3/jx-auc3-linsubhr-ratio-hosp3.pptx
+++ b/docs/pptx/auc3/jx-auc3-linsubhr-ratio-hosp3.pptx
@@ -4898,7 +4898,7 @@
           <p:spPr>
             <a:xfrm>
               <a:off x="817517" y="1896563"/>
-              <a:ext cx="5816864" cy="82021"/>
+              <a:ext cx="6360017" cy="82021"/>
             </a:xfrm>
             <a:prstGeom prst="rect">
               <a:avLst/>
@@ -4930,7 +4930,7 @@
                   <a:latin typeface="Helvetica"/>
                   <a:cs typeface="Helvetica"/>
                 </a:rPr>
-                <a:t>subHR per 0.1 ratio decline: 2.56 (1.29-5.08)  |  per IQR decline (Δ = 0.30): 16.00 (2.11-121.46)  |  IQR: [0.84, 1.14]</a:t>
+                <a:t>subHR per 0.1 ratio decline: 2.56 (1.29-5.08), p = 0.007  |  per IQR decline (Δ = 0.30): 16.00 (2.11-121.46)  |  IQR: [0.84, 1.14]</a:t>
               </a:r>
             </a:p>
           </p:txBody>

--- a/docs/pptx/auc3/jx-auc3-linsubhr-ratio-hosp3.pptx
+++ b/docs/pptx/auc3/jx-auc3-linsubhr-ratio-hosp3.pptx
@@ -2443,7 +2443,7 @@
           </p:nvSpPr>
           <p:spPr>
             <a:xfrm>
-              <a:off x="1615213" y="2073503"/>
+              <a:off x="1531834" y="2073503"/>
               <a:ext cx="0" cy="3649639"/>
             </a:xfrm>
             <a:custGeom>
@@ -2486,7 +2486,7 @@
           </p:nvSpPr>
           <p:spPr>
             <a:xfrm>
-              <a:off x="3387871" y="2073503"/>
+              <a:off x="3586410" y="2073503"/>
               <a:ext cx="0" cy="3649639"/>
             </a:xfrm>
             <a:custGeom>
@@ -2529,7 +2529,7 @@
           </p:nvSpPr>
           <p:spPr>
             <a:xfrm>
-              <a:off x="5160528" y="2073503"/>
+              <a:off x="5640985" y="2073503"/>
               <a:ext cx="0" cy="3649639"/>
             </a:xfrm>
             <a:custGeom>
@@ -2572,7 +2572,7 @@
           </p:nvSpPr>
           <p:spPr>
             <a:xfrm>
-              <a:off x="6933186" y="2073503"/>
+              <a:off x="7695561" y="2073503"/>
               <a:ext cx="0" cy="3649639"/>
             </a:xfrm>
             <a:custGeom>
@@ -2830,7 +2830,7 @@
           </p:nvSpPr>
           <p:spPr>
             <a:xfrm>
-              <a:off x="2501542" y="2073503"/>
+              <a:off x="2559122" y="2073503"/>
               <a:ext cx="0" cy="3649639"/>
             </a:xfrm>
             <a:custGeom>
@@ -2873,7 +2873,7 @@
           </p:nvSpPr>
           <p:spPr>
             <a:xfrm>
-              <a:off x="4274200" y="2073503"/>
+              <a:off x="4613698" y="2073503"/>
               <a:ext cx="0" cy="3649639"/>
             </a:xfrm>
             <a:custGeom>
@@ -2916,7 +2916,7 @@
           </p:nvSpPr>
           <p:spPr>
             <a:xfrm>
-              <a:off x="6046857" y="2073503"/>
+              <a:off x="6668273" y="2073503"/>
               <a:ext cx="0" cy="3649639"/>
             </a:xfrm>
             <a:custGeom>
@@ -2953,547 +2953,516 @@
         </p:sp>
         <p:sp>
           <p:nvSpPr>
-            <p:cNvPr id="20" name="pl20"/>
+            <p:cNvPr id="20" name="pg20"/>
             <p:cNvSpPr/>
             <p:nvPr/>
           </p:nvSpPr>
           <p:spPr>
             <a:xfrm>
-              <a:off x="7819515" y="2073503"/>
-              <a:ext cx="0" cy="3649639"/>
+              <a:off x="1172049" y="2073503"/>
+              <a:ext cx="7090630" cy="3483289"/>
             </a:xfrm>
             <a:custGeom>
               <a:avLst/>
               <a:pathLst>
-                <a:path w="0" h="3649639">
+                <a:path w="7090630" h="3483289">
                   <a:moveTo>
-                    <a:pt x="0" y="3649639"/>
+                    <a:pt x="2571041" y="0"/>
                   </a:moveTo>
                   <a:lnTo>
+                    <a:pt x="2578410" y="53695"/>
+                  </a:lnTo>
+                  <a:lnTo>
+                    <a:pt x="2650033" y="506626"/>
+                  </a:lnTo>
+                  <a:lnTo>
+                    <a:pt x="2721655" y="899749"/>
+                  </a:lnTo>
+                  <a:lnTo>
+                    <a:pt x="2793278" y="1240960"/>
+                  </a:lnTo>
+                  <a:lnTo>
+                    <a:pt x="2864901" y="1537115"/>
+                  </a:lnTo>
+                  <a:lnTo>
+                    <a:pt x="2936523" y="1794164"/>
+                  </a:lnTo>
+                  <a:lnTo>
+                    <a:pt x="3008146" y="2017270"/>
+                  </a:lnTo>
+                  <a:lnTo>
+                    <a:pt x="3079768" y="2210915"/>
+                  </a:lnTo>
+                  <a:lnTo>
+                    <a:pt x="3151391" y="2378990"/>
+                  </a:lnTo>
+                  <a:lnTo>
+                    <a:pt x="3223013" y="2524870"/>
+                  </a:lnTo>
+                  <a:lnTo>
+                    <a:pt x="3294636" y="2651488"/>
+                  </a:lnTo>
+                  <a:lnTo>
+                    <a:pt x="3366258" y="2671916"/>
+                  </a:lnTo>
+                  <a:lnTo>
+                    <a:pt x="3437881" y="2689589"/>
+                  </a:lnTo>
+                  <a:lnTo>
+                    <a:pt x="3509503" y="2706878"/>
+                  </a:lnTo>
+                  <a:lnTo>
+                    <a:pt x="3581126" y="2723791"/>
+                  </a:lnTo>
+                  <a:lnTo>
+                    <a:pt x="3652748" y="2740335"/>
+                  </a:lnTo>
+                  <a:lnTo>
+                    <a:pt x="3724371" y="2756519"/>
+                  </a:lnTo>
+                  <a:lnTo>
+                    <a:pt x="3795993" y="2772351"/>
+                  </a:lnTo>
+                  <a:lnTo>
+                    <a:pt x="3867616" y="2787838"/>
+                  </a:lnTo>
+                  <a:lnTo>
+                    <a:pt x="3939238" y="2802988"/>
+                  </a:lnTo>
+                  <a:lnTo>
+                    <a:pt x="4010861" y="2817808"/>
+                  </a:lnTo>
+                  <a:lnTo>
+                    <a:pt x="4082483" y="2832305"/>
+                  </a:lnTo>
+                  <a:lnTo>
+                    <a:pt x="4154106" y="2846487"/>
+                  </a:lnTo>
+                  <a:lnTo>
+                    <a:pt x="4225729" y="2860360"/>
+                  </a:lnTo>
+                  <a:lnTo>
+                    <a:pt x="4297351" y="2873931"/>
+                  </a:lnTo>
+                  <a:lnTo>
+                    <a:pt x="4368974" y="2887207"/>
+                  </a:lnTo>
+                  <a:lnTo>
+                    <a:pt x="4440596" y="2900194"/>
+                  </a:lnTo>
+                  <a:lnTo>
+                    <a:pt x="4512219" y="2912898"/>
+                  </a:lnTo>
+                  <a:lnTo>
+                    <a:pt x="4583841" y="2925325"/>
+                  </a:lnTo>
+                  <a:lnTo>
+                    <a:pt x="4655464" y="2937482"/>
+                  </a:lnTo>
+                  <a:lnTo>
+                    <a:pt x="4727086" y="2949374"/>
+                  </a:lnTo>
+                  <a:lnTo>
+                    <a:pt x="4798709" y="2961007"/>
+                  </a:lnTo>
+                  <a:lnTo>
+                    <a:pt x="4870331" y="2972387"/>
+                  </a:lnTo>
+                  <a:lnTo>
+                    <a:pt x="4941954" y="2983520"/>
+                  </a:lnTo>
+                  <a:lnTo>
+                    <a:pt x="5013576" y="2994410"/>
+                  </a:lnTo>
+                  <a:lnTo>
+                    <a:pt x="5085199" y="3005062"/>
+                  </a:lnTo>
+                  <a:lnTo>
+                    <a:pt x="5156821" y="3015483"/>
+                  </a:lnTo>
+                  <a:lnTo>
+                    <a:pt x="5228444" y="3025677"/>
+                  </a:lnTo>
+                  <a:lnTo>
+                    <a:pt x="5300066" y="3035650"/>
+                  </a:lnTo>
+                  <a:lnTo>
+                    <a:pt x="5371689" y="3045405"/>
+                  </a:lnTo>
+                  <a:lnTo>
+                    <a:pt x="5443311" y="3054947"/>
+                  </a:lnTo>
+                  <a:lnTo>
+                    <a:pt x="5514934" y="3064282"/>
+                  </a:lnTo>
+                  <a:lnTo>
+                    <a:pt x="5586557" y="3073414"/>
+                  </a:lnTo>
+                  <a:lnTo>
+                    <a:pt x="5658179" y="3082347"/>
+                  </a:lnTo>
+                  <a:lnTo>
+                    <a:pt x="5729802" y="3091085"/>
+                  </a:lnTo>
+                  <a:lnTo>
+                    <a:pt x="5801424" y="3099634"/>
+                  </a:lnTo>
+                  <a:lnTo>
+                    <a:pt x="5873047" y="3107996"/>
+                  </a:lnTo>
+                  <a:lnTo>
+                    <a:pt x="5944669" y="3116176"/>
+                  </a:lnTo>
+                  <a:lnTo>
+                    <a:pt x="6016292" y="3124178"/>
+                  </a:lnTo>
+                  <a:lnTo>
+                    <a:pt x="6087914" y="3132006"/>
+                  </a:lnTo>
+                  <a:lnTo>
+                    <a:pt x="6159537" y="3139663"/>
+                  </a:lnTo>
+                  <a:lnTo>
+                    <a:pt x="6231159" y="3147154"/>
+                  </a:lnTo>
+                  <a:lnTo>
+                    <a:pt x="6302782" y="3154481"/>
+                  </a:lnTo>
+                  <a:lnTo>
+                    <a:pt x="6374404" y="3161649"/>
+                  </a:lnTo>
+                  <a:lnTo>
+                    <a:pt x="6446027" y="3168661"/>
+                  </a:lnTo>
+                  <a:lnTo>
+                    <a:pt x="6517649" y="3175521"/>
+                  </a:lnTo>
+                  <a:lnTo>
+                    <a:pt x="6589272" y="3182231"/>
+                  </a:lnTo>
+                  <a:lnTo>
+                    <a:pt x="6660894" y="3188795"/>
+                  </a:lnTo>
+                  <a:lnTo>
+                    <a:pt x="6732517" y="3195216"/>
+                  </a:lnTo>
+                  <a:lnTo>
+                    <a:pt x="6804139" y="3201497"/>
+                  </a:lnTo>
+                  <a:lnTo>
+                    <a:pt x="6875762" y="3207642"/>
+                  </a:lnTo>
+                  <a:lnTo>
+                    <a:pt x="6947385" y="3213653"/>
+                  </a:lnTo>
+                  <a:lnTo>
+                    <a:pt x="7019007" y="3219533"/>
+                  </a:lnTo>
+                  <a:lnTo>
+                    <a:pt x="7090630" y="3225285"/>
+                  </a:lnTo>
+                  <a:lnTo>
+                    <a:pt x="7090630" y="3483289"/>
+                  </a:lnTo>
+                  <a:lnTo>
+                    <a:pt x="7019007" y="3483219"/>
+                  </a:lnTo>
+                  <a:lnTo>
+                    <a:pt x="6947385" y="3483139"/>
+                  </a:lnTo>
+                  <a:lnTo>
+                    <a:pt x="6875762" y="3483046"/>
+                  </a:lnTo>
+                  <a:lnTo>
+                    <a:pt x="6804139" y="3482940"/>
+                  </a:lnTo>
+                  <a:lnTo>
+                    <a:pt x="6732517" y="3482817"/>
+                  </a:lnTo>
+                  <a:lnTo>
+                    <a:pt x="6660894" y="3482676"/>
+                  </a:lnTo>
+                  <a:lnTo>
+                    <a:pt x="6589272" y="3482513"/>
+                  </a:lnTo>
+                  <a:lnTo>
+                    <a:pt x="6517649" y="3482325"/>
+                  </a:lnTo>
+                  <a:lnTo>
+                    <a:pt x="6446027" y="3482109"/>
+                  </a:lnTo>
+                  <a:lnTo>
+                    <a:pt x="6374404" y="3481860"/>
+                  </a:lnTo>
+                  <a:lnTo>
+                    <a:pt x="6302782" y="3481573"/>
+                  </a:lnTo>
+                  <a:lnTo>
+                    <a:pt x="6231159" y="3481243"/>
+                  </a:lnTo>
+                  <a:lnTo>
+                    <a:pt x="6159537" y="3480862"/>
+                  </a:lnTo>
+                  <a:lnTo>
+                    <a:pt x="6087914" y="3480423"/>
+                  </a:lnTo>
+                  <a:lnTo>
+                    <a:pt x="6016292" y="3479917"/>
+                  </a:lnTo>
+                  <a:lnTo>
+                    <a:pt x="5944669" y="3479335"/>
+                  </a:lnTo>
+                  <a:lnTo>
+                    <a:pt x="5873047" y="3478664"/>
+                  </a:lnTo>
+                  <a:lnTo>
+                    <a:pt x="5801424" y="3477890"/>
+                  </a:lnTo>
+                  <a:lnTo>
+                    <a:pt x="5729802" y="3476999"/>
+                  </a:lnTo>
+                  <a:lnTo>
+                    <a:pt x="5658179" y="3475973"/>
+                  </a:lnTo>
+                  <a:lnTo>
+                    <a:pt x="5586557" y="3474790"/>
+                  </a:lnTo>
+                  <a:lnTo>
+                    <a:pt x="5514934" y="3473428"/>
+                  </a:lnTo>
+                  <a:lnTo>
+                    <a:pt x="5443311" y="3471858"/>
+                  </a:lnTo>
+                  <a:lnTo>
+                    <a:pt x="5371689" y="3470049"/>
+                  </a:lnTo>
+                  <a:lnTo>
+                    <a:pt x="5300066" y="3467965"/>
+                  </a:lnTo>
+                  <a:lnTo>
+                    <a:pt x="5228444" y="3465564"/>
+                  </a:lnTo>
+                  <a:lnTo>
+                    <a:pt x="5156821" y="3462798"/>
+                  </a:lnTo>
+                  <a:lnTo>
+                    <a:pt x="5085199" y="3459611"/>
+                  </a:lnTo>
+                  <a:lnTo>
+                    <a:pt x="5013576" y="3455939"/>
+                  </a:lnTo>
+                  <a:lnTo>
+                    <a:pt x="4941954" y="3451709"/>
+                  </a:lnTo>
+                  <a:lnTo>
+                    <a:pt x="4870331" y="3446835"/>
+                  </a:lnTo>
+                  <a:lnTo>
+                    <a:pt x="4798709" y="3441219"/>
+                  </a:lnTo>
+                  <a:lnTo>
+                    <a:pt x="4727086" y="3434749"/>
+                  </a:lnTo>
+                  <a:lnTo>
+                    <a:pt x="4655464" y="3427295"/>
+                  </a:lnTo>
+                  <a:lnTo>
+                    <a:pt x="4583841" y="3418706"/>
+                  </a:lnTo>
+                  <a:lnTo>
+                    <a:pt x="4512219" y="3408811"/>
+                  </a:lnTo>
+                  <a:lnTo>
+                    <a:pt x="4440596" y="3397411"/>
+                  </a:lnTo>
+                  <a:lnTo>
+                    <a:pt x="4368974" y="3384276"/>
+                  </a:lnTo>
+                  <a:lnTo>
+                    <a:pt x="4297351" y="3369143"/>
+                  </a:lnTo>
+                  <a:lnTo>
+                    <a:pt x="4225729" y="3351707"/>
+                  </a:lnTo>
+                  <a:lnTo>
+                    <a:pt x="4154106" y="3331619"/>
+                  </a:lnTo>
+                  <a:lnTo>
+                    <a:pt x="4082483" y="3308475"/>
+                  </a:lnTo>
+                  <a:lnTo>
+                    <a:pt x="4010861" y="3281810"/>
+                  </a:lnTo>
+                  <a:lnTo>
+                    <a:pt x="3939238" y="3251087"/>
+                  </a:lnTo>
+                  <a:lnTo>
+                    <a:pt x="3867616" y="3215691"/>
+                  </a:lnTo>
+                  <a:lnTo>
+                    <a:pt x="3795993" y="3174910"/>
+                  </a:lnTo>
+                  <a:lnTo>
+                    <a:pt x="3724371" y="3127925"/>
+                  </a:lnTo>
+                  <a:lnTo>
+                    <a:pt x="3652748" y="3073791"/>
+                  </a:lnTo>
+                  <a:lnTo>
+                    <a:pt x="3581126" y="3011421"/>
+                  </a:lnTo>
+                  <a:lnTo>
+                    <a:pt x="3509503" y="2939563"/>
+                  </a:lnTo>
+                  <a:lnTo>
+                    <a:pt x="3437881" y="2856772"/>
+                  </a:lnTo>
+                  <a:lnTo>
+                    <a:pt x="3366258" y="2761386"/>
+                  </a:lnTo>
+                  <a:lnTo>
+                    <a:pt x="3294636" y="2653849"/>
+                  </a:lnTo>
+                  <a:lnTo>
+                    <a:pt x="3223013" y="2635380"/>
+                  </a:lnTo>
+                  <a:lnTo>
+                    <a:pt x="3151391" y="2616500"/>
+                  </a:lnTo>
+                  <a:lnTo>
+                    <a:pt x="3079768" y="2597200"/>
+                  </a:lnTo>
+                  <a:lnTo>
+                    <a:pt x="3008146" y="2577471"/>
+                  </a:lnTo>
+                  <a:lnTo>
+                    <a:pt x="2936523" y="2557302"/>
+                  </a:lnTo>
+                  <a:lnTo>
+                    <a:pt x="2864901" y="2536684"/>
+                  </a:lnTo>
+                  <a:lnTo>
+                    <a:pt x="2793278" y="2515608"/>
+                  </a:lnTo>
+                  <a:lnTo>
+                    <a:pt x="2721655" y="2494063"/>
+                  </a:lnTo>
+                  <a:lnTo>
+                    <a:pt x="2650033" y="2472038"/>
+                  </a:lnTo>
+                  <a:lnTo>
+                    <a:pt x="2578410" y="2449523"/>
+                  </a:lnTo>
+                  <a:lnTo>
+                    <a:pt x="2506788" y="2426507"/>
+                  </a:lnTo>
+                  <a:lnTo>
+                    <a:pt x="2435165" y="2402978"/>
+                  </a:lnTo>
+                  <a:lnTo>
+                    <a:pt x="2363543" y="2378926"/>
+                  </a:lnTo>
+                  <a:lnTo>
+                    <a:pt x="2291920" y="2354339"/>
+                  </a:lnTo>
+                  <a:lnTo>
+                    <a:pt x="2220298" y="2329205"/>
+                  </a:lnTo>
+                  <a:lnTo>
+                    <a:pt x="2148675" y="2303511"/>
+                  </a:lnTo>
+                  <a:lnTo>
+                    <a:pt x="2077053" y="2277246"/>
+                  </a:lnTo>
+                  <a:lnTo>
+                    <a:pt x="2005430" y="2250396"/>
+                  </a:lnTo>
+                  <a:lnTo>
+                    <a:pt x="1933808" y="2222948"/>
+                  </a:lnTo>
+                  <a:lnTo>
+                    <a:pt x="1862185" y="2194890"/>
+                  </a:lnTo>
+                  <a:lnTo>
+                    <a:pt x="1790563" y="2166207"/>
+                  </a:lnTo>
+                  <a:lnTo>
+                    <a:pt x="1718940" y="2136886"/>
+                  </a:lnTo>
+                  <a:lnTo>
+                    <a:pt x="1647318" y="2106912"/>
+                  </a:lnTo>
+                  <a:lnTo>
+                    <a:pt x="1575695" y="2076271"/>
+                  </a:lnTo>
+                  <a:lnTo>
+                    <a:pt x="1504073" y="2044949"/>
+                  </a:lnTo>
+                  <a:lnTo>
+                    <a:pt x="1432450" y="2012929"/>
+                  </a:lnTo>
+                  <a:lnTo>
+                    <a:pt x="1360827" y="1980197"/>
+                  </a:lnTo>
+                  <a:lnTo>
+                    <a:pt x="1289205" y="1946736"/>
+                  </a:lnTo>
+                  <a:lnTo>
+                    <a:pt x="1217582" y="1912531"/>
+                  </a:lnTo>
+                  <a:lnTo>
+                    <a:pt x="1145960" y="1877564"/>
+                  </a:lnTo>
+                  <a:lnTo>
+                    <a:pt x="1074337" y="1841819"/>
+                  </a:lnTo>
+                  <a:lnTo>
+                    <a:pt x="1002715" y="1805279"/>
+                  </a:lnTo>
+                  <a:lnTo>
+                    <a:pt x="931092" y="1767926"/>
+                  </a:lnTo>
+                  <a:lnTo>
+                    <a:pt x="859470" y="1729741"/>
+                  </a:lnTo>
+                  <a:lnTo>
+                    <a:pt x="787847" y="1690707"/>
+                  </a:lnTo>
+                  <a:lnTo>
+                    <a:pt x="716225" y="1650804"/>
+                  </a:lnTo>
+                  <a:lnTo>
+                    <a:pt x="644602" y="1610012"/>
+                  </a:lnTo>
+                  <a:lnTo>
+                    <a:pt x="572980" y="1568313"/>
+                  </a:lnTo>
+                  <a:lnTo>
+                    <a:pt x="501357" y="1525686"/>
+                  </a:lnTo>
+                  <a:lnTo>
+                    <a:pt x="429735" y="1482111"/>
+                  </a:lnTo>
+                  <a:lnTo>
+                    <a:pt x="358112" y="1437566"/>
+                  </a:lnTo>
+                  <a:lnTo>
+                    <a:pt x="286490" y="1392029"/>
+                  </a:lnTo>
+                  <a:lnTo>
+                    <a:pt x="214867" y="1345479"/>
+                  </a:lnTo>
+                  <a:lnTo>
+                    <a:pt x="143245" y="1297893"/>
+                  </a:lnTo>
+                  <a:lnTo>
+                    <a:pt x="71622" y="1249248"/>
+                  </a:lnTo>
+                  <a:lnTo>
+                    <a:pt x="0" y="1199520"/>
+                  </a:lnTo>
+                  <a:lnTo>
                     <a:pt x="0" y="0"/>
-                  </a:lnTo>
-                  <a:lnTo>
-                    <a:pt x="0" y="0"/>
-                  </a:lnTo>
-                </a:path>
-              </a:pathLst>
-            </a:custGeom>
-            <a:ln w="13550" cap="flat">
-              <a:solidFill>
-                <a:srgbClr val="EBEBEB">
-                  <a:alpha val="100000"/>
-                </a:srgbClr>
-              </a:solidFill>
-              <a:prstDash val="solid"/>
-              <a:round/>
-            </a:ln>
-          </p:spPr>
-          <p:txBody>
-            <a:bodyPr/>
-            <a:lstStyle/>
-            <a:p/>
-          </p:txBody>
-        </p:sp>
-        <p:sp>
-          <p:nvSpPr>
-            <p:cNvPr id="21" name="pg21"/>
-            <p:cNvSpPr/>
-            <p:nvPr/>
-          </p:nvSpPr>
-          <p:spPr>
-            <a:xfrm>
-              <a:off x="817517" y="2073503"/>
-              <a:ext cx="7392041" cy="3483289"/>
-            </a:xfrm>
-            <a:custGeom>
-              <a:avLst/>
-              <a:pathLst>
-                <a:path w="7392041" h="3483289">
-                  <a:moveTo>
-                    <a:pt x="2517748" y="0"/>
-                  </a:moveTo>
-                  <a:lnTo>
-                    <a:pt x="2525696" y="53695"/>
-                  </a:lnTo>
-                  <a:lnTo>
-                    <a:pt x="2602939" y="506626"/>
-                  </a:lnTo>
-                  <a:lnTo>
-                    <a:pt x="2680183" y="899749"/>
-                  </a:lnTo>
-                  <a:lnTo>
-                    <a:pt x="2757426" y="1240960"/>
-                  </a:lnTo>
-                  <a:lnTo>
-                    <a:pt x="2834670" y="1537115"/>
-                  </a:lnTo>
-                  <a:lnTo>
-                    <a:pt x="2911914" y="1794164"/>
-                  </a:lnTo>
-                  <a:lnTo>
-                    <a:pt x="2989157" y="2017270"/>
-                  </a:lnTo>
-                  <a:lnTo>
-                    <a:pt x="3066401" y="2210915"/>
-                  </a:lnTo>
-                  <a:lnTo>
-                    <a:pt x="3143644" y="2378990"/>
-                  </a:lnTo>
-                  <a:lnTo>
-                    <a:pt x="3220888" y="2524870"/>
-                  </a:lnTo>
-                  <a:lnTo>
-                    <a:pt x="3298131" y="2651488"/>
-                  </a:lnTo>
-                  <a:lnTo>
-                    <a:pt x="3375375" y="2671916"/>
-                  </a:lnTo>
-                  <a:lnTo>
-                    <a:pt x="3452619" y="2689589"/>
-                  </a:lnTo>
-                  <a:lnTo>
-                    <a:pt x="3529862" y="2706878"/>
-                  </a:lnTo>
-                  <a:lnTo>
-                    <a:pt x="3607106" y="2723791"/>
-                  </a:lnTo>
-                  <a:lnTo>
-                    <a:pt x="3684349" y="2740335"/>
-                  </a:lnTo>
-                  <a:lnTo>
-                    <a:pt x="3761593" y="2756519"/>
-                  </a:lnTo>
-                  <a:lnTo>
-                    <a:pt x="3838836" y="2772351"/>
-                  </a:lnTo>
-                  <a:lnTo>
-                    <a:pt x="3916080" y="2787838"/>
-                  </a:lnTo>
-                  <a:lnTo>
-                    <a:pt x="3993324" y="2802988"/>
-                  </a:lnTo>
-                  <a:lnTo>
-                    <a:pt x="4070567" y="2817808"/>
-                  </a:lnTo>
-                  <a:lnTo>
-                    <a:pt x="4147811" y="2832305"/>
-                  </a:lnTo>
-                  <a:lnTo>
-                    <a:pt x="4225054" y="2846487"/>
-                  </a:lnTo>
-                  <a:lnTo>
-                    <a:pt x="4302298" y="2860360"/>
-                  </a:lnTo>
-                  <a:lnTo>
-                    <a:pt x="4379541" y="2873931"/>
-                  </a:lnTo>
-                  <a:lnTo>
-                    <a:pt x="4456785" y="2887207"/>
-                  </a:lnTo>
-                  <a:lnTo>
-                    <a:pt x="4534029" y="2900194"/>
-                  </a:lnTo>
-                  <a:lnTo>
-                    <a:pt x="4611272" y="2912898"/>
-                  </a:lnTo>
-                  <a:lnTo>
-                    <a:pt x="4688516" y="2925325"/>
-                  </a:lnTo>
-                  <a:lnTo>
-                    <a:pt x="4765759" y="2937482"/>
-                  </a:lnTo>
-                  <a:lnTo>
-                    <a:pt x="4843003" y="2949374"/>
-                  </a:lnTo>
-                  <a:lnTo>
-                    <a:pt x="4920246" y="2961007"/>
-                  </a:lnTo>
-                  <a:lnTo>
-                    <a:pt x="4997490" y="2972387"/>
-                  </a:lnTo>
-                  <a:lnTo>
-                    <a:pt x="5074734" y="2983520"/>
-                  </a:lnTo>
-                  <a:lnTo>
-                    <a:pt x="5151977" y="2994410"/>
-                  </a:lnTo>
-                  <a:lnTo>
-                    <a:pt x="5229221" y="3005062"/>
-                  </a:lnTo>
-                  <a:lnTo>
-                    <a:pt x="5306464" y="3015483"/>
-                  </a:lnTo>
-                  <a:lnTo>
-                    <a:pt x="5383708" y="3025677"/>
-                  </a:lnTo>
-                  <a:lnTo>
-                    <a:pt x="5460951" y="3035650"/>
-                  </a:lnTo>
-                  <a:lnTo>
-                    <a:pt x="5538195" y="3045405"/>
-                  </a:lnTo>
-                  <a:lnTo>
-                    <a:pt x="5615439" y="3054947"/>
-                  </a:lnTo>
-                  <a:lnTo>
-                    <a:pt x="5692682" y="3064282"/>
-                  </a:lnTo>
-                  <a:lnTo>
-                    <a:pt x="5769926" y="3073414"/>
-                  </a:lnTo>
-                  <a:lnTo>
-                    <a:pt x="5847169" y="3082347"/>
-                  </a:lnTo>
-                  <a:lnTo>
-                    <a:pt x="5924413" y="3091085"/>
-                  </a:lnTo>
-                  <a:lnTo>
-                    <a:pt x="6001656" y="3099634"/>
-                  </a:lnTo>
-                  <a:lnTo>
-                    <a:pt x="6078900" y="3107996"/>
-                  </a:lnTo>
-                  <a:lnTo>
-                    <a:pt x="6156144" y="3116176"/>
-                  </a:lnTo>
-                  <a:lnTo>
-                    <a:pt x="6233387" y="3124178"/>
-                  </a:lnTo>
-                  <a:lnTo>
-                    <a:pt x="6310631" y="3132006"/>
-                  </a:lnTo>
-                  <a:lnTo>
-                    <a:pt x="6387874" y="3139663"/>
-                  </a:lnTo>
-                  <a:lnTo>
-                    <a:pt x="6465118" y="3147154"/>
-                  </a:lnTo>
-                  <a:lnTo>
-                    <a:pt x="6542361" y="3154481"/>
-                  </a:lnTo>
-                  <a:lnTo>
-                    <a:pt x="6619605" y="3161649"/>
-                  </a:lnTo>
-                  <a:lnTo>
-                    <a:pt x="6696849" y="3168661"/>
-                  </a:lnTo>
-                  <a:lnTo>
-                    <a:pt x="6774092" y="3175521"/>
-                  </a:lnTo>
-                  <a:lnTo>
-                    <a:pt x="6851336" y="3182231"/>
-                  </a:lnTo>
-                  <a:lnTo>
-                    <a:pt x="6928579" y="3188795"/>
-                  </a:lnTo>
-                  <a:lnTo>
-                    <a:pt x="7005823" y="3195216"/>
-                  </a:lnTo>
-                  <a:lnTo>
-                    <a:pt x="7083066" y="3201497"/>
-                  </a:lnTo>
-                  <a:lnTo>
-                    <a:pt x="7160310" y="3207642"/>
-                  </a:lnTo>
-                  <a:lnTo>
-                    <a:pt x="7237554" y="3213653"/>
-                  </a:lnTo>
-                  <a:lnTo>
-                    <a:pt x="7314797" y="3219533"/>
-                  </a:lnTo>
-                  <a:lnTo>
-                    <a:pt x="7392041" y="3225285"/>
-                  </a:lnTo>
-                  <a:lnTo>
-                    <a:pt x="7392041" y="3483289"/>
-                  </a:lnTo>
-                  <a:lnTo>
-                    <a:pt x="7314797" y="3483219"/>
-                  </a:lnTo>
-                  <a:lnTo>
-                    <a:pt x="7237554" y="3483139"/>
-                  </a:lnTo>
-                  <a:lnTo>
-                    <a:pt x="7160310" y="3483046"/>
-                  </a:lnTo>
-                  <a:lnTo>
-                    <a:pt x="7083066" y="3482940"/>
-                  </a:lnTo>
-                  <a:lnTo>
-                    <a:pt x="7005823" y="3482817"/>
-                  </a:lnTo>
-                  <a:lnTo>
-                    <a:pt x="6928579" y="3482676"/>
-                  </a:lnTo>
-                  <a:lnTo>
-                    <a:pt x="6851336" y="3482513"/>
-                  </a:lnTo>
-                  <a:lnTo>
-                    <a:pt x="6774092" y="3482325"/>
-                  </a:lnTo>
-                  <a:lnTo>
-                    <a:pt x="6696849" y="3482109"/>
-                  </a:lnTo>
-                  <a:lnTo>
-                    <a:pt x="6619605" y="3481860"/>
-                  </a:lnTo>
-                  <a:lnTo>
-                    <a:pt x="6542361" y="3481573"/>
-                  </a:lnTo>
-                  <a:lnTo>
-                    <a:pt x="6465118" y="3481243"/>
-                  </a:lnTo>
-                  <a:lnTo>
-                    <a:pt x="6387874" y="3480862"/>
-                  </a:lnTo>
-                  <a:lnTo>
-                    <a:pt x="6310631" y="3480423"/>
-                  </a:lnTo>
-                  <a:lnTo>
-                    <a:pt x="6233387" y="3479917"/>
-                  </a:lnTo>
-                  <a:lnTo>
-                    <a:pt x="6156144" y="3479335"/>
-                  </a:lnTo>
-                  <a:lnTo>
-                    <a:pt x="6078900" y="3478664"/>
-                  </a:lnTo>
-                  <a:lnTo>
-                    <a:pt x="6001656" y="3477890"/>
-                  </a:lnTo>
-                  <a:lnTo>
-                    <a:pt x="5924413" y="3476999"/>
-                  </a:lnTo>
-                  <a:lnTo>
-                    <a:pt x="5847169" y="3475973"/>
-                  </a:lnTo>
-                  <a:lnTo>
-                    <a:pt x="5769926" y="3474790"/>
-                  </a:lnTo>
-                  <a:lnTo>
-                    <a:pt x="5692682" y="3473428"/>
-                  </a:lnTo>
-                  <a:lnTo>
-                    <a:pt x="5615439" y="3471858"/>
-                  </a:lnTo>
-                  <a:lnTo>
-                    <a:pt x="5538195" y="3470049"/>
-                  </a:lnTo>
-                  <a:lnTo>
-                    <a:pt x="5460951" y="3467965"/>
-                  </a:lnTo>
-                  <a:lnTo>
-                    <a:pt x="5383708" y="3465564"/>
-                  </a:lnTo>
-                  <a:lnTo>
-                    <a:pt x="5306464" y="3462798"/>
-                  </a:lnTo>
-                  <a:lnTo>
-                    <a:pt x="5229221" y="3459611"/>
-                  </a:lnTo>
-                  <a:lnTo>
-                    <a:pt x="5151977" y="3455939"/>
-                  </a:lnTo>
-                  <a:lnTo>
-                    <a:pt x="5074734" y="3451709"/>
-                  </a:lnTo>
-                  <a:lnTo>
-                    <a:pt x="4997490" y="3446835"/>
-                  </a:lnTo>
-                  <a:lnTo>
-                    <a:pt x="4920246" y="3441219"/>
-                  </a:lnTo>
-                  <a:lnTo>
-                    <a:pt x="4843003" y="3434749"/>
-                  </a:lnTo>
-                  <a:lnTo>
-                    <a:pt x="4765759" y="3427295"/>
-                  </a:lnTo>
-                  <a:lnTo>
-                    <a:pt x="4688516" y="3418706"/>
-                  </a:lnTo>
-                  <a:lnTo>
-                    <a:pt x="4611272" y="3408811"/>
-                  </a:lnTo>
-                  <a:lnTo>
-                    <a:pt x="4534029" y="3397411"/>
-                  </a:lnTo>
-                  <a:lnTo>
-                    <a:pt x="4456785" y="3384276"/>
-                  </a:lnTo>
-                  <a:lnTo>
-                    <a:pt x="4379541" y="3369143"/>
-                  </a:lnTo>
-                  <a:lnTo>
-                    <a:pt x="4302298" y="3351707"/>
-                  </a:lnTo>
-                  <a:lnTo>
-                    <a:pt x="4225054" y="3331619"/>
-                  </a:lnTo>
-                  <a:lnTo>
-                    <a:pt x="4147811" y="3308475"/>
-                  </a:lnTo>
-                  <a:lnTo>
-                    <a:pt x="4070567" y="3281810"/>
-                  </a:lnTo>
-                  <a:lnTo>
-                    <a:pt x="3993324" y="3251087"/>
-                  </a:lnTo>
-                  <a:lnTo>
-                    <a:pt x="3916080" y="3215691"/>
-                  </a:lnTo>
-                  <a:lnTo>
-                    <a:pt x="3838836" y="3174910"/>
-                  </a:lnTo>
-                  <a:lnTo>
-                    <a:pt x="3761593" y="3127925"/>
-                  </a:lnTo>
-                  <a:lnTo>
-                    <a:pt x="3684349" y="3073791"/>
-                  </a:lnTo>
-                  <a:lnTo>
-                    <a:pt x="3607106" y="3011421"/>
-                  </a:lnTo>
-                  <a:lnTo>
-                    <a:pt x="3529862" y="2939563"/>
-                  </a:lnTo>
-                  <a:lnTo>
-                    <a:pt x="3452619" y="2856772"/>
-                  </a:lnTo>
-                  <a:lnTo>
-                    <a:pt x="3375375" y="2761386"/>
-                  </a:lnTo>
-                  <a:lnTo>
-                    <a:pt x="3298131" y="2653849"/>
-                  </a:lnTo>
-                  <a:lnTo>
-                    <a:pt x="3220888" y="2635380"/>
-                  </a:lnTo>
-                  <a:lnTo>
-                    <a:pt x="3143644" y="2616500"/>
-                  </a:lnTo>
-                  <a:lnTo>
-                    <a:pt x="3066401" y="2597200"/>
-                  </a:lnTo>
-                  <a:lnTo>
-                    <a:pt x="2989157" y="2577471"/>
-                  </a:lnTo>
-                  <a:lnTo>
-                    <a:pt x="2911914" y="2557302"/>
-                  </a:lnTo>
-                  <a:lnTo>
-                    <a:pt x="2834670" y="2536684"/>
-                  </a:lnTo>
-                  <a:lnTo>
-                    <a:pt x="2757426" y="2515608"/>
-                  </a:lnTo>
-                  <a:lnTo>
-                    <a:pt x="2680183" y="2494063"/>
-                  </a:lnTo>
-                  <a:lnTo>
-                    <a:pt x="2602939" y="2472038"/>
-                  </a:lnTo>
-                  <a:lnTo>
-                    <a:pt x="2525696" y="2449523"/>
-                  </a:lnTo>
-                  <a:lnTo>
-                    <a:pt x="2448452" y="2426507"/>
-                  </a:lnTo>
-                  <a:lnTo>
-                    <a:pt x="2371209" y="2402978"/>
-                  </a:lnTo>
-                  <a:lnTo>
-                    <a:pt x="2293965" y="2378926"/>
-                  </a:lnTo>
-                  <a:lnTo>
-                    <a:pt x="2216721" y="2354339"/>
-                  </a:lnTo>
-                  <a:lnTo>
-                    <a:pt x="2139478" y="2329205"/>
-                  </a:lnTo>
-                  <a:lnTo>
-                    <a:pt x="2062234" y="2303511"/>
-                  </a:lnTo>
-                  <a:lnTo>
-                    <a:pt x="1984991" y="2277246"/>
-                  </a:lnTo>
-                  <a:lnTo>
-                    <a:pt x="1907747" y="2250396"/>
-                  </a:lnTo>
-                  <a:lnTo>
-                    <a:pt x="1830504" y="2222948"/>
-                  </a:lnTo>
-                  <a:lnTo>
-                    <a:pt x="1753260" y="2194890"/>
-                  </a:lnTo>
-                  <a:lnTo>
-                    <a:pt x="1676016" y="2166207"/>
-                  </a:lnTo>
-                  <a:lnTo>
-                    <a:pt x="1598773" y="2136886"/>
-                  </a:lnTo>
-                  <a:lnTo>
-                    <a:pt x="1521529" y="2106912"/>
-                  </a:lnTo>
-                  <a:lnTo>
-                    <a:pt x="1444286" y="2076271"/>
-                  </a:lnTo>
-                  <a:lnTo>
-                    <a:pt x="1367042" y="2044949"/>
-                  </a:lnTo>
-                  <a:lnTo>
-                    <a:pt x="1289799" y="2012929"/>
-                  </a:lnTo>
-                  <a:lnTo>
-                    <a:pt x="1212555" y="1980197"/>
-                  </a:lnTo>
-                  <a:lnTo>
-                    <a:pt x="1135311" y="1946736"/>
-                  </a:lnTo>
-                  <a:lnTo>
-                    <a:pt x="1058068" y="1912531"/>
-                  </a:lnTo>
-                  <a:lnTo>
-                    <a:pt x="980824" y="1877564"/>
-                  </a:lnTo>
-                  <a:lnTo>
-                    <a:pt x="903581" y="1841819"/>
-                  </a:lnTo>
-                  <a:lnTo>
-                    <a:pt x="826337" y="1805279"/>
-                  </a:lnTo>
-                  <a:lnTo>
-                    <a:pt x="749094" y="1767926"/>
-                  </a:lnTo>
-                  <a:lnTo>
-                    <a:pt x="671850" y="1729741"/>
-                  </a:lnTo>
-                  <a:lnTo>
-                    <a:pt x="594606" y="1690707"/>
-                  </a:lnTo>
-                  <a:lnTo>
-                    <a:pt x="517363" y="1650804"/>
-                  </a:lnTo>
-                  <a:lnTo>
-                    <a:pt x="440119" y="1610012"/>
-                  </a:lnTo>
-                  <a:lnTo>
-                    <a:pt x="362876" y="1568313"/>
-                  </a:lnTo>
-                  <a:lnTo>
-                    <a:pt x="285632" y="1525686"/>
-                  </a:lnTo>
-                  <a:lnTo>
-                    <a:pt x="208389" y="1482111"/>
-                  </a:lnTo>
-                  <a:lnTo>
-                    <a:pt x="131145" y="1437566"/>
-                  </a:lnTo>
-                  <a:lnTo>
-                    <a:pt x="53901" y="1392029"/>
-                  </a:lnTo>
-                  <a:lnTo>
-                    <a:pt x="0" y="1359545"/>
                   </a:lnTo>
                   <a:close/>
                 </a:path>
@@ -3513,213 +3482,538 @@
         </p:sp>
         <p:sp>
           <p:nvSpPr>
+            <p:cNvPr id="21" name="pl21"/>
+            <p:cNvSpPr/>
+            <p:nvPr/>
+          </p:nvSpPr>
+          <p:spPr>
+            <a:xfrm>
+              <a:off x="3743090" y="2073503"/>
+              <a:ext cx="4519588" cy="3225285"/>
+            </a:xfrm>
+            <a:custGeom>
+              <a:avLst/>
+              <a:pathLst>
+                <a:path w="4519588" h="3225285">
+                  <a:moveTo>
+                    <a:pt x="0" y="0"/>
+                  </a:moveTo>
+                  <a:lnTo>
+                    <a:pt x="7369" y="53695"/>
+                  </a:lnTo>
+                  <a:lnTo>
+                    <a:pt x="78992" y="506626"/>
+                  </a:lnTo>
+                  <a:lnTo>
+                    <a:pt x="150614" y="899749"/>
+                  </a:lnTo>
+                  <a:lnTo>
+                    <a:pt x="222237" y="1240960"/>
+                  </a:lnTo>
+                  <a:lnTo>
+                    <a:pt x="293859" y="1537115"/>
+                  </a:lnTo>
+                  <a:lnTo>
+                    <a:pt x="365482" y="1794164"/>
+                  </a:lnTo>
+                  <a:lnTo>
+                    <a:pt x="437104" y="2017270"/>
+                  </a:lnTo>
+                  <a:lnTo>
+                    <a:pt x="508727" y="2210915"/>
+                  </a:lnTo>
+                  <a:lnTo>
+                    <a:pt x="580349" y="2378990"/>
+                  </a:lnTo>
+                  <a:lnTo>
+                    <a:pt x="651972" y="2524870"/>
+                  </a:lnTo>
+                  <a:lnTo>
+                    <a:pt x="723594" y="2651488"/>
+                  </a:lnTo>
+                  <a:lnTo>
+                    <a:pt x="795217" y="2671916"/>
+                  </a:lnTo>
+                  <a:lnTo>
+                    <a:pt x="866840" y="2689589"/>
+                  </a:lnTo>
+                  <a:lnTo>
+                    <a:pt x="938462" y="2706878"/>
+                  </a:lnTo>
+                  <a:lnTo>
+                    <a:pt x="1010085" y="2723791"/>
+                  </a:lnTo>
+                  <a:lnTo>
+                    <a:pt x="1081707" y="2740335"/>
+                  </a:lnTo>
+                  <a:lnTo>
+                    <a:pt x="1153330" y="2756519"/>
+                  </a:lnTo>
+                  <a:lnTo>
+                    <a:pt x="1224952" y="2772351"/>
+                  </a:lnTo>
+                  <a:lnTo>
+                    <a:pt x="1296575" y="2787838"/>
+                  </a:lnTo>
+                  <a:lnTo>
+                    <a:pt x="1368197" y="2802988"/>
+                  </a:lnTo>
+                  <a:lnTo>
+                    <a:pt x="1439820" y="2817808"/>
+                  </a:lnTo>
+                  <a:lnTo>
+                    <a:pt x="1511442" y="2832305"/>
+                  </a:lnTo>
+                  <a:lnTo>
+                    <a:pt x="1583065" y="2846487"/>
+                  </a:lnTo>
+                  <a:lnTo>
+                    <a:pt x="1654687" y="2860360"/>
+                  </a:lnTo>
+                  <a:lnTo>
+                    <a:pt x="1726310" y="2873931"/>
+                  </a:lnTo>
+                  <a:lnTo>
+                    <a:pt x="1797932" y="2887207"/>
+                  </a:lnTo>
+                  <a:lnTo>
+                    <a:pt x="1869555" y="2900194"/>
+                  </a:lnTo>
+                  <a:lnTo>
+                    <a:pt x="1941177" y="2912898"/>
+                  </a:lnTo>
+                  <a:lnTo>
+                    <a:pt x="2012800" y="2925325"/>
+                  </a:lnTo>
+                  <a:lnTo>
+                    <a:pt x="2084422" y="2937482"/>
+                  </a:lnTo>
+                  <a:lnTo>
+                    <a:pt x="2156045" y="2949374"/>
+                  </a:lnTo>
+                  <a:lnTo>
+                    <a:pt x="2227668" y="2961007"/>
+                  </a:lnTo>
+                  <a:lnTo>
+                    <a:pt x="2299290" y="2972387"/>
+                  </a:lnTo>
+                  <a:lnTo>
+                    <a:pt x="2370913" y="2983520"/>
+                  </a:lnTo>
+                  <a:lnTo>
+                    <a:pt x="2442535" y="2994410"/>
+                  </a:lnTo>
+                  <a:lnTo>
+                    <a:pt x="2514158" y="3005062"/>
+                  </a:lnTo>
+                  <a:lnTo>
+                    <a:pt x="2585780" y="3015483"/>
+                  </a:lnTo>
+                  <a:lnTo>
+                    <a:pt x="2657403" y="3025677"/>
+                  </a:lnTo>
+                  <a:lnTo>
+                    <a:pt x="2729025" y="3035650"/>
+                  </a:lnTo>
+                  <a:lnTo>
+                    <a:pt x="2800648" y="3045405"/>
+                  </a:lnTo>
+                  <a:lnTo>
+                    <a:pt x="2872270" y="3054947"/>
+                  </a:lnTo>
+                  <a:lnTo>
+                    <a:pt x="2943893" y="3064282"/>
+                  </a:lnTo>
+                  <a:lnTo>
+                    <a:pt x="3015515" y="3073414"/>
+                  </a:lnTo>
+                  <a:lnTo>
+                    <a:pt x="3087138" y="3082347"/>
+                  </a:lnTo>
+                  <a:lnTo>
+                    <a:pt x="3158760" y="3091085"/>
+                  </a:lnTo>
+                  <a:lnTo>
+                    <a:pt x="3230383" y="3099634"/>
+                  </a:lnTo>
+                  <a:lnTo>
+                    <a:pt x="3302005" y="3107996"/>
+                  </a:lnTo>
+                  <a:lnTo>
+                    <a:pt x="3373628" y="3116176"/>
+                  </a:lnTo>
+                  <a:lnTo>
+                    <a:pt x="3445250" y="3124178"/>
+                  </a:lnTo>
+                  <a:lnTo>
+                    <a:pt x="3516873" y="3132006"/>
+                  </a:lnTo>
+                  <a:lnTo>
+                    <a:pt x="3588496" y="3139663"/>
+                  </a:lnTo>
+                  <a:lnTo>
+                    <a:pt x="3660118" y="3147154"/>
+                  </a:lnTo>
+                  <a:lnTo>
+                    <a:pt x="3731741" y="3154481"/>
+                  </a:lnTo>
+                  <a:lnTo>
+                    <a:pt x="3803363" y="3161649"/>
+                  </a:lnTo>
+                  <a:lnTo>
+                    <a:pt x="3874986" y="3168661"/>
+                  </a:lnTo>
+                  <a:lnTo>
+                    <a:pt x="3946608" y="3175521"/>
+                  </a:lnTo>
+                  <a:lnTo>
+                    <a:pt x="4018231" y="3182231"/>
+                  </a:lnTo>
+                  <a:lnTo>
+                    <a:pt x="4089853" y="3188795"/>
+                  </a:lnTo>
+                  <a:lnTo>
+                    <a:pt x="4161476" y="3195216"/>
+                  </a:lnTo>
+                  <a:lnTo>
+                    <a:pt x="4233098" y="3201497"/>
+                  </a:lnTo>
+                  <a:lnTo>
+                    <a:pt x="4304721" y="3207642"/>
+                  </a:lnTo>
+                  <a:lnTo>
+                    <a:pt x="4376343" y="3213653"/>
+                  </a:lnTo>
+                  <a:lnTo>
+                    <a:pt x="4447966" y="3219533"/>
+                  </a:lnTo>
+                  <a:lnTo>
+                    <a:pt x="4519588" y="3225285"/>
+                  </a:lnTo>
+                </a:path>
+              </a:pathLst>
+            </a:custGeom>
+          </p:spPr>
+          <p:txBody>
+            <a:bodyPr/>
+            <a:lstStyle/>
+            <a:p/>
+          </p:txBody>
+        </p:sp>
+        <p:sp>
+          <p:nvSpPr>
             <p:cNvPr id="22" name="pl22"/>
             <p:cNvSpPr/>
             <p:nvPr/>
           </p:nvSpPr>
           <p:spPr>
             <a:xfrm>
-              <a:off x="3335266" y="2073503"/>
-              <a:ext cx="4874293" cy="3225285"/>
+              <a:off x="1172049" y="3273023"/>
+              <a:ext cx="7090630" cy="2283768"/>
             </a:xfrm>
             <a:custGeom>
               <a:avLst/>
               <a:pathLst>
-                <a:path w="4874293" h="3225285">
+                <a:path w="7090630" h="2283768">
                   <a:moveTo>
+                    <a:pt x="7090630" y="2283768"/>
+                  </a:moveTo>
+                  <a:lnTo>
+                    <a:pt x="7019007" y="2283698"/>
+                  </a:lnTo>
+                  <a:lnTo>
+                    <a:pt x="6947385" y="2283618"/>
+                  </a:lnTo>
+                  <a:lnTo>
+                    <a:pt x="6875762" y="2283526"/>
+                  </a:lnTo>
+                  <a:lnTo>
+                    <a:pt x="6804139" y="2283419"/>
+                  </a:lnTo>
+                  <a:lnTo>
+                    <a:pt x="6732517" y="2283297"/>
+                  </a:lnTo>
+                  <a:lnTo>
+                    <a:pt x="6660894" y="2283155"/>
+                  </a:lnTo>
+                  <a:lnTo>
+                    <a:pt x="6589272" y="2282992"/>
+                  </a:lnTo>
+                  <a:lnTo>
+                    <a:pt x="6517649" y="2282805"/>
+                  </a:lnTo>
+                  <a:lnTo>
+                    <a:pt x="6446027" y="2282589"/>
+                  </a:lnTo>
+                  <a:lnTo>
+                    <a:pt x="6374404" y="2282339"/>
+                  </a:lnTo>
+                  <a:lnTo>
+                    <a:pt x="6302782" y="2282053"/>
+                  </a:lnTo>
+                  <a:lnTo>
+                    <a:pt x="6231159" y="2281722"/>
+                  </a:lnTo>
+                  <a:lnTo>
+                    <a:pt x="6159537" y="2281341"/>
+                  </a:lnTo>
+                  <a:lnTo>
+                    <a:pt x="6087914" y="2280902"/>
+                  </a:lnTo>
+                  <a:lnTo>
+                    <a:pt x="6016292" y="2280397"/>
+                  </a:lnTo>
+                  <a:lnTo>
+                    <a:pt x="5944669" y="2279814"/>
+                  </a:lnTo>
+                  <a:lnTo>
+                    <a:pt x="5873047" y="2279143"/>
+                  </a:lnTo>
+                  <a:lnTo>
+                    <a:pt x="5801424" y="2278369"/>
+                  </a:lnTo>
+                  <a:lnTo>
+                    <a:pt x="5729802" y="2277479"/>
+                  </a:lnTo>
+                  <a:lnTo>
+                    <a:pt x="5658179" y="2276452"/>
+                  </a:lnTo>
+                  <a:lnTo>
+                    <a:pt x="5586557" y="2275269"/>
+                  </a:lnTo>
+                  <a:lnTo>
+                    <a:pt x="5514934" y="2273907"/>
+                  </a:lnTo>
+                  <a:lnTo>
+                    <a:pt x="5443311" y="2272337"/>
+                  </a:lnTo>
+                  <a:lnTo>
+                    <a:pt x="5371689" y="2270528"/>
+                  </a:lnTo>
+                  <a:lnTo>
+                    <a:pt x="5300066" y="2268444"/>
+                  </a:lnTo>
+                  <a:lnTo>
+                    <a:pt x="5228444" y="2266044"/>
+                  </a:lnTo>
+                  <a:lnTo>
+                    <a:pt x="5156821" y="2263277"/>
+                  </a:lnTo>
+                  <a:lnTo>
+                    <a:pt x="5085199" y="2260090"/>
+                  </a:lnTo>
+                  <a:lnTo>
+                    <a:pt x="5013576" y="2256418"/>
+                  </a:lnTo>
+                  <a:lnTo>
+                    <a:pt x="4941954" y="2252188"/>
+                  </a:lnTo>
+                  <a:lnTo>
+                    <a:pt x="4870331" y="2247314"/>
+                  </a:lnTo>
+                  <a:lnTo>
+                    <a:pt x="4798709" y="2241698"/>
+                  </a:lnTo>
+                  <a:lnTo>
+                    <a:pt x="4727086" y="2235228"/>
+                  </a:lnTo>
+                  <a:lnTo>
+                    <a:pt x="4655464" y="2227774"/>
+                  </a:lnTo>
+                  <a:lnTo>
+                    <a:pt x="4583841" y="2219185"/>
+                  </a:lnTo>
+                  <a:lnTo>
+                    <a:pt x="4512219" y="2209290"/>
+                  </a:lnTo>
+                  <a:lnTo>
+                    <a:pt x="4440596" y="2197890"/>
+                  </a:lnTo>
+                  <a:lnTo>
+                    <a:pt x="4368974" y="2184755"/>
+                  </a:lnTo>
+                  <a:lnTo>
+                    <a:pt x="4297351" y="2169622"/>
+                  </a:lnTo>
+                  <a:lnTo>
+                    <a:pt x="4225729" y="2152186"/>
+                  </a:lnTo>
+                  <a:lnTo>
+                    <a:pt x="4154106" y="2132098"/>
+                  </a:lnTo>
+                  <a:lnTo>
+                    <a:pt x="4082483" y="2108954"/>
+                  </a:lnTo>
+                  <a:lnTo>
+                    <a:pt x="4010861" y="2082289"/>
+                  </a:lnTo>
+                  <a:lnTo>
+                    <a:pt x="3939238" y="2051567"/>
+                  </a:lnTo>
+                  <a:lnTo>
+                    <a:pt x="3867616" y="2016170"/>
+                  </a:lnTo>
+                  <a:lnTo>
+                    <a:pt x="3795993" y="1975389"/>
+                  </a:lnTo>
+                  <a:lnTo>
+                    <a:pt x="3724371" y="1928404"/>
+                  </a:lnTo>
+                  <a:lnTo>
+                    <a:pt x="3652748" y="1874270"/>
+                  </a:lnTo>
+                  <a:lnTo>
+                    <a:pt x="3581126" y="1811900"/>
+                  </a:lnTo>
+                  <a:lnTo>
+                    <a:pt x="3509503" y="1740042"/>
+                  </a:lnTo>
+                  <a:lnTo>
+                    <a:pt x="3437881" y="1657251"/>
+                  </a:lnTo>
+                  <a:lnTo>
+                    <a:pt x="3366258" y="1561865"/>
+                  </a:lnTo>
+                  <a:lnTo>
+                    <a:pt x="3294636" y="1454328"/>
+                  </a:lnTo>
+                  <a:lnTo>
+                    <a:pt x="3223013" y="1435859"/>
+                  </a:lnTo>
+                  <a:lnTo>
+                    <a:pt x="3151391" y="1416979"/>
+                  </a:lnTo>
+                  <a:lnTo>
+                    <a:pt x="3079768" y="1397679"/>
+                  </a:lnTo>
+                  <a:lnTo>
+                    <a:pt x="3008146" y="1377950"/>
+                  </a:lnTo>
+                  <a:lnTo>
+                    <a:pt x="2936523" y="1357781"/>
+                  </a:lnTo>
+                  <a:lnTo>
+                    <a:pt x="2864901" y="1337164"/>
+                  </a:lnTo>
+                  <a:lnTo>
+                    <a:pt x="2793278" y="1316087"/>
+                  </a:lnTo>
+                  <a:lnTo>
+                    <a:pt x="2721655" y="1294542"/>
+                  </a:lnTo>
+                  <a:lnTo>
+                    <a:pt x="2650033" y="1272517"/>
+                  </a:lnTo>
+                  <a:lnTo>
+                    <a:pt x="2578410" y="1250002"/>
+                  </a:lnTo>
+                  <a:lnTo>
+                    <a:pt x="2506788" y="1226986"/>
+                  </a:lnTo>
+                  <a:lnTo>
+                    <a:pt x="2435165" y="1203457"/>
+                  </a:lnTo>
+                  <a:lnTo>
+                    <a:pt x="2363543" y="1179406"/>
+                  </a:lnTo>
+                  <a:lnTo>
+                    <a:pt x="2291920" y="1154818"/>
+                  </a:lnTo>
+                  <a:lnTo>
+                    <a:pt x="2220298" y="1129684"/>
+                  </a:lnTo>
+                  <a:lnTo>
+                    <a:pt x="2148675" y="1103990"/>
+                  </a:lnTo>
+                  <a:lnTo>
+                    <a:pt x="2077053" y="1077725"/>
+                  </a:lnTo>
+                  <a:lnTo>
+                    <a:pt x="2005430" y="1050875"/>
+                  </a:lnTo>
+                  <a:lnTo>
+                    <a:pt x="1933808" y="1023427"/>
+                  </a:lnTo>
+                  <a:lnTo>
+                    <a:pt x="1862185" y="995369"/>
+                  </a:lnTo>
+                  <a:lnTo>
+                    <a:pt x="1790563" y="966686"/>
+                  </a:lnTo>
+                  <a:lnTo>
+                    <a:pt x="1718940" y="937365"/>
+                  </a:lnTo>
+                  <a:lnTo>
+                    <a:pt x="1647318" y="907391"/>
+                  </a:lnTo>
+                  <a:lnTo>
+                    <a:pt x="1575695" y="876750"/>
+                  </a:lnTo>
+                  <a:lnTo>
+                    <a:pt x="1504073" y="845428"/>
+                  </a:lnTo>
+                  <a:lnTo>
+                    <a:pt x="1432450" y="813408"/>
+                  </a:lnTo>
+                  <a:lnTo>
+                    <a:pt x="1360827" y="780676"/>
+                  </a:lnTo>
+                  <a:lnTo>
+                    <a:pt x="1289205" y="747215"/>
+                  </a:lnTo>
+                  <a:lnTo>
+                    <a:pt x="1217582" y="713010"/>
+                  </a:lnTo>
+                  <a:lnTo>
+                    <a:pt x="1145960" y="678043"/>
+                  </a:lnTo>
+                  <a:lnTo>
+                    <a:pt x="1074337" y="642299"/>
+                  </a:lnTo>
+                  <a:lnTo>
+                    <a:pt x="1002715" y="605758"/>
+                  </a:lnTo>
+                  <a:lnTo>
+                    <a:pt x="931092" y="568405"/>
+                  </a:lnTo>
+                  <a:lnTo>
+                    <a:pt x="859470" y="530220"/>
+                  </a:lnTo>
+                  <a:lnTo>
+                    <a:pt x="787847" y="491186"/>
+                  </a:lnTo>
+                  <a:lnTo>
+                    <a:pt x="716225" y="451283"/>
+                  </a:lnTo>
+                  <a:lnTo>
+                    <a:pt x="644602" y="410492"/>
+                  </a:lnTo>
+                  <a:lnTo>
+                    <a:pt x="572980" y="368793"/>
+                  </a:lnTo>
+                  <a:lnTo>
+                    <a:pt x="501357" y="326166"/>
+                  </a:lnTo>
+                  <a:lnTo>
+                    <a:pt x="429735" y="282590"/>
+                  </a:lnTo>
+                  <a:lnTo>
+                    <a:pt x="358112" y="238045"/>
+                  </a:lnTo>
+                  <a:lnTo>
+                    <a:pt x="286490" y="192508"/>
+                  </a:lnTo>
+                  <a:lnTo>
+                    <a:pt x="214867" y="145958"/>
+                  </a:lnTo>
+                  <a:lnTo>
+                    <a:pt x="143245" y="98372"/>
+                  </a:lnTo>
+                  <a:lnTo>
+                    <a:pt x="71622" y="49727"/>
+                  </a:lnTo>
+                  <a:lnTo>
                     <a:pt x="0" y="0"/>
-                  </a:moveTo>
-                  <a:lnTo>
-                    <a:pt x="7948" y="53695"/>
-                  </a:lnTo>
-                  <a:lnTo>
-                    <a:pt x="85191" y="506626"/>
-                  </a:lnTo>
-                  <a:lnTo>
-                    <a:pt x="162435" y="899749"/>
-                  </a:lnTo>
-                  <a:lnTo>
-                    <a:pt x="239678" y="1240960"/>
-                  </a:lnTo>
-                  <a:lnTo>
-                    <a:pt x="316922" y="1537115"/>
-                  </a:lnTo>
-                  <a:lnTo>
-                    <a:pt x="394165" y="1794164"/>
-                  </a:lnTo>
-                  <a:lnTo>
-                    <a:pt x="471409" y="2017270"/>
-                  </a:lnTo>
-                  <a:lnTo>
-                    <a:pt x="548653" y="2210915"/>
-                  </a:lnTo>
-                  <a:lnTo>
-                    <a:pt x="625896" y="2378990"/>
-                  </a:lnTo>
-                  <a:lnTo>
-                    <a:pt x="703140" y="2524870"/>
-                  </a:lnTo>
-                  <a:lnTo>
-                    <a:pt x="780383" y="2651488"/>
-                  </a:lnTo>
-                  <a:lnTo>
-                    <a:pt x="857627" y="2671916"/>
-                  </a:lnTo>
-                  <a:lnTo>
-                    <a:pt x="934870" y="2689589"/>
-                  </a:lnTo>
-                  <a:lnTo>
-                    <a:pt x="1012114" y="2706878"/>
-                  </a:lnTo>
-                  <a:lnTo>
-                    <a:pt x="1089358" y="2723791"/>
-                  </a:lnTo>
-                  <a:lnTo>
-                    <a:pt x="1166601" y="2740335"/>
-                  </a:lnTo>
-                  <a:lnTo>
-                    <a:pt x="1243845" y="2756519"/>
-                  </a:lnTo>
-                  <a:lnTo>
-                    <a:pt x="1321088" y="2772351"/>
-                  </a:lnTo>
-                  <a:lnTo>
-                    <a:pt x="1398332" y="2787838"/>
-                  </a:lnTo>
-                  <a:lnTo>
-                    <a:pt x="1475575" y="2802988"/>
-                  </a:lnTo>
-                  <a:lnTo>
-                    <a:pt x="1552819" y="2817808"/>
-                  </a:lnTo>
-                  <a:lnTo>
-                    <a:pt x="1630063" y="2832305"/>
-                  </a:lnTo>
-                  <a:lnTo>
-                    <a:pt x="1707306" y="2846487"/>
-                  </a:lnTo>
-                  <a:lnTo>
-                    <a:pt x="1784550" y="2860360"/>
-                  </a:lnTo>
-                  <a:lnTo>
-                    <a:pt x="1861793" y="2873931"/>
-                  </a:lnTo>
-                  <a:lnTo>
-                    <a:pt x="1939037" y="2887207"/>
-                  </a:lnTo>
-                  <a:lnTo>
-                    <a:pt x="2016280" y="2900194"/>
-                  </a:lnTo>
-                  <a:lnTo>
-                    <a:pt x="2093524" y="2912898"/>
-                  </a:lnTo>
-                  <a:lnTo>
-                    <a:pt x="2170768" y="2925325"/>
-                  </a:lnTo>
-                  <a:lnTo>
-                    <a:pt x="2248011" y="2937482"/>
-                  </a:lnTo>
-                  <a:lnTo>
-                    <a:pt x="2325255" y="2949374"/>
-                  </a:lnTo>
-                  <a:lnTo>
-                    <a:pt x="2402498" y="2961007"/>
-                  </a:lnTo>
-                  <a:lnTo>
-                    <a:pt x="2479742" y="2972387"/>
-                  </a:lnTo>
-                  <a:lnTo>
-                    <a:pt x="2556985" y="2983520"/>
-                  </a:lnTo>
-                  <a:lnTo>
-                    <a:pt x="2634229" y="2994410"/>
-                  </a:lnTo>
-                  <a:lnTo>
-                    <a:pt x="2711473" y="3005062"/>
-                  </a:lnTo>
-                  <a:lnTo>
-                    <a:pt x="2788716" y="3015483"/>
-                  </a:lnTo>
-                  <a:lnTo>
-                    <a:pt x="2865960" y="3025677"/>
-                  </a:lnTo>
-                  <a:lnTo>
-                    <a:pt x="2943203" y="3035650"/>
-                  </a:lnTo>
-                  <a:lnTo>
-                    <a:pt x="3020447" y="3045405"/>
-                  </a:lnTo>
-                  <a:lnTo>
-                    <a:pt x="3097690" y="3054947"/>
-                  </a:lnTo>
-                  <a:lnTo>
-                    <a:pt x="3174934" y="3064282"/>
-                  </a:lnTo>
-                  <a:lnTo>
-                    <a:pt x="3252178" y="3073414"/>
-                  </a:lnTo>
-                  <a:lnTo>
-                    <a:pt x="3329421" y="3082347"/>
-                  </a:lnTo>
-                  <a:lnTo>
-                    <a:pt x="3406665" y="3091085"/>
-                  </a:lnTo>
-                  <a:lnTo>
-                    <a:pt x="3483908" y="3099634"/>
-                  </a:lnTo>
-                  <a:lnTo>
-                    <a:pt x="3561152" y="3107996"/>
-                  </a:lnTo>
-                  <a:lnTo>
-                    <a:pt x="3638395" y="3116176"/>
-                  </a:lnTo>
-                  <a:lnTo>
-                    <a:pt x="3715639" y="3124178"/>
-                  </a:lnTo>
-                  <a:lnTo>
-                    <a:pt x="3792883" y="3132006"/>
-                  </a:lnTo>
-                  <a:lnTo>
-                    <a:pt x="3870126" y="3139663"/>
-                  </a:lnTo>
-                  <a:lnTo>
-                    <a:pt x="3947370" y="3147154"/>
-                  </a:lnTo>
-                  <a:lnTo>
-                    <a:pt x="4024613" y="3154481"/>
-                  </a:lnTo>
-                  <a:lnTo>
-                    <a:pt x="4101857" y="3161649"/>
-                  </a:lnTo>
-                  <a:lnTo>
-                    <a:pt x="4179100" y="3168661"/>
-                  </a:lnTo>
-                  <a:lnTo>
-                    <a:pt x="4256344" y="3175521"/>
-                  </a:lnTo>
-                  <a:lnTo>
-                    <a:pt x="4333588" y="3182231"/>
-                  </a:lnTo>
-                  <a:lnTo>
-                    <a:pt x="4410831" y="3188795"/>
-                  </a:lnTo>
-                  <a:lnTo>
-                    <a:pt x="4488075" y="3195216"/>
-                  </a:lnTo>
-                  <a:lnTo>
-                    <a:pt x="4565318" y="3201497"/>
-                  </a:lnTo>
-                  <a:lnTo>
-                    <a:pt x="4642562" y="3207642"/>
-                  </a:lnTo>
-                  <a:lnTo>
-                    <a:pt x="4719805" y="3213653"/>
-                  </a:lnTo>
-                  <a:lnTo>
-                    <a:pt x="4797049" y="3219533"/>
-                  </a:lnTo>
-                  <a:lnTo>
-                    <a:pt x="4874293" y="3225285"/>
                   </a:lnTo>
                 </a:path>
               </a:pathLst>
@@ -3739,544 +4033,228 @@
           </p:nvSpPr>
           <p:spPr>
             <a:xfrm>
-              <a:off x="817517" y="3433049"/>
-              <a:ext cx="7392041" cy="2123743"/>
+              <a:off x="3212810" y="2073503"/>
+              <a:ext cx="5049869" cy="3472871"/>
             </a:xfrm>
             <a:custGeom>
               <a:avLst/>
               <a:pathLst>
-                <a:path w="7392041" h="2123743">
-                  <a:moveTo>
-                    <a:pt x="7392041" y="2123743"/>
-                  </a:moveTo>
-                  <a:lnTo>
-                    <a:pt x="7314797" y="2123673"/>
-                  </a:lnTo>
-                  <a:lnTo>
-                    <a:pt x="7237554" y="2123593"/>
-                  </a:lnTo>
-                  <a:lnTo>
-                    <a:pt x="7160310" y="2123501"/>
-                  </a:lnTo>
-                  <a:lnTo>
-                    <a:pt x="7083066" y="2123394"/>
-                  </a:lnTo>
-                  <a:lnTo>
-                    <a:pt x="7005823" y="2123271"/>
-                  </a:lnTo>
-                  <a:lnTo>
-                    <a:pt x="6928579" y="2123130"/>
-                  </a:lnTo>
-                  <a:lnTo>
-                    <a:pt x="6851336" y="2122967"/>
-                  </a:lnTo>
-                  <a:lnTo>
-                    <a:pt x="6774092" y="2122780"/>
-                  </a:lnTo>
-                  <a:lnTo>
-                    <a:pt x="6696849" y="2122563"/>
-                  </a:lnTo>
-                  <a:lnTo>
-                    <a:pt x="6619605" y="2122314"/>
-                  </a:lnTo>
-                  <a:lnTo>
-                    <a:pt x="6542361" y="2122027"/>
-                  </a:lnTo>
-                  <a:lnTo>
-                    <a:pt x="6465118" y="2121697"/>
-                  </a:lnTo>
-                  <a:lnTo>
-                    <a:pt x="6387874" y="2121316"/>
-                  </a:lnTo>
-                  <a:lnTo>
-                    <a:pt x="6310631" y="2120877"/>
-                  </a:lnTo>
-                  <a:lnTo>
-                    <a:pt x="6233387" y="2120371"/>
-                  </a:lnTo>
-                  <a:lnTo>
-                    <a:pt x="6156144" y="2119789"/>
-                  </a:lnTo>
-                  <a:lnTo>
-                    <a:pt x="6078900" y="2119118"/>
-                  </a:lnTo>
-                  <a:lnTo>
-                    <a:pt x="6001656" y="2118344"/>
-                  </a:lnTo>
-                  <a:lnTo>
-                    <a:pt x="5924413" y="2117453"/>
-                  </a:lnTo>
-                  <a:lnTo>
-                    <a:pt x="5847169" y="2116427"/>
-                  </a:lnTo>
-                  <a:lnTo>
-                    <a:pt x="5769926" y="2115244"/>
-                  </a:lnTo>
-                  <a:lnTo>
-                    <a:pt x="5692682" y="2113882"/>
-                  </a:lnTo>
-                  <a:lnTo>
-                    <a:pt x="5615439" y="2112312"/>
-                  </a:lnTo>
-                  <a:lnTo>
-                    <a:pt x="5538195" y="2110503"/>
-                  </a:lnTo>
-                  <a:lnTo>
-                    <a:pt x="5460951" y="2108419"/>
-                  </a:lnTo>
-                  <a:lnTo>
-                    <a:pt x="5383708" y="2106018"/>
-                  </a:lnTo>
-                  <a:lnTo>
-                    <a:pt x="5306464" y="2103252"/>
-                  </a:lnTo>
-                  <a:lnTo>
-                    <a:pt x="5229221" y="2100065"/>
-                  </a:lnTo>
-                  <a:lnTo>
-                    <a:pt x="5151977" y="2096393"/>
-                  </a:lnTo>
-                  <a:lnTo>
-                    <a:pt x="5074734" y="2092163"/>
-                  </a:lnTo>
-                  <a:lnTo>
-                    <a:pt x="4997490" y="2087289"/>
-                  </a:lnTo>
-                  <a:lnTo>
-                    <a:pt x="4920246" y="2081673"/>
-                  </a:lnTo>
-                  <a:lnTo>
-                    <a:pt x="4843003" y="2075203"/>
-                  </a:lnTo>
-                  <a:lnTo>
-                    <a:pt x="4765759" y="2067749"/>
-                  </a:lnTo>
-                  <a:lnTo>
-                    <a:pt x="4688516" y="2059160"/>
-                  </a:lnTo>
-                  <a:lnTo>
-                    <a:pt x="4611272" y="2049265"/>
-                  </a:lnTo>
-                  <a:lnTo>
-                    <a:pt x="4534029" y="2037865"/>
-                  </a:lnTo>
-                  <a:lnTo>
-                    <a:pt x="4456785" y="2024730"/>
-                  </a:lnTo>
-                  <a:lnTo>
-                    <a:pt x="4379541" y="2009597"/>
-                  </a:lnTo>
-                  <a:lnTo>
-                    <a:pt x="4302298" y="1992161"/>
-                  </a:lnTo>
-                  <a:lnTo>
-                    <a:pt x="4225054" y="1972073"/>
-                  </a:lnTo>
-                  <a:lnTo>
-                    <a:pt x="4147811" y="1948929"/>
-                  </a:lnTo>
-                  <a:lnTo>
-                    <a:pt x="4070567" y="1922264"/>
-                  </a:lnTo>
-                  <a:lnTo>
-                    <a:pt x="3993324" y="1891541"/>
-                  </a:lnTo>
-                  <a:lnTo>
-                    <a:pt x="3916080" y="1856145"/>
-                  </a:lnTo>
-                  <a:lnTo>
-                    <a:pt x="3838836" y="1815364"/>
-                  </a:lnTo>
-                  <a:lnTo>
-                    <a:pt x="3761593" y="1768379"/>
-                  </a:lnTo>
-                  <a:lnTo>
-                    <a:pt x="3684349" y="1714245"/>
-                  </a:lnTo>
-                  <a:lnTo>
-                    <a:pt x="3607106" y="1651875"/>
-                  </a:lnTo>
-                  <a:lnTo>
-                    <a:pt x="3529862" y="1580017"/>
-                  </a:lnTo>
-                  <a:lnTo>
-                    <a:pt x="3452619" y="1497226"/>
-                  </a:lnTo>
-                  <a:lnTo>
-                    <a:pt x="3375375" y="1401840"/>
-                  </a:lnTo>
-                  <a:lnTo>
-                    <a:pt x="3298131" y="1294303"/>
-                  </a:lnTo>
-                  <a:lnTo>
-                    <a:pt x="3220888" y="1275834"/>
-                  </a:lnTo>
-                  <a:lnTo>
-                    <a:pt x="3143644" y="1256954"/>
-                  </a:lnTo>
-                  <a:lnTo>
-                    <a:pt x="3066401" y="1237654"/>
-                  </a:lnTo>
-                  <a:lnTo>
-                    <a:pt x="2989157" y="1217925"/>
-                  </a:lnTo>
-                  <a:lnTo>
-                    <a:pt x="2911914" y="1197756"/>
-                  </a:lnTo>
-                  <a:lnTo>
-                    <a:pt x="2834670" y="1177138"/>
-                  </a:lnTo>
-                  <a:lnTo>
-                    <a:pt x="2757426" y="1156062"/>
-                  </a:lnTo>
-                  <a:lnTo>
-                    <a:pt x="2680183" y="1134517"/>
-                  </a:lnTo>
-                  <a:lnTo>
-                    <a:pt x="2602939" y="1112492"/>
-                  </a:lnTo>
-                  <a:lnTo>
-                    <a:pt x="2525696" y="1089977"/>
-                  </a:lnTo>
-                  <a:lnTo>
-                    <a:pt x="2448452" y="1066961"/>
-                  </a:lnTo>
-                  <a:lnTo>
-                    <a:pt x="2371209" y="1043432"/>
-                  </a:lnTo>
-                  <a:lnTo>
-                    <a:pt x="2293965" y="1019380"/>
-                  </a:lnTo>
-                  <a:lnTo>
-                    <a:pt x="2216721" y="994793"/>
-                  </a:lnTo>
-                  <a:lnTo>
-                    <a:pt x="2139478" y="969659"/>
-                  </a:lnTo>
-                  <a:lnTo>
-                    <a:pt x="2062234" y="943965"/>
-                  </a:lnTo>
-                  <a:lnTo>
-                    <a:pt x="1984991" y="917700"/>
-                  </a:lnTo>
-                  <a:lnTo>
-                    <a:pt x="1907747" y="890850"/>
-                  </a:lnTo>
-                  <a:lnTo>
-                    <a:pt x="1830504" y="863402"/>
-                  </a:lnTo>
-                  <a:lnTo>
-                    <a:pt x="1753260" y="835344"/>
-                  </a:lnTo>
-                  <a:lnTo>
-                    <a:pt x="1676016" y="806661"/>
-                  </a:lnTo>
-                  <a:lnTo>
-                    <a:pt x="1598773" y="777340"/>
-                  </a:lnTo>
-                  <a:lnTo>
-                    <a:pt x="1521529" y="747366"/>
-                  </a:lnTo>
-                  <a:lnTo>
-                    <a:pt x="1444286" y="716725"/>
-                  </a:lnTo>
-                  <a:lnTo>
-                    <a:pt x="1367042" y="685403"/>
-                  </a:lnTo>
-                  <a:lnTo>
-                    <a:pt x="1289799" y="653383"/>
-                  </a:lnTo>
-                  <a:lnTo>
-                    <a:pt x="1212555" y="620651"/>
-                  </a:lnTo>
-                  <a:lnTo>
-                    <a:pt x="1135311" y="587190"/>
-                  </a:lnTo>
-                  <a:lnTo>
-                    <a:pt x="1058068" y="552985"/>
-                  </a:lnTo>
-                  <a:lnTo>
-                    <a:pt x="980824" y="518018"/>
-                  </a:lnTo>
-                  <a:lnTo>
-                    <a:pt x="903581" y="482273"/>
-                  </a:lnTo>
-                  <a:lnTo>
-                    <a:pt x="826337" y="445733"/>
-                  </a:lnTo>
-                  <a:lnTo>
-                    <a:pt x="749094" y="408380"/>
-                  </a:lnTo>
-                  <a:lnTo>
-                    <a:pt x="671850" y="370195"/>
-                  </a:lnTo>
-                  <a:lnTo>
-                    <a:pt x="594606" y="331161"/>
-                  </a:lnTo>
-                  <a:lnTo>
-                    <a:pt x="517363" y="291258"/>
-                  </a:lnTo>
-                  <a:lnTo>
-                    <a:pt x="440119" y="250466"/>
-                  </a:lnTo>
-                  <a:lnTo>
-                    <a:pt x="362876" y="208767"/>
-                  </a:lnTo>
-                  <a:lnTo>
-                    <a:pt x="285632" y="166141"/>
-                  </a:lnTo>
-                  <a:lnTo>
-                    <a:pt x="208389" y="122565"/>
-                  </a:lnTo>
-                  <a:lnTo>
-                    <a:pt x="131145" y="78020"/>
-                  </a:lnTo>
-                  <a:lnTo>
-                    <a:pt x="53901" y="32483"/>
-                  </a:lnTo>
-                  <a:lnTo>
-                    <a:pt x="0" y="0"/>
-                  </a:lnTo>
-                </a:path>
-              </a:pathLst>
-            </a:custGeom>
-          </p:spPr>
-          <p:txBody>
-            <a:bodyPr/>
-            <a:lstStyle/>
-            <a:p/>
-          </p:txBody>
-        </p:sp>
-        <p:sp>
-          <p:nvSpPr>
-            <p:cNvPr id="24" name="pl24"/>
-            <p:cNvSpPr/>
-            <p:nvPr/>
-          </p:nvSpPr>
-          <p:spPr>
-            <a:xfrm>
-              <a:off x="2763368" y="2073503"/>
-              <a:ext cx="5446190" cy="3472871"/>
-            </a:xfrm>
-            <a:custGeom>
-              <a:avLst/>
-              <a:pathLst>
-                <a:path w="5446190" h="3472871">
+                <a:path w="5049869" h="3472871">
                   <a:moveTo>
                     <a:pt x="0" y="0"/>
                   </a:moveTo>
                   <a:lnTo>
-                    <a:pt x="39140" y="144265"/>
-                  </a:lnTo>
-                  <a:lnTo>
-                    <a:pt x="116384" y="406606"/>
-                  </a:lnTo>
-                  <a:lnTo>
-                    <a:pt x="193627" y="648337"/>
-                  </a:lnTo>
-                  <a:lnTo>
-                    <a:pt x="270871" y="871079"/>
-                  </a:lnTo>
-                  <a:lnTo>
-                    <a:pt x="348114" y="1076323"/>
-                  </a:lnTo>
-                  <a:lnTo>
-                    <a:pt x="425358" y="1265444"/>
-                  </a:lnTo>
-                  <a:lnTo>
-                    <a:pt x="502602" y="1439707"/>
-                  </a:lnTo>
-                  <a:lnTo>
-                    <a:pt x="579845" y="1600281"/>
-                  </a:lnTo>
-                  <a:lnTo>
-                    <a:pt x="657089" y="1748241"/>
-                  </a:lnTo>
-                  <a:lnTo>
-                    <a:pt x="734332" y="1884578"/>
-                  </a:lnTo>
-                  <a:lnTo>
-                    <a:pt x="811576" y="2010204"/>
-                  </a:lnTo>
-                  <a:lnTo>
-                    <a:pt x="888820" y="2125961"/>
-                  </a:lnTo>
-                  <a:lnTo>
-                    <a:pt x="966063" y="2232625"/>
-                  </a:lnTo>
-                  <a:lnTo>
-                    <a:pt x="1043307" y="2330910"/>
-                  </a:lnTo>
-                  <a:lnTo>
-                    <a:pt x="1120550" y="2421473"/>
-                  </a:lnTo>
-                  <a:lnTo>
-                    <a:pt x="1197794" y="2504923"/>
-                  </a:lnTo>
-                  <a:lnTo>
-                    <a:pt x="1275037" y="2581816"/>
-                  </a:lnTo>
-                  <a:lnTo>
-                    <a:pt x="1352281" y="2652669"/>
-                  </a:lnTo>
-                  <a:lnTo>
-                    <a:pt x="1429525" y="2717957"/>
-                  </a:lnTo>
-                  <a:lnTo>
-                    <a:pt x="1506768" y="2778115"/>
-                  </a:lnTo>
-                  <a:lnTo>
-                    <a:pt x="1584012" y="2833547"/>
-                  </a:lnTo>
-                  <a:lnTo>
-                    <a:pt x="1661255" y="2884625"/>
-                  </a:lnTo>
-                  <a:lnTo>
-                    <a:pt x="1738499" y="2931690"/>
-                  </a:lnTo>
-                  <a:lnTo>
-                    <a:pt x="1815742" y="2975058"/>
-                  </a:lnTo>
-                  <a:lnTo>
-                    <a:pt x="1892986" y="3015020"/>
-                  </a:lnTo>
-                  <a:lnTo>
-                    <a:pt x="1970230" y="3051841"/>
-                  </a:lnTo>
-                  <a:lnTo>
-                    <a:pt x="2047473" y="3085771"/>
-                  </a:lnTo>
-                  <a:lnTo>
-                    <a:pt x="2124717" y="3117035"/>
-                  </a:lnTo>
-                  <a:lnTo>
-                    <a:pt x="2201960" y="3145842"/>
-                  </a:lnTo>
-                  <a:lnTo>
-                    <a:pt x="2279204" y="3172387"/>
-                  </a:lnTo>
-                  <a:lnTo>
-                    <a:pt x="2356447" y="3196847"/>
-                  </a:lnTo>
-                  <a:lnTo>
-                    <a:pt x="2433691" y="3219385"/>
-                  </a:lnTo>
-                  <a:lnTo>
-                    <a:pt x="2510935" y="3240152"/>
-                  </a:lnTo>
-                  <a:lnTo>
-                    <a:pt x="2588178" y="3259288"/>
-                  </a:lnTo>
-                  <a:lnTo>
-                    <a:pt x="2665422" y="3276921"/>
-                  </a:lnTo>
-                  <a:lnTo>
-                    <a:pt x="2742665" y="3293169"/>
-                  </a:lnTo>
-                  <a:lnTo>
-                    <a:pt x="2819909" y="3308140"/>
-                  </a:lnTo>
-                  <a:lnTo>
-                    <a:pt x="2897152" y="3321935"/>
-                  </a:lnTo>
-                  <a:lnTo>
-                    <a:pt x="2974396" y="3334647"/>
-                  </a:lnTo>
-                  <a:lnTo>
-                    <a:pt x="3051640" y="3346359"/>
-                  </a:lnTo>
-                  <a:lnTo>
-                    <a:pt x="3128883" y="3357152"/>
-                  </a:lnTo>
-                  <a:lnTo>
-                    <a:pt x="3206127" y="3367097"/>
-                  </a:lnTo>
-                  <a:lnTo>
-                    <a:pt x="3283370" y="3376261"/>
-                  </a:lnTo>
-                  <a:lnTo>
-                    <a:pt x="3360614" y="3384705"/>
-                  </a:lnTo>
-                  <a:lnTo>
-                    <a:pt x="3437857" y="3392485"/>
-                  </a:lnTo>
-                  <a:lnTo>
-                    <a:pt x="3515101" y="3399654"/>
-                  </a:lnTo>
-                  <a:lnTo>
-                    <a:pt x="3592345" y="3406260"/>
-                  </a:lnTo>
-                  <a:lnTo>
-                    <a:pt x="3669588" y="3412347"/>
-                  </a:lnTo>
-                  <a:lnTo>
-                    <a:pt x="3746832" y="3417956"/>
-                  </a:lnTo>
-                  <a:lnTo>
-                    <a:pt x="3824075" y="3423125"/>
-                  </a:lnTo>
-                  <a:lnTo>
-                    <a:pt x="3901319" y="3427887"/>
-                  </a:lnTo>
-                  <a:lnTo>
-                    <a:pt x="3978562" y="3432275"/>
-                  </a:lnTo>
-                  <a:lnTo>
-                    <a:pt x="4055806" y="3436318"/>
-                  </a:lnTo>
-                  <a:lnTo>
-                    <a:pt x="4133050" y="3440044"/>
-                  </a:lnTo>
-                  <a:lnTo>
-                    <a:pt x="4210293" y="3443477"/>
-                  </a:lnTo>
-                  <a:lnTo>
-                    <a:pt x="4287537" y="3446641"/>
-                  </a:lnTo>
-                  <a:lnTo>
-                    <a:pt x="4364780" y="3449556"/>
-                  </a:lnTo>
-                  <a:lnTo>
-                    <a:pt x="4442024" y="3452242"/>
-                  </a:lnTo>
-                  <a:lnTo>
-                    <a:pt x="4519267" y="3454717"/>
-                  </a:lnTo>
-                  <a:lnTo>
-                    <a:pt x="4596511" y="3456997"/>
-                  </a:lnTo>
-                  <a:lnTo>
-                    <a:pt x="4673755" y="3459098"/>
-                  </a:lnTo>
-                  <a:lnTo>
-                    <a:pt x="4750998" y="3461035"/>
-                  </a:lnTo>
-                  <a:lnTo>
-                    <a:pt x="4828242" y="3462819"/>
-                  </a:lnTo>
-                  <a:lnTo>
-                    <a:pt x="4905485" y="3464463"/>
-                  </a:lnTo>
-                  <a:lnTo>
-                    <a:pt x="4982729" y="3465978"/>
-                  </a:lnTo>
-                  <a:lnTo>
-                    <a:pt x="5059972" y="3467374"/>
-                  </a:lnTo>
-                  <a:lnTo>
-                    <a:pt x="5137216" y="3468660"/>
-                  </a:lnTo>
-                  <a:lnTo>
-                    <a:pt x="5214460" y="3469845"/>
-                  </a:lnTo>
-                  <a:lnTo>
-                    <a:pt x="5291703" y="3470937"/>
-                  </a:lnTo>
-                  <a:lnTo>
-                    <a:pt x="5368947" y="3471943"/>
-                  </a:lnTo>
-                  <a:lnTo>
-                    <a:pt x="5446190" y="3472871"/>
+                    <a:pt x="36292" y="144265"/>
+                  </a:lnTo>
+                  <a:lnTo>
+                    <a:pt x="107914" y="406606"/>
+                  </a:lnTo>
+                  <a:lnTo>
+                    <a:pt x="179537" y="648337"/>
+                  </a:lnTo>
+                  <a:lnTo>
+                    <a:pt x="251160" y="871079"/>
+                  </a:lnTo>
+                  <a:lnTo>
+                    <a:pt x="322782" y="1076323"/>
+                  </a:lnTo>
+                  <a:lnTo>
+                    <a:pt x="394405" y="1265444"/>
+                  </a:lnTo>
+                  <a:lnTo>
+                    <a:pt x="466027" y="1439707"/>
+                  </a:lnTo>
+                  <a:lnTo>
+                    <a:pt x="537650" y="1600281"/>
+                  </a:lnTo>
+                  <a:lnTo>
+                    <a:pt x="609272" y="1748241"/>
+                  </a:lnTo>
+                  <a:lnTo>
+                    <a:pt x="680895" y="1884578"/>
+                  </a:lnTo>
+                  <a:lnTo>
+                    <a:pt x="752517" y="2010204"/>
+                  </a:lnTo>
+                  <a:lnTo>
+                    <a:pt x="824140" y="2125961"/>
+                  </a:lnTo>
+                  <a:lnTo>
+                    <a:pt x="895762" y="2232625"/>
+                  </a:lnTo>
+                  <a:lnTo>
+                    <a:pt x="967385" y="2330910"/>
+                  </a:lnTo>
+                  <a:lnTo>
+                    <a:pt x="1039007" y="2421473"/>
+                  </a:lnTo>
+                  <a:lnTo>
+                    <a:pt x="1110630" y="2504923"/>
+                  </a:lnTo>
+                  <a:lnTo>
+                    <a:pt x="1182252" y="2581816"/>
+                  </a:lnTo>
+                  <a:lnTo>
+                    <a:pt x="1253875" y="2652669"/>
+                  </a:lnTo>
+                  <a:lnTo>
+                    <a:pt x="1325497" y="2717957"/>
+                  </a:lnTo>
+                  <a:lnTo>
+                    <a:pt x="1397120" y="2778115"/>
+                  </a:lnTo>
+                  <a:lnTo>
+                    <a:pt x="1468742" y="2833547"/>
+                  </a:lnTo>
+                  <a:lnTo>
+                    <a:pt x="1540365" y="2884625"/>
+                  </a:lnTo>
+                  <a:lnTo>
+                    <a:pt x="1611988" y="2931690"/>
+                  </a:lnTo>
+                  <a:lnTo>
+                    <a:pt x="1683610" y="2975058"/>
+                  </a:lnTo>
+                  <a:lnTo>
+                    <a:pt x="1755233" y="3015020"/>
+                  </a:lnTo>
+                  <a:lnTo>
+                    <a:pt x="1826855" y="3051841"/>
+                  </a:lnTo>
+                  <a:lnTo>
+                    <a:pt x="1898478" y="3085771"/>
+                  </a:lnTo>
+                  <a:lnTo>
+                    <a:pt x="1970100" y="3117035"/>
+                  </a:lnTo>
+                  <a:lnTo>
+                    <a:pt x="2041723" y="3145842"/>
+                  </a:lnTo>
+                  <a:lnTo>
+                    <a:pt x="2113345" y="3172387"/>
+                  </a:lnTo>
+                  <a:lnTo>
+                    <a:pt x="2184968" y="3196847"/>
+                  </a:lnTo>
+                  <a:lnTo>
+                    <a:pt x="2256590" y="3219385"/>
+                  </a:lnTo>
+                  <a:lnTo>
+                    <a:pt x="2328213" y="3240152"/>
+                  </a:lnTo>
+                  <a:lnTo>
+                    <a:pt x="2399835" y="3259288"/>
+                  </a:lnTo>
+                  <a:lnTo>
+                    <a:pt x="2471458" y="3276921"/>
+                  </a:lnTo>
+                  <a:lnTo>
+                    <a:pt x="2543080" y="3293169"/>
+                  </a:lnTo>
+                  <a:lnTo>
+                    <a:pt x="2614703" y="3308140"/>
+                  </a:lnTo>
+                  <a:lnTo>
+                    <a:pt x="2686325" y="3321935"/>
+                  </a:lnTo>
+                  <a:lnTo>
+                    <a:pt x="2757948" y="3334647"/>
+                  </a:lnTo>
+                  <a:lnTo>
+                    <a:pt x="2829570" y="3346359"/>
+                  </a:lnTo>
+                  <a:lnTo>
+                    <a:pt x="2901193" y="3357152"/>
+                  </a:lnTo>
+                  <a:lnTo>
+                    <a:pt x="2972815" y="3367097"/>
+                  </a:lnTo>
+                  <a:lnTo>
+                    <a:pt x="3044438" y="3376261"/>
+                  </a:lnTo>
+                  <a:lnTo>
+                    <a:pt x="3116061" y="3384705"/>
+                  </a:lnTo>
+                  <a:lnTo>
+                    <a:pt x="3187683" y="3392485"/>
+                  </a:lnTo>
+                  <a:lnTo>
+                    <a:pt x="3259306" y="3399654"/>
+                  </a:lnTo>
+                  <a:lnTo>
+                    <a:pt x="3330928" y="3406260"/>
+                  </a:lnTo>
+                  <a:lnTo>
+                    <a:pt x="3402551" y="3412347"/>
+                  </a:lnTo>
+                  <a:lnTo>
+                    <a:pt x="3474173" y="3417956"/>
+                  </a:lnTo>
+                  <a:lnTo>
+                    <a:pt x="3545796" y="3423125"/>
+                  </a:lnTo>
+                  <a:lnTo>
+                    <a:pt x="3617418" y="3427887"/>
+                  </a:lnTo>
+                  <a:lnTo>
+                    <a:pt x="3689041" y="3432275"/>
+                  </a:lnTo>
+                  <a:lnTo>
+                    <a:pt x="3760663" y="3436318"/>
+                  </a:lnTo>
+                  <a:lnTo>
+                    <a:pt x="3832286" y="3440044"/>
+                  </a:lnTo>
+                  <a:lnTo>
+                    <a:pt x="3903908" y="3443477"/>
+                  </a:lnTo>
+                  <a:lnTo>
+                    <a:pt x="3975531" y="3446641"/>
+                  </a:lnTo>
+                  <a:lnTo>
+                    <a:pt x="4047153" y="3449556"/>
+                  </a:lnTo>
+                  <a:lnTo>
+                    <a:pt x="4118776" y="3452242"/>
+                  </a:lnTo>
+                  <a:lnTo>
+                    <a:pt x="4190398" y="3454717"/>
+                  </a:lnTo>
+                  <a:lnTo>
+                    <a:pt x="4262021" y="3456997"/>
+                  </a:lnTo>
+                  <a:lnTo>
+                    <a:pt x="4333643" y="3459098"/>
+                  </a:lnTo>
+                  <a:lnTo>
+                    <a:pt x="4405266" y="3461035"/>
+                  </a:lnTo>
+                  <a:lnTo>
+                    <a:pt x="4476889" y="3462819"/>
+                  </a:lnTo>
+                  <a:lnTo>
+                    <a:pt x="4548511" y="3464463"/>
+                  </a:lnTo>
+                  <a:lnTo>
+                    <a:pt x="4620134" y="3465978"/>
+                  </a:lnTo>
+                  <a:lnTo>
+                    <a:pt x="4691756" y="3467374"/>
+                  </a:lnTo>
+                  <a:lnTo>
+                    <a:pt x="4763379" y="3468660"/>
+                  </a:lnTo>
+                  <a:lnTo>
+                    <a:pt x="4835001" y="3469845"/>
+                  </a:lnTo>
+                  <a:lnTo>
+                    <a:pt x="4906624" y="3470937"/>
+                  </a:lnTo>
+                  <a:lnTo>
+                    <a:pt x="4978246" y="3471943"/>
+                  </a:lnTo>
+                  <a:lnTo>
+                    <a:pt x="5049869" y="3472871"/>
                   </a:lnTo>
                 </a:path>
               </a:pathLst>
@@ -4299,7 +4277,7 @@
         </p:sp>
         <p:sp>
           <p:nvSpPr>
-            <p:cNvPr id="25" name="pl25"/>
+            <p:cNvPr id="24" name="pl24"/>
             <p:cNvSpPr/>
             <p:nvPr/>
           </p:nvSpPr>
@@ -4342,13 +4320,13 @@
         </p:sp>
         <p:sp>
           <p:nvSpPr>
-            <p:cNvPr id="26" name="pl26"/>
+            <p:cNvPr id="25" name="pl25"/>
             <p:cNvSpPr/>
             <p:nvPr/>
           </p:nvSpPr>
           <p:spPr>
             <a:xfrm>
-              <a:off x="4117484" y="2073503"/>
+              <a:off x="4468386" y="2073503"/>
               <a:ext cx="0" cy="3649639"/>
             </a:xfrm>
             <a:custGeom>
@@ -4385,7 +4363,7 @@
         </p:sp>
         <p:sp>
           <p:nvSpPr>
-            <p:cNvPr id="27" name="tx27"/>
+            <p:cNvPr id="26" name="tx26"/>
             <p:cNvSpPr/>
             <p:nvPr/>
           </p:nvSpPr>
@@ -4431,7 +4409,7 @@
         </p:sp>
         <p:sp>
           <p:nvSpPr>
-            <p:cNvPr id="28" name="tx28"/>
+            <p:cNvPr id="27" name="tx27"/>
             <p:cNvSpPr/>
             <p:nvPr/>
           </p:nvSpPr>
@@ -4477,7 +4455,7 @@
         </p:sp>
         <p:sp>
           <p:nvSpPr>
-            <p:cNvPr id="29" name="tx29"/>
+            <p:cNvPr id="28" name="tx28"/>
             <p:cNvSpPr/>
             <p:nvPr/>
           </p:nvSpPr>
@@ -4523,7 +4501,7 @@
         </p:sp>
         <p:sp>
           <p:nvSpPr>
-            <p:cNvPr id="30" name="tx30"/>
+            <p:cNvPr id="29" name="tx29"/>
             <p:cNvSpPr/>
             <p:nvPr/>
           </p:nvSpPr>
@@ -4569,7 +4547,7 @@
         </p:sp>
         <p:sp>
           <p:nvSpPr>
-            <p:cNvPr id="31" name="tx31"/>
+            <p:cNvPr id="30" name="tx30"/>
             <p:cNvSpPr/>
             <p:nvPr/>
           </p:nvSpPr>
@@ -4615,14 +4593,14 @@
         </p:sp>
         <p:sp>
           <p:nvSpPr>
-            <p:cNvPr id="32" name="tx32"/>
+            <p:cNvPr id="31" name="tx31"/>
             <p:cNvSpPr/>
             <p:nvPr/>
           </p:nvSpPr>
           <p:spPr>
             <a:xfrm>
-              <a:off x="2423864" y="5785772"/>
-              <a:ext cx="155356" cy="80101"/>
+              <a:off x="2478335" y="5785772"/>
+              <a:ext cx="161574" cy="80101"/>
             </a:xfrm>
             <a:prstGeom prst="rect">
               <a:avLst/>
@@ -4654,21 +4632,21 @@
                   <a:latin typeface="Helvetica"/>
                   <a:cs typeface="Helvetica"/>
                 </a:rPr>
-                <a:t>0.8</a:t>
+                <a:t>-25</a:t>
               </a:r>
             </a:p>
           </p:txBody>
         </p:sp>
         <p:sp>
           <p:nvSpPr>
-            <p:cNvPr id="33" name="tx33"/>
+            <p:cNvPr id="32" name="tx32"/>
             <p:cNvSpPr/>
             <p:nvPr/>
           </p:nvSpPr>
           <p:spPr>
             <a:xfrm>
-              <a:off x="4196521" y="5785772"/>
-              <a:ext cx="155356" cy="80101"/>
+              <a:off x="4582608" y="5785772"/>
+              <a:ext cx="62179" cy="80101"/>
             </a:xfrm>
             <a:prstGeom prst="rect">
               <a:avLst/>
@@ -4700,21 +4678,21 @@
                   <a:latin typeface="Helvetica"/>
                   <a:cs typeface="Helvetica"/>
                 </a:rPr>
-                <a:t>1.0</a:t>
+                <a:t>0</a:t>
               </a:r>
             </a:p>
           </p:txBody>
         </p:sp>
         <p:sp>
           <p:nvSpPr>
-            <p:cNvPr id="34" name="tx34"/>
+            <p:cNvPr id="33" name="tx33"/>
             <p:cNvSpPr/>
             <p:nvPr/>
           </p:nvSpPr>
           <p:spPr>
             <a:xfrm>
-              <a:off x="5969179" y="5785772"/>
-              <a:ext cx="155356" cy="80101"/>
+              <a:off x="6606094" y="5785772"/>
+              <a:ext cx="124358" cy="80101"/>
             </a:xfrm>
             <a:prstGeom prst="rect">
               <a:avLst/>
@@ -4746,67 +4724,21 @@
                   <a:latin typeface="Helvetica"/>
                   <a:cs typeface="Helvetica"/>
                 </a:rPr>
-                <a:t>1.2</a:t>
+                <a:t>25</a:t>
               </a:r>
             </a:p>
           </p:txBody>
         </p:sp>
         <p:sp>
           <p:nvSpPr>
-            <p:cNvPr id="35" name="tx35"/>
+            <p:cNvPr id="34" name="tx34"/>
             <p:cNvSpPr/>
             <p:nvPr/>
           </p:nvSpPr>
           <p:spPr>
             <a:xfrm>
-              <a:off x="7741836" y="5785772"/>
-              <a:ext cx="155356" cy="80101"/>
-            </a:xfrm>
-            <a:prstGeom prst="rect">
-              <a:avLst/>
-            </a:prstGeom>
-            <a:noFill/>
-          </p:spPr>
-          <p:txBody>
-            <a:bodyPr lIns="0" rIns="0" tIns="0" bIns="0" anchorCtr="1" anchor="ctr" wrap="none"/>
-            <a:lstStyle/>
-            <a:p>
-              <a:pPr algn="l" marL="0" marR="0" indent="0">
-                <a:lnSpc>
-                  <a:spcPts val="880"/>
-                </a:lnSpc>
-                <a:spcBef>
-                  <a:spcPts val="0"/>
-                </a:spcBef>
-                <a:spcAft>
-                  <a:spcPts val="0"/>
-                </a:spcAft>
-              </a:pPr>
-              <a:r>
-                <a:rPr sz="880">
-                  <a:solidFill>
-                    <a:srgbClr val="4D4D4D">
-                      <a:alpha val="100000"/>
-                    </a:srgbClr>
-                  </a:solidFill>
-                  <a:latin typeface="Helvetica"/>
-                  <a:cs typeface="Helvetica"/>
-                </a:rPr>
-                <a:t>1.4</a:t>
-              </a:r>
-            </a:p>
-          </p:txBody>
-        </p:sp>
-        <p:sp>
-          <p:nvSpPr>
-            <p:cNvPr id="36" name="tx36"/>
-            <p:cNvSpPr/>
-            <p:nvPr/>
-          </p:nvSpPr>
-          <p:spPr>
-            <a:xfrm>
-              <a:off x="3879271" y="5925448"/>
-              <a:ext cx="1676186" cy="100218"/>
+              <a:off x="2928340" y="5925448"/>
+              <a:ext cx="3578047" cy="100218"/>
             </a:xfrm>
             <a:prstGeom prst="rect">
               <a:avLst/>
@@ -4838,14 +4770,14 @@
                   <a:latin typeface="Helvetica"/>
                   <a:cs typeface="Helvetica"/>
                 </a:rPr>
-                <a:t>CKD-EPI Cr-Cys / CG ratio</a:t>
+                <a:t>eGFR difference (%): 100 × (CKD-EPI Cr-Cys − CG) / CG</a:t>
               </a:r>
             </a:p>
           </p:txBody>
         </p:sp>
         <p:sp>
           <p:nvSpPr>
-            <p:cNvPr id="37" name="tx37"/>
+            <p:cNvPr id="35" name="tx35"/>
             <p:cNvSpPr/>
             <p:nvPr/>
           </p:nvSpPr>
@@ -4891,14 +4823,14 @@
         </p:sp>
         <p:sp>
           <p:nvSpPr>
-            <p:cNvPr id="38" name="tx38"/>
+            <p:cNvPr id="36" name="tx36"/>
             <p:cNvSpPr/>
             <p:nvPr/>
           </p:nvSpPr>
           <p:spPr>
             <a:xfrm>
               <a:off x="817517" y="1896563"/>
-              <a:ext cx="6360017" cy="82021"/>
+              <a:ext cx="6512265" cy="82021"/>
             </a:xfrm>
             <a:prstGeom prst="rect">
               <a:avLst/>
@@ -4930,14 +4862,14 @@
                   <a:latin typeface="Helvetica"/>
                   <a:cs typeface="Helvetica"/>
                 </a:rPr>
-                <a:t>subHR per 0.1 ratio decline: 2.56 (1.29-5.08), p = 0.007  |  per IQR decline (Δ = 0.30): 16.00 (2.11-121.46)  |  IQR: [0.84, 1.14]</a:t>
+                <a:t>subHR per 10 % decline: 2.56 (1.29-5.08), p = 0.007  |  per IQR decline (Δ = 29.5 %): 16.00 (2.11-121.46)  |  IQR: [-15.6, 13.9] %</a:t>
               </a:r>
             </a:p>
           </p:txBody>
         </p:sp>
         <p:sp>
           <p:nvSpPr>
-            <p:cNvPr id="39" name="tx39"/>
+            <p:cNvPr id="37" name="tx37"/>
             <p:cNvSpPr/>
             <p:nvPr/>
           </p:nvSpPr>

--- a/docs/pptx/auc3/jx-auc3-linsubhr-ratio-hosp3.pptx
+++ b/docs/pptx/auc3/jx-auc3-linsubhr-ratio-hosp3.pptx
@@ -2265,27 +2265,62 @@
         </p:sp>
         <p:sp>
           <p:nvSpPr>
-            <p:cNvPr id="4" name="pl4"/>
+            <p:cNvPr id="4" name="rc4"/>
             <p:cNvSpPr/>
             <p:nvPr/>
           </p:nvSpPr>
           <p:spPr>
             <a:xfrm>
-              <a:off x="817517" y="5142518"/>
-              <a:ext cx="7799693" cy="0"/>
+              <a:off x="457200" y="1600200"/>
+              <a:ext cx="8229600" cy="4525962"/>
+            </a:xfrm>
+            <a:prstGeom prst="rect">
+              <a:avLst/>
+            </a:prstGeom>
+            <a:solidFill>
+              <a:srgbClr val="FFFFFF">
+                <a:alpha val="100000"/>
+              </a:srgbClr>
+            </a:solidFill>
+            <a:ln w="13550" cap="rnd">
+              <a:solidFill>
+                <a:srgbClr val="FFFFFF">
+                  <a:alpha val="100000"/>
+                </a:srgbClr>
+              </a:solidFill>
+              <a:prstDash val="solid"/>
+              <a:round/>
+            </a:ln>
+          </p:spPr>
+          <p:txBody>
+            <a:bodyPr/>
+            <a:lstStyle/>
+            <a:p/>
+          </p:txBody>
+        </p:sp>
+        <p:sp>
+          <p:nvSpPr>
+            <p:cNvPr id="5" name="pl5"/>
+            <p:cNvSpPr/>
+            <p:nvPr/>
+          </p:nvSpPr>
+          <p:spPr>
+            <a:xfrm>
+              <a:off x="887106" y="3250627"/>
+              <a:ext cx="7660515" cy="0"/>
             </a:xfrm>
             <a:custGeom>
               <a:avLst/>
               <a:pathLst>
-                <a:path w="7799693" h="0">
+                <a:path w="7660515" h="0">
                   <a:moveTo>
                     <a:pt x="0" y="0"/>
                   </a:moveTo>
                   <a:lnTo>
-                    <a:pt x="7799693" y="0"/>
-                  </a:lnTo>
-                  <a:lnTo>
-                    <a:pt x="7799693" y="0"/>
+                    <a:pt x="7660515" y="0"/>
+                  </a:lnTo>
+                  <a:lnTo>
+                    <a:pt x="7660515" y="0"/>
                   </a:lnTo>
                 </a:path>
               </a:pathLst>
@@ -2308,27 +2343,27 @@
         </p:sp>
         <p:sp>
           <p:nvSpPr>
-            <p:cNvPr id="5" name="pl5"/>
+            <p:cNvPr id="6" name="pl6"/>
             <p:cNvSpPr/>
             <p:nvPr/>
           </p:nvSpPr>
           <p:spPr>
             <a:xfrm>
-              <a:off x="817517" y="4313054"/>
-              <a:ext cx="7799693" cy="0"/>
+              <a:off x="887106" y="2951293"/>
+              <a:ext cx="7660515" cy="0"/>
             </a:xfrm>
             <a:custGeom>
               <a:avLst/>
               <a:pathLst>
-                <a:path w="7799693" h="0">
+                <a:path w="7660515" h="0">
                   <a:moveTo>
                     <a:pt x="0" y="0"/>
                   </a:moveTo>
                   <a:lnTo>
-                    <a:pt x="7799693" y="0"/>
-                  </a:lnTo>
-                  <a:lnTo>
-                    <a:pt x="7799693" y="0"/>
+                    <a:pt x="7660515" y="0"/>
+                  </a:lnTo>
+                  <a:lnTo>
+                    <a:pt x="7660515" y="0"/>
                   </a:lnTo>
                 </a:path>
               </a:pathLst>
@@ -2351,27 +2386,27 @@
         </p:sp>
         <p:sp>
           <p:nvSpPr>
-            <p:cNvPr id="6" name="pl6"/>
+            <p:cNvPr id="7" name="pl7"/>
             <p:cNvSpPr/>
             <p:nvPr/>
           </p:nvSpPr>
           <p:spPr>
             <a:xfrm>
-              <a:off x="817517" y="3483591"/>
-              <a:ext cx="7799693" cy="0"/>
+              <a:off x="887106" y="2651959"/>
+              <a:ext cx="7660515" cy="0"/>
             </a:xfrm>
             <a:custGeom>
               <a:avLst/>
               <a:pathLst>
-                <a:path w="7799693" h="0">
+                <a:path w="7660515" h="0">
                   <a:moveTo>
                     <a:pt x="0" y="0"/>
                   </a:moveTo>
                   <a:lnTo>
-                    <a:pt x="7799693" y="0"/>
-                  </a:lnTo>
-                  <a:lnTo>
-                    <a:pt x="7799693" y="0"/>
+                    <a:pt x="7660515" y="0"/>
+                  </a:lnTo>
+                  <a:lnTo>
+                    <a:pt x="7660515" y="0"/>
                   </a:lnTo>
                 </a:path>
               </a:pathLst>
@@ -2394,27 +2429,27 @@
         </p:sp>
         <p:sp>
           <p:nvSpPr>
-            <p:cNvPr id="7" name="pl7"/>
+            <p:cNvPr id="8" name="pl8"/>
             <p:cNvSpPr/>
             <p:nvPr/>
           </p:nvSpPr>
           <p:spPr>
             <a:xfrm>
-              <a:off x="817517" y="2654127"/>
-              <a:ext cx="7799693" cy="0"/>
+              <a:off x="887106" y="2352625"/>
+              <a:ext cx="7660515" cy="0"/>
             </a:xfrm>
             <a:custGeom>
               <a:avLst/>
               <a:pathLst>
-                <a:path w="7799693" h="0">
+                <a:path w="7660515" h="0">
                   <a:moveTo>
                     <a:pt x="0" y="0"/>
                   </a:moveTo>
                   <a:lnTo>
-                    <a:pt x="7799693" y="0"/>
-                  </a:lnTo>
-                  <a:lnTo>
-                    <a:pt x="7799693" y="0"/>
+                    <a:pt x="7660515" y="0"/>
+                  </a:lnTo>
+                  <a:lnTo>
+                    <a:pt x="7660515" y="0"/>
                   </a:lnTo>
                 </a:path>
               </a:pathLst>
@@ -2437,21 +2472,21 @@
         </p:sp>
         <p:sp>
           <p:nvSpPr>
-            <p:cNvPr id="8" name="pl8"/>
+            <p:cNvPr id="9" name="pl9"/>
             <p:cNvSpPr/>
             <p:nvPr/>
           </p:nvSpPr>
           <p:spPr>
             <a:xfrm>
-              <a:off x="1531834" y="2073503"/>
-              <a:ext cx="0" cy="3649639"/>
+              <a:off x="1588677" y="2143092"/>
+              <a:ext cx="0" cy="1317069"/>
             </a:xfrm>
             <a:custGeom>
               <a:avLst/>
               <a:pathLst>
-                <a:path w="0" h="3649639">
+                <a:path w="0" h="1317069">
                   <a:moveTo>
-                    <a:pt x="0" y="3649639"/>
+                    <a:pt x="0" y="1317069"/>
                   </a:moveTo>
                   <a:lnTo>
                     <a:pt x="0" y="0"/>
@@ -2480,21 +2515,21 @@
         </p:sp>
         <p:sp>
           <p:nvSpPr>
-            <p:cNvPr id="9" name="pl9"/>
+            <p:cNvPr id="10" name="pl10"/>
             <p:cNvSpPr/>
             <p:nvPr/>
           </p:nvSpPr>
           <p:spPr>
             <a:xfrm>
-              <a:off x="3586410" y="2073503"/>
-              <a:ext cx="0" cy="3649639"/>
+              <a:off x="3606590" y="2143092"/>
+              <a:ext cx="0" cy="1317069"/>
             </a:xfrm>
             <a:custGeom>
               <a:avLst/>
               <a:pathLst>
-                <a:path w="0" h="3649639">
+                <a:path w="0" h="1317069">
                   <a:moveTo>
-                    <a:pt x="0" y="3649639"/>
+                    <a:pt x="0" y="1317069"/>
                   </a:moveTo>
                   <a:lnTo>
                     <a:pt x="0" y="0"/>
@@ -2523,21 +2558,21 @@
         </p:sp>
         <p:sp>
           <p:nvSpPr>
-            <p:cNvPr id="10" name="pl10"/>
+            <p:cNvPr id="11" name="pl11"/>
             <p:cNvSpPr/>
             <p:nvPr/>
           </p:nvSpPr>
           <p:spPr>
             <a:xfrm>
-              <a:off x="5640985" y="2073503"/>
-              <a:ext cx="0" cy="3649639"/>
+              <a:off x="5624504" y="2143092"/>
+              <a:ext cx="0" cy="1317069"/>
             </a:xfrm>
             <a:custGeom>
               <a:avLst/>
               <a:pathLst>
-                <a:path w="0" h="3649639">
+                <a:path w="0" h="1317069">
                   <a:moveTo>
-                    <a:pt x="0" y="3649639"/>
+                    <a:pt x="0" y="1317069"/>
                   </a:moveTo>
                   <a:lnTo>
                     <a:pt x="0" y="0"/>
@@ -2566,21 +2601,21 @@
         </p:sp>
         <p:sp>
           <p:nvSpPr>
-            <p:cNvPr id="11" name="pl11"/>
+            <p:cNvPr id="12" name="pl12"/>
             <p:cNvSpPr/>
             <p:nvPr/>
           </p:nvSpPr>
           <p:spPr>
             <a:xfrm>
-              <a:off x="7695561" y="2073503"/>
-              <a:ext cx="0" cy="3649639"/>
+              <a:off x="7642418" y="2143092"/>
+              <a:ext cx="0" cy="1317069"/>
             </a:xfrm>
             <a:custGeom>
               <a:avLst/>
               <a:pathLst>
-                <a:path w="0" h="3649639">
+                <a:path w="0" h="1317069">
                   <a:moveTo>
-                    <a:pt x="0" y="3649639"/>
+                    <a:pt x="0" y="1317069"/>
                   </a:moveTo>
                   <a:lnTo>
                     <a:pt x="0" y="0"/>
@@ -2609,27 +2644,27 @@
         </p:sp>
         <p:sp>
           <p:nvSpPr>
-            <p:cNvPr id="12" name="pl12"/>
+            <p:cNvPr id="13" name="pl13"/>
             <p:cNvSpPr/>
             <p:nvPr/>
           </p:nvSpPr>
           <p:spPr>
             <a:xfrm>
-              <a:off x="817517" y="5557249"/>
-              <a:ext cx="7799693" cy="0"/>
+              <a:off x="887106" y="3400294"/>
+              <a:ext cx="7660515" cy="0"/>
             </a:xfrm>
             <a:custGeom>
               <a:avLst/>
               <a:pathLst>
-                <a:path w="7799693" h="0">
+                <a:path w="7660515" h="0">
                   <a:moveTo>
                     <a:pt x="0" y="0"/>
                   </a:moveTo>
                   <a:lnTo>
-                    <a:pt x="7799693" y="0"/>
-                  </a:lnTo>
-                  <a:lnTo>
-                    <a:pt x="7799693" y="0"/>
+                    <a:pt x="7660515" y="0"/>
+                  </a:lnTo>
+                  <a:lnTo>
+                    <a:pt x="7660515" y="0"/>
                   </a:lnTo>
                 </a:path>
               </a:pathLst>
@@ -2652,27 +2687,27 @@
         </p:sp>
         <p:sp>
           <p:nvSpPr>
-            <p:cNvPr id="13" name="pl13"/>
+            <p:cNvPr id="14" name="pl14"/>
             <p:cNvSpPr/>
             <p:nvPr/>
           </p:nvSpPr>
           <p:spPr>
             <a:xfrm>
-              <a:off x="817517" y="4727786"/>
-              <a:ext cx="7799693" cy="0"/>
+              <a:off x="887106" y="3100960"/>
+              <a:ext cx="7660515" cy="0"/>
             </a:xfrm>
             <a:custGeom>
               <a:avLst/>
               <a:pathLst>
-                <a:path w="7799693" h="0">
+                <a:path w="7660515" h="0">
                   <a:moveTo>
                     <a:pt x="0" y="0"/>
                   </a:moveTo>
                   <a:lnTo>
-                    <a:pt x="7799693" y="0"/>
-                  </a:lnTo>
-                  <a:lnTo>
-                    <a:pt x="7799693" y="0"/>
+                    <a:pt x="7660515" y="0"/>
+                  </a:lnTo>
+                  <a:lnTo>
+                    <a:pt x="7660515" y="0"/>
                   </a:lnTo>
                 </a:path>
               </a:pathLst>
@@ -2695,27 +2730,27 @@
         </p:sp>
         <p:sp>
           <p:nvSpPr>
-            <p:cNvPr id="14" name="pl14"/>
+            <p:cNvPr id="15" name="pl15"/>
             <p:cNvSpPr/>
             <p:nvPr/>
           </p:nvSpPr>
           <p:spPr>
             <a:xfrm>
-              <a:off x="817517" y="3898322"/>
-              <a:ext cx="7799693" cy="0"/>
+              <a:off x="887106" y="2801626"/>
+              <a:ext cx="7660515" cy="0"/>
             </a:xfrm>
             <a:custGeom>
               <a:avLst/>
               <a:pathLst>
-                <a:path w="7799693" h="0">
+                <a:path w="7660515" h="0">
                   <a:moveTo>
                     <a:pt x="0" y="0"/>
                   </a:moveTo>
                   <a:lnTo>
-                    <a:pt x="7799693" y="0"/>
-                  </a:lnTo>
-                  <a:lnTo>
-                    <a:pt x="7799693" y="0"/>
+                    <a:pt x="7660515" y="0"/>
+                  </a:lnTo>
+                  <a:lnTo>
+                    <a:pt x="7660515" y="0"/>
                   </a:lnTo>
                 </a:path>
               </a:pathLst>
@@ -2738,27 +2773,27 @@
         </p:sp>
         <p:sp>
           <p:nvSpPr>
-            <p:cNvPr id="15" name="pl15"/>
+            <p:cNvPr id="16" name="pl16"/>
             <p:cNvSpPr/>
             <p:nvPr/>
           </p:nvSpPr>
           <p:spPr>
             <a:xfrm>
-              <a:off x="817517" y="3068859"/>
-              <a:ext cx="7799693" cy="0"/>
+              <a:off x="887106" y="2502292"/>
+              <a:ext cx="7660515" cy="0"/>
             </a:xfrm>
             <a:custGeom>
               <a:avLst/>
               <a:pathLst>
-                <a:path w="7799693" h="0">
+                <a:path w="7660515" h="0">
                   <a:moveTo>
                     <a:pt x="0" y="0"/>
                   </a:moveTo>
                   <a:lnTo>
-                    <a:pt x="7799693" y="0"/>
-                  </a:lnTo>
-                  <a:lnTo>
-                    <a:pt x="7799693" y="0"/>
+                    <a:pt x="7660515" y="0"/>
+                  </a:lnTo>
+                  <a:lnTo>
+                    <a:pt x="7660515" y="0"/>
                   </a:lnTo>
                 </a:path>
               </a:pathLst>
@@ -2781,27 +2816,27 @@
         </p:sp>
         <p:sp>
           <p:nvSpPr>
-            <p:cNvPr id="16" name="pl16"/>
+            <p:cNvPr id="17" name="pl17"/>
             <p:cNvSpPr/>
             <p:nvPr/>
           </p:nvSpPr>
           <p:spPr>
             <a:xfrm>
-              <a:off x="817517" y="2239395"/>
-              <a:ext cx="7799693" cy="0"/>
+              <a:off x="887106" y="2202958"/>
+              <a:ext cx="7660515" cy="0"/>
             </a:xfrm>
             <a:custGeom>
               <a:avLst/>
               <a:pathLst>
-                <a:path w="7799693" h="0">
+                <a:path w="7660515" h="0">
                   <a:moveTo>
                     <a:pt x="0" y="0"/>
                   </a:moveTo>
                   <a:lnTo>
-                    <a:pt x="7799693" y="0"/>
-                  </a:lnTo>
-                  <a:lnTo>
-                    <a:pt x="7799693" y="0"/>
+                    <a:pt x="7660515" y="0"/>
+                  </a:lnTo>
+                  <a:lnTo>
+                    <a:pt x="7660515" y="0"/>
                   </a:lnTo>
                 </a:path>
               </a:pathLst>
@@ -2824,21 +2859,21 @@
         </p:sp>
         <p:sp>
           <p:nvSpPr>
-            <p:cNvPr id="17" name="pl17"/>
+            <p:cNvPr id="18" name="pl18"/>
             <p:cNvSpPr/>
             <p:nvPr/>
           </p:nvSpPr>
           <p:spPr>
             <a:xfrm>
-              <a:off x="2559122" y="2073503"/>
-              <a:ext cx="0" cy="3649639"/>
+              <a:off x="2597634" y="2143092"/>
+              <a:ext cx="0" cy="1317069"/>
             </a:xfrm>
             <a:custGeom>
               <a:avLst/>
               <a:pathLst>
-                <a:path w="0" h="3649639">
+                <a:path w="0" h="1317069">
                   <a:moveTo>
-                    <a:pt x="0" y="3649639"/>
+                    <a:pt x="0" y="1317069"/>
                   </a:moveTo>
                   <a:lnTo>
                     <a:pt x="0" y="0"/>
@@ -2867,21 +2902,21 @@
         </p:sp>
         <p:sp>
           <p:nvSpPr>
-            <p:cNvPr id="18" name="pl18"/>
+            <p:cNvPr id="19" name="pl19"/>
             <p:cNvSpPr/>
             <p:nvPr/>
           </p:nvSpPr>
           <p:spPr>
             <a:xfrm>
-              <a:off x="4613698" y="2073503"/>
-              <a:ext cx="0" cy="3649639"/>
+              <a:off x="4615547" y="2143092"/>
+              <a:ext cx="0" cy="1317069"/>
             </a:xfrm>
             <a:custGeom>
               <a:avLst/>
               <a:pathLst>
-                <a:path w="0" h="3649639">
+                <a:path w="0" h="1317069">
                   <a:moveTo>
-                    <a:pt x="0" y="3649639"/>
+                    <a:pt x="0" y="1317069"/>
                   </a:moveTo>
                   <a:lnTo>
                     <a:pt x="0" y="0"/>
@@ -2910,21 +2945,21 @@
         </p:sp>
         <p:sp>
           <p:nvSpPr>
-            <p:cNvPr id="19" name="pl19"/>
+            <p:cNvPr id="20" name="pl20"/>
             <p:cNvSpPr/>
             <p:nvPr/>
           </p:nvSpPr>
           <p:spPr>
             <a:xfrm>
-              <a:off x="6668273" y="2073503"/>
-              <a:ext cx="0" cy="3649639"/>
+              <a:off x="6633461" y="2143092"/>
+              <a:ext cx="0" cy="1317069"/>
             </a:xfrm>
             <a:custGeom>
               <a:avLst/>
               <a:pathLst>
-                <a:path w="0" h="3649639">
+                <a:path w="0" h="1317069">
                   <a:moveTo>
-                    <a:pt x="0" y="3649639"/>
+                    <a:pt x="0" y="1317069"/>
                   </a:moveTo>
                   <a:lnTo>
                     <a:pt x="0" y="0"/>
@@ -2953,513 +2988,513 @@
         </p:sp>
         <p:sp>
           <p:nvSpPr>
-            <p:cNvPr id="20" name="pg20"/>
+            <p:cNvPr id="21" name="pg21"/>
             <p:cNvSpPr/>
             <p:nvPr/>
           </p:nvSpPr>
           <p:spPr>
             <a:xfrm>
-              <a:off x="1172049" y="2073503"/>
-              <a:ext cx="7090630" cy="3483289"/>
+              <a:off x="1235312" y="2143092"/>
+              <a:ext cx="6964104" cy="1257037"/>
             </a:xfrm>
             <a:custGeom>
               <a:avLst/>
               <a:pathLst>
-                <a:path w="7090630" h="3483289">
+                <a:path w="6964104" h="1257037">
                   <a:moveTo>
-                    <a:pt x="2571041" y="0"/>
+                    <a:pt x="2525163" y="0"/>
                   </a:moveTo>
                   <a:lnTo>
-                    <a:pt x="2578410" y="53695"/>
-                  </a:lnTo>
-                  <a:lnTo>
-                    <a:pt x="2650033" y="506626"/>
-                  </a:lnTo>
-                  <a:lnTo>
-                    <a:pt x="2721655" y="899749"/>
-                  </a:lnTo>
-                  <a:lnTo>
-                    <a:pt x="2793278" y="1240960"/>
-                  </a:lnTo>
-                  <a:lnTo>
-                    <a:pt x="2864901" y="1537115"/>
-                  </a:lnTo>
-                  <a:lnTo>
-                    <a:pt x="2936523" y="1794164"/>
-                  </a:lnTo>
-                  <a:lnTo>
-                    <a:pt x="3008146" y="2017270"/>
-                  </a:lnTo>
-                  <a:lnTo>
-                    <a:pt x="3079768" y="2210915"/>
-                  </a:lnTo>
-                  <a:lnTo>
-                    <a:pt x="3151391" y="2378990"/>
-                  </a:lnTo>
-                  <a:lnTo>
-                    <a:pt x="3223013" y="2524870"/>
-                  </a:lnTo>
-                  <a:lnTo>
-                    <a:pt x="3294636" y="2651488"/>
-                  </a:lnTo>
-                  <a:lnTo>
-                    <a:pt x="3366258" y="2671916"/>
-                  </a:lnTo>
-                  <a:lnTo>
-                    <a:pt x="3437881" y="2689589"/>
-                  </a:lnTo>
-                  <a:lnTo>
-                    <a:pt x="3509503" y="2706878"/>
-                  </a:lnTo>
-                  <a:lnTo>
-                    <a:pt x="3581126" y="2723791"/>
-                  </a:lnTo>
-                  <a:lnTo>
-                    <a:pt x="3652748" y="2740335"/>
-                  </a:lnTo>
-                  <a:lnTo>
-                    <a:pt x="3724371" y="2756519"/>
-                  </a:lnTo>
-                  <a:lnTo>
-                    <a:pt x="3795993" y="2772351"/>
-                  </a:lnTo>
-                  <a:lnTo>
-                    <a:pt x="3867616" y="2787838"/>
-                  </a:lnTo>
-                  <a:lnTo>
-                    <a:pt x="3939238" y="2802988"/>
-                  </a:lnTo>
-                  <a:lnTo>
-                    <a:pt x="4010861" y="2817808"/>
-                  </a:lnTo>
-                  <a:lnTo>
-                    <a:pt x="4082483" y="2832305"/>
-                  </a:lnTo>
-                  <a:lnTo>
-                    <a:pt x="4154106" y="2846487"/>
-                  </a:lnTo>
-                  <a:lnTo>
-                    <a:pt x="4225729" y="2860360"/>
-                  </a:lnTo>
-                  <a:lnTo>
-                    <a:pt x="4297351" y="2873931"/>
-                  </a:lnTo>
-                  <a:lnTo>
-                    <a:pt x="4368974" y="2887207"/>
-                  </a:lnTo>
-                  <a:lnTo>
-                    <a:pt x="4440596" y="2900194"/>
-                  </a:lnTo>
-                  <a:lnTo>
-                    <a:pt x="4512219" y="2912898"/>
-                  </a:lnTo>
-                  <a:lnTo>
-                    <a:pt x="4583841" y="2925325"/>
-                  </a:lnTo>
-                  <a:lnTo>
-                    <a:pt x="4655464" y="2937482"/>
-                  </a:lnTo>
-                  <a:lnTo>
-                    <a:pt x="4727086" y="2949374"/>
-                  </a:lnTo>
-                  <a:lnTo>
-                    <a:pt x="4798709" y="2961007"/>
-                  </a:lnTo>
-                  <a:lnTo>
-                    <a:pt x="4870331" y="2972387"/>
-                  </a:lnTo>
-                  <a:lnTo>
-                    <a:pt x="4941954" y="2983520"/>
-                  </a:lnTo>
-                  <a:lnTo>
-                    <a:pt x="5013576" y="2994410"/>
-                  </a:lnTo>
-                  <a:lnTo>
-                    <a:pt x="5085199" y="3005062"/>
-                  </a:lnTo>
-                  <a:lnTo>
-                    <a:pt x="5156821" y="3015483"/>
-                  </a:lnTo>
-                  <a:lnTo>
-                    <a:pt x="5228444" y="3025677"/>
-                  </a:lnTo>
-                  <a:lnTo>
-                    <a:pt x="5300066" y="3035650"/>
-                  </a:lnTo>
-                  <a:lnTo>
-                    <a:pt x="5371689" y="3045405"/>
-                  </a:lnTo>
-                  <a:lnTo>
-                    <a:pt x="5443311" y="3054947"/>
-                  </a:lnTo>
-                  <a:lnTo>
-                    <a:pt x="5514934" y="3064282"/>
-                  </a:lnTo>
-                  <a:lnTo>
-                    <a:pt x="5586557" y="3073414"/>
-                  </a:lnTo>
-                  <a:lnTo>
-                    <a:pt x="5658179" y="3082347"/>
-                  </a:lnTo>
-                  <a:lnTo>
-                    <a:pt x="5729802" y="3091085"/>
-                  </a:lnTo>
-                  <a:lnTo>
-                    <a:pt x="5801424" y="3099634"/>
-                  </a:lnTo>
-                  <a:lnTo>
-                    <a:pt x="5873047" y="3107996"/>
-                  </a:lnTo>
-                  <a:lnTo>
-                    <a:pt x="5944669" y="3116176"/>
-                  </a:lnTo>
-                  <a:lnTo>
-                    <a:pt x="6016292" y="3124178"/>
-                  </a:lnTo>
-                  <a:lnTo>
-                    <a:pt x="6087914" y="3132006"/>
-                  </a:lnTo>
-                  <a:lnTo>
-                    <a:pt x="6159537" y="3139663"/>
-                  </a:lnTo>
-                  <a:lnTo>
-                    <a:pt x="6231159" y="3147154"/>
-                  </a:lnTo>
-                  <a:lnTo>
-                    <a:pt x="6302782" y="3154481"/>
-                  </a:lnTo>
-                  <a:lnTo>
-                    <a:pt x="6374404" y="3161649"/>
-                  </a:lnTo>
-                  <a:lnTo>
-                    <a:pt x="6446027" y="3168661"/>
-                  </a:lnTo>
-                  <a:lnTo>
-                    <a:pt x="6517649" y="3175521"/>
-                  </a:lnTo>
-                  <a:lnTo>
-                    <a:pt x="6589272" y="3182231"/>
-                  </a:lnTo>
-                  <a:lnTo>
-                    <a:pt x="6660894" y="3188795"/>
-                  </a:lnTo>
-                  <a:lnTo>
-                    <a:pt x="6732517" y="3195216"/>
-                  </a:lnTo>
-                  <a:lnTo>
-                    <a:pt x="6804139" y="3201497"/>
-                  </a:lnTo>
-                  <a:lnTo>
-                    <a:pt x="6875762" y="3207642"/>
-                  </a:lnTo>
-                  <a:lnTo>
-                    <a:pt x="6947385" y="3213653"/>
-                  </a:lnTo>
-                  <a:lnTo>
-                    <a:pt x="7019007" y="3219533"/>
-                  </a:lnTo>
-                  <a:lnTo>
-                    <a:pt x="7090630" y="3225285"/>
-                  </a:lnTo>
-                  <a:lnTo>
-                    <a:pt x="7090630" y="3483289"/>
-                  </a:lnTo>
-                  <a:lnTo>
-                    <a:pt x="7019007" y="3483219"/>
-                  </a:lnTo>
-                  <a:lnTo>
-                    <a:pt x="6947385" y="3483139"/>
-                  </a:lnTo>
-                  <a:lnTo>
-                    <a:pt x="6875762" y="3483046"/>
-                  </a:lnTo>
-                  <a:lnTo>
-                    <a:pt x="6804139" y="3482940"/>
-                  </a:lnTo>
-                  <a:lnTo>
-                    <a:pt x="6732517" y="3482817"/>
-                  </a:lnTo>
-                  <a:lnTo>
-                    <a:pt x="6660894" y="3482676"/>
-                  </a:lnTo>
-                  <a:lnTo>
-                    <a:pt x="6589272" y="3482513"/>
-                  </a:lnTo>
-                  <a:lnTo>
-                    <a:pt x="6517649" y="3482325"/>
-                  </a:lnTo>
-                  <a:lnTo>
-                    <a:pt x="6446027" y="3482109"/>
-                  </a:lnTo>
-                  <a:lnTo>
-                    <a:pt x="6374404" y="3481860"/>
-                  </a:lnTo>
-                  <a:lnTo>
-                    <a:pt x="6302782" y="3481573"/>
-                  </a:lnTo>
-                  <a:lnTo>
-                    <a:pt x="6231159" y="3481243"/>
-                  </a:lnTo>
-                  <a:lnTo>
-                    <a:pt x="6159537" y="3480862"/>
-                  </a:lnTo>
-                  <a:lnTo>
-                    <a:pt x="6087914" y="3480423"/>
-                  </a:lnTo>
-                  <a:lnTo>
-                    <a:pt x="6016292" y="3479917"/>
-                  </a:lnTo>
-                  <a:lnTo>
-                    <a:pt x="5944669" y="3479335"/>
-                  </a:lnTo>
-                  <a:lnTo>
-                    <a:pt x="5873047" y="3478664"/>
-                  </a:lnTo>
-                  <a:lnTo>
-                    <a:pt x="5801424" y="3477890"/>
-                  </a:lnTo>
-                  <a:lnTo>
-                    <a:pt x="5729802" y="3476999"/>
-                  </a:lnTo>
-                  <a:lnTo>
-                    <a:pt x="5658179" y="3475973"/>
-                  </a:lnTo>
-                  <a:lnTo>
-                    <a:pt x="5586557" y="3474790"/>
-                  </a:lnTo>
-                  <a:lnTo>
-                    <a:pt x="5514934" y="3473428"/>
-                  </a:lnTo>
-                  <a:lnTo>
-                    <a:pt x="5443311" y="3471858"/>
-                  </a:lnTo>
-                  <a:lnTo>
-                    <a:pt x="5371689" y="3470049"/>
-                  </a:lnTo>
-                  <a:lnTo>
-                    <a:pt x="5300066" y="3467965"/>
-                  </a:lnTo>
-                  <a:lnTo>
-                    <a:pt x="5228444" y="3465564"/>
-                  </a:lnTo>
-                  <a:lnTo>
-                    <a:pt x="5156821" y="3462798"/>
-                  </a:lnTo>
-                  <a:lnTo>
-                    <a:pt x="5085199" y="3459611"/>
-                  </a:lnTo>
-                  <a:lnTo>
-                    <a:pt x="5013576" y="3455939"/>
-                  </a:lnTo>
-                  <a:lnTo>
-                    <a:pt x="4941954" y="3451709"/>
-                  </a:lnTo>
-                  <a:lnTo>
-                    <a:pt x="4870331" y="3446835"/>
-                  </a:lnTo>
-                  <a:lnTo>
-                    <a:pt x="4798709" y="3441219"/>
-                  </a:lnTo>
-                  <a:lnTo>
-                    <a:pt x="4727086" y="3434749"/>
-                  </a:lnTo>
-                  <a:lnTo>
-                    <a:pt x="4655464" y="3427295"/>
-                  </a:lnTo>
-                  <a:lnTo>
-                    <a:pt x="4583841" y="3418706"/>
-                  </a:lnTo>
-                  <a:lnTo>
-                    <a:pt x="4512219" y="3408811"/>
-                  </a:lnTo>
-                  <a:lnTo>
-                    <a:pt x="4440596" y="3397411"/>
-                  </a:lnTo>
-                  <a:lnTo>
-                    <a:pt x="4368974" y="3384276"/>
-                  </a:lnTo>
-                  <a:lnTo>
-                    <a:pt x="4297351" y="3369143"/>
-                  </a:lnTo>
-                  <a:lnTo>
-                    <a:pt x="4225729" y="3351707"/>
-                  </a:lnTo>
-                  <a:lnTo>
-                    <a:pt x="4154106" y="3331619"/>
-                  </a:lnTo>
-                  <a:lnTo>
-                    <a:pt x="4082483" y="3308475"/>
-                  </a:lnTo>
-                  <a:lnTo>
-                    <a:pt x="4010861" y="3281810"/>
-                  </a:lnTo>
-                  <a:lnTo>
-                    <a:pt x="3939238" y="3251087"/>
-                  </a:lnTo>
-                  <a:lnTo>
-                    <a:pt x="3867616" y="3215691"/>
-                  </a:lnTo>
-                  <a:lnTo>
-                    <a:pt x="3795993" y="3174910"/>
-                  </a:lnTo>
-                  <a:lnTo>
-                    <a:pt x="3724371" y="3127925"/>
-                  </a:lnTo>
-                  <a:lnTo>
-                    <a:pt x="3652748" y="3073791"/>
-                  </a:lnTo>
-                  <a:lnTo>
-                    <a:pt x="3581126" y="3011421"/>
-                  </a:lnTo>
-                  <a:lnTo>
-                    <a:pt x="3509503" y="2939563"/>
-                  </a:lnTo>
-                  <a:lnTo>
-                    <a:pt x="3437881" y="2856772"/>
-                  </a:lnTo>
-                  <a:lnTo>
-                    <a:pt x="3366258" y="2761386"/>
-                  </a:lnTo>
-                  <a:lnTo>
-                    <a:pt x="3294636" y="2653849"/>
-                  </a:lnTo>
-                  <a:lnTo>
-                    <a:pt x="3223013" y="2635380"/>
-                  </a:lnTo>
-                  <a:lnTo>
-                    <a:pt x="3151391" y="2616500"/>
-                  </a:lnTo>
-                  <a:lnTo>
-                    <a:pt x="3079768" y="2597200"/>
-                  </a:lnTo>
-                  <a:lnTo>
-                    <a:pt x="3008146" y="2577471"/>
-                  </a:lnTo>
-                  <a:lnTo>
-                    <a:pt x="2936523" y="2557302"/>
-                  </a:lnTo>
-                  <a:lnTo>
-                    <a:pt x="2864901" y="2536684"/>
-                  </a:lnTo>
-                  <a:lnTo>
-                    <a:pt x="2793278" y="2515608"/>
-                  </a:lnTo>
-                  <a:lnTo>
-                    <a:pt x="2721655" y="2494063"/>
-                  </a:lnTo>
-                  <a:lnTo>
-                    <a:pt x="2650033" y="2472038"/>
-                  </a:lnTo>
-                  <a:lnTo>
-                    <a:pt x="2578410" y="2449523"/>
-                  </a:lnTo>
-                  <a:lnTo>
-                    <a:pt x="2506788" y="2426507"/>
-                  </a:lnTo>
-                  <a:lnTo>
-                    <a:pt x="2435165" y="2402978"/>
-                  </a:lnTo>
-                  <a:lnTo>
-                    <a:pt x="2363543" y="2378926"/>
-                  </a:lnTo>
-                  <a:lnTo>
-                    <a:pt x="2291920" y="2354339"/>
-                  </a:lnTo>
-                  <a:lnTo>
-                    <a:pt x="2220298" y="2329205"/>
-                  </a:lnTo>
-                  <a:lnTo>
-                    <a:pt x="2148675" y="2303511"/>
-                  </a:lnTo>
-                  <a:lnTo>
-                    <a:pt x="2077053" y="2277246"/>
-                  </a:lnTo>
-                  <a:lnTo>
-                    <a:pt x="2005430" y="2250396"/>
-                  </a:lnTo>
-                  <a:lnTo>
-                    <a:pt x="1933808" y="2222948"/>
-                  </a:lnTo>
-                  <a:lnTo>
-                    <a:pt x="1862185" y="2194890"/>
-                  </a:lnTo>
-                  <a:lnTo>
-                    <a:pt x="1790563" y="2166207"/>
-                  </a:lnTo>
-                  <a:lnTo>
-                    <a:pt x="1718940" y="2136886"/>
-                  </a:lnTo>
-                  <a:lnTo>
-                    <a:pt x="1647318" y="2106912"/>
-                  </a:lnTo>
-                  <a:lnTo>
-                    <a:pt x="1575695" y="2076271"/>
-                  </a:lnTo>
-                  <a:lnTo>
-                    <a:pt x="1504073" y="2044949"/>
-                  </a:lnTo>
-                  <a:lnTo>
-                    <a:pt x="1432450" y="2012929"/>
-                  </a:lnTo>
-                  <a:lnTo>
-                    <a:pt x="1360827" y="1980197"/>
-                  </a:lnTo>
-                  <a:lnTo>
-                    <a:pt x="1289205" y="1946736"/>
-                  </a:lnTo>
-                  <a:lnTo>
-                    <a:pt x="1217582" y="1912531"/>
-                  </a:lnTo>
-                  <a:lnTo>
-                    <a:pt x="1145960" y="1877564"/>
-                  </a:lnTo>
-                  <a:lnTo>
-                    <a:pt x="1074337" y="1841819"/>
-                  </a:lnTo>
-                  <a:lnTo>
-                    <a:pt x="1002715" y="1805279"/>
-                  </a:lnTo>
-                  <a:lnTo>
-                    <a:pt x="931092" y="1767926"/>
-                  </a:lnTo>
-                  <a:lnTo>
-                    <a:pt x="859470" y="1729741"/>
-                  </a:lnTo>
-                  <a:lnTo>
-                    <a:pt x="787847" y="1690707"/>
-                  </a:lnTo>
-                  <a:lnTo>
-                    <a:pt x="716225" y="1650804"/>
-                  </a:lnTo>
-                  <a:lnTo>
-                    <a:pt x="644602" y="1610012"/>
-                  </a:lnTo>
-                  <a:lnTo>
-                    <a:pt x="572980" y="1568313"/>
-                  </a:lnTo>
-                  <a:lnTo>
-                    <a:pt x="501357" y="1525686"/>
-                  </a:lnTo>
-                  <a:lnTo>
-                    <a:pt x="429735" y="1482111"/>
-                  </a:lnTo>
-                  <a:lnTo>
-                    <a:pt x="358112" y="1437566"/>
-                  </a:lnTo>
-                  <a:lnTo>
-                    <a:pt x="286490" y="1392029"/>
-                  </a:lnTo>
-                  <a:lnTo>
-                    <a:pt x="214867" y="1345479"/>
-                  </a:lnTo>
-                  <a:lnTo>
-                    <a:pt x="143245" y="1297893"/>
-                  </a:lnTo>
-                  <a:lnTo>
-                    <a:pt x="71622" y="1249248"/>
-                  </a:lnTo>
-                  <a:lnTo>
-                    <a:pt x="0" y="1199520"/>
+                    <a:pt x="2532401" y="19377"/>
+                  </a:lnTo>
+                  <a:lnTo>
+                    <a:pt x="2602746" y="182829"/>
+                  </a:lnTo>
+                  <a:lnTo>
+                    <a:pt x="2673090" y="324698"/>
+                  </a:lnTo>
+                  <a:lnTo>
+                    <a:pt x="2743435" y="447833"/>
+                  </a:lnTo>
+                  <a:lnTo>
+                    <a:pt x="2813779" y="554708"/>
+                  </a:lnTo>
+                  <a:lnTo>
+                    <a:pt x="2884124" y="647471"/>
+                  </a:lnTo>
+                  <a:lnTo>
+                    <a:pt x="2954468" y="727985"/>
+                  </a:lnTo>
+                  <a:lnTo>
+                    <a:pt x="3024813" y="797867"/>
+                  </a:lnTo>
+                  <a:lnTo>
+                    <a:pt x="3095157" y="858521"/>
+                  </a:lnTo>
+                  <a:lnTo>
+                    <a:pt x="3165502" y="911166"/>
+                  </a:lnTo>
+                  <a:lnTo>
+                    <a:pt x="3235846" y="956859"/>
+                  </a:lnTo>
+                  <a:lnTo>
+                    <a:pt x="3306191" y="964231"/>
+                  </a:lnTo>
+                  <a:lnTo>
+                    <a:pt x="3376535" y="970609"/>
+                  </a:lnTo>
+                  <a:lnTo>
+                    <a:pt x="3446880" y="976848"/>
+                  </a:lnTo>
+                  <a:lnTo>
+                    <a:pt x="3517224" y="982952"/>
+                  </a:lnTo>
+                  <a:lnTo>
+                    <a:pt x="3587569" y="988922"/>
+                  </a:lnTo>
+                  <a:lnTo>
+                    <a:pt x="3657913" y="994763"/>
+                  </a:lnTo>
+                  <a:lnTo>
+                    <a:pt x="3728257" y="1000476"/>
+                  </a:lnTo>
+                  <a:lnTo>
+                    <a:pt x="3798602" y="1006065"/>
+                  </a:lnTo>
+                  <a:lnTo>
+                    <a:pt x="3868946" y="1011532"/>
+                  </a:lnTo>
+                  <a:lnTo>
+                    <a:pt x="3939291" y="1016880"/>
+                  </a:lnTo>
+                  <a:lnTo>
+                    <a:pt x="4009635" y="1022112"/>
+                  </a:lnTo>
+                  <a:lnTo>
+                    <a:pt x="4079980" y="1027230"/>
+                  </a:lnTo>
+                  <a:lnTo>
+                    <a:pt x="4150324" y="1032236"/>
+                  </a:lnTo>
+                  <a:lnTo>
+                    <a:pt x="4220669" y="1037134"/>
+                  </a:lnTo>
+                  <a:lnTo>
+                    <a:pt x="4291013" y="1041925"/>
+                  </a:lnTo>
+                  <a:lnTo>
+                    <a:pt x="4361358" y="1046611"/>
+                  </a:lnTo>
+                  <a:lnTo>
+                    <a:pt x="4431702" y="1051196"/>
+                  </a:lnTo>
+                  <a:lnTo>
+                    <a:pt x="4502047" y="1055681"/>
+                  </a:lnTo>
+                  <a:lnTo>
+                    <a:pt x="4572391" y="1060068"/>
+                  </a:lnTo>
+                  <a:lnTo>
+                    <a:pt x="4642736" y="1064359"/>
+                  </a:lnTo>
+                  <a:lnTo>
+                    <a:pt x="4713080" y="1068558"/>
+                  </a:lnTo>
+                  <a:lnTo>
+                    <a:pt x="4783425" y="1072664"/>
+                  </a:lnTo>
+                  <a:lnTo>
+                    <a:pt x="4853769" y="1076682"/>
+                  </a:lnTo>
+                  <a:lnTo>
+                    <a:pt x="4924114" y="1080612"/>
+                  </a:lnTo>
+                  <a:lnTo>
+                    <a:pt x="4994458" y="1084456"/>
+                  </a:lnTo>
+                  <a:lnTo>
+                    <a:pt x="5064803" y="1088217"/>
+                  </a:lnTo>
+                  <a:lnTo>
+                    <a:pt x="5135147" y="1091895"/>
+                  </a:lnTo>
+                  <a:lnTo>
+                    <a:pt x="5205492" y="1095494"/>
+                  </a:lnTo>
+                  <a:lnTo>
+                    <a:pt x="5275836" y="1099015"/>
+                  </a:lnTo>
+                  <a:lnTo>
+                    <a:pt x="5346181" y="1102458"/>
+                  </a:lnTo>
+                  <a:lnTo>
+                    <a:pt x="5416525" y="1105827"/>
+                  </a:lnTo>
+                  <a:lnTo>
+                    <a:pt x="5486870" y="1109122"/>
+                  </a:lnTo>
+                  <a:lnTo>
+                    <a:pt x="5557214" y="1112346"/>
+                  </a:lnTo>
+                  <a:lnTo>
+                    <a:pt x="5627559" y="1115500"/>
+                  </a:lnTo>
+                  <a:lnTo>
+                    <a:pt x="5697903" y="1118585"/>
+                  </a:lnTo>
+                  <a:lnTo>
+                    <a:pt x="5768248" y="1121602"/>
+                  </a:lnTo>
+                  <a:lnTo>
+                    <a:pt x="5838592" y="1124554"/>
+                  </a:lnTo>
+                  <a:lnTo>
+                    <a:pt x="5908937" y="1127442"/>
+                  </a:lnTo>
+                  <a:lnTo>
+                    <a:pt x="5979281" y="1130267"/>
+                  </a:lnTo>
+                  <a:lnTo>
+                    <a:pt x="6049626" y="1133030"/>
+                  </a:lnTo>
+                  <a:lnTo>
+                    <a:pt x="6119970" y="1135733"/>
+                  </a:lnTo>
+                  <a:lnTo>
+                    <a:pt x="6190315" y="1138378"/>
+                  </a:lnTo>
+                  <a:lnTo>
+                    <a:pt x="6260659" y="1140965"/>
+                  </a:lnTo>
+                  <a:lnTo>
+                    <a:pt x="6331004" y="1143495"/>
+                  </a:lnTo>
+                  <a:lnTo>
+                    <a:pt x="6401348" y="1145970"/>
+                  </a:lnTo>
+                  <a:lnTo>
+                    <a:pt x="6471693" y="1148392"/>
+                  </a:lnTo>
+                  <a:lnTo>
+                    <a:pt x="6542037" y="1150761"/>
+                  </a:lnTo>
+                  <a:lnTo>
+                    <a:pt x="6612382" y="1153078"/>
+                  </a:lnTo>
+                  <a:lnTo>
+                    <a:pt x="6682726" y="1155345"/>
+                  </a:lnTo>
+                  <a:lnTo>
+                    <a:pt x="6753071" y="1157562"/>
+                  </a:lnTo>
+                  <a:lnTo>
+                    <a:pt x="6823415" y="1159731"/>
+                  </a:lnTo>
+                  <a:lnTo>
+                    <a:pt x="6893760" y="1161853"/>
+                  </a:lnTo>
+                  <a:lnTo>
+                    <a:pt x="6964104" y="1163929"/>
+                  </a:lnTo>
+                  <a:lnTo>
+                    <a:pt x="6964104" y="1257037"/>
+                  </a:lnTo>
+                  <a:lnTo>
+                    <a:pt x="6893760" y="1257012"/>
+                  </a:lnTo>
+                  <a:lnTo>
+                    <a:pt x="6823415" y="1256983"/>
+                  </a:lnTo>
+                  <a:lnTo>
+                    <a:pt x="6753071" y="1256949"/>
+                  </a:lnTo>
+                  <a:lnTo>
+                    <a:pt x="6682726" y="1256911"/>
+                  </a:lnTo>
+                  <a:lnTo>
+                    <a:pt x="6612382" y="1256867"/>
+                  </a:lnTo>
+                  <a:lnTo>
+                    <a:pt x="6542037" y="1256816"/>
+                  </a:lnTo>
+                  <a:lnTo>
+                    <a:pt x="6471693" y="1256757"/>
+                  </a:lnTo>
+                  <a:lnTo>
+                    <a:pt x="6401348" y="1256689"/>
+                  </a:lnTo>
+                  <a:lnTo>
+                    <a:pt x="6331004" y="1256611"/>
+                  </a:lnTo>
+                  <a:lnTo>
+                    <a:pt x="6260659" y="1256521"/>
+                  </a:lnTo>
+                  <a:lnTo>
+                    <a:pt x="6190315" y="1256418"/>
+                  </a:lnTo>
+                  <a:lnTo>
+                    <a:pt x="6119970" y="1256298"/>
+                  </a:lnTo>
+                  <a:lnTo>
+                    <a:pt x="6049626" y="1256161"/>
+                  </a:lnTo>
+                  <a:lnTo>
+                    <a:pt x="5979281" y="1256002"/>
+                  </a:lnTo>
+                  <a:lnTo>
+                    <a:pt x="5908937" y="1255820"/>
+                  </a:lnTo>
+                  <a:lnTo>
+                    <a:pt x="5838592" y="1255610"/>
+                  </a:lnTo>
+                  <a:lnTo>
+                    <a:pt x="5768248" y="1255368"/>
+                  </a:lnTo>
+                  <a:lnTo>
+                    <a:pt x="5697903" y="1255088"/>
+                  </a:lnTo>
+                  <a:lnTo>
+                    <a:pt x="5627559" y="1254767"/>
+                  </a:lnTo>
+                  <a:lnTo>
+                    <a:pt x="5557214" y="1254397"/>
+                  </a:lnTo>
+                  <a:lnTo>
+                    <a:pt x="5486870" y="1253970"/>
+                  </a:lnTo>
+                  <a:lnTo>
+                    <a:pt x="5416525" y="1253478"/>
+                  </a:lnTo>
+                  <a:lnTo>
+                    <a:pt x="5346181" y="1252911"/>
+                  </a:lnTo>
+                  <a:lnTo>
+                    <a:pt x="5275836" y="1252259"/>
+                  </a:lnTo>
+                  <a:lnTo>
+                    <a:pt x="5205492" y="1251507"/>
+                  </a:lnTo>
+                  <a:lnTo>
+                    <a:pt x="5135147" y="1250640"/>
+                  </a:lnTo>
+                  <a:lnTo>
+                    <a:pt x="5064803" y="1249642"/>
+                  </a:lnTo>
+                  <a:lnTo>
+                    <a:pt x="4994458" y="1248492"/>
+                  </a:lnTo>
+                  <a:lnTo>
+                    <a:pt x="4924114" y="1247167"/>
+                  </a:lnTo>
+                  <a:lnTo>
+                    <a:pt x="4853769" y="1245640"/>
+                  </a:lnTo>
+                  <a:lnTo>
+                    <a:pt x="4783425" y="1243881"/>
+                  </a:lnTo>
+                  <a:lnTo>
+                    <a:pt x="4713080" y="1241855"/>
+                  </a:lnTo>
+                  <a:lnTo>
+                    <a:pt x="4642736" y="1239520"/>
+                  </a:lnTo>
+                  <a:lnTo>
+                    <a:pt x="4572391" y="1236830"/>
+                  </a:lnTo>
+                  <a:lnTo>
+                    <a:pt x="4502047" y="1233730"/>
+                  </a:lnTo>
+                  <a:lnTo>
+                    <a:pt x="4431702" y="1230159"/>
+                  </a:lnTo>
+                  <a:lnTo>
+                    <a:pt x="4361358" y="1226045"/>
+                  </a:lnTo>
+                  <a:lnTo>
+                    <a:pt x="4291013" y="1221305"/>
+                  </a:lnTo>
+                  <a:lnTo>
+                    <a:pt x="4220669" y="1215844"/>
+                  </a:lnTo>
+                  <a:lnTo>
+                    <a:pt x="4150324" y="1209552"/>
+                  </a:lnTo>
+                  <a:lnTo>
+                    <a:pt x="4079980" y="1202303"/>
+                  </a:lnTo>
+                  <a:lnTo>
+                    <a:pt x="4009635" y="1193950"/>
+                  </a:lnTo>
+                  <a:lnTo>
+                    <a:pt x="3939291" y="1184328"/>
+                  </a:lnTo>
+                  <a:lnTo>
+                    <a:pt x="3868946" y="1173241"/>
+                  </a:lnTo>
+                  <a:lnTo>
+                    <a:pt x="3798602" y="1160467"/>
+                  </a:lnTo>
+                  <a:lnTo>
+                    <a:pt x="3728257" y="1145750"/>
+                  </a:lnTo>
+                  <a:lnTo>
+                    <a:pt x="3657913" y="1128794"/>
+                  </a:lnTo>
+                  <a:lnTo>
+                    <a:pt x="3587569" y="1109258"/>
+                  </a:lnTo>
+                  <a:lnTo>
+                    <a:pt x="3517224" y="1086751"/>
+                  </a:lnTo>
+                  <a:lnTo>
+                    <a:pt x="3446880" y="1060819"/>
+                  </a:lnTo>
+                  <a:lnTo>
+                    <a:pt x="3376535" y="1030942"/>
+                  </a:lnTo>
+                  <a:lnTo>
+                    <a:pt x="3306191" y="996519"/>
+                  </a:lnTo>
+                  <a:lnTo>
+                    <a:pt x="3235846" y="957711"/>
+                  </a:lnTo>
+                  <a:lnTo>
+                    <a:pt x="3165502" y="951046"/>
+                  </a:lnTo>
+                  <a:lnTo>
+                    <a:pt x="3095157" y="944233"/>
+                  </a:lnTo>
+                  <a:lnTo>
+                    <a:pt x="3024813" y="937268"/>
+                  </a:lnTo>
+                  <a:lnTo>
+                    <a:pt x="2954468" y="930148"/>
+                  </a:lnTo>
+                  <a:lnTo>
+                    <a:pt x="2884124" y="922870"/>
+                  </a:lnTo>
+                  <a:lnTo>
+                    <a:pt x="2813779" y="915429"/>
+                  </a:lnTo>
+                  <a:lnTo>
+                    <a:pt x="2743435" y="907823"/>
+                  </a:lnTo>
+                  <a:lnTo>
+                    <a:pt x="2673090" y="900048"/>
+                  </a:lnTo>
+                  <a:lnTo>
+                    <a:pt x="2602746" y="892100"/>
+                  </a:lnTo>
+                  <a:lnTo>
+                    <a:pt x="2532401" y="883975"/>
+                  </a:lnTo>
+                  <a:lnTo>
+                    <a:pt x="2462057" y="875669"/>
+                  </a:lnTo>
+                  <a:lnTo>
+                    <a:pt x="2391712" y="867178"/>
+                  </a:lnTo>
+                  <a:lnTo>
+                    <a:pt x="2321368" y="858498"/>
+                  </a:lnTo>
+                  <a:lnTo>
+                    <a:pt x="2251023" y="849625"/>
+                  </a:lnTo>
+                  <a:lnTo>
+                    <a:pt x="2180679" y="840555"/>
+                  </a:lnTo>
+                  <a:lnTo>
+                    <a:pt x="2110334" y="831283"/>
+                  </a:lnTo>
+                  <a:lnTo>
+                    <a:pt x="2039990" y="821804"/>
+                  </a:lnTo>
+                  <a:lnTo>
+                    <a:pt x="1969645" y="812114"/>
+                  </a:lnTo>
+                  <a:lnTo>
+                    <a:pt x="1899301" y="802209"/>
+                  </a:lnTo>
+                  <a:lnTo>
+                    <a:pt x="1828956" y="792084"/>
+                  </a:lnTo>
+                  <a:lnTo>
+                    <a:pt x="1758612" y="781733"/>
+                  </a:lnTo>
+                  <a:lnTo>
+                    <a:pt x="1688267" y="771151"/>
+                  </a:lnTo>
+                  <a:lnTo>
+                    <a:pt x="1617923" y="760335"/>
+                  </a:lnTo>
+                  <a:lnTo>
+                    <a:pt x="1547578" y="749277"/>
+                  </a:lnTo>
+                  <a:lnTo>
+                    <a:pt x="1477234" y="737974"/>
+                  </a:lnTo>
+                  <a:lnTo>
+                    <a:pt x="1406889" y="726418"/>
+                  </a:lnTo>
+                  <a:lnTo>
+                    <a:pt x="1336545" y="714606"/>
+                  </a:lnTo>
+                  <a:lnTo>
+                    <a:pt x="1266200" y="702531"/>
+                  </a:lnTo>
+                  <a:lnTo>
+                    <a:pt x="1195856" y="690187"/>
+                  </a:lnTo>
+                  <a:lnTo>
+                    <a:pt x="1125511" y="677568"/>
+                  </a:lnTo>
+                  <a:lnTo>
+                    <a:pt x="1055167" y="664669"/>
+                  </a:lnTo>
+                  <a:lnTo>
+                    <a:pt x="984822" y="651482"/>
+                  </a:lnTo>
+                  <a:lnTo>
+                    <a:pt x="914478" y="638003"/>
+                  </a:lnTo>
+                  <a:lnTo>
+                    <a:pt x="844133" y="624223"/>
+                  </a:lnTo>
+                  <a:lnTo>
+                    <a:pt x="773789" y="610136"/>
+                  </a:lnTo>
+                  <a:lnTo>
+                    <a:pt x="703444" y="595736"/>
+                  </a:lnTo>
+                  <a:lnTo>
+                    <a:pt x="633100" y="581015"/>
+                  </a:lnTo>
+                  <a:lnTo>
+                    <a:pt x="562755" y="565967"/>
+                  </a:lnTo>
+                  <a:lnTo>
+                    <a:pt x="492411" y="550584"/>
+                  </a:lnTo>
+                  <a:lnTo>
+                    <a:pt x="422066" y="534859"/>
+                  </a:lnTo>
+                  <a:lnTo>
+                    <a:pt x="351722" y="518783"/>
+                  </a:lnTo>
+                  <a:lnTo>
+                    <a:pt x="281377" y="502350"/>
+                  </a:lnTo>
+                  <a:lnTo>
+                    <a:pt x="211033" y="485551"/>
+                  </a:lnTo>
+                  <a:lnTo>
+                    <a:pt x="140688" y="468379"/>
+                  </a:lnTo>
+                  <a:lnTo>
+                    <a:pt x="70344" y="450824"/>
+                  </a:lnTo>
+                  <a:lnTo>
+                    <a:pt x="0" y="432878"/>
                   </a:lnTo>
                   <a:lnTo>
                     <a:pt x="0" y="0"/>
@@ -3482,213 +3517,213 @@
         </p:sp>
         <p:sp>
           <p:nvSpPr>
-            <p:cNvPr id="21" name="pl21"/>
+            <p:cNvPr id="22" name="pl22"/>
             <p:cNvSpPr/>
             <p:nvPr/>
           </p:nvSpPr>
           <p:spPr>
             <a:xfrm>
-              <a:off x="3743090" y="2073503"/>
-              <a:ext cx="4519588" cy="3225285"/>
+              <a:off x="3760475" y="2143092"/>
+              <a:ext cx="4438941" cy="1163929"/>
             </a:xfrm>
             <a:custGeom>
               <a:avLst/>
               <a:pathLst>
-                <a:path w="4519588" h="3225285">
+                <a:path w="4438941" h="1163929">
                   <a:moveTo>
                     <a:pt x="0" y="0"/>
                   </a:moveTo>
                   <a:lnTo>
-                    <a:pt x="7369" y="53695"/>
-                  </a:lnTo>
-                  <a:lnTo>
-                    <a:pt x="78992" y="506626"/>
-                  </a:lnTo>
-                  <a:lnTo>
-                    <a:pt x="150614" y="899749"/>
-                  </a:lnTo>
-                  <a:lnTo>
-                    <a:pt x="222237" y="1240960"/>
-                  </a:lnTo>
-                  <a:lnTo>
-                    <a:pt x="293859" y="1537115"/>
-                  </a:lnTo>
-                  <a:lnTo>
-                    <a:pt x="365482" y="1794164"/>
-                  </a:lnTo>
-                  <a:lnTo>
-                    <a:pt x="437104" y="2017270"/>
-                  </a:lnTo>
-                  <a:lnTo>
-                    <a:pt x="508727" y="2210915"/>
-                  </a:lnTo>
-                  <a:lnTo>
-                    <a:pt x="580349" y="2378990"/>
-                  </a:lnTo>
-                  <a:lnTo>
-                    <a:pt x="651972" y="2524870"/>
-                  </a:lnTo>
-                  <a:lnTo>
-                    <a:pt x="723594" y="2651488"/>
-                  </a:lnTo>
-                  <a:lnTo>
-                    <a:pt x="795217" y="2671916"/>
-                  </a:lnTo>
-                  <a:lnTo>
-                    <a:pt x="866840" y="2689589"/>
-                  </a:lnTo>
-                  <a:lnTo>
-                    <a:pt x="938462" y="2706878"/>
-                  </a:lnTo>
-                  <a:lnTo>
-                    <a:pt x="1010085" y="2723791"/>
-                  </a:lnTo>
-                  <a:lnTo>
-                    <a:pt x="1081707" y="2740335"/>
-                  </a:lnTo>
-                  <a:lnTo>
-                    <a:pt x="1153330" y="2756519"/>
-                  </a:lnTo>
-                  <a:lnTo>
-                    <a:pt x="1224952" y="2772351"/>
-                  </a:lnTo>
-                  <a:lnTo>
-                    <a:pt x="1296575" y="2787838"/>
-                  </a:lnTo>
-                  <a:lnTo>
-                    <a:pt x="1368197" y="2802988"/>
-                  </a:lnTo>
-                  <a:lnTo>
-                    <a:pt x="1439820" y="2817808"/>
-                  </a:lnTo>
-                  <a:lnTo>
-                    <a:pt x="1511442" y="2832305"/>
-                  </a:lnTo>
-                  <a:lnTo>
-                    <a:pt x="1583065" y="2846487"/>
-                  </a:lnTo>
-                  <a:lnTo>
-                    <a:pt x="1654687" y="2860360"/>
-                  </a:lnTo>
-                  <a:lnTo>
-                    <a:pt x="1726310" y="2873931"/>
-                  </a:lnTo>
-                  <a:lnTo>
-                    <a:pt x="1797932" y="2887207"/>
-                  </a:lnTo>
-                  <a:lnTo>
-                    <a:pt x="1869555" y="2900194"/>
-                  </a:lnTo>
-                  <a:lnTo>
-                    <a:pt x="1941177" y="2912898"/>
-                  </a:lnTo>
-                  <a:lnTo>
-                    <a:pt x="2012800" y="2925325"/>
-                  </a:lnTo>
-                  <a:lnTo>
-                    <a:pt x="2084422" y="2937482"/>
-                  </a:lnTo>
-                  <a:lnTo>
-                    <a:pt x="2156045" y="2949374"/>
-                  </a:lnTo>
-                  <a:lnTo>
-                    <a:pt x="2227668" y="2961007"/>
-                  </a:lnTo>
-                  <a:lnTo>
-                    <a:pt x="2299290" y="2972387"/>
-                  </a:lnTo>
-                  <a:lnTo>
-                    <a:pt x="2370913" y="2983520"/>
-                  </a:lnTo>
-                  <a:lnTo>
-                    <a:pt x="2442535" y="2994410"/>
-                  </a:lnTo>
-                  <a:lnTo>
-                    <a:pt x="2514158" y="3005062"/>
-                  </a:lnTo>
-                  <a:lnTo>
-                    <a:pt x="2585780" y="3015483"/>
-                  </a:lnTo>
-                  <a:lnTo>
-                    <a:pt x="2657403" y="3025677"/>
-                  </a:lnTo>
-                  <a:lnTo>
-                    <a:pt x="2729025" y="3035650"/>
-                  </a:lnTo>
-                  <a:lnTo>
-                    <a:pt x="2800648" y="3045405"/>
-                  </a:lnTo>
-                  <a:lnTo>
-                    <a:pt x="2872270" y="3054947"/>
-                  </a:lnTo>
-                  <a:lnTo>
-                    <a:pt x="2943893" y="3064282"/>
-                  </a:lnTo>
-                  <a:lnTo>
-                    <a:pt x="3015515" y="3073414"/>
-                  </a:lnTo>
-                  <a:lnTo>
-                    <a:pt x="3087138" y="3082347"/>
-                  </a:lnTo>
-                  <a:lnTo>
-                    <a:pt x="3158760" y="3091085"/>
-                  </a:lnTo>
-                  <a:lnTo>
-                    <a:pt x="3230383" y="3099634"/>
-                  </a:lnTo>
-                  <a:lnTo>
-                    <a:pt x="3302005" y="3107996"/>
-                  </a:lnTo>
-                  <a:lnTo>
-                    <a:pt x="3373628" y="3116176"/>
-                  </a:lnTo>
-                  <a:lnTo>
-                    <a:pt x="3445250" y="3124178"/>
-                  </a:lnTo>
-                  <a:lnTo>
-                    <a:pt x="3516873" y="3132006"/>
-                  </a:lnTo>
-                  <a:lnTo>
-                    <a:pt x="3588496" y="3139663"/>
-                  </a:lnTo>
-                  <a:lnTo>
-                    <a:pt x="3660118" y="3147154"/>
-                  </a:lnTo>
-                  <a:lnTo>
-                    <a:pt x="3731741" y="3154481"/>
-                  </a:lnTo>
-                  <a:lnTo>
-                    <a:pt x="3803363" y="3161649"/>
-                  </a:lnTo>
-                  <a:lnTo>
-                    <a:pt x="3874986" y="3168661"/>
-                  </a:lnTo>
-                  <a:lnTo>
-                    <a:pt x="3946608" y="3175521"/>
-                  </a:lnTo>
-                  <a:lnTo>
-                    <a:pt x="4018231" y="3182231"/>
-                  </a:lnTo>
-                  <a:lnTo>
-                    <a:pt x="4089853" y="3188795"/>
-                  </a:lnTo>
-                  <a:lnTo>
-                    <a:pt x="4161476" y="3195216"/>
-                  </a:lnTo>
-                  <a:lnTo>
-                    <a:pt x="4233098" y="3201497"/>
-                  </a:lnTo>
-                  <a:lnTo>
-                    <a:pt x="4304721" y="3207642"/>
-                  </a:lnTo>
-                  <a:lnTo>
-                    <a:pt x="4376343" y="3213653"/>
-                  </a:lnTo>
-                  <a:lnTo>
-                    <a:pt x="4447966" y="3219533"/>
-                  </a:lnTo>
-                  <a:lnTo>
-                    <a:pt x="4519588" y="3225285"/>
+                    <a:pt x="7238" y="19377"/>
+                  </a:lnTo>
+                  <a:lnTo>
+                    <a:pt x="77582" y="182829"/>
+                  </a:lnTo>
+                  <a:lnTo>
+                    <a:pt x="147927" y="324698"/>
+                  </a:lnTo>
+                  <a:lnTo>
+                    <a:pt x="218271" y="447833"/>
+                  </a:lnTo>
+                  <a:lnTo>
+                    <a:pt x="288616" y="554708"/>
+                  </a:lnTo>
+                  <a:lnTo>
+                    <a:pt x="358960" y="647471"/>
+                  </a:lnTo>
+                  <a:lnTo>
+                    <a:pt x="429305" y="727985"/>
+                  </a:lnTo>
+                  <a:lnTo>
+                    <a:pt x="499649" y="797867"/>
+                  </a:lnTo>
+                  <a:lnTo>
+                    <a:pt x="569994" y="858521"/>
+                  </a:lnTo>
+                  <a:lnTo>
+                    <a:pt x="640338" y="911166"/>
+                  </a:lnTo>
+                  <a:lnTo>
+                    <a:pt x="710683" y="956859"/>
+                  </a:lnTo>
+                  <a:lnTo>
+                    <a:pt x="781027" y="964231"/>
+                  </a:lnTo>
+                  <a:lnTo>
+                    <a:pt x="851372" y="970609"/>
+                  </a:lnTo>
+                  <a:lnTo>
+                    <a:pt x="921716" y="976848"/>
+                  </a:lnTo>
+                  <a:lnTo>
+                    <a:pt x="992061" y="982952"/>
+                  </a:lnTo>
+                  <a:lnTo>
+                    <a:pt x="1062405" y="988922"/>
+                  </a:lnTo>
+                  <a:lnTo>
+                    <a:pt x="1132750" y="994763"/>
+                  </a:lnTo>
+                  <a:lnTo>
+                    <a:pt x="1203094" y="1000476"/>
+                  </a:lnTo>
+                  <a:lnTo>
+                    <a:pt x="1273439" y="1006065"/>
+                  </a:lnTo>
+                  <a:lnTo>
+                    <a:pt x="1343783" y="1011532"/>
+                  </a:lnTo>
+                  <a:lnTo>
+                    <a:pt x="1414128" y="1016880"/>
+                  </a:lnTo>
+                  <a:lnTo>
+                    <a:pt x="1484472" y="1022112"/>
+                  </a:lnTo>
+                  <a:lnTo>
+                    <a:pt x="1554816" y="1027230"/>
+                  </a:lnTo>
+                  <a:lnTo>
+                    <a:pt x="1625161" y="1032236"/>
+                  </a:lnTo>
+                  <a:lnTo>
+                    <a:pt x="1695505" y="1037134"/>
+                  </a:lnTo>
+                  <a:lnTo>
+                    <a:pt x="1765850" y="1041925"/>
+                  </a:lnTo>
+                  <a:lnTo>
+                    <a:pt x="1836194" y="1046611"/>
+                  </a:lnTo>
+                  <a:lnTo>
+                    <a:pt x="1906539" y="1051196"/>
+                  </a:lnTo>
+                  <a:lnTo>
+                    <a:pt x="1976883" y="1055681"/>
+                  </a:lnTo>
+                  <a:lnTo>
+                    <a:pt x="2047228" y="1060068"/>
+                  </a:lnTo>
+                  <a:lnTo>
+                    <a:pt x="2117572" y="1064359"/>
+                  </a:lnTo>
+                  <a:lnTo>
+                    <a:pt x="2187917" y="1068558"/>
+                  </a:lnTo>
+                  <a:lnTo>
+                    <a:pt x="2258261" y="1072664"/>
+                  </a:lnTo>
+                  <a:lnTo>
+                    <a:pt x="2328606" y="1076682"/>
+                  </a:lnTo>
+                  <a:lnTo>
+                    <a:pt x="2398950" y="1080612"/>
+                  </a:lnTo>
+                  <a:lnTo>
+                    <a:pt x="2469295" y="1084456"/>
+                  </a:lnTo>
+                  <a:lnTo>
+                    <a:pt x="2539639" y="1088217"/>
+                  </a:lnTo>
+                  <a:lnTo>
+                    <a:pt x="2609984" y="1091895"/>
+                  </a:lnTo>
+                  <a:lnTo>
+                    <a:pt x="2680328" y="1095494"/>
+                  </a:lnTo>
+                  <a:lnTo>
+                    <a:pt x="2750673" y="1099015"/>
+                  </a:lnTo>
+                  <a:lnTo>
+                    <a:pt x="2821017" y="1102458"/>
+                  </a:lnTo>
+                  <a:lnTo>
+                    <a:pt x="2891362" y="1105827"/>
+                  </a:lnTo>
+                  <a:lnTo>
+                    <a:pt x="2961706" y="1109122"/>
+                  </a:lnTo>
+                  <a:lnTo>
+                    <a:pt x="3032051" y="1112346"/>
+                  </a:lnTo>
+                  <a:lnTo>
+                    <a:pt x="3102395" y="1115500"/>
+                  </a:lnTo>
+                  <a:lnTo>
+                    <a:pt x="3172740" y="1118585"/>
+                  </a:lnTo>
+                  <a:lnTo>
+                    <a:pt x="3243084" y="1121602"/>
+                  </a:lnTo>
+                  <a:lnTo>
+                    <a:pt x="3313429" y="1124554"/>
+                  </a:lnTo>
+                  <a:lnTo>
+                    <a:pt x="3383773" y="1127442"/>
+                  </a:lnTo>
+                  <a:lnTo>
+                    <a:pt x="3454118" y="1130267"/>
+                  </a:lnTo>
+                  <a:lnTo>
+                    <a:pt x="3524462" y="1133030"/>
+                  </a:lnTo>
+                  <a:lnTo>
+                    <a:pt x="3594807" y="1135733"/>
+                  </a:lnTo>
+                  <a:lnTo>
+                    <a:pt x="3665151" y="1138378"/>
+                  </a:lnTo>
+                  <a:lnTo>
+                    <a:pt x="3735496" y="1140965"/>
+                  </a:lnTo>
+                  <a:lnTo>
+                    <a:pt x="3805840" y="1143495"/>
+                  </a:lnTo>
+                  <a:lnTo>
+                    <a:pt x="3876185" y="1145970"/>
+                  </a:lnTo>
+                  <a:lnTo>
+                    <a:pt x="3946529" y="1148392"/>
+                  </a:lnTo>
+                  <a:lnTo>
+                    <a:pt x="4016874" y="1150761"/>
+                  </a:lnTo>
+                  <a:lnTo>
+                    <a:pt x="4087218" y="1153078"/>
+                  </a:lnTo>
+                  <a:lnTo>
+                    <a:pt x="4157563" y="1155345"/>
+                  </a:lnTo>
+                  <a:lnTo>
+                    <a:pt x="4227907" y="1157562"/>
+                  </a:lnTo>
+                  <a:lnTo>
+                    <a:pt x="4298252" y="1159731"/>
+                  </a:lnTo>
+                  <a:lnTo>
+                    <a:pt x="4368596" y="1161853"/>
+                  </a:lnTo>
+                  <a:lnTo>
+                    <a:pt x="4438941" y="1163929"/>
                   </a:lnTo>
                 </a:path>
               </a:pathLst>
@@ -3702,315 +3737,315 @@
         </p:sp>
         <p:sp>
           <p:nvSpPr>
-            <p:cNvPr id="22" name="pl22"/>
+            <p:cNvPr id="23" name="pl23"/>
             <p:cNvSpPr/>
             <p:nvPr/>
           </p:nvSpPr>
           <p:spPr>
             <a:xfrm>
-              <a:off x="1172049" y="3273023"/>
-              <a:ext cx="7090630" cy="2283768"/>
+              <a:off x="1235312" y="2575970"/>
+              <a:ext cx="6964104" cy="824158"/>
             </a:xfrm>
             <a:custGeom>
               <a:avLst/>
               <a:pathLst>
-                <a:path w="7090630" h="2283768">
+                <a:path w="6964104" h="824158">
                   <a:moveTo>
-                    <a:pt x="7090630" y="2283768"/>
+                    <a:pt x="6964104" y="824158"/>
                   </a:moveTo>
                   <a:lnTo>
-                    <a:pt x="7019007" y="2283698"/>
-                  </a:lnTo>
-                  <a:lnTo>
-                    <a:pt x="6947385" y="2283618"/>
-                  </a:lnTo>
-                  <a:lnTo>
-                    <a:pt x="6875762" y="2283526"/>
-                  </a:lnTo>
-                  <a:lnTo>
-                    <a:pt x="6804139" y="2283419"/>
-                  </a:lnTo>
-                  <a:lnTo>
-                    <a:pt x="6732517" y="2283297"/>
-                  </a:lnTo>
-                  <a:lnTo>
-                    <a:pt x="6660894" y="2283155"/>
-                  </a:lnTo>
-                  <a:lnTo>
-                    <a:pt x="6589272" y="2282992"/>
-                  </a:lnTo>
-                  <a:lnTo>
-                    <a:pt x="6517649" y="2282805"/>
-                  </a:lnTo>
-                  <a:lnTo>
-                    <a:pt x="6446027" y="2282589"/>
-                  </a:lnTo>
-                  <a:lnTo>
-                    <a:pt x="6374404" y="2282339"/>
-                  </a:lnTo>
-                  <a:lnTo>
-                    <a:pt x="6302782" y="2282053"/>
-                  </a:lnTo>
-                  <a:lnTo>
-                    <a:pt x="6231159" y="2281722"/>
-                  </a:lnTo>
-                  <a:lnTo>
-                    <a:pt x="6159537" y="2281341"/>
-                  </a:lnTo>
-                  <a:lnTo>
-                    <a:pt x="6087914" y="2280902"/>
-                  </a:lnTo>
-                  <a:lnTo>
-                    <a:pt x="6016292" y="2280397"/>
-                  </a:lnTo>
-                  <a:lnTo>
-                    <a:pt x="5944669" y="2279814"/>
-                  </a:lnTo>
-                  <a:lnTo>
-                    <a:pt x="5873047" y="2279143"/>
-                  </a:lnTo>
-                  <a:lnTo>
-                    <a:pt x="5801424" y="2278369"/>
-                  </a:lnTo>
-                  <a:lnTo>
-                    <a:pt x="5729802" y="2277479"/>
-                  </a:lnTo>
-                  <a:lnTo>
-                    <a:pt x="5658179" y="2276452"/>
-                  </a:lnTo>
-                  <a:lnTo>
-                    <a:pt x="5586557" y="2275269"/>
-                  </a:lnTo>
-                  <a:lnTo>
-                    <a:pt x="5514934" y="2273907"/>
-                  </a:lnTo>
-                  <a:lnTo>
-                    <a:pt x="5443311" y="2272337"/>
-                  </a:lnTo>
-                  <a:lnTo>
-                    <a:pt x="5371689" y="2270528"/>
-                  </a:lnTo>
-                  <a:lnTo>
-                    <a:pt x="5300066" y="2268444"/>
-                  </a:lnTo>
-                  <a:lnTo>
-                    <a:pt x="5228444" y="2266044"/>
-                  </a:lnTo>
-                  <a:lnTo>
-                    <a:pt x="5156821" y="2263277"/>
-                  </a:lnTo>
-                  <a:lnTo>
-                    <a:pt x="5085199" y="2260090"/>
-                  </a:lnTo>
-                  <a:lnTo>
-                    <a:pt x="5013576" y="2256418"/>
-                  </a:lnTo>
-                  <a:lnTo>
-                    <a:pt x="4941954" y="2252188"/>
-                  </a:lnTo>
-                  <a:lnTo>
-                    <a:pt x="4870331" y="2247314"/>
-                  </a:lnTo>
-                  <a:lnTo>
-                    <a:pt x="4798709" y="2241698"/>
-                  </a:lnTo>
-                  <a:lnTo>
-                    <a:pt x="4727086" y="2235228"/>
-                  </a:lnTo>
-                  <a:lnTo>
-                    <a:pt x="4655464" y="2227774"/>
-                  </a:lnTo>
-                  <a:lnTo>
-                    <a:pt x="4583841" y="2219185"/>
-                  </a:lnTo>
-                  <a:lnTo>
-                    <a:pt x="4512219" y="2209290"/>
-                  </a:lnTo>
-                  <a:lnTo>
-                    <a:pt x="4440596" y="2197890"/>
-                  </a:lnTo>
-                  <a:lnTo>
-                    <a:pt x="4368974" y="2184755"/>
-                  </a:lnTo>
-                  <a:lnTo>
-                    <a:pt x="4297351" y="2169622"/>
-                  </a:lnTo>
-                  <a:lnTo>
-                    <a:pt x="4225729" y="2152186"/>
-                  </a:lnTo>
-                  <a:lnTo>
-                    <a:pt x="4154106" y="2132098"/>
-                  </a:lnTo>
-                  <a:lnTo>
-                    <a:pt x="4082483" y="2108954"/>
-                  </a:lnTo>
-                  <a:lnTo>
-                    <a:pt x="4010861" y="2082289"/>
-                  </a:lnTo>
-                  <a:lnTo>
-                    <a:pt x="3939238" y="2051567"/>
-                  </a:lnTo>
-                  <a:lnTo>
-                    <a:pt x="3867616" y="2016170"/>
-                  </a:lnTo>
-                  <a:lnTo>
-                    <a:pt x="3795993" y="1975389"/>
-                  </a:lnTo>
-                  <a:lnTo>
-                    <a:pt x="3724371" y="1928404"/>
-                  </a:lnTo>
-                  <a:lnTo>
-                    <a:pt x="3652748" y="1874270"/>
-                  </a:lnTo>
-                  <a:lnTo>
-                    <a:pt x="3581126" y="1811900"/>
-                  </a:lnTo>
-                  <a:lnTo>
-                    <a:pt x="3509503" y="1740042"/>
-                  </a:lnTo>
-                  <a:lnTo>
-                    <a:pt x="3437881" y="1657251"/>
-                  </a:lnTo>
-                  <a:lnTo>
-                    <a:pt x="3366258" y="1561865"/>
-                  </a:lnTo>
-                  <a:lnTo>
-                    <a:pt x="3294636" y="1454328"/>
-                  </a:lnTo>
-                  <a:lnTo>
-                    <a:pt x="3223013" y="1435859"/>
-                  </a:lnTo>
-                  <a:lnTo>
-                    <a:pt x="3151391" y="1416979"/>
-                  </a:lnTo>
-                  <a:lnTo>
-                    <a:pt x="3079768" y="1397679"/>
-                  </a:lnTo>
-                  <a:lnTo>
-                    <a:pt x="3008146" y="1377950"/>
-                  </a:lnTo>
-                  <a:lnTo>
-                    <a:pt x="2936523" y="1357781"/>
-                  </a:lnTo>
-                  <a:lnTo>
-                    <a:pt x="2864901" y="1337164"/>
-                  </a:lnTo>
-                  <a:lnTo>
-                    <a:pt x="2793278" y="1316087"/>
-                  </a:lnTo>
-                  <a:lnTo>
-                    <a:pt x="2721655" y="1294542"/>
-                  </a:lnTo>
-                  <a:lnTo>
-                    <a:pt x="2650033" y="1272517"/>
-                  </a:lnTo>
-                  <a:lnTo>
-                    <a:pt x="2578410" y="1250002"/>
-                  </a:lnTo>
-                  <a:lnTo>
-                    <a:pt x="2506788" y="1226986"/>
-                  </a:lnTo>
-                  <a:lnTo>
-                    <a:pt x="2435165" y="1203457"/>
-                  </a:lnTo>
-                  <a:lnTo>
-                    <a:pt x="2363543" y="1179406"/>
-                  </a:lnTo>
-                  <a:lnTo>
-                    <a:pt x="2291920" y="1154818"/>
-                  </a:lnTo>
-                  <a:lnTo>
-                    <a:pt x="2220298" y="1129684"/>
-                  </a:lnTo>
-                  <a:lnTo>
-                    <a:pt x="2148675" y="1103990"/>
-                  </a:lnTo>
-                  <a:lnTo>
-                    <a:pt x="2077053" y="1077725"/>
-                  </a:lnTo>
-                  <a:lnTo>
-                    <a:pt x="2005430" y="1050875"/>
-                  </a:lnTo>
-                  <a:lnTo>
-                    <a:pt x="1933808" y="1023427"/>
-                  </a:lnTo>
-                  <a:lnTo>
-                    <a:pt x="1862185" y="995369"/>
-                  </a:lnTo>
-                  <a:lnTo>
-                    <a:pt x="1790563" y="966686"/>
-                  </a:lnTo>
-                  <a:lnTo>
-                    <a:pt x="1718940" y="937365"/>
-                  </a:lnTo>
-                  <a:lnTo>
-                    <a:pt x="1647318" y="907391"/>
-                  </a:lnTo>
-                  <a:lnTo>
-                    <a:pt x="1575695" y="876750"/>
-                  </a:lnTo>
-                  <a:lnTo>
-                    <a:pt x="1504073" y="845428"/>
-                  </a:lnTo>
-                  <a:lnTo>
-                    <a:pt x="1432450" y="813408"/>
-                  </a:lnTo>
-                  <a:lnTo>
-                    <a:pt x="1360827" y="780676"/>
-                  </a:lnTo>
-                  <a:lnTo>
-                    <a:pt x="1289205" y="747215"/>
-                  </a:lnTo>
-                  <a:lnTo>
-                    <a:pt x="1217582" y="713010"/>
-                  </a:lnTo>
-                  <a:lnTo>
-                    <a:pt x="1145960" y="678043"/>
-                  </a:lnTo>
-                  <a:lnTo>
-                    <a:pt x="1074337" y="642299"/>
-                  </a:lnTo>
-                  <a:lnTo>
-                    <a:pt x="1002715" y="605758"/>
-                  </a:lnTo>
-                  <a:lnTo>
-                    <a:pt x="931092" y="568405"/>
-                  </a:lnTo>
-                  <a:lnTo>
-                    <a:pt x="859470" y="530220"/>
-                  </a:lnTo>
-                  <a:lnTo>
-                    <a:pt x="787847" y="491186"/>
-                  </a:lnTo>
-                  <a:lnTo>
-                    <a:pt x="716225" y="451283"/>
-                  </a:lnTo>
-                  <a:lnTo>
-                    <a:pt x="644602" y="410492"/>
-                  </a:lnTo>
-                  <a:lnTo>
-                    <a:pt x="572980" y="368793"/>
-                  </a:lnTo>
-                  <a:lnTo>
-                    <a:pt x="501357" y="326166"/>
-                  </a:lnTo>
-                  <a:lnTo>
-                    <a:pt x="429735" y="282590"/>
-                  </a:lnTo>
-                  <a:lnTo>
-                    <a:pt x="358112" y="238045"/>
-                  </a:lnTo>
-                  <a:lnTo>
-                    <a:pt x="286490" y="192508"/>
-                  </a:lnTo>
-                  <a:lnTo>
-                    <a:pt x="214867" y="145958"/>
-                  </a:lnTo>
-                  <a:lnTo>
-                    <a:pt x="143245" y="98372"/>
-                  </a:lnTo>
-                  <a:lnTo>
-                    <a:pt x="71622" y="49727"/>
+                    <a:pt x="6893760" y="824133"/>
+                  </a:lnTo>
+                  <a:lnTo>
+                    <a:pt x="6823415" y="824104"/>
+                  </a:lnTo>
+                  <a:lnTo>
+                    <a:pt x="6753071" y="824070"/>
+                  </a:lnTo>
+                  <a:lnTo>
+                    <a:pt x="6682726" y="824032"/>
+                  </a:lnTo>
+                  <a:lnTo>
+                    <a:pt x="6612382" y="823988"/>
+                  </a:lnTo>
+                  <a:lnTo>
+                    <a:pt x="6542037" y="823937"/>
+                  </a:lnTo>
+                  <a:lnTo>
+                    <a:pt x="6471693" y="823878"/>
+                  </a:lnTo>
+                  <a:lnTo>
+                    <a:pt x="6401348" y="823810"/>
+                  </a:lnTo>
+                  <a:lnTo>
+                    <a:pt x="6331004" y="823732"/>
+                  </a:lnTo>
+                  <a:lnTo>
+                    <a:pt x="6260659" y="823642"/>
+                  </a:lnTo>
+                  <a:lnTo>
+                    <a:pt x="6190315" y="823539"/>
+                  </a:lnTo>
+                  <a:lnTo>
+                    <a:pt x="6119970" y="823419"/>
+                  </a:lnTo>
+                  <a:lnTo>
+                    <a:pt x="6049626" y="823282"/>
+                  </a:lnTo>
+                  <a:lnTo>
+                    <a:pt x="5979281" y="823124"/>
+                  </a:lnTo>
+                  <a:lnTo>
+                    <a:pt x="5908937" y="822941"/>
+                  </a:lnTo>
+                  <a:lnTo>
+                    <a:pt x="5838592" y="822731"/>
+                  </a:lnTo>
+                  <a:lnTo>
+                    <a:pt x="5768248" y="822489"/>
+                  </a:lnTo>
+                  <a:lnTo>
+                    <a:pt x="5697903" y="822210"/>
+                  </a:lnTo>
+                  <a:lnTo>
+                    <a:pt x="5627559" y="821888"/>
+                  </a:lnTo>
+                  <a:lnTo>
+                    <a:pt x="5557214" y="821518"/>
+                  </a:lnTo>
+                  <a:lnTo>
+                    <a:pt x="5486870" y="821091"/>
+                  </a:lnTo>
+                  <a:lnTo>
+                    <a:pt x="5416525" y="820599"/>
+                  </a:lnTo>
+                  <a:lnTo>
+                    <a:pt x="5346181" y="820033"/>
+                  </a:lnTo>
+                  <a:lnTo>
+                    <a:pt x="5275836" y="819380"/>
+                  </a:lnTo>
+                  <a:lnTo>
+                    <a:pt x="5205492" y="818628"/>
+                  </a:lnTo>
+                  <a:lnTo>
+                    <a:pt x="5135147" y="817761"/>
+                  </a:lnTo>
+                  <a:lnTo>
+                    <a:pt x="5064803" y="816763"/>
+                  </a:lnTo>
+                  <a:lnTo>
+                    <a:pt x="4994458" y="815613"/>
+                  </a:lnTo>
+                  <a:lnTo>
+                    <a:pt x="4924114" y="814288"/>
+                  </a:lnTo>
+                  <a:lnTo>
+                    <a:pt x="4853769" y="812761"/>
+                  </a:lnTo>
+                  <a:lnTo>
+                    <a:pt x="4783425" y="811002"/>
+                  </a:lnTo>
+                  <a:lnTo>
+                    <a:pt x="4713080" y="808976"/>
+                  </a:lnTo>
+                  <a:lnTo>
+                    <a:pt x="4642736" y="806641"/>
+                  </a:lnTo>
+                  <a:lnTo>
+                    <a:pt x="4572391" y="803951"/>
+                  </a:lnTo>
+                  <a:lnTo>
+                    <a:pt x="4502047" y="800851"/>
+                  </a:lnTo>
+                  <a:lnTo>
+                    <a:pt x="4431702" y="797281"/>
+                  </a:lnTo>
+                  <a:lnTo>
+                    <a:pt x="4361358" y="793166"/>
+                  </a:lnTo>
+                  <a:lnTo>
+                    <a:pt x="4291013" y="788426"/>
+                  </a:lnTo>
+                  <a:lnTo>
+                    <a:pt x="4220669" y="782965"/>
+                  </a:lnTo>
+                  <a:lnTo>
+                    <a:pt x="4150324" y="776673"/>
+                  </a:lnTo>
+                  <a:lnTo>
+                    <a:pt x="4079980" y="769424"/>
+                  </a:lnTo>
+                  <a:lnTo>
+                    <a:pt x="4009635" y="761072"/>
+                  </a:lnTo>
+                  <a:lnTo>
+                    <a:pt x="3939291" y="751449"/>
+                  </a:lnTo>
+                  <a:lnTo>
+                    <a:pt x="3868946" y="740362"/>
+                  </a:lnTo>
+                  <a:lnTo>
+                    <a:pt x="3798602" y="727588"/>
+                  </a:lnTo>
+                  <a:lnTo>
+                    <a:pt x="3728257" y="712871"/>
+                  </a:lnTo>
+                  <a:lnTo>
+                    <a:pt x="3657913" y="695915"/>
+                  </a:lnTo>
+                  <a:lnTo>
+                    <a:pt x="3587569" y="676380"/>
+                  </a:lnTo>
+                  <a:lnTo>
+                    <a:pt x="3517224" y="653872"/>
+                  </a:lnTo>
+                  <a:lnTo>
+                    <a:pt x="3446880" y="627940"/>
+                  </a:lnTo>
+                  <a:lnTo>
+                    <a:pt x="3376535" y="598063"/>
+                  </a:lnTo>
+                  <a:lnTo>
+                    <a:pt x="3306191" y="563640"/>
+                  </a:lnTo>
+                  <a:lnTo>
+                    <a:pt x="3235846" y="524833"/>
+                  </a:lnTo>
+                  <a:lnTo>
+                    <a:pt x="3165502" y="518168"/>
+                  </a:lnTo>
+                  <a:lnTo>
+                    <a:pt x="3095157" y="511354"/>
+                  </a:lnTo>
+                  <a:lnTo>
+                    <a:pt x="3024813" y="504389"/>
+                  </a:lnTo>
+                  <a:lnTo>
+                    <a:pt x="2954468" y="497269"/>
+                  </a:lnTo>
+                  <a:lnTo>
+                    <a:pt x="2884124" y="489991"/>
+                  </a:lnTo>
+                  <a:lnTo>
+                    <a:pt x="2813779" y="482551"/>
+                  </a:lnTo>
+                  <a:lnTo>
+                    <a:pt x="2743435" y="474945"/>
+                  </a:lnTo>
+                  <a:lnTo>
+                    <a:pt x="2673090" y="467169"/>
+                  </a:lnTo>
+                  <a:lnTo>
+                    <a:pt x="2602746" y="459221"/>
+                  </a:lnTo>
+                  <a:lnTo>
+                    <a:pt x="2532401" y="451096"/>
+                  </a:lnTo>
+                  <a:lnTo>
+                    <a:pt x="2462057" y="442790"/>
+                  </a:lnTo>
+                  <a:lnTo>
+                    <a:pt x="2391712" y="434299"/>
+                  </a:lnTo>
+                  <a:lnTo>
+                    <a:pt x="2321368" y="425619"/>
+                  </a:lnTo>
+                  <a:lnTo>
+                    <a:pt x="2251023" y="416746"/>
+                  </a:lnTo>
+                  <a:lnTo>
+                    <a:pt x="2180679" y="407676"/>
+                  </a:lnTo>
+                  <a:lnTo>
+                    <a:pt x="2110334" y="398404"/>
+                  </a:lnTo>
+                  <a:lnTo>
+                    <a:pt x="2039990" y="388925"/>
+                  </a:lnTo>
+                  <a:lnTo>
+                    <a:pt x="1969645" y="379236"/>
+                  </a:lnTo>
+                  <a:lnTo>
+                    <a:pt x="1899301" y="369330"/>
+                  </a:lnTo>
+                  <a:lnTo>
+                    <a:pt x="1828956" y="359205"/>
+                  </a:lnTo>
+                  <a:lnTo>
+                    <a:pt x="1758612" y="348854"/>
+                  </a:lnTo>
+                  <a:lnTo>
+                    <a:pt x="1688267" y="338273"/>
+                  </a:lnTo>
+                  <a:lnTo>
+                    <a:pt x="1617923" y="327456"/>
+                  </a:lnTo>
+                  <a:lnTo>
+                    <a:pt x="1547578" y="316398"/>
+                  </a:lnTo>
+                  <a:lnTo>
+                    <a:pt x="1477234" y="305095"/>
+                  </a:lnTo>
+                  <a:lnTo>
+                    <a:pt x="1406889" y="293540"/>
+                  </a:lnTo>
+                  <a:lnTo>
+                    <a:pt x="1336545" y="281727"/>
+                  </a:lnTo>
+                  <a:lnTo>
+                    <a:pt x="1266200" y="269652"/>
+                  </a:lnTo>
+                  <a:lnTo>
+                    <a:pt x="1195856" y="257308"/>
+                  </a:lnTo>
+                  <a:lnTo>
+                    <a:pt x="1125511" y="244690"/>
+                  </a:lnTo>
+                  <a:lnTo>
+                    <a:pt x="1055167" y="231790"/>
+                  </a:lnTo>
+                  <a:lnTo>
+                    <a:pt x="984822" y="218604"/>
+                  </a:lnTo>
+                  <a:lnTo>
+                    <a:pt x="914478" y="205124"/>
+                  </a:lnTo>
+                  <a:lnTo>
+                    <a:pt x="844133" y="191344"/>
+                  </a:lnTo>
+                  <a:lnTo>
+                    <a:pt x="773789" y="177257"/>
+                  </a:lnTo>
+                  <a:lnTo>
+                    <a:pt x="703444" y="162857"/>
+                  </a:lnTo>
+                  <a:lnTo>
+                    <a:pt x="633100" y="148136"/>
+                  </a:lnTo>
+                  <a:lnTo>
+                    <a:pt x="562755" y="133088"/>
+                  </a:lnTo>
+                  <a:lnTo>
+                    <a:pt x="492411" y="117705"/>
+                  </a:lnTo>
+                  <a:lnTo>
+                    <a:pt x="422066" y="101980"/>
+                  </a:lnTo>
+                  <a:lnTo>
+                    <a:pt x="351722" y="85904"/>
+                  </a:lnTo>
+                  <a:lnTo>
+                    <a:pt x="281377" y="69471"/>
+                  </a:lnTo>
+                  <a:lnTo>
+                    <a:pt x="211033" y="52673"/>
+                  </a:lnTo>
+                  <a:lnTo>
+                    <a:pt x="140688" y="35500"/>
+                  </a:lnTo>
+                  <a:lnTo>
+                    <a:pt x="70344" y="17945"/>
                   </a:lnTo>
                   <a:lnTo>
                     <a:pt x="0" y="0"/>
@@ -4027,234 +4062,234 @@
         </p:sp>
         <p:sp>
           <p:nvSpPr>
-            <p:cNvPr id="23" name="pl23"/>
+            <p:cNvPr id="24" name="pl24"/>
             <p:cNvSpPr/>
             <p:nvPr/>
           </p:nvSpPr>
           <p:spPr>
             <a:xfrm>
-              <a:off x="3212810" y="2073503"/>
-              <a:ext cx="5049869" cy="3472871"/>
+              <a:off x="3239657" y="2143092"/>
+              <a:ext cx="4959759" cy="1253277"/>
             </a:xfrm>
             <a:custGeom>
               <a:avLst/>
               <a:pathLst>
-                <a:path w="5049869" h="3472871">
+                <a:path w="4959759" h="1253277">
                   <a:moveTo>
                     <a:pt x="0" y="0"/>
                   </a:moveTo>
                   <a:lnTo>
-                    <a:pt x="36292" y="144265"/>
-                  </a:lnTo>
-                  <a:lnTo>
-                    <a:pt x="107914" y="406606"/>
-                  </a:lnTo>
-                  <a:lnTo>
-                    <a:pt x="179537" y="648337"/>
-                  </a:lnTo>
-                  <a:lnTo>
-                    <a:pt x="251160" y="871079"/>
-                  </a:lnTo>
-                  <a:lnTo>
-                    <a:pt x="322782" y="1076323"/>
-                  </a:lnTo>
-                  <a:lnTo>
-                    <a:pt x="394405" y="1265444"/>
-                  </a:lnTo>
-                  <a:lnTo>
-                    <a:pt x="466027" y="1439707"/>
-                  </a:lnTo>
-                  <a:lnTo>
-                    <a:pt x="537650" y="1600281"/>
-                  </a:lnTo>
-                  <a:lnTo>
-                    <a:pt x="609272" y="1748241"/>
-                  </a:lnTo>
-                  <a:lnTo>
-                    <a:pt x="680895" y="1884578"/>
-                  </a:lnTo>
-                  <a:lnTo>
-                    <a:pt x="752517" y="2010204"/>
-                  </a:lnTo>
-                  <a:lnTo>
-                    <a:pt x="824140" y="2125961"/>
-                  </a:lnTo>
-                  <a:lnTo>
-                    <a:pt x="895762" y="2232625"/>
-                  </a:lnTo>
-                  <a:lnTo>
-                    <a:pt x="967385" y="2330910"/>
-                  </a:lnTo>
-                  <a:lnTo>
-                    <a:pt x="1039007" y="2421473"/>
-                  </a:lnTo>
-                  <a:lnTo>
-                    <a:pt x="1110630" y="2504923"/>
-                  </a:lnTo>
-                  <a:lnTo>
-                    <a:pt x="1182252" y="2581816"/>
-                  </a:lnTo>
-                  <a:lnTo>
-                    <a:pt x="1253875" y="2652669"/>
-                  </a:lnTo>
-                  <a:lnTo>
-                    <a:pt x="1325497" y="2717957"/>
-                  </a:lnTo>
-                  <a:lnTo>
-                    <a:pt x="1397120" y="2778115"/>
-                  </a:lnTo>
-                  <a:lnTo>
-                    <a:pt x="1468742" y="2833547"/>
-                  </a:lnTo>
-                  <a:lnTo>
-                    <a:pt x="1540365" y="2884625"/>
-                  </a:lnTo>
-                  <a:lnTo>
-                    <a:pt x="1611988" y="2931690"/>
-                  </a:lnTo>
-                  <a:lnTo>
-                    <a:pt x="1683610" y="2975058"/>
-                  </a:lnTo>
-                  <a:lnTo>
-                    <a:pt x="1755233" y="3015020"/>
-                  </a:lnTo>
-                  <a:lnTo>
-                    <a:pt x="1826855" y="3051841"/>
-                  </a:lnTo>
-                  <a:lnTo>
-                    <a:pt x="1898478" y="3085771"/>
-                  </a:lnTo>
-                  <a:lnTo>
-                    <a:pt x="1970100" y="3117035"/>
-                  </a:lnTo>
-                  <a:lnTo>
-                    <a:pt x="2041723" y="3145842"/>
-                  </a:lnTo>
-                  <a:lnTo>
-                    <a:pt x="2113345" y="3172387"/>
-                  </a:lnTo>
-                  <a:lnTo>
-                    <a:pt x="2184968" y="3196847"/>
-                  </a:lnTo>
-                  <a:lnTo>
-                    <a:pt x="2256590" y="3219385"/>
-                  </a:lnTo>
-                  <a:lnTo>
-                    <a:pt x="2328213" y="3240152"/>
-                  </a:lnTo>
-                  <a:lnTo>
-                    <a:pt x="2399835" y="3259288"/>
-                  </a:lnTo>
-                  <a:lnTo>
-                    <a:pt x="2471458" y="3276921"/>
-                  </a:lnTo>
-                  <a:lnTo>
-                    <a:pt x="2543080" y="3293169"/>
-                  </a:lnTo>
-                  <a:lnTo>
-                    <a:pt x="2614703" y="3308140"/>
-                  </a:lnTo>
-                  <a:lnTo>
-                    <a:pt x="2686325" y="3321935"/>
-                  </a:lnTo>
-                  <a:lnTo>
-                    <a:pt x="2757948" y="3334647"/>
-                  </a:lnTo>
-                  <a:lnTo>
-                    <a:pt x="2829570" y="3346359"/>
-                  </a:lnTo>
-                  <a:lnTo>
-                    <a:pt x="2901193" y="3357152"/>
-                  </a:lnTo>
-                  <a:lnTo>
-                    <a:pt x="2972815" y="3367097"/>
-                  </a:lnTo>
-                  <a:lnTo>
-                    <a:pt x="3044438" y="3376261"/>
-                  </a:lnTo>
-                  <a:lnTo>
-                    <a:pt x="3116061" y="3384705"/>
-                  </a:lnTo>
-                  <a:lnTo>
-                    <a:pt x="3187683" y="3392485"/>
-                  </a:lnTo>
-                  <a:lnTo>
-                    <a:pt x="3259306" y="3399654"/>
-                  </a:lnTo>
-                  <a:lnTo>
-                    <a:pt x="3330928" y="3406260"/>
-                  </a:lnTo>
-                  <a:lnTo>
-                    <a:pt x="3402551" y="3412347"/>
-                  </a:lnTo>
-                  <a:lnTo>
-                    <a:pt x="3474173" y="3417956"/>
-                  </a:lnTo>
-                  <a:lnTo>
-                    <a:pt x="3545796" y="3423125"/>
-                  </a:lnTo>
-                  <a:lnTo>
-                    <a:pt x="3617418" y="3427887"/>
-                  </a:lnTo>
-                  <a:lnTo>
-                    <a:pt x="3689041" y="3432275"/>
-                  </a:lnTo>
-                  <a:lnTo>
-                    <a:pt x="3760663" y="3436318"/>
-                  </a:lnTo>
-                  <a:lnTo>
-                    <a:pt x="3832286" y="3440044"/>
-                  </a:lnTo>
-                  <a:lnTo>
-                    <a:pt x="3903908" y="3443477"/>
-                  </a:lnTo>
-                  <a:lnTo>
-                    <a:pt x="3975531" y="3446641"/>
-                  </a:lnTo>
-                  <a:lnTo>
-                    <a:pt x="4047153" y="3449556"/>
-                  </a:lnTo>
-                  <a:lnTo>
-                    <a:pt x="4118776" y="3452242"/>
-                  </a:lnTo>
-                  <a:lnTo>
-                    <a:pt x="4190398" y="3454717"/>
-                  </a:lnTo>
-                  <a:lnTo>
-                    <a:pt x="4262021" y="3456997"/>
-                  </a:lnTo>
-                  <a:lnTo>
-                    <a:pt x="4333643" y="3459098"/>
-                  </a:lnTo>
-                  <a:lnTo>
-                    <a:pt x="4405266" y="3461035"/>
-                  </a:lnTo>
-                  <a:lnTo>
-                    <a:pt x="4476889" y="3462819"/>
-                  </a:lnTo>
-                  <a:lnTo>
-                    <a:pt x="4548511" y="3464463"/>
-                  </a:lnTo>
-                  <a:lnTo>
-                    <a:pt x="4620134" y="3465978"/>
-                  </a:lnTo>
-                  <a:lnTo>
-                    <a:pt x="4691756" y="3467374"/>
-                  </a:lnTo>
-                  <a:lnTo>
-                    <a:pt x="4763379" y="3468660"/>
-                  </a:lnTo>
-                  <a:lnTo>
-                    <a:pt x="4835001" y="3469845"/>
-                  </a:lnTo>
-                  <a:lnTo>
-                    <a:pt x="4906624" y="3470937"/>
-                  </a:lnTo>
-                  <a:lnTo>
-                    <a:pt x="4978246" y="3471943"/>
-                  </a:lnTo>
-                  <a:lnTo>
-                    <a:pt x="5049869" y="3472871"/>
+                    <a:pt x="35644" y="52062"/>
+                  </a:lnTo>
+                  <a:lnTo>
+                    <a:pt x="105989" y="146734"/>
+                  </a:lnTo>
+                  <a:lnTo>
+                    <a:pt x="176333" y="233969"/>
+                  </a:lnTo>
+                  <a:lnTo>
+                    <a:pt x="246678" y="314352"/>
+                  </a:lnTo>
+                  <a:lnTo>
+                    <a:pt x="317022" y="388419"/>
+                  </a:lnTo>
+                  <a:lnTo>
+                    <a:pt x="387367" y="456668"/>
+                  </a:lnTo>
+                  <a:lnTo>
+                    <a:pt x="457711" y="519556"/>
+                  </a:lnTo>
+                  <a:lnTo>
+                    <a:pt x="528056" y="577504"/>
+                  </a:lnTo>
+                  <a:lnTo>
+                    <a:pt x="598400" y="630899"/>
+                  </a:lnTo>
+                  <a:lnTo>
+                    <a:pt x="668745" y="680099"/>
+                  </a:lnTo>
+                  <a:lnTo>
+                    <a:pt x="739089" y="725435"/>
+                  </a:lnTo>
+                  <a:lnTo>
+                    <a:pt x="809434" y="767209"/>
+                  </a:lnTo>
+                  <a:lnTo>
+                    <a:pt x="879778" y="805702"/>
+                  </a:lnTo>
+                  <a:lnTo>
+                    <a:pt x="950123" y="841170"/>
+                  </a:lnTo>
+                  <a:lnTo>
+                    <a:pt x="1020467" y="873852"/>
+                  </a:lnTo>
+                  <a:lnTo>
+                    <a:pt x="1090812" y="903967"/>
+                  </a:lnTo>
+                  <a:lnTo>
+                    <a:pt x="1161156" y="931716"/>
+                  </a:lnTo>
+                  <a:lnTo>
+                    <a:pt x="1231501" y="957286"/>
+                  </a:lnTo>
+                  <a:lnTo>
+                    <a:pt x="1301845" y="980846"/>
+                  </a:lnTo>
+                  <a:lnTo>
+                    <a:pt x="1372190" y="1002556"/>
+                  </a:lnTo>
+                  <a:lnTo>
+                    <a:pt x="1442534" y="1022560"/>
+                  </a:lnTo>
+                  <a:lnTo>
+                    <a:pt x="1512879" y="1040993"/>
+                  </a:lnTo>
+                  <a:lnTo>
+                    <a:pt x="1583223" y="1057978"/>
+                  </a:lnTo>
+                  <a:lnTo>
+                    <a:pt x="1653568" y="1073628"/>
+                  </a:lnTo>
+                  <a:lnTo>
+                    <a:pt x="1723912" y="1088049"/>
+                  </a:lnTo>
+                  <a:lnTo>
+                    <a:pt x="1794257" y="1101337"/>
+                  </a:lnTo>
+                  <a:lnTo>
+                    <a:pt x="1864601" y="1113582"/>
+                  </a:lnTo>
+                  <a:lnTo>
+                    <a:pt x="1934946" y="1124864"/>
+                  </a:lnTo>
+                  <a:lnTo>
+                    <a:pt x="2005290" y="1135260"/>
+                  </a:lnTo>
+                  <a:lnTo>
+                    <a:pt x="2075635" y="1144840"/>
+                  </a:lnTo>
+                  <a:lnTo>
+                    <a:pt x="2145979" y="1153666"/>
+                  </a:lnTo>
+                  <a:lnTo>
+                    <a:pt x="2216324" y="1161800"/>
+                  </a:lnTo>
+                  <a:lnTo>
+                    <a:pt x="2286668" y="1169294"/>
+                  </a:lnTo>
+                  <a:lnTo>
+                    <a:pt x="2357013" y="1176200"/>
+                  </a:lnTo>
+                  <a:lnTo>
+                    <a:pt x="2427357" y="1182563"/>
+                  </a:lnTo>
+                  <a:lnTo>
+                    <a:pt x="2497701" y="1188427"/>
+                  </a:lnTo>
+                  <a:lnTo>
+                    <a:pt x="2568046" y="1193830"/>
+                  </a:lnTo>
+                  <a:lnTo>
+                    <a:pt x="2638390" y="1198808"/>
+                  </a:lnTo>
+                  <a:lnTo>
+                    <a:pt x="2708735" y="1203395"/>
+                  </a:lnTo>
+                  <a:lnTo>
+                    <a:pt x="2779079" y="1207622"/>
+                  </a:lnTo>
+                  <a:lnTo>
+                    <a:pt x="2849424" y="1211517"/>
+                  </a:lnTo>
+                  <a:lnTo>
+                    <a:pt x="2919768" y="1215106"/>
+                  </a:lnTo>
+                  <a:lnTo>
+                    <a:pt x="2990113" y="1218413"/>
+                  </a:lnTo>
+                  <a:lnTo>
+                    <a:pt x="3060457" y="1221460"/>
+                  </a:lnTo>
+                  <a:lnTo>
+                    <a:pt x="3130802" y="1224268"/>
+                  </a:lnTo>
+                  <a:lnTo>
+                    <a:pt x="3201146" y="1226855"/>
+                  </a:lnTo>
+                  <a:lnTo>
+                    <a:pt x="3271491" y="1229239"/>
+                  </a:lnTo>
+                  <a:lnTo>
+                    <a:pt x="3341835" y="1231436"/>
+                  </a:lnTo>
+                  <a:lnTo>
+                    <a:pt x="3412180" y="1233460"/>
+                  </a:lnTo>
+                  <a:lnTo>
+                    <a:pt x="3482524" y="1235325"/>
+                  </a:lnTo>
+                  <a:lnTo>
+                    <a:pt x="3552869" y="1237043"/>
+                  </a:lnTo>
+                  <a:lnTo>
+                    <a:pt x="3623213" y="1238627"/>
+                  </a:lnTo>
+                  <a:lnTo>
+                    <a:pt x="3693558" y="1240086"/>
+                  </a:lnTo>
+                  <a:lnTo>
+                    <a:pt x="3763902" y="1241431"/>
+                  </a:lnTo>
+                  <a:lnTo>
+                    <a:pt x="3834247" y="1242670"/>
+                  </a:lnTo>
+                  <a:lnTo>
+                    <a:pt x="3904591" y="1243811"/>
+                  </a:lnTo>
+                  <a:lnTo>
+                    <a:pt x="3974936" y="1244863"/>
+                  </a:lnTo>
+                  <a:lnTo>
+                    <a:pt x="4045280" y="1245832"/>
+                  </a:lnTo>
+                  <a:lnTo>
+                    <a:pt x="4115625" y="1246726"/>
+                  </a:lnTo>
+                  <a:lnTo>
+                    <a:pt x="4185969" y="1247549"/>
+                  </a:lnTo>
+                  <a:lnTo>
+                    <a:pt x="4256314" y="1248307"/>
+                  </a:lnTo>
+                  <a:lnTo>
+                    <a:pt x="4326658" y="1249006"/>
+                  </a:lnTo>
+                  <a:lnTo>
+                    <a:pt x="4397003" y="1249650"/>
+                  </a:lnTo>
+                  <a:lnTo>
+                    <a:pt x="4467347" y="1250243"/>
+                  </a:lnTo>
+                  <a:lnTo>
+                    <a:pt x="4537692" y="1250790"/>
+                  </a:lnTo>
+                  <a:lnTo>
+                    <a:pt x="4608036" y="1251293"/>
+                  </a:lnTo>
+                  <a:lnTo>
+                    <a:pt x="4678381" y="1251757"/>
+                  </a:lnTo>
+                  <a:lnTo>
+                    <a:pt x="4748725" y="1252185"/>
+                  </a:lnTo>
+                  <a:lnTo>
+                    <a:pt x="4819070" y="1252579"/>
+                  </a:lnTo>
+                  <a:lnTo>
+                    <a:pt x="4889414" y="1252942"/>
+                  </a:lnTo>
+                  <a:lnTo>
+                    <a:pt x="4959759" y="1253277"/>
                   </a:lnTo>
                 </a:path>
               </a:pathLst>
@@ -4277,27 +4312,27 @@
         </p:sp>
         <p:sp>
           <p:nvSpPr>
-            <p:cNvPr id="24" name="pl24"/>
+            <p:cNvPr id="25" name="pl25"/>
             <p:cNvSpPr/>
             <p:nvPr/>
           </p:nvSpPr>
           <p:spPr>
             <a:xfrm>
-              <a:off x="817517" y="4727786"/>
-              <a:ext cx="7799693" cy="0"/>
+              <a:off x="887106" y="3100960"/>
+              <a:ext cx="7660515" cy="0"/>
             </a:xfrm>
             <a:custGeom>
               <a:avLst/>
               <a:pathLst>
-                <a:path w="7799693" h="0">
+                <a:path w="7660515" h="0">
                   <a:moveTo>
                     <a:pt x="0" y="0"/>
                   </a:moveTo>
                   <a:lnTo>
-                    <a:pt x="7799693" y="0"/>
-                  </a:lnTo>
-                  <a:lnTo>
-                    <a:pt x="7799693" y="0"/>
+                    <a:pt x="7660515" y="0"/>
+                  </a:lnTo>
+                  <a:lnTo>
+                    <a:pt x="7660515" y="0"/>
                   </a:lnTo>
                 </a:path>
               </a:pathLst>
@@ -4320,21 +4355,21 @@
         </p:sp>
         <p:sp>
           <p:nvSpPr>
-            <p:cNvPr id="25" name="pl25"/>
+            <p:cNvPr id="26" name="pl26"/>
             <p:cNvSpPr/>
             <p:nvPr/>
           </p:nvSpPr>
           <p:spPr>
             <a:xfrm>
-              <a:off x="4468386" y="2073503"/>
-              <a:ext cx="0" cy="3649639"/>
+              <a:off x="4472829" y="2143092"/>
+              <a:ext cx="0" cy="1317069"/>
             </a:xfrm>
             <a:custGeom>
               <a:avLst/>
               <a:pathLst>
-                <a:path w="0" h="3649639">
+                <a:path w="0" h="1317069">
                   <a:moveTo>
-                    <a:pt x="0" y="3649639"/>
+                    <a:pt x="0" y="1317069"/>
                   </a:moveTo>
                   <a:lnTo>
                     <a:pt x="0" y="0"/>
@@ -4363,13 +4398,13 @@
         </p:sp>
         <p:sp>
           <p:nvSpPr>
-            <p:cNvPr id="26" name="tx26"/>
+            <p:cNvPr id="27" name="tx27"/>
             <p:cNvSpPr/>
             <p:nvPr/>
           </p:nvSpPr>
           <p:spPr>
             <a:xfrm>
-              <a:off x="692708" y="5517199"/>
+              <a:off x="762297" y="3360243"/>
               <a:ext cx="62179" cy="80101"/>
             </a:xfrm>
             <a:prstGeom prst="rect">
@@ -4409,13 +4444,13 @@
         </p:sp>
         <p:sp>
           <p:nvSpPr>
-            <p:cNvPr id="27" name="tx27"/>
+            <p:cNvPr id="28" name="tx28"/>
             <p:cNvSpPr/>
             <p:nvPr/>
           </p:nvSpPr>
           <p:spPr>
             <a:xfrm>
-              <a:off x="692708" y="4687735"/>
+              <a:off x="762297" y="3060909"/>
               <a:ext cx="62179" cy="80101"/>
             </a:xfrm>
             <a:prstGeom prst="rect">
@@ -4455,13 +4490,13 @@
         </p:sp>
         <p:sp>
           <p:nvSpPr>
-            <p:cNvPr id="28" name="tx28"/>
+            <p:cNvPr id="29" name="tx29"/>
             <p:cNvSpPr/>
             <p:nvPr/>
           </p:nvSpPr>
           <p:spPr>
             <a:xfrm>
-              <a:off x="692708" y="3858272"/>
+              <a:off x="762297" y="2761575"/>
               <a:ext cx="62179" cy="80101"/>
             </a:xfrm>
             <a:prstGeom prst="rect">
@@ -4501,13 +4536,13 @@
         </p:sp>
         <p:sp>
           <p:nvSpPr>
-            <p:cNvPr id="29" name="tx29"/>
+            <p:cNvPr id="30" name="tx30"/>
             <p:cNvSpPr/>
             <p:nvPr/>
           </p:nvSpPr>
           <p:spPr>
             <a:xfrm>
-              <a:off x="692708" y="3028808"/>
+              <a:off x="762297" y="2462242"/>
               <a:ext cx="62179" cy="80101"/>
             </a:xfrm>
             <a:prstGeom prst="rect">
@@ -4547,13 +4582,13 @@
         </p:sp>
         <p:sp>
           <p:nvSpPr>
-            <p:cNvPr id="30" name="tx30"/>
+            <p:cNvPr id="31" name="tx31"/>
             <p:cNvSpPr/>
             <p:nvPr/>
           </p:nvSpPr>
           <p:spPr>
             <a:xfrm>
-              <a:off x="692708" y="2199345"/>
+              <a:off x="762297" y="2162908"/>
               <a:ext cx="62179" cy="80101"/>
             </a:xfrm>
             <a:prstGeom prst="rect">
@@ -4593,13 +4628,13 @@
         </p:sp>
         <p:sp>
           <p:nvSpPr>
-            <p:cNvPr id="31" name="tx31"/>
+            <p:cNvPr id="32" name="tx32"/>
             <p:cNvSpPr/>
             <p:nvPr/>
           </p:nvSpPr>
           <p:spPr>
             <a:xfrm>
-              <a:off x="2478335" y="5785772"/>
+              <a:off x="2516846" y="3522791"/>
               <a:ext cx="161574" cy="80101"/>
             </a:xfrm>
             <a:prstGeom prst="rect">
@@ -4639,13 +4674,13 @@
         </p:sp>
         <p:sp>
           <p:nvSpPr>
-            <p:cNvPr id="32" name="tx32"/>
+            <p:cNvPr id="33" name="tx33"/>
             <p:cNvSpPr/>
             <p:nvPr/>
           </p:nvSpPr>
           <p:spPr>
             <a:xfrm>
-              <a:off x="4582608" y="5785772"/>
+              <a:off x="4584458" y="3522791"/>
               <a:ext cx="62179" cy="80101"/>
             </a:xfrm>
             <a:prstGeom prst="rect">
@@ -4685,13 +4720,13 @@
         </p:sp>
         <p:sp>
           <p:nvSpPr>
-            <p:cNvPr id="33" name="tx33"/>
+            <p:cNvPr id="34" name="tx34"/>
             <p:cNvSpPr/>
             <p:nvPr/>
           </p:nvSpPr>
           <p:spPr>
             <a:xfrm>
-              <a:off x="6606094" y="5785772"/>
+              <a:off x="6571282" y="3522791"/>
               <a:ext cx="124358" cy="80101"/>
             </a:xfrm>
             <a:prstGeom prst="rect">
@@ -4731,13 +4766,13 @@
         </p:sp>
         <p:sp>
           <p:nvSpPr>
-            <p:cNvPr id="34" name="tx34"/>
+            <p:cNvPr id="35" name="tx35"/>
             <p:cNvSpPr/>
             <p:nvPr/>
           </p:nvSpPr>
           <p:spPr>
             <a:xfrm>
-              <a:off x="2928340" y="5925448"/>
+              <a:off x="2928340" y="3662467"/>
               <a:ext cx="3578047" cy="100218"/>
             </a:xfrm>
             <a:prstGeom prst="rect">
@@ -4777,13 +4812,13 @@
         </p:sp>
         <p:sp>
           <p:nvSpPr>
-            <p:cNvPr id="35" name="tx35"/>
+            <p:cNvPr id="36" name="tx36"/>
             <p:cNvSpPr/>
             <p:nvPr/>
           </p:nvSpPr>
           <p:spPr>
             <a:xfrm rot="-5400000">
-              <a:off x="68446" y="3848213"/>
+              <a:off x="138035" y="2751517"/>
               <a:ext cx="1016904" cy="100218"/>
             </a:xfrm>
             <a:prstGeom prst="rect">
@@ -4823,13 +4858,13 @@
         </p:sp>
         <p:sp>
           <p:nvSpPr>
-            <p:cNvPr id="36" name="tx36"/>
+            <p:cNvPr id="37" name="tx37"/>
             <p:cNvSpPr/>
             <p:nvPr/>
           </p:nvSpPr>
           <p:spPr>
             <a:xfrm>
-              <a:off x="817517" y="1896563"/>
+              <a:off x="887106" y="1966152"/>
               <a:ext cx="6512265" cy="82021"/>
             </a:xfrm>
             <a:prstGeom prst="rect">
@@ -4869,13 +4904,3455 @@
         </p:sp>
         <p:sp>
           <p:nvSpPr>
-            <p:cNvPr id="37" name="tx37"/>
+            <p:cNvPr id="38" name="tx38"/>
             <p:cNvSpPr/>
             <p:nvPr/>
           </p:nvSpPr>
           <p:spPr>
             <a:xfrm>
-              <a:off x="817517" y="1669789"/>
+              <a:off x="887106" y="1739378"/>
+              <a:ext cx="1963308" cy="120152"/>
+            </a:xfrm>
+            <a:prstGeom prst="rect">
+              <a:avLst/>
+            </a:prstGeom>
+            <a:noFill/>
+          </p:spPr>
+          <p:txBody>
+            <a:bodyPr lIns="0" rIns="0" tIns="0" bIns="0" anchorCtr="1" anchor="ctr" wrap="none"/>
+            <a:lstStyle/>
+            <a:p>
+              <a:pPr algn="l" marL="0" marR="0" indent="0">
+                <a:lnSpc>
+                  <a:spcPts val="1320"/>
+                </a:lnSpc>
+                <a:spcBef>
+                  <a:spcPts val="0"/>
+                </a:spcBef>
+                <a:spcAft>
+                  <a:spcPts val="0"/>
+                </a:spcAft>
+              </a:pPr>
+              <a:r>
+                <a:rPr sz="1320">
+                  <a:solidFill>
+                    <a:srgbClr val="000000">
+                      <a:alpha val="100000"/>
+                    </a:srgbClr>
+                  </a:solidFill>
+                  <a:latin typeface="Helvetica"/>
+                  <a:cs typeface="Helvetica"/>
+                </a:rPr>
+                <a:t>AKI (Carboplatin AUC ≥ 3)</a:t>
+              </a:r>
+            </a:p>
+          </p:txBody>
+        </p:sp>
+        <p:sp>
+          <p:nvSpPr>
+            <p:cNvPr id="39" name="pl39"/>
+            <p:cNvSpPr/>
+            <p:nvPr/>
+          </p:nvSpPr>
+          <p:spPr>
+            <a:xfrm>
+              <a:off x="887106" y="5444019"/>
+              <a:ext cx="7660515" cy="0"/>
+            </a:xfrm>
+            <a:custGeom>
+              <a:avLst/>
+              <a:pathLst>
+                <a:path w="7660515" h="0">
+                  <a:moveTo>
+                    <a:pt x="0" y="0"/>
+                  </a:moveTo>
+                  <a:lnTo>
+                    <a:pt x="7660515" y="0"/>
+                  </a:lnTo>
+                  <a:lnTo>
+                    <a:pt x="7660515" y="0"/>
+                  </a:lnTo>
+                </a:path>
+              </a:pathLst>
+            </a:custGeom>
+            <a:ln w="6775" cap="flat">
+              <a:solidFill>
+                <a:srgbClr val="EBEBEB">
+                  <a:alpha val="100000"/>
+                </a:srgbClr>
+              </a:solidFill>
+              <a:prstDash val="solid"/>
+              <a:round/>
+            </a:ln>
+          </p:spPr>
+          <p:txBody>
+            <a:bodyPr/>
+            <a:lstStyle/>
+            <a:p/>
+          </p:txBody>
+        </p:sp>
+        <p:sp>
+          <p:nvSpPr>
+            <p:cNvPr id="40" name="pl40"/>
+            <p:cNvSpPr/>
+            <p:nvPr/>
+          </p:nvSpPr>
+          <p:spPr>
+            <a:xfrm>
+              <a:off x="887106" y="5144686"/>
+              <a:ext cx="7660515" cy="0"/>
+            </a:xfrm>
+            <a:custGeom>
+              <a:avLst/>
+              <a:pathLst>
+                <a:path w="7660515" h="0">
+                  <a:moveTo>
+                    <a:pt x="0" y="0"/>
+                  </a:moveTo>
+                  <a:lnTo>
+                    <a:pt x="7660515" y="0"/>
+                  </a:lnTo>
+                  <a:lnTo>
+                    <a:pt x="7660515" y="0"/>
+                  </a:lnTo>
+                </a:path>
+              </a:pathLst>
+            </a:custGeom>
+            <a:ln w="6775" cap="flat">
+              <a:solidFill>
+                <a:srgbClr val="EBEBEB">
+                  <a:alpha val="100000"/>
+                </a:srgbClr>
+              </a:solidFill>
+              <a:prstDash val="solid"/>
+              <a:round/>
+            </a:ln>
+          </p:spPr>
+          <p:txBody>
+            <a:bodyPr/>
+            <a:lstStyle/>
+            <a:p/>
+          </p:txBody>
+        </p:sp>
+        <p:sp>
+          <p:nvSpPr>
+            <p:cNvPr id="41" name="pl41"/>
+            <p:cNvSpPr/>
+            <p:nvPr/>
+          </p:nvSpPr>
+          <p:spPr>
+            <a:xfrm>
+              <a:off x="887106" y="4845352"/>
+              <a:ext cx="7660515" cy="0"/>
+            </a:xfrm>
+            <a:custGeom>
+              <a:avLst/>
+              <a:pathLst>
+                <a:path w="7660515" h="0">
+                  <a:moveTo>
+                    <a:pt x="0" y="0"/>
+                  </a:moveTo>
+                  <a:lnTo>
+                    <a:pt x="7660515" y="0"/>
+                  </a:lnTo>
+                  <a:lnTo>
+                    <a:pt x="7660515" y="0"/>
+                  </a:lnTo>
+                </a:path>
+              </a:pathLst>
+            </a:custGeom>
+            <a:ln w="6775" cap="flat">
+              <a:solidFill>
+                <a:srgbClr val="EBEBEB">
+                  <a:alpha val="100000"/>
+                </a:srgbClr>
+              </a:solidFill>
+              <a:prstDash val="solid"/>
+              <a:round/>
+            </a:ln>
+          </p:spPr>
+          <p:txBody>
+            <a:bodyPr/>
+            <a:lstStyle/>
+            <a:p/>
+          </p:txBody>
+        </p:sp>
+        <p:sp>
+          <p:nvSpPr>
+            <p:cNvPr id="42" name="pl42"/>
+            <p:cNvSpPr/>
+            <p:nvPr/>
+          </p:nvSpPr>
+          <p:spPr>
+            <a:xfrm>
+              <a:off x="887106" y="4546018"/>
+              <a:ext cx="7660515" cy="0"/>
+            </a:xfrm>
+            <a:custGeom>
+              <a:avLst/>
+              <a:pathLst>
+                <a:path w="7660515" h="0">
+                  <a:moveTo>
+                    <a:pt x="0" y="0"/>
+                  </a:moveTo>
+                  <a:lnTo>
+                    <a:pt x="7660515" y="0"/>
+                  </a:lnTo>
+                  <a:lnTo>
+                    <a:pt x="7660515" y="0"/>
+                  </a:lnTo>
+                </a:path>
+              </a:pathLst>
+            </a:custGeom>
+            <a:ln w="6775" cap="flat">
+              <a:solidFill>
+                <a:srgbClr val="EBEBEB">
+                  <a:alpha val="100000"/>
+                </a:srgbClr>
+              </a:solidFill>
+              <a:prstDash val="solid"/>
+              <a:round/>
+            </a:ln>
+          </p:spPr>
+          <p:txBody>
+            <a:bodyPr/>
+            <a:lstStyle/>
+            <a:p/>
+          </p:txBody>
+        </p:sp>
+        <p:sp>
+          <p:nvSpPr>
+            <p:cNvPr id="43" name="pl43"/>
+            <p:cNvSpPr/>
+            <p:nvPr/>
+          </p:nvSpPr>
+          <p:spPr>
+            <a:xfrm>
+              <a:off x="983303" y="4336484"/>
+              <a:ext cx="0" cy="1317069"/>
+            </a:xfrm>
+            <a:custGeom>
+              <a:avLst/>
+              <a:pathLst>
+                <a:path w="0" h="1317069">
+                  <a:moveTo>
+                    <a:pt x="0" y="1317069"/>
+                  </a:moveTo>
+                  <a:lnTo>
+                    <a:pt x="0" y="0"/>
+                  </a:lnTo>
+                  <a:lnTo>
+                    <a:pt x="0" y="0"/>
+                  </a:lnTo>
+                </a:path>
+              </a:pathLst>
+            </a:custGeom>
+            <a:ln w="6775" cap="flat">
+              <a:solidFill>
+                <a:srgbClr val="EBEBEB">
+                  <a:alpha val="100000"/>
+                </a:srgbClr>
+              </a:solidFill>
+              <a:prstDash val="solid"/>
+              <a:round/>
+            </a:ln>
+          </p:spPr>
+          <p:txBody>
+            <a:bodyPr/>
+            <a:lstStyle/>
+            <a:p/>
+          </p:txBody>
+        </p:sp>
+        <p:sp>
+          <p:nvSpPr>
+            <p:cNvPr id="44" name="pl44"/>
+            <p:cNvSpPr/>
+            <p:nvPr/>
+          </p:nvSpPr>
+          <p:spPr>
+            <a:xfrm>
+              <a:off x="1790468" y="4336484"/>
+              <a:ext cx="0" cy="1317069"/>
+            </a:xfrm>
+            <a:custGeom>
+              <a:avLst/>
+              <a:pathLst>
+                <a:path w="0" h="1317069">
+                  <a:moveTo>
+                    <a:pt x="0" y="1317069"/>
+                  </a:moveTo>
+                  <a:lnTo>
+                    <a:pt x="0" y="0"/>
+                  </a:lnTo>
+                  <a:lnTo>
+                    <a:pt x="0" y="0"/>
+                  </a:lnTo>
+                </a:path>
+              </a:pathLst>
+            </a:custGeom>
+            <a:ln w="6775" cap="flat">
+              <a:solidFill>
+                <a:srgbClr val="EBEBEB">
+                  <a:alpha val="100000"/>
+                </a:srgbClr>
+              </a:solidFill>
+              <a:prstDash val="solid"/>
+              <a:round/>
+            </a:ln>
+          </p:spPr>
+          <p:txBody>
+            <a:bodyPr/>
+            <a:lstStyle/>
+            <a:p/>
+          </p:txBody>
+        </p:sp>
+        <p:sp>
+          <p:nvSpPr>
+            <p:cNvPr id="45" name="pl45"/>
+            <p:cNvSpPr/>
+            <p:nvPr/>
+          </p:nvSpPr>
+          <p:spPr>
+            <a:xfrm>
+              <a:off x="2597634" y="4336484"/>
+              <a:ext cx="0" cy="1317069"/>
+            </a:xfrm>
+            <a:custGeom>
+              <a:avLst/>
+              <a:pathLst>
+                <a:path w="0" h="1317069">
+                  <a:moveTo>
+                    <a:pt x="0" y="1317069"/>
+                  </a:moveTo>
+                  <a:lnTo>
+                    <a:pt x="0" y="0"/>
+                  </a:lnTo>
+                  <a:lnTo>
+                    <a:pt x="0" y="0"/>
+                  </a:lnTo>
+                </a:path>
+              </a:pathLst>
+            </a:custGeom>
+            <a:ln w="6775" cap="flat">
+              <a:solidFill>
+                <a:srgbClr val="EBEBEB">
+                  <a:alpha val="100000"/>
+                </a:srgbClr>
+              </a:solidFill>
+              <a:prstDash val="solid"/>
+              <a:round/>
+            </a:ln>
+          </p:spPr>
+          <p:txBody>
+            <a:bodyPr/>
+            <a:lstStyle/>
+            <a:p/>
+          </p:txBody>
+        </p:sp>
+        <p:sp>
+          <p:nvSpPr>
+            <p:cNvPr id="46" name="pl46"/>
+            <p:cNvSpPr/>
+            <p:nvPr/>
+          </p:nvSpPr>
+          <p:spPr>
+            <a:xfrm>
+              <a:off x="3404799" y="4336484"/>
+              <a:ext cx="0" cy="1317069"/>
+            </a:xfrm>
+            <a:custGeom>
+              <a:avLst/>
+              <a:pathLst>
+                <a:path w="0" h="1317069">
+                  <a:moveTo>
+                    <a:pt x="0" y="1317069"/>
+                  </a:moveTo>
+                  <a:lnTo>
+                    <a:pt x="0" y="0"/>
+                  </a:lnTo>
+                  <a:lnTo>
+                    <a:pt x="0" y="0"/>
+                  </a:lnTo>
+                </a:path>
+              </a:pathLst>
+            </a:custGeom>
+            <a:ln w="6775" cap="flat">
+              <a:solidFill>
+                <a:srgbClr val="EBEBEB">
+                  <a:alpha val="100000"/>
+                </a:srgbClr>
+              </a:solidFill>
+              <a:prstDash val="solid"/>
+              <a:round/>
+            </a:ln>
+          </p:spPr>
+          <p:txBody>
+            <a:bodyPr/>
+            <a:lstStyle/>
+            <a:p/>
+          </p:txBody>
+        </p:sp>
+        <p:sp>
+          <p:nvSpPr>
+            <p:cNvPr id="47" name="pl47"/>
+            <p:cNvSpPr/>
+            <p:nvPr/>
+          </p:nvSpPr>
+          <p:spPr>
+            <a:xfrm>
+              <a:off x="4211965" y="4336484"/>
+              <a:ext cx="0" cy="1317069"/>
+            </a:xfrm>
+            <a:custGeom>
+              <a:avLst/>
+              <a:pathLst>
+                <a:path w="0" h="1317069">
+                  <a:moveTo>
+                    <a:pt x="0" y="1317069"/>
+                  </a:moveTo>
+                  <a:lnTo>
+                    <a:pt x="0" y="0"/>
+                  </a:lnTo>
+                  <a:lnTo>
+                    <a:pt x="0" y="0"/>
+                  </a:lnTo>
+                </a:path>
+              </a:pathLst>
+            </a:custGeom>
+            <a:ln w="6775" cap="flat">
+              <a:solidFill>
+                <a:srgbClr val="EBEBEB">
+                  <a:alpha val="100000"/>
+                </a:srgbClr>
+              </a:solidFill>
+              <a:prstDash val="solid"/>
+              <a:round/>
+            </a:ln>
+          </p:spPr>
+          <p:txBody>
+            <a:bodyPr/>
+            <a:lstStyle/>
+            <a:p/>
+          </p:txBody>
+        </p:sp>
+        <p:sp>
+          <p:nvSpPr>
+            <p:cNvPr id="48" name="pl48"/>
+            <p:cNvSpPr/>
+            <p:nvPr/>
+          </p:nvSpPr>
+          <p:spPr>
+            <a:xfrm>
+              <a:off x="5019130" y="4336484"/>
+              <a:ext cx="0" cy="1317069"/>
+            </a:xfrm>
+            <a:custGeom>
+              <a:avLst/>
+              <a:pathLst>
+                <a:path w="0" h="1317069">
+                  <a:moveTo>
+                    <a:pt x="0" y="1317069"/>
+                  </a:moveTo>
+                  <a:lnTo>
+                    <a:pt x="0" y="0"/>
+                  </a:lnTo>
+                  <a:lnTo>
+                    <a:pt x="0" y="0"/>
+                  </a:lnTo>
+                </a:path>
+              </a:pathLst>
+            </a:custGeom>
+            <a:ln w="6775" cap="flat">
+              <a:solidFill>
+                <a:srgbClr val="EBEBEB">
+                  <a:alpha val="100000"/>
+                </a:srgbClr>
+              </a:solidFill>
+              <a:prstDash val="solid"/>
+              <a:round/>
+            </a:ln>
+          </p:spPr>
+          <p:txBody>
+            <a:bodyPr/>
+            <a:lstStyle/>
+            <a:p/>
+          </p:txBody>
+        </p:sp>
+        <p:sp>
+          <p:nvSpPr>
+            <p:cNvPr id="49" name="pl49"/>
+            <p:cNvSpPr/>
+            <p:nvPr/>
+          </p:nvSpPr>
+          <p:spPr>
+            <a:xfrm>
+              <a:off x="5826296" y="4336484"/>
+              <a:ext cx="0" cy="1317069"/>
+            </a:xfrm>
+            <a:custGeom>
+              <a:avLst/>
+              <a:pathLst>
+                <a:path w="0" h="1317069">
+                  <a:moveTo>
+                    <a:pt x="0" y="1317069"/>
+                  </a:moveTo>
+                  <a:lnTo>
+                    <a:pt x="0" y="0"/>
+                  </a:lnTo>
+                  <a:lnTo>
+                    <a:pt x="0" y="0"/>
+                  </a:lnTo>
+                </a:path>
+              </a:pathLst>
+            </a:custGeom>
+            <a:ln w="6775" cap="flat">
+              <a:solidFill>
+                <a:srgbClr val="EBEBEB">
+                  <a:alpha val="100000"/>
+                </a:srgbClr>
+              </a:solidFill>
+              <a:prstDash val="solid"/>
+              <a:round/>
+            </a:ln>
+          </p:spPr>
+          <p:txBody>
+            <a:bodyPr/>
+            <a:lstStyle/>
+            <a:p/>
+          </p:txBody>
+        </p:sp>
+        <p:sp>
+          <p:nvSpPr>
+            <p:cNvPr id="50" name="pl50"/>
+            <p:cNvSpPr/>
+            <p:nvPr/>
+          </p:nvSpPr>
+          <p:spPr>
+            <a:xfrm>
+              <a:off x="6633461" y="4336484"/>
+              <a:ext cx="0" cy="1317069"/>
+            </a:xfrm>
+            <a:custGeom>
+              <a:avLst/>
+              <a:pathLst>
+                <a:path w="0" h="1317069">
+                  <a:moveTo>
+                    <a:pt x="0" y="1317069"/>
+                  </a:moveTo>
+                  <a:lnTo>
+                    <a:pt x="0" y="0"/>
+                  </a:lnTo>
+                  <a:lnTo>
+                    <a:pt x="0" y="0"/>
+                  </a:lnTo>
+                </a:path>
+              </a:pathLst>
+            </a:custGeom>
+            <a:ln w="6775" cap="flat">
+              <a:solidFill>
+                <a:srgbClr val="EBEBEB">
+                  <a:alpha val="100000"/>
+                </a:srgbClr>
+              </a:solidFill>
+              <a:prstDash val="solid"/>
+              <a:round/>
+            </a:ln>
+          </p:spPr>
+          <p:txBody>
+            <a:bodyPr/>
+            <a:lstStyle/>
+            <a:p/>
+          </p:txBody>
+        </p:sp>
+        <p:sp>
+          <p:nvSpPr>
+            <p:cNvPr id="51" name="pl51"/>
+            <p:cNvSpPr/>
+            <p:nvPr/>
+          </p:nvSpPr>
+          <p:spPr>
+            <a:xfrm>
+              <a:off x="7440627" y="4336484"/>
+              <a:ext cx="0" cy="1317069"/>
+            </a:xfrm>
+            <a:custGeom>
+              <a:avLst/>
+              <a:pathLst>
+                <a:path w="0" h="1317069">
+                  <a:moveTo>
+                    <a:pt x="0" y="1317069"/>
+                  </a:moveTo>
+                  <a:lnTo>
+                    <a:pt x="0" y="0"/>
+                  </a:lnTo>
+                  <a:lnTo>
+                    <a:pt x="0" y="0"/>
+                  </a:lnTo>
+                </a:path>
+              </a:pathLst>
+            </a:custGeom>
+            <a:ln w="6775" cap="flat">
+              <a:solidFill>
+                <a:srgbClr val="EBEBEB">
+                  <a:alpha val="100000"/>
+                </a:srgbClr>
+              </a:solidFill>
+              <a:prstDash val="solid"/>
+              <a:round/>
+            </a:ln>
+          </p:spPr>
+          <p:txBody>
+            <a:bodyPr/>
+            <a:lstStyle/>
+            <a:p/>
+          </p:txBody>
+        </p:sp>
+        <p:sp>
+          <p:nvSpPr>
+            <p:cNvPr id="52" name="pl52"/>
+            <p:cNvSpPr/>
+            <p:nvPr/>
+          </p:nvSpPr>
+          <p:spPr>
+            <a:xfrm>
+              <a:off x="8247792" y="4336484"/>
+              <a:ext cx="0" cy="1317069"/>
+            </a:xfrm>
+            <a:custGeom>
+              <a:avLst/>
+              <a:pathLst>
+                <a:path w="0" h="1317069">
+                  <a:moveTo>
+                    <a:pt x="0" y="1317069"/>
+                  </a:moveTo>
+                  <a:lnTo>
+                    <a:pt x="0" y="0"/>
+                  </a:lnTo>
+                  <a:lnTo>
+                    <a:pt x="0" y="0"/>
+                  </a:lnTo>
+                </a:path>
+              </a:pathLst>
+            </a:custGeom>
+            <a:ln w="6775" cap="flat">
+              <a:solidFill>
+                <a:srgbClr val="EBEBEB">
+                  <a:alpha val="100000"/>
+                </a:srgbClr>
+              </a:solidFill>
+              <a:prstDash val="solid"/>
+              <a:round/>
+            </a:ln>
+          </p:spPr>
+          <p:txBody>
+            <a:bodyPr/>
+            <a:lstStyle/>
+            <a:p/>
+          </p:txBody>
+        </p:sp>
+        <p:sp>
+          <p:nvSpPr>
+            <p:cNvPr id="53" name="pl53"/>
+            <p:cNvSpPr/>
+            <p:nvPr/>
+          </p:nvSpPr>
+          <p:spPr>
+            <a:xfrm>
+              <a:off x="887106" y="5593686"/>
+              <a:ext cx="7660515" cy="0"/>
+            </a:xfrm>
+            <a:custGeom>
+              <a:avLst/>
+              <a:pathLst>
+                <a:path w="7660515" h="0">
+                  <a:moveTo>
+                    <a:pt x="0" y="0"/>
+                  </a:moveTo>
+                  <a:lnTo>
+                    <a:pt x="7660515" y="0"/>
+                  </a:lnTo>
+                  <a:lnTo>
+                    <a:pt x="7660515" y="0"/>
+                  </a:lnTo>
+                </a:path>
+              </a:pathLst>
+            </a:custGeom>
+            <a:ln w="13550" cap="flat">
+              <a:solidFill>
+                <a:srgbClr val="EBEBEB">
+                  <a:alpha val="100000"/>
+                </a:srgbClr>
+              </a:solidFill>
+              <a:prstDash val="solid"/>
+              <a:round/>
+            </a:ln>
+          </p:spPr>
+          <p:txBody>
+            <a:bodyPr/>
+            <a:lstStyle/>
+            <a:p/>
+          </p:txBody>
+        </p:sp>
+        <p:sp>
+          <p:nvSpPr>
+            <p:cNvPr id="54" name="pl54"/>
+            <p:cNvSpPr/>
+            <p:nvPr/>
+          </p:nvSpPr>
+          <p:spPr>
+            <a:xfrm>
+              <a:off x="887106" y="5294352"/>
+              <a:ext cx="7660515" cy="0"/>
+            </a:xfrm>
+            <a:custGeom>
+              <a:avLst/>
+              <a:pathLst>
+                <a:path w="7660515" h="0">
+                  <a:moveTo>
+                    <a:pt x="0" y="0"/>
+                  </a:moveTo>
+                  <a:lnTo>
+                    <a:pt x="7660515" y="0"/>
+                  </a:lnTo>
+                  <a:lnTo>
+                    <a:pt x="7660515" y="0"/>
+                  </a:lnTo>
+                </a:path>
+              </a:pathLst>
+            </a:custGeom>
+            <a:ln w="13550" cap="flat">
+              <a:solidFill>
+                <a:srgbClr val="EBEBEB">
+                  <a:alpha val="100000"/>
+                </a:srgbClr>
+              </a:solidFill>
+              <a:prstDash val="solid"/>
+              <a:round/>
+            </a:ln>
+          </p:spPr>
+          <p:txBody>
+            <a:bodyPr/>
+            <a:lstStyle/>
+            <a:p/>
+          </p:txBody>
+        </p:sp>
+        <p:sp>
+          <p:nvSpPr>
+            <p:cNvPr id="55" name="pl55"/>
+            <p:cNvSpPr/>
+            <p:nvPr/>
+          </p:nvSpPr>
+          <p:spPr>
+            <a:xfrm>
+              <a:off x="887106" y="4995019"/>
+              <a:ext cx="7660515" cy="0"/>
+            </a:xfrm>
+            <a:custGeom>
+              <a:avLst/>
+              <a:pathLst>
+                <a:path w="7660515" h="0">
+                  <a:moveTo>
+                    <a:pt x="0" y="0"/>
+                  </a:moveTo>
+                  <a:lnTo>
+                    <a:pt x="7660515" y="0"/>
+                  </a:lnTo>
+                  <a:lnTo>
+                    <a:pt x="7660515" y="0"/>
+                  </a:lnTo>
+                </a:path>
+              </a:pathLst>
+            </a:custGeom>
+            <a:ln w="13550" cap="flat">
+              <a:solidFill>
+                <a:srgbClr val="EBEBEB">
+                  <a:alpha val="100000"/>
+                </a:srgbClr>
+              </a:solidFill>
+              <a:prstDash val="solid"/>
+              <a:round/>
+            </a:ln>
+          </p:spPr>
+          <p:txBody>
+            <a:bodyPr/>
+            <a:lstStyle/>
+            <a:p/>
+          </p:txBody>
+        </p:sp>
+        <p:sp>
+          <p:nvSpPr>
+            <p:cNvPr id="56" name="pl56"/>
+            <p:cNvSpPr/>
+            <p:nvPr/>
+          </p:nvSpPr>
+          <p:spPr>
+            <a:xfrm>
+              <a:off x="887106" y="4695685"/>
+              <a:ext cx="7660515" cy="0"/>
+            </a:xfrm>
+            <a:custGeom>
+              <a:avLst/>
+              <a:pathLst>
+                <a:path w="7660515" h="0">
+                  <a:moveTo>
+                    <a:pt x="0" y="0"/>
+                  </a:moveTo>
+                  <a:lnTo>
+                    <a:pt x="7660515" y="0"/>
+                  </a:lnTo>
+                  <a:lnTo>
+                    <a:pt x="7660515" y="0"/>
+                  </a:lnTo>
+                </a:path>
+              </a:pathLst>
+            </a:custGeom>
+            <a:ln w="13550" cap="flat">
+              <a:solidFill>
+                <a:srgbClr val="EBEBEB">
+                  <a:alpha val="100000"/>
+                </a:srgbClr>
+              </a:solidFill>
+              <a:prstDash val="solid"/>
+              <a:round/>
+            </a:ln>
+          </p:spPr>
+          <p:txBody>
+            <a:bodyPr/>
+            <a:lstStyle/>
+            <a:p/>
+          </p:txBody>
+        </p:sp>
+        <p:sp>
+          <p:nvSpPr>
+            <p:cNvPr id="57" name="pl57"/>
+            <p:cNvSpPr/>
+            <p:nvPr/>
+          </p:nvSpPr>
+          <p:spPr>
+            <a:xfrm>
+              <a:off x="887106" y="4396351"/>
+              <a:ext cx="7660515" cy="0"/>
+            </a:xfrm>
+            <a:custGeom>
+              <a:avLst/>
+              <a:pathLst>
+                <a:path w="7660515" h="0">
+                  <a:moveTo>
+                    <a:pt x="0" y="0"/>
+                  </a:moveTo>
+                  <a:lnTo>
+                    <a:pt x="7660515" y="0"/>
+                  </a:lnTo>
+                  <a:lnTo>
+                    <a:pt x="7660515" y="0"/>
+                  </a:lnTo>
+                </a:path>
+              </a:pathLst>
+            </a:custGeom>
+            <a:ln w="13550" cap="flat">
+              <a:solidFill>
+                <a:srgbClr val="EBEBEB">
+                  <a:alpha val="100000"/>
+                </a:srgbClr>
+              </a:solidFill>
+              <a:prstDash val="solid"/>
+              <a:round/>
+            </a:ln>
+          </p:spPr>
+          <p:txBody>
+            <a:bodyPr/>
+            <a:lstStyle/>
+            <a:p/>
+          </p:txBody>
+        </p:sp>
+        <p:sp>
+          <p:nvSpPr>
+            <p:cNvPr id="58" name="pl58"/>
+            <p:cNvSpPr/>
+            <p:nvPr/>
+          </p:nvSpPr>
+          <p:spPr>
+            <a:xfrm>
+              <a:off x="1386885" y="4336484"/>
+              <a:ext cx="0" cy="1317069"/>
+            </a:xfrm>
+            <a:custGeom>
+              <a:avLst/>
+              <a:pathLst>
+                <a:path w="0" h="1317069">
+                  <a:moveTo>
+                    <a:pt x="0" y="1317069"/>
+                  </a:moveTo>
+                  <a:lnTo>
+                    <a:pt x="0" y="0"/>
+                  </a:lnTo>
+                  <a:lnTo>
+                    <a:pt x="0" y="0"/>
+                  </a:lnTo>
+                </a:path>
+              </a:pathLst>
+            </a:custGeom>
+            <a:ln w="13550" cap="flat">
+              <a:solidFill>
+                <a:srgbClr val="EBEBEB">
+                  <a:alpha val="100000"/>
+                </a:srgbClr>
+              </a:solidFill>
+              <a:prstDash val="solid"/>
+              <a:round/>
+            </a:ln>
+          </p:spPr>
+          <p:txBody>
+            <a:bodyPr/>
+            <a:lstStyle/>
+            <a:p/>
+          </p:txBody>
+        </p:sp>
+        <p:sp>
+          <p:nvSpPr>
+            <p:cNvPr id="59" name="pl59"/>
+            <p:cNvSpPr/>
+            <p:nvPr/>
+          </p:nvSpPr>
+          <p:spPr>
+            <a:xfrm>
+              <a:off x="2194051" y="4336484"/>
+              <a:ext cx="0" cy="1317069"/>
+            </a:xfrm>
+            <a:custGeom>
+              <a:avLst/>
+              <a:pathLst>
+                <a:path w="0" h="1317069">
+                  <a:moveTo>
+                    <a:pt x="0" y="1317069"/>
+                  </a:moveTo>
+                  <a:lnTo>
+                    <a:pt x="0" y="0"/>
+                  </a:lnTo>
+                  <a:lnTo>
+                    <a:pt x="0" y="0"/>
+                  </a:lnTo>
+                </a:path>
+              </a:pathLst>
+            </a:custGeom>
+            <a:ln w="13550" cap="flat">
+              <a:solidFill>
+                <a:srgbClr val="EBEBEB">
+                  <a:alpha val="100000"/>
+                </a:srgbClr>
+              </a:solidFill>
+              <a:prstDash val="solid"/>
+              <a:round/>
+            </a:ln>
+          </p:spPr>
+          <p:txBody>
+            <a:bodyPr/>
+            <a:lstStyle/>
+            <a:p/>
+          </p:txBody>
+        </p:sp>
+        <p:sp>
+          <p:nvSpPr>
+            <p:cNvPr id="60" name="pl60"/>
+            <p:cNvSpPr/>
+            <p:nvPr/>
+          </p:nvSpPr>
+          <p:spPr>
+            <a:xfrm>
+              <a:off x="3001216" y="4336484"/>
+              <a:ext cx="0" cy="1317069"/>
+            </a:xfrm>
+            <a:custGeom>
+              <a:avLst/>
+              <a:pathLst>
+                <a:path w="0" h="1317069">
+                  <a:moveTo>
+                    <a:pt x="0" y="1317069"/>
+                  </a:moveTo>
+                  <a:lnTo>
+                    <a:pt x="0" y="0"/>
+                  </a:lnTo>
+                  <a:lnTo>
+                    <a:pt x="0" y="0"/>
+                  </a:lnTo>
+                </a:path>
+              </a:pathLst>
+            </a:custGeom>
+            <a:ln w="13550" cap="flat">
+              <a:solidFill>
+                <a:srgbClr val="EBEBEB">
+                  <a:alpha val="100000"/>
+                </a:srgbClr>
+              </a:solidFill>
+              <a:prstDash val="solid"/>
+              <a:round/>
+            </a:ln>
+          </p:spPr>
+          <p:txBody>
+            <a:bodyPr/>
+            <a:lstStyle/>
+            <a:p/>
+          </p:txBody>
+        </p:sp>
+        <p:sp>
+          <p:nvSpPr>
+            <p:cNvPr id="61" name="pl61"/>
+            <p:cNvSpPr/>
+            <p:nvPr/>
+          </p:nvSpPr>
+          <p:spPr>
+            <a:xfrm>
+              <a:off x="3808382" y="4336484"/>
+              <a:ext cx="0" cy="1317069"/>
+            </a:xfrm>
+            <a:custGeom>
+              <a:avLst/>
+              <a:pathLst>
+                <a:path w="0" h="1317069">
+                  <a:moveTo>
+                    <a:pt x="0" y="1317069"/>
+                  </a:moveTo>
+                  <a:lnTo>
+                    <a:pt x="0" y="0"/>
+                  </a:lnTo>
+                  <a:lnTo>
+                    <a:pt x="0" y="0"/>
+                  </a:lnTo>
+                </a:path>
+              </a:pathLst>
+            </a:custGeom>
+            <a:ln w="13550" cap="flat">
+              <a:solidFill>
+                <a:srgbClr val="EBEBEB">
+                  <a:alpha val="100000"/>
+                </a:srgbClr>
+              </a:solidFill>
+              <a:prstDash val="solid"/>
+              <a:round/>
+            </a:ln>
+          </p:spPr>
+          <p:txBody>
+            <a:bodyPr/>
+            <a:lstStyle/>
+            <a:p/>
+          </p:txBody>
+        </p:sp>
+        <p:sp>
+          <p:nvSpPr>
+            <p:cNvPr id="62" name="pl62"/>
+            <p:cNvSpPr/>
+            <p:nvPr/>
+          </p:nvSpPr>
+          <p:spPr>
+            <a:xfrm>
+              <a:off x="4615547" y="4336484"/>
+              <a:ext cx="0" cy="1317069"/>
+            </a:xfrm>
+            <a:custGeom>
+              <a:avLst/>
+              <a:pathLst>
+                <a:path w="0" h="1317069">
+                  <a:moveTo>
+                    <a:pt x="0" y="1317069"/>
+                  </a:moveTo>
+                  <a:lnTo>
+                    <a:pt x="0" y="0"/>
+                  </a:lnTo>
+                  <a:lnTo>
+                    <a:pt x="0" y="0"/>
+                  </a:lnTo>
+                </a:path>
+              </a:pathLst>
+            </a:custGeom>
+            <a:ln w="13550" cap="flat">
+              <a:solidFill>
+                <a:srgbClr val="EBEBEB">
+                  <a:alpha val="100000"/>
+                </a:srgbClr>
+              </a:solidFill>
+              <a:prstDash val="solid"/>
+              <a:round/>
+            </a:ln>
+          </p:spPr>
+          <p:txBody>
+            <a:bodyPr/>
+            <a:lstStyle/>
+            <a:p/>
+          </p:txBody>
+        </p:sp>
+        <p:sp>
+          <p:nvSpPr>
+            <p:cNvPr id="63" name="pl63"/>
+            <p:cNvSpPr/>
+            <p:nvPr/>
+          </p:nvSpPr>
+          <p:spPr>
+            <a:xfrm>
+              <a:off x="5422713" y="4336484"/>
+              <a:ext cx="0" cy="1317069"/>
+            </a:xfrm>
+            <a:custGeom>
+              <a:avLst/>
+              <a:pathLst>
+                <a:path w="0" h="1317069">
+                  <a:moveTo>
+                    <a:pt x="0" y="1317069"/>
+                  </a:moveTo>
+                  <a:lnTo>
+                    <a:pt x="0" y="0"/>
+                  </a:lnTo>
+                  <a:lnTo>
+                    <a:pt x="0" y="0"/>
+                  </a:lnTo>
+                </a:path>
+              </a:pathLst>
+            </a:custGeom>
+            <a:ln w="13550" cap="flat">
+              <a:solidFill>
+                <a:srgbClr val="EBEBEB">
+                  <a:alpha val="100000"/>
+                </a:srgbClr>
+              </a:solidFill>
+              <a:prstDash val="solid"/>
+              <a:round/>
+            </a:ln>
+          </p:spPr>
+          <p:txBody>
+            <a:bodyPr/>
+            <a:lstStyle/>
+            <a:p/>
+          </p:txBody>
+        </p:sp>
+        <p:sp>
+          <p:nvSpPr>
+            <p:cNvPr id="64" name="pl64"/>
+            <p:cNvSpPr/>
+            <p:nvPr/>
+          </p:nvSpPr>
+          <p:spPr>
+            <a:xfrm>
+              <a:off x="6229878" y="4336484"/>
+              <a:ext cx="0" cy="1317069"/>
+            </a:xfrm>
+            <a:custGeom>
+              <a:avLst/>
+              <a:pathLst>
+                <a:path w="0" h="1317069">
+                  <a:moveTo>
+                    <a:pt x="0" y="1317069"/>
+                  </a:moveTo>
+                  <a:lnTo>
+                    <a:pt x="0" y="0"/>
+                  </a:lnTo>
+                  <a:lnTo>
+                    <a:pt x="0" y="0"/>
+                  </a:lnTo>
+                </a:path>
+              </a:pathLst>
+            </a:custGeom>
+            <a:ln w="13550" cap="flat">
+              <a:solidFill>
+                <a:srgbClr val="EBEBEB">
+                  <a:alpha val="100000"/>
+                </a:srgbClr>
+              </a:solidFill>
+              <a:prstDash val="solid"/>
+              <a:round/>
+            </a:ln>
+          </p:spPr>
+          <p:txBody>
+            <a:bodyPr/>
+            <a:lstStyle/>
+            <a:p/>
+          </p:txBody>
+        </p:sp>
+        <p:sp>
+          <p:nvSpPr>
+            <p:cNvPr id="65" name="pl65"/>
+            <p:cNvSpPr/>
+            <p:nvPr/>
+          </p:nvSpPr>
+          <p:spPr>
+            <a:xfrm>
+              <a:off x="7037044" y="4336484"/>
+              <a:ext cx="0" cy="1317069"/>
+            </a:xfrm>
+            <a:custGeom>
+              <a:avLst/>
+              <a:pathLst>
+                <a:path w="0" h="1317069">
+                  <a:moveTo>
+                    <a:pt x="0" y="1317069"/>
+                  </a:moveTo>
+                  <a:lnTo>
+                    <a:pt x="0" y="0"/>
+                  </a:lnTo>
+                  <a:lnTo>
+                    <a:pt x="0" y="0"/>
+                  </a:lnTo>
+                </a:path>
+              </a:pathLst>
+            </a:custGeom>
+            <a:ln w="13550" cap="flat">
+              <a:solidFill>
+                <a:srgbClr val="EBEBEB">
+                  <a:alpha val="100000"/>
+                </a:srgbClr>
+              </a:solidFill>
+              <a:prstDash val="solid"/>
+              <a:round/>
+            </a:ln>
+          </p:spPr>
+          <p:txBody>
+            <a:bodyPr/>
+            <a:lstStyle/>
+            <a:p/>
+          </p:txBody>
+        </p:sp>
+        <p:sp>
+          <p:nvSpPr>
+            <p:cNvPr id="66" name="pl66"/>
+            <p:cNvSpPr/>
+            <p:nvPr/>
+          </p:nvSpPr>
+          <p:spPr>
+            <a:xfrm>
+              <a:off x="7844209" y="4336484"/>
+              <a:ext cx="0" cy="1317069"/>
+            </a:xfrm>
+            <a:custGeom>
+              <a:avLst/>
+              <a:pathLst>
+                <a:path w="0" h="1317069">
+                  <a:moveTo>
+                    <a:pt x="0" y="1317069"/>
+                  </a:moveTo>
+                  <a:lnTo>
+                    <a:pt x="0" y="0"/>
+                  </a:lnTo>
+                  <a:lnTo>
+                    <a:pt x="0" y="0"/>
+                  </a:lnTo>
+                </a:path>
+              </a:pathLst>
+            </a:custGeom>
+            <a:ln w="13550" cap="flat">
+              <a:solidFill>
+                <a:srgbClr val="EBEBEB">
+                  <a:alpha val="100000"/>
+                </a:srgbClr>
+              </a:solidFill>
+              <a:prstDash val="solid"/>
+              <a:round/>
+            </a:ln>
+          </p:spPr>
+          <p:txBody>
+            <a:bodyPr/>
+            <a:lstStyle/>
+            <a:p/>
+          </p:txBody>
+        </p:sp>
+        <p:sp>
+          <p:nvSpPr>
+            <p:cNvPr id="67" name="pg67"/>
+            <p:cNvSpPr/>
+            <p:nvPr/>
+          </p:nvSpPr>
+          <p:spPr>
+            <a:xfrm>
+              <a:off x="1235312" y="4336484"/>
+              <a:ext cx="6964104" cy="1257037"/>
+            </a:xfrm>
+            <a:custGeom>
+              <a:avLst/>
+              <a:pathLst>
+                <a:path w="6964104" h="1257037">
+                  <a:moveTo>
+                    <a:pt x="2525163" y="0"/>
+                  </a:moveTo>
+                  <a:lnTo>
+                    <a:pt x="2532401" y="19377"/>
+                  </a:lnTo>
+                  <a:lnTo>
+                    <a:pt x="2602746" y="182829"/>
+                  </a:lnTo>
+                  <a:lnTo>
+                    <a:pt x="2673090" y="324698"/>
+                  </a:lnTo>
+                  <a:lnTo>
+                    <a:pt x="2743435" y="447833"/>
+                  </a:lnTo>
+                  <a:lnTo>
+                    <a:pt x="2813779" y="554708"/>
+                  </a:lnTo>
+                  <a:lnTo>
+                    <a:pt x="2884124" y="647471"/>
+                  </a:lnTo>
+                  <a:lnTo>
+                    <a:pt x="2954468" y="727985"/>
+                  </a:lnTo>
+                  <a:lnTo>
+                    <a:pt x="3024813" y="797867"/>
+                  </a:lnTo>
+                  <a:lnTo>
+                    <a:pt x="3095157" y="858521"/>
+                  </a:lnTo>
+                  <a:lnTo>
+                    <a:pt x="3165502" y="911166"/>
+                  </a:lnTo>
+                  <a:lnTo>
+                    <a:pt x="3235846" y="956859"/>
+                  </a:lnTo>
+                  <a:lnTo>
+                    <a:pt x="3306191" y="964231"/>
+                  </a:lnTo>
+                  <a:lnTo>
+                    <a:pt x="3376535" y="970609"/>
+                  </a:lnTo>
+                  <a:lnTo>
+                    <a:pt x="3446880" y="976848"/>
+                  </a:lnTo>
+                  <a:lnTo>
+                    <a:pt x="3517224" y="982952"/>
+                  </a:lnTo>
+                  <a:lnTo>
+                    <a:pt x="3587569" y="988922"/>
+                  </a:lnTo>
+                  <a:lnTo>
+                    <a:pt x="3657913" y="994763"/>
+                  </a:lnTo>
+                  <a:lnTo>
+                    <a:pt x="3728257" y="1000476"/>
+                  </a:lnTo>
+                  <a:lnTo>
+                    <a:pt x="3798602" y="1006065"/>
+                  </a:lnTo>
+                  <a:lnTo>
+                    <a:pt x="3868946" y="1011532"/>
+                  </a:lnTo>
+                  <a:lnTo>
+                    <a:pt x="3939291" y="1016880"/>
+                  </a:lnTo>
+                  <a:lnTo>
+                    <a:pt x="4009635" y="1022112"/>
+                  </a:lnTo>
+                  <a:lnTo>
+                    <a:pt x="4079980" y="1027230"/>
+                  </a:lnTo>
+                  <a:lnTo>
+                    <a:pt x="4150324" y="1032236"/>
+                  </a:lnTo>
+                  <a:lnTo>
+                    <a:pt x="4220669" y="1037134"/>
+                  </a:lnTo>
+                  <a:lnTo>
+                    <a:pt x="4291013" y="1041925"/>
+                  </a:lnTo>
+                  <a:lnTo>
+                    <a:pt x="4361358" y="1046611"/>
+                  </a:lnTo>
+                  <a:lnTo>
+                    <a:pt x="4431702" y="1051196"/>
+                  </a:lnTo>
+                  <a:lnTo>
+                    <a:pt x="4502047" y="1055681"/>
+                  </a:lnTo>
+                  <a:lnTo>
+                    <a:pt x="4572391" y="1060068"/>
+                  </a:lnTo>
+                  <a:lnTo>
+                    <a:pt x="4642736" y="1064359"/>
+                  </a:lnTo>
+                  <a:lnTo>
+                    <a:pt x="4713080" y="1068558"/>
+                  </a:lnTo>
+                  <a:lnTo>
+                    <a:pt x="4783425" y="1072664"/>
+                  </a:lnTo>
+                  <a:lnTo>
+                    <a:pt x="4853769" y="1076682"/>
+                  </a:lnTo>
+                  <a:lnTo>
+                    <a:pt x="4924114" y="1080612"/>
+                  </a:lnTo>
+                  <a:lnTo>
+                    <a:pt x="4994458" y="1084456"/>
+                  </a:lnTo>
+                  <a:lnTo>
+                    <a:pt x="5064803" y="1088217"/>
+                  </a:lnTo>
+                  <a:lnTo>
+                    <a:pt x="5135147" y="1091895"/>
+                  </a:lnTo>
+                  <a:lnTo>
+                    <a:pt x="5205492" y="1095494"/>
+                  </a:lnTo>
+                  <a:lnTo>
+                    <a:pt x="5275836" y="1099015"/>
+                  </a:lnTo>
+                  <a:lnTo>
+                    <a:pt x="5346181" y="1102458"/>
+                  </a:lnTo>
+                  <a:lnTo>
+                    <a:pt x="5416525" y="1105827"/>
+                  </a:lnTo>
+                  <a:lnTo>
+                    <a:pt x="5486870" y="1109122"/>
+                  </a:lnTo>
+                  <a:lnTo>
+                    <a:pt x="5557214" y="1112346"/>
+                  </a:lnTo>
+                  <a:lnTo>
+                    <a:pt x="5627559" y="1115500"/>
+                  </a:lnTo>
+                  <a:lnTo>
+                    <a:pt x="5697903" y="1118585"/>
+                  </a:lnTo>
+                  <a:lnTo>
+                    <a:pt x="5768248" y="1121602"/>
+                  </a:lnTo>
+                  <a:lnTo>
+                    <a:pt x="5838592" y="1124554"/>
+                  </a:lnTo>
+                  <a:lnTo>
+                    <a:pt x="5908937" y="1127442"/>
+                  </a:lnTo>
+                  <a:lnTo>
+                    <a:pt x="5979281" y="1130267"/>
+                  </a:lnTo>
+                  <a:lnTo>
+                    <a:pt x="6049626" y="1133030"/>
+                  </a:lnTo>
+                  <a:lnTo>
+                    <a:pt x="6119970" y="1135733"/>
+                  </a:lnTo>
+                  <a:lnTo>
+                    <a:pt x="6190315" y="1138378"/>
+                  </a:lnTo>
+                  <a:lnTo>
+                    <a:pt x="6260659" y="1140965"/>
+                  </a:lnTo>
+                  <a:lnTo>
+                    <a:pt x="6331004" y="1143495"/>
+                  </a:lnTo>
+                  <a:lnTo>
+                    <a:pt x="6401348" y="1145970"/>
+                  </a:lnTo>
+                  <a:lnTo>
+                    <a:pt x="6471693" y="1148392"/>
+                  </a:lnTo>
+                  <a:lnTo>
+                    <a:pt x="6542037" y="1150761"/>
+                  </a:lnTo>
+                  <a:lnTo>
+                    <a:pt x="6612382" y="1153078"/>
+                  </a:lnTo>
+                  <a:lnTo>
+                    <a:pt x="6682726" y="1155345"/>
+                  </a:lnTo>
+                  <a:lnTo>
+                    <a:pt x="6753071" y="1157562"/>
+                  </a:lnTo>
+                  <a:lnTo>
+                    <a:pt x="6823415" y="1159731"/>
+                  </a:lnTo>
+                  <a:lnTo>
+                    <a:pt x="6893760" y="1161853"/>
+                  </a:lnTo>
+                  <a:lnTo>
+                    <a:pt x="6964104" y="1163929"/>
+                  </a:lnTo>
+                  <a:lnTo>
+                    <a:pt x="6964104" y="1257037"/>
+                  </a:lnTo>
+                  <a:lnTo>
+                    <a:pt x="6893760" y="1257012"/>
+                  </a:lnTo>
+                  <a:lnTo>
+                    <a:pt x="6823415" y="1256983"/>
+                  </a:lnTo>
+                  <a:lnTo>
+                    <a:pt x="6753071" y="1256949"/>
+                  </a:lnTo>
+                  <a:lnTo>
+                    <a:pt x="6682726" y="1256911"/>
+                  </a:lnTo>
+                  <a:lnTo>
+                    <a:pt x="6612382" y="1256867"/>
+                  </a:lnTo>
+                  <a:lnTo>
+                    <a:pt x="6542037" y="1256816"/>
+                  </a:lnTo>
+                  <a:lnTo>
+                    <a:pt x="6471693" y="1256757"/>
+                  </a:lnTo>
+                  <a:lnTo>
+                    <a:pt x="6401348" y="1256689"/>
+                  </a:lnTo>
+                  <a:lnTo>
+                    <a:pt x="6331004" y="1256611"/>
+                  </a:lnTo>
+                  <a:lnTo>
+                    <a:pt x="6260659" y="1256521"/>
+                  </a:lnTo>
+                  <a:lnTo>
+                    <a:pt x="6190315" y="1256418"/>
+                  </a:lnTo>
+                  <a:lnTo>
+                    <a:pt x="6119970" y="1256298"/>
+                  </a:lnTo>
+                  <a:lnTo>
+                    <a:pt x="6049626" y="1256161"/>
+                  </a:lnTo>
+                  <a:lnTo>
+                    <a:pt x="5979281" y="1256002"/>
+                  </a:lnTo>
+                  <a:lnTo>
+                    <a:pt x="5908937" y="1255820"/>
+                  </a:lnTo>
+                  <a:lnTo>
+                    <a:pt x="5838592" y="1255610"/>
+                  </a:lnTo>
+                  <a:lnTo>
+                    <a:pt x="5768248" y="1255368"/>
+                  </a:lnTo>
+                  <a:lnTo>
+                    <a:pt x="5697903" y="1255088"/>
+                  </a:lnTo>
+                  <a:lnTo>
+                    <a:pt x="5627559" y="1254767"/>
+                  </a:lnTo>
+                  <a:lnTo>
+                    <a:pt x="5557214" y="1254397"/>
+                  </a:lnTo>
+                  <a:lnTo>
+                    <a:pt x="5486870" y="1253970"/>
+                  </a:lnTo>
+                  <a:lnTo>
+                    <a:pt x="5416525" y="1253478"/>
+                  </a:lnTo>
+                  <a:lnTo>
+                    <a:pt x="5346181" y="1252911"/>
+                  </a:lnTo>
+                  <a:lnTo>
+                    <a:pt x="5275836" y="1252259"/>
+                  </a:lnTo>
+                  <a:lnTo>
+                    <a:pt x="5205492" y="1251507"/>
+                  </a:lnTo>
+                  <a:lnTo>
+                    <a:pt x="5135147" y="1250640"/>
+                  </a:lnTo>
+                  <a:lnTo>
+                    <a:pt x="5064803" y="1249642"/>
+                  </a:lnTo>
+                  <a:lnTo>
+                    <a:pt x="4994458" y="1248492"/>
+                  </a:lnTo>
+                  <a:lnTo>
+                    <a:pt x="4924114" y="1247167"/>
+                  </a:lnTo>
+                  <a:lnTo>
+                    <a:pt x="4853769" y="1245640"/>
+                  </a:lnTo>
+                  <a:lnTo>
+                    <a:pt x="4783425" y="1243881"/>
+                  </a:lnTo>
+                  <a:lnTo>
+                    <a:pt x="4713080" y="1241855"/>
+                  </a:lnTo>
+                  <a:lnTo>
+                    <a:pt x="4642736" y="1239520"/>
+                  </a:lnTo>
+                  <a:lnTo>
+                    <a:pt x="4572391" y="1236830"/>
+                  </a:lnTo>
+                  <a:lnTo>
+                    <a:pt x="4502047" y="1233730"/>
+                  </a:lnTo>
+                  <a:lnTo>
+                    <a:pt x="4431702" y="1230159"/>
+                  </a:lnTo>
+                  <a:lnTo>
+                    <a:pt x="4361358" y="1226045"/>
+                  </a:lnTo>
+                  <a:lnTo>
+                    <a:pt x="4291013" y="1221305"/>
+                  </a:lnTo>
+                  <a:lnTo>
+                    <a:pt x="4220669" y="1215844"/>
+                  </a:lnTo>
+                  <a:lnTo>
+                    <a:pt x="4150324" y="1209552"/>
+                  </a:lnTo>
+                  <a:lnTo>
+                    <a:pt x="4079980" y="1202303"/>
+                  </a:lnTo>
+                  <a:lnTo>
+                    <a:pt x="4009635" y="1193950"/>
+                  </a:lnTo>
+                  <a:lnTo>
+                    <a:pt x="3939291" y="1184328"/>
+                  </a:lnTo>
+                  <a:lnTo>
+                    <a:pt x="3868946" y="1173241"/>
+                  </a:lnTo>
+                  <a:lnTo>
+                    <a:pt x="3798602" y="1160467"/>
+                  </a:lnTo>
+                  <a:lnTo>
+                    <a:pt x="3728257" y="1145750"/>
+                  </a:lnTo>
+                  <a:lnTo>
+                    <a:pt x="3657913" y="1128794"/>
+                  </a:lnTo>
+                  <a:lnTo>
+                    <a:pt x="3587569" y="1109258"/>
+                  </a:lnTo>
+                  <a:lnTo>
+                    <a:pt x="3517224" y="1086751"/>
+                  </a:lnTo>
+                  <a:lnTo>
+                    <a:pt x="3446880" y="1060819"/>
+                  </a:lnTo>
+                  <a:lnTo>
+                    <a:pt x="3376535" y="1030942"/>
+                  </a:lnTo>
+                  <a:lnTo>
+                    <a:pt x="3306191" y="996519"/>
+                  </a:lnTo>
+                  <a:lnTo>
+                    <a:pt x="3235846" y="957711"/>
+                  </a:lnTo>
+                  <a:lnTo>
+                    <a:pt x="3165502" y="951046"/>
+                  </a:lnTo>
+                  <a:lnTo>
+                    <a:pt x="3095157" y="944233"/>
+                  </a:lnTo>
+                  <a:lnTo>
+                    <a:pt x="3024813" y="937268"/>
+                  </a:lnTo>
+                  <a:lnTo>
+                    <a:pt x="2954468" y="930148"/>
+                  </a:lnTo>
+                  <a:lnTo>
+                    <a:pt x="2884124" y="922870"/>
+                  </a:lnTo>
+                  <a:lnTo>
+                    <a:pt x="2813779" y="915429"/>
+                  </a:lnTo>
+                  <a:lnTo>
+                    <a:pt x="2743435" y="907823"/>
+                  </a:lnTo>
+                  <a:lnTo>
+                    <a:pt x="2673090" y="900048"/>
+                  </a:lnTo>
+                  <a:lnTo>
+                    <a:pt x="2602746" y="892100"/>
+                  </a:lnTo>
+                  <a:lnTo>
+                    <a:pt x="2532401" y="883975"/>
+                  </a:lnTo>
+                  <a:lnTo>
+                    <a:pt x="2462057" y="875669"/>
+                  </a:lnTo>
+                  <a:lnTo>
+                    <a:pt x="2391712" y="867178"/>
+                  </a:lnTo>
+                  <a:lnTo>
+                    <a:pt x="2321368" y="858498"/>
+                  </a:lnTo>
+                  <a:lnTo>
+                    <a:pt x="2251023" y="849625"/>
+                  </a:lnTo>
+                  <a:lnTo>
+                    <a:pt x="2180679" y="840555"/>
+                  </a:lnTo>
+                  <a:lnTo>
+                    <a:pt x="2110334" y="831283"/>
+                  </a:lnTo>
+                  <a:lnTo>
+                    <a:pt x="2039990" y="821804"/>
+                  </a:lnTo>
+                  <a:lnTo>
+                    <a:pt x="1969645" y="812114"/>
+                  </a:lnTo>
+                  <a:lnTo>
+                    <a:pt x="1899301" y="802209"/>
+                  </a:lnTo>
+                  <a:lnTo>
+                    <a:pt x="1828956" y="792084"/>
+                  </a:lnTo>
+                  <a:lnTo>
+                    <a:pt x="1758612" y="781733"/>
+                  </a:lnTo>
+                  <a:lnTo>
+                    <a:pt x="1688267" y="771151"/>
+                  </a:lnTo>
+                  <a:lnTo>
+                    <a:pt x="1617923" y="760335"/>
+                  </a:lnTo>
+                  <a:lnTo>
+                    <a:pt x="1547578" y="749277"/>
+                  </a:lnTo>
+                  <a:lnTo>
+                    <a:pt x="1477234" y="737974"/>
+                  </a:lnTo>
+                  <a:lnTo>
+                    <a:pt x="1406889" y="726418"/>
+                  </a:lnTo>
+                  <a:lnTo>
+                    <a:pt x="1336545" y="714606"/>
+                  </a:lnTo>
+                  <a:lnTo>
+                    <a:pt x="1266200" y="702531"/>
+                  </a:lnTo>
+                  <a:lnTo>
+                    <a:pt x="1195856" y="690187"/>
+                  </a:lnTo>
+                  <a:lnTo>
+                    <a:pt x="1125511" y="677568"/>
+                  </a:lnTo>
+                  <a:lnTo>
+                    <a:pt x="1055167" y="664669"/>
+                  </a:lnTo>
+                  <a:lnTo>
+                    <a:pt x="984822" y="651482"/>
+                  </a:lnTo>
+                  <a:lnTo>
+                    <a:pt x="914478" y="638003"/>
+                  </a:lnTo>
+                  <a:lnTo>
+                    <a:pt x="844133" y="624223"/>
+                  </a:lnTo>
+                  <a:lnTo>
+                    <a:pt x="773789" y="610136"/>
+                  </a:lnTo>
+                  <a:lnTo>
+                    <a:pt x="703444" y="595736"/>
+                  </a:lnTo>
+                  <a:lnTo>
+                    <a:pt x="633100" y="581015"/>
+                  </a:lnTo>
+                  <a:lnTo>
+                    <a:pt x="562755" y="565967"/>
+                  </a:lnTo>
+                  <a:lnTo>
+                    <a:pt x="492411" y="550584"/>
+                  </a:lnTo>
+                  <a:lnTo>
+                    <a:pt x="422066" y="534859"/>
+                  </a:lnTo>
+                  <a:lnTo>
+                    <a:pt x="351722" y="518783"/>
+                  </a:lnTo>
+                  <a:lnTo>
+                    <a:pt x="281377" y="502350"/>
+                  </a:lnTo>
+                  <a:lnTo>
+                    <a:pt x="211033" y="485551"/>
+                  </a:lnTo>
+                  <a:lnTo>
+                    <a:pt x="140688" y="468379"/>
+                  </a:lnTo>
+                  <a:lnTo>
+                    <a:pt x="70344" y="450824"/>
+                  </a:lnTo>
+                  <a:lnTo>
+                    <a:pt x="0" y="432878"/>
+                  </a:lnTo>
+                  <a:lnTo>
+                    <a:pt x="0" y="0"/>
+                  </a:lnTo>
+                  <a:close/>
+                </a:path>
+              </a:pathLst>
+            </a:custGeom>
+            <a:solidFill>
+              <a:srgbClr val="FF8C00">
+                <a:alpha val="20000"/>
+              </a:srgbClr>
+            </a:solidFill>
+          </p:spPr>
+          <p:txBody>
+            <a:bodyPr/>
+            <a:lstStyle/>
+            <a:p/>
+          </p:txBody>
+        </p:sp>
+        <p:sp>
+          <p:nvSpPr>
+            <p:cNvPr id="68" name="pl68"/>
+            <p:cNvSpPr/>
+            <p:nvPr/>
+          </p:nvSpPr>
+          <p:spPr>
+            <a:xfrm>
+              <a:off x="3760475" y="4336484"/>
+              <a:ext cx="4438941" cy="1163929"/>
+            </a:xfrm>
+            <a:custGeom>
+              <a:avLst/>
+              <a:pathLst>
+                <a:path w="4438941" h="1163929">
+                  <a:moveTo>
+                    <a:pt x="0" y="0"/>
+                  </a:moveTo>
+                  <a:lnTo>
+                    <a:pt x="7238" y="19377"/>
+                  </a:lnTo>
+                  <a:lnTo>
+                    <a:pt x="77582" y="182829"/>
+                  </a:lnTo>
+                  <a:lnTo>
+                    <a:pt x="147927" y="324698"/>
+                  </a:lnTo>
+                  <a:lnTo>
+                    <a:pt x="218271" y="447833"/>
+                  </a:lnTo>
+                  <a:lnTo>
+                    <a:pt x="288616" y="554708"/>
+                  </a:lnTo>
+                  <a:lnTo>
+                    <a:pt x="358960" y="647471"/>
+                  </a:lnTo>
+                  <a:lnTo>
+                    <a:pt x="429305" y="727985"/>
+                  </a:lnTo>
+                  <a:lnTo>
+                    <a:pt x="499649" y="797867"/>
+                  </a:lnTo>
+                  <a:lnTo>
+                    <a:pt x="569994" y="858521"/>
+                  </a:lnTo>
+                  <a:lnTo>
+                    <a:pt x="640338" y="911166"/>
+                  </a:lnTo>
+                  <a:lnTo>
+                    <a:pt x="710683" y="956859"/>
+                  </a:lnTo>
+                  <a:lnTo>
+                    <a:pt x="781027" y="964231"/>
+                  </a:lnTo>
+                  <a:lnTo>
+                    <a:pt x="851372" y="970609"/>
+                  </a:lnTo>
+                  <a:lnTo>
+                    <a:pt x="921716" y="976848"/>
+                  </a:lnTo>
+                  <a:lnTo>
+                    <a:pt x="992061" y="982952"/>
+                  </a:lnTo>
+                  <a:lnTo>
+                    <a:pt x="1062405" y="988922"/>
+                  </a:lnTo>
+                  <a:lnTo>
+                    <a:pt x="1132750" y="994763"/>
+                  </a:lnTo>
+                  <a:lnTo>
+                    <a:pt x="1203094" y="1000476"/>
+                  </a:lnTo>
+                  <a:lnTo>
+                    <a:pt x="1273439" y="1006065"/>
+                  </a:lnTo>
+                  <a:lnTo>
+                    <a:pt x="1343783" y="1011532"/>
+                  </a:lnTo>
+                  <a:lnTo>
+                    <a:pt x="1414128" y="1016880"/>
+                  </a:lnTo>
+                  <a:lnTo>
+                    <a:pt x="1484472" y="1022112"/>
+                  </a:lnTo>
+                  <a:lnTo>
+                    <a:pt x="1554816" y="1027230"/>
+                  </a:lnTo>
+                  <a:lnTo>
+                    <a:pt x="1625161" y="1032236"/>
+                  </a:lnTo>
+                  <a:lnTo>
+                    <a:pt x="1695505" y="1037134"/>
+                  </a:lnTo>
+                  <a:lnTo>
+                    <a:pt x="1765850" y="1041925"/>
+                  </a:lnTo>
+                  <a:lnTo>
+                    <a:pt x="1836194" y="1046611"/>
+                  </a:lnTo>
+                  <a:lnTo>
+                    <a:pt x="1906539" y="1051196"/>
+                  </a:lnTo>
+                  <a:lnTo>
+                    <a:pt x="1976883" y="1055681"/>
+                  </a:lnTo>
+                  <a:lnTo>
+                    <a:pt x="2047228" y="1060068"/>
+                  </a:lnTo>
+                  <a:lnTo>
+                    <a:pt x="2117572" y="1064359"/>
+                  </a:lnTo>
+                  <a:lnTo>
+                    <a:pt x="2187917" y="1068558"/>
+                  </a:lnTo>
+                  <a:lnTo>
+                    <a:pt x="2258261" y="1072664"/>
+                  </a:lnTo>
+                  <a:lnTo>
+                    <a:pt x="2328606" y="1076682"/>
+                  </a:lnTo>
+                  <a:lnTo>
+                    <a:pt x="2398950" y="1080612"/>
+                  </a:lnTo>
+                  <a:lnTo>
+                    <a:pt x="2469295" y="1084456"/>
+                  </a:lnTo>
+                  <a:lnTo>
+                    <a:pt x="2539639" y="1088217"/>
+                  </a:lnTo>
+                  <a:lnTo>
+                    <a:pt x="2609984" y="1091895"/>
+                  </a:lnTo>
+                  <a:lnTo>
+                    <a:pt x="2680328" y="1095494"/>
+                  </a:lnTo>
+                  <a:lnTo>
+                    <a:pt x="2750673" y="1099015"/>
+                  </a:lnTo>
+                  <a:lnTo>
+                    <a:pt x="2821017" y="1102458"/>
+                  </a:lnTo>
+                  <a:lnTo>
+                    <a:pt x="2891362" y="1105827"/>
+                  </a:lnTo>
+                  <a:lnTo>
+                    <a:pt x="2961706" y="1109122"/>
+                  </a:lnTo>
+                  <a:lnTo>
+                    <a:pt x="3032051" y="1112346"/>
+                  </a:lnTo>
+                  <a:lnTo>
+                    <a:pt x="3102395" y="1115500"/>
+                  </a:lnTo>
+                  <a:lnTo>
+                    <a:pt x="3172740" y="1118585"/>
+                  </a:lnTo>
+                  <a:lnTo>
+                    <a:pt x="3243084" y="1121602"/>
+                  </a:lnTo>
+                  <a:lnTo>
+                    <a:pt x="3313429" y="1124554"/>
+                  </a:lnTo>
+                  <a:lnTo>
+                    <a:pt x="3383773" y="1127442"/>
+                  </a:lnTo>
+                  <a:lnTo>
+                    <a:pt x="3454118" y="1130267"/>
+                  </a:lnTo>
+                  <a:lnTo>
+                    <a:pt x="3524462" y="1133030"/>
+                  </a:lnTo>
+                  <a:lnTo>
+                    <a:pt x="3594807" y="1135733"/>
+                  </a:lnTo>
+                  <a:lnTo>
+                    <a:pt x="3665151" y="1138378"/>
+                  </a:lnTo>
+                  <a:lnTo>
+                    <a:pt x="3735496" y="1140965"/>
+                  </a:lnTo>
+                  <a:lnTo>
+                    <a:pt x="3805840" y="1143495"/>
+                  </a:lnTo>
+                  <a:lnTo>
+                    <a:pt x="3876185" y="1145970"/>
+                  </a:lnTo>
+                  <a:lnTo>
+                    <a:pt x="3946529" y="1148392"/>
+                  </a:lnTo>
+                  <a:lnTo>
+                    <a:pt x="4016874" y="1150761"/>
+                  </a:lnTo>
+                  <a:lnTo>
+                    <a:pt x="4087218" y="1153078"/>
+                  </a:lnTo>
+                  <a:lnTo>
+                    <a:pt x="4157563" y="1155345"/>
+                  </a:lnTo>
+                  <a:lnTo>
+                    <a:pt x="4227907" y="1157562"/>
+                  </a:lnTo>
+                  <a:lnTo>
+                    <a:pt x="4298252" y="1159731"/>
+                  </a:lnTo>
+                  <a:lnTo>
+                    <a:pt x="4368596" y="1161853"/>
+                  </a:lnTo>
+                  <a:lnTo>
+                    <a:pt x="4438941" y="1163929"/>
+                  </a:lnTo>
+                </a:path>
+              </a:pathLst>
+            </a:custGeom>
+          </p:spPr>
+          <p:txBody>
+            <a:bodyPr/>
+            <a:lstStyle/>
+            <a:p/>
+          </p:txBody>
+        </p:sp>
+        <p:sp>
+          <p:nvSpPr>
+            <p:cNvPr id="69" name="pl69"/>
+            <p:cNvSpPr/>
+            <p:nvPr/>
+          </p:nvSpPr>
+          <p:spPr>
+            <a:xfrm>
+              <a:off x="1235312" y="4769363"/>
+              <a:ext cx="6964104" cy="824158"/>
+            </a:xfrm>
+            <a:custGeom>
+              <a:avLst/>
+              <a:pathLst>
+                <a:path w="6964104" h="824158">
+                  <a:moveTo>
+                    <a:pt x="6964104" y="824158"/>
+                  </a:moveTo>
+                  <a:lnTo>
+                    <a:pt x="6893760" y="824133"/>
+                  </a:lnTo>
+                  <a:lnTo>
+                    <a:pt x="6823415" y="824104"/>
+                  </a:lnTo>
+                  <a:lnTo>
+                    <a:pt x="6753071" y="824070"/>
+                  </a:lnTo>
+                  <a:lnTo>
+                    <a:pt x="6682726" y="824032"/>
+                  </a:lnTo>
+                  <a:lnTo>
+                    <a:pt x="6612382" y="823988"/>
+                  </a:lnTo>
+                  <a:lnTo>
+                    <a:pt x="6542037" y="823937"/>
+                  </a:lnTo>
+                  <a:lnTo>
+                    <a:pt x="6471693" y="823878"/>
+                  </a:lnTo>
+                  <a:lnTo>
+                    <a:pt x="6401348" y="823810"/>
+                  </a:lnTo>
+                  <a:lnTo>
+                    <a:pt x="6331004" y="823732"/>
+                  </a:lnTo>
+                  <a:lnTo>
+                    <a:pt x="6260659" y="823642"/>
+                  </a:lnTo>
+                  <a:lnTo>
+                    <a:pt x="6190315" y="823539"/>
+                  </a:lnTo>
+                  <a:lnTo>
+                    <a:pt x="6119970" y="823419"/>
+                  </a:lnTo>
+                  <a:lnTo>
+                    <a:pt x="6049626" y="823282"/>
+                  </a:lnTo>
+                  <a:lnTo>
+                    <a:pt x="5979281" y="823124"/>
+                  </a:lnTo>
+                  <a:lnTo>
+                    <a:pt x="5908937" y="822941"/>
+                  </a:lnTo>
+                  <a:lnTo>
+                    <a:pt x="5838592" y="822731"/>
+                  </a:lnTo>
+                  <a:lnTo>
+                    <a:pt x="5768248" y="822489"/>
+                  </a:lnTo>
+                  <a:lnTo>
+                    <a:pt x="5697903" y="822210"/>
+                  </a:lnTo>
+                  <a:lnTo>
+                    <a:pt x="5627559" y="821888"/>
+                  </a:lnTo>
+                  <a:lnTo>
+                    <a:pt x="5557214" y="821518"/>
+                  </a:lnTo>
+                  <a:lnTo>
+                    <a:pt x="5486870" y="821091"/>
+                  </a:lnTo>
+                  <a:lnTo>
+                    <a:pt x="5416525" y="820599"/>
+                  </a:lnTo>
+                  <a:lnTo>
+                    <a:pt x="5346181" y="820033"/>
+                  </a:lnTo>
+                  <a:lnTo>
+                    <a:pt x="5275836" y="819380"/>
+                  </a:lnTo>
+                  <a:lnTo>
+                    <a:pt x="5205492" y="818628"/>
+                  </a:lnTo>
+                  <a:lnTo>
+                    <a:pt x="5135147" y="817761"/>
+                  </a:lnTo>
+                  <a:lnTo>
+                    <a:pt x="5064803" y="816763"/>
+                  </a:lnTo>
+                  <a:lnTo>
+                    <a:pt x="4994458" y="815613"/>
+                  </a:lnTo>
+                  <a:lnTo>
+                    <a:pt x="4924114" y="814288"/>
+                  </a:lnTo>
+                  <a:lnTo>
+                    <a:pt x="4853769" y="812761"/>
+                  </a:lnTo>
+                  <a:lnTo>
+                    <a:pt x="4783425" y="811002"/>
+                  </a:lnTo>
+                  <a:lnTo>
+                    <a:pt x="4713080" y="808976"/>
+                  </a:lnTo>
+                  <a:lnTo>
+                    <a:pt x="4642736" y="806641"/>
+                  </a:lnTo>
+                  <a:lnTo>
+                    <a:pt x="4572391" y="803951"/>
+                  </a:lnTo>
+                  <a:lnTo>
+                    <a:pt x="4502047" y="800851"/>
+                  </a:lnTo>
+                  <a:lnTo>
+                    <a:pt x="4431702" y="797281"/>
+                  </a:lnTo>
+                  <a:lnTo>
+                    <a:pt x="4361358" y="793166"/>
+                  </a:lnTo>
+                  <a:lnTo>
+                    <a:pt x="4291013" y="788426"/>
+                  </a:lnTo>
+                  <a:lnTo>
+                    <a:pt x="4220669" y="782965"/>
+                  </a:lnTo>
+                  <a:lnTo>
+                    <a:pt x="4150324" y="776673"/>
+                  </a:lnTo>
+                  <a:lnTo>
+                    <a:pt x="4079980" y="769424"/>
+                  </a:lnTo>
+                  <a:lnTo>
+                    <a:pt x="4009635" y="761072"/>
+                  </a:lnTo>
+                  <a:lnTo>
+                    <a:pt x="3939291" y="751449"/>
+                  </a:lnTo>
+                  <a:lnTo>
+                    <a:pt x="3868946" y="740362"/>
+                  </a:lnTo>
+                  <a:lnTo>
+                    <a:pt x="3798602" y="727588"/>
+                  </a:lnTo>
+                  <a:lnTo>
+                    <a:pt x="3728257" y="712871"/>
+                  </a:lnTo>
+                  <a:lnTo>
+                    <a:pt x="3657913" y="695915"/>
+                  </a:lnTo>
+                  <a:lnTo>
+                    <a:pt x="3587569" y="676380"/>
+                  </a:lnTo>
+                  <a:lnTo>
+                    <a:pt x="3517224" y="653872"/>
+                  </a:lnTo>
+                  <a:lnTo>
+                    <a:pt x="3446880" y="627940"/>
+                  </a:lnTo>
+                  <a:lnTo>
+                    <a:pt x="3376535" y="598063"/>
+                  </a:lnTo>
+                  <a:lnTo>
+                    <a:pt x="3306191" y="563640"/>
+                  </a:lnTo>
+                  <a:lnTo>
+                    <a:pt x="3235846" y="524833"/>
+                  </a:lnTo>
+                  <a:lnTo>
+                    <a:pt x="3165502" y="518168"/>
+                  </a:lnTo>
+                  <a:lnTo>
+                    <a:pt x="3095157" y="511354"/>
+                  </a:lnTo>
+                  <a:lnTo>
+                    <a:pt x="3024813" y="504389"/>
+                  </a:lnTo>
+                  <a:lnTo>
+                    <a:pt x="2954468" y="497269"/>
+                  </a:lnTo>
+                  <a:lnTo>
+                    <a:pt x="2884124" y="489991"/>
+                  </a:lnTo>
+                  <a:lnTo>
+                    <a:pt x="2813779" y="482551"/>
+                  </a:lnTo>
+                  <a:lnTo>
+                    <a:pt x="2743435" y="474945"/>
+                  </a:lnTo>
+                  <a:lnTo>
+                    <a:pt x="2673090" y="467169"/>
+                  </a:lnTo>
+                  <a:lnTo>
+                    <a:pt x="2602746" y="459221"/>
+                  </a:lnTo>
+                  <a:lnTo>
+                    <a:pt x="2532401" y="451096"/>
+                  </a:lnTo>
+                  <a:lnTo>
+                    <a:pt x="2462057" y="442790"/>
+                  </a:lnTo>
+                  <a:lnTo>
+                    <a:pt x="2391712" y="434299"/>
+                  </a:lnTo>
+                  <a:lnTo>
+                    <a:pt x="2321368" y="425619"/>
+                  </a:lnTo>
+                  <a:lnTo>
+                    <a:pt x="2251023" y="416746"/>
+                  </a:lnTo>
+                  <a:lnTo>
+                    <a:pt x="2180679" y="407676"/>
+                  </a:lnTo>
+                  <a:lnTo>
+                    <a:pt x="2110334" y="398404"/>
+                  </a:lnTo>
+                  <a:lnTo>
+                    <a:pt x="2039990" y="388925"/>
+                  </a:lnTo>
+                  <a:lnTo>
+                    <a:pt x="1969645" y="379236"/>
+                  </a:lnTo>
+                  <a:lnTo>
+                    <a:pt x="1899301" y="369330"/>
+                  </a:lnTo>
+                  <a:lnTo>
+                    <a:pt x="1828956" y="359205"/>
+                  </a:lnTo>
+                  <a:lnTo>
+                    <a:pt x="1758612" y="348854"/>
+                  </a:lnTo>
+                  <a:lnTo>
+                    <a:pt x="1688267" y="338273"/>
+                  </a:lnTo>
+                  <a:lnTo>
+                    <a:pt x="1617923" y="327456"/>
+                  </a:lnTo>
+                  <a:lnTo>
+                    <a:pt x="1547578" y="316398"/>
+                  </a:lnTo>
+                  <a:lnTo>
+                    <a:pt x="1477234" y="305095"/>
+                  </a:lnTo>
+                  <a:lnTo>
+                    <a:pt x="1406889" y="293540"/>
+                  </a:lnTo>
+                  <a:lnTo>
+                    <a:pt x="1336545" y="281727"/>
+                  </a:lnTo>
+                  <a:lnTo>
+                    <a:pt x="1266200" y="269652"/>
+                  </a:lnTo>
+                  <a:lnTo>
+                    <a:pt x="1195856" y="257308"/>
+                  </a:lnTo>
+                  <a:lnTo>
+                    <a:pt x="1125511" y="244690"/>
+                  </a:lnTo>
+                  <a:lnTo>
+                    <a:pt x="1055167" y="231790"/>
+                  </a:lnTo>
+                  <a:lnTo>
+                    <a:pt x="984822" y="218604"/>
+                  </a:lnTo>
+                  <a:lnTo>
+                    <a:pt x="914478" y="205124"/>
+                  </a:lnTo>
+                  <a:lnTo>
+                    <a:pt x="844133" y="191344"/>
+                  </a:lnTo>
+                  <a:lnTo>
+                    <a:pt x="773789" y="177257"/>
+                  </a:lnTo>
+                  <a:lnTo>
+                    <a:pt x="703444" y="162857"/>
+                  </a:lnTo>
+                  <a:lnTo>
+                    <a:pt x="633100" y="148136"/>
+                  </a:lnTo>
+                  <a:lnTo>
+                    <a:pt x="562755" y="133088"/>
+                  </a:lnTo>
+                  <a:lnTo>
+                    <a:pt x="492411" y="117705"/>
+                  </a:lnTo>
+                  <a:lnTo>
+                    <a:pt x="422066" y="101980"/>
+                  </a:lnTo>
+                  <a:lnTo>
+                    <a:pt x="351722" y="85904"/>
+                  </a:lnTo>
+                  <a:lnTo>
+                    <a:pt x="281377" y="69471"/>
+                  </a:lnTo>
+                  <a:lnTo>
+                    <a:pt x="211033" y="52673"/>
+                  </a:lnTo>
+                  <a:lnTo>
+                    <a:pt x="140688" y="35500"/>
+                  </a:lnTo>
+                  <a:lnTo>
+                    <a:pt x="70344" y="17945"/>
+                  </a:lnTo>
+                  <a:lnTo>
+                    <a:pt x="0" y="0"/>
+                  </a:lnTo>
+                </a:path>
+              </a:pathLst>
+            </a:custGeom>
+          </p:spPr>
+          <p:txBody>
+            <a:bodyPr/>
+            <a:lstStyle/>
+            <a:p/>
+          </p:txBody>
+        </p:sp>
+        <p:sp>
+          <p:nvSpPr>
+            <p:cNvPr id="70" name="pl70"/>
+            <p:cNvSpPr/>
+            <p:nvPr/>
+          </p:nvSpPr>
+          <p:spPr>
+            <a:xfrm>
+              <a:off x="3239657" y="4336484"/>
+              <a:ext cx="4959759" cy="1253277"/>
+            </a:xfrm>
+            <a:custGeom>
+              <a:avLst/>
+              <a:pathLst>
+                <a:path w="4959759" h="1253277">
+                  <a:moveTo>
+                    <a:pt x="0" y="0"/>
+                  </a:moveTo>
+                  <a:lnTo>
+                    <a:pt x="35644" y="52062"/>
+                  </a:lnTo>
+                  <a:lnTo>
+                    <a:pt x="105989" y="146734"/>
+                  </a:lnTo>
+                  <a:lnTo>
+                    <a:pt x="176333" y="233969"/>
+                  </a:lnTo>
+                  <a:lnTo>
+                    <a:pt x="246678" y="314352"/>
+                  </a:lnTo>
+                  <a:lnTo>
+                    <a:pt x="317022" y="388419"/>
+                  </a:lnTo>
+                  <a:lnTo>
+                    <a:pt x="387367" y="456668"/>
+                  </a:lnTo>
+                  <a:lnTo>
+                    <a:pt x="457711" y="519556"/>
+                  </a:lnTo>
+                  <a:lnTo>
+                    <a:pt x="528056" y="577504"/>
+                  </a:lnTo>
+                  <a:lnTo>
+                    <a:pt x="598400" y="630899"/>
+                  </a:lnTo>
+                  <a:lnTo>
+                    <a:pt x="668745" y="680099"/>
+                  </a:lnTo>
+                  <a:lnTo>
+                    <a:pt x="739089" y="725435"/>
+                  </a:lnTo>
+                  <a:lnTo>
+                    <a:pt x="809434" y="767209"/>
+                  </a:lnTo>
+                  <a:lnTo>
+                    <a:pt x="879778" y="805702"/>
+                  </a:lnTo>
+                  <a:lnTo>
+                    <a:pt x="950123" y="841170"/>
+                  </a:lnTo>
+                  <a:lnTo>
+                    <a:pt x="1020467" y="873852"/>
+                  </a:lnTo>
+                  <a:lnTo>
+                    <a:pt x="1090812" y="903967"/>
+                  </a:lnTo>
+                  <a:lnTo>
+                    <a:pt x="1161156" y="931716"/>
+                  </a:lnTo>
+                  <a:lnTo>
+                    <a:pt x="1231501" y="957286"/>
+                  </a:lnTo>
+                  <a:lnTo>
+                    <a:pt x="1301845" y="980846"/>
+                  </a:lnTo>
+                  <a:lnTo>
+                    <a:pt x="1372190" y="1002556"/>
+                  </a:lnTo>
+                  <a:lnTo>
+                    <a:pt x="1442534" y="1022560"/>
+                  </a:lnTo>
+                  <a:lnTo>
+                    <a:pt x="1512879" y="1040993"/>
+                  </a:lnTo>
+                  <a:lnTo>
+                    <a:pt x="1583223" y="1057978"/>
+                  </a:lnTo>
+                  <a:lnTo>
+                    <a:pt x="1653568" y="1073628"/>
+                  </a:lnTo>
+                  <a:lnTo>
+                    <a:pt x="1723912" y="1088049"/>
+                  </a:lnTo>
+                  <a:lnTo>
+                    <a:pt x="1794257" y="1101337"/>
+                  </a:lnTo>
+                  <a:lnTo>
+                    <a:pt x="1864601" y="1113582"/>
+                  </a:lnTo>
+                  <a:lnTo>
+                    <a:pt x="1934946" y="1124864"/>
+                  </a:lnTo>
+                  <a:lnTo>
+                    <a:pt x="2005290" y="1135260"/>
+                  </a:lnTo>
+                  <a:lnTo>
+                    <a:pt x="2075635" y="1144840"/>
+                  </a:lnTo>
+                  <a:lnTo>
+                    <a:pt x="2145979" y="1153666"/>
+                  </a:lnTo>
+                  <a:lnTo>
+                    <a:pt x="2216324" y="1161800"/>
+                  </a:lnTo>
+                  <a:lnTo>
+                    <a:pt x="2286668" y="1169294"/>
+                  </a:lnTo>
+                  <a:lnTo>
+                    <a:pt x="2357013" y="1176200"/>
+                  </a:lnTo>
+                  <a:lnTo>
+                    <a:pt x="2427357" y="1182563"/>
+                  </a:lnTo>
+                  <a:lnTo>
+                    <a:pt x="2497701" y="1188427"/>
+                  </a:lnTo>
+                  <a:lnTo>
+                    <a:pt x="2568046" y="1193830"/>
+                  </a:lnTo>
+                  <a:lnTo>
+                    <a:pt x="2638390" y="1198808"/>
+                  </a:lnTo>
+                  <a:lnTo>
+                    <a:pt x="2708735" y="1203395"/>
+                  </a:lnTo>
+                  <a:lnTo>
+                    <a:pt x="2779079" y="1207622"/>
+                  </a:lnTo>
+                  <a:lnTo>
+                    <a:pt x="2849424" y="1211517"/>
+                  </a:lnTo>
+                  <a:lnTo>
+                    <a:pt x="2919768" y="1215106"/>
+                  </a:lnTo>
+                  <a:lnTo>
+                    <a:pt x="2990113" y="1218413"/>
+                  </a:lnTo>
+                  <a:lnTo>
+                    <a:pt x="3060457" y="1221460"/>
+                  </a:lnTo>
+                  <a:lnTo>
+                    <a:pt x="3130802" y="1224268"/>
+                  </a:lnTo>
+                  <a:lnTo>
+                    <a:pt x="3201146" y="1226855"/>
+                  </a:lnTo>
+                  <a:lnTo>
+                    <a:pt x="3271491" y="1229239"/>
+                  </a:lnTo>
+                  <a:lnTo>
+                    <a:pt x="3341835" y="1231436"/>
+                  </a:lnTo>
+                  <a:lnTo>
+                    <a:pt x="3412180" y="1233460"/>
+                  </a:lnTo>
+                  <a:lnTo>
+                    <a:pt x="3482524" y="1235325"/>
+                  </a:lnTo>
+                  <a:lnTo>
+                    <a:pt x="3552869" y="1237043"/>
+                  </a:lnTo>
+                  <a:lnTo>
+                    <a:pt x="3623213" y="1238627"/>
+                  </a:lnTo>
+                  <a:lnTo>
+                    <a:pt x="3693558" y="1240086"/>
+                  </a:lnTo>
+                  <a:lnTo>
+                    <a:pt x="3763902" y="1241431"/>
+                  </a:lnTo>
+                  <a:lnTo>
+                    <a:pt x="3834247" y="1242670"/>
+                  </a:lnTo>
+                  <a:lnTo>
+                    <a:pt x="3904591" y="1243811"/>
+                  </a:lnTo>
+                  <a:lnTo>
+                    <a:pt x="3974936" y="1244863"/>
+                  </a:lnTo>
+                  <a:lnTo>
+                    <a:pt x="4045280" y="1245832"/>
+                  </a:lnTo>
+                  <a:lnTo>
+                    <a:pt x="4115625" y="1246726"/>
+                  </a:lnTo>
+                  <a:lnTo>
+                    <a:pt x="4185969" y="1247549"/>
+                  </a:lnTo>
+                  <a:lnTo>
+                    <a:pt x="4256314" y="1248307"/>
+                  </a:lnTo>
+                  <a:lnTo>
+                    <a:pt x="4326658" y="1249006"/>
+                  </a:lnTo>
+                  <a:lnTo>
+                    <a:pt x="4397003" y="1249650"/>
+                  </a:lnTo>
+                  <a:lnTo>
+                    <a:pt x="4467347" y="1250243"/>
+                  </a:lnTo>
+                  <a:lnTo>
+                    <a:pt x="4537692" y="1250790"/>
+                  </a:lnTo>
+                  <a:lnTo>
+                    <a:pt x="4608036" y="1251293"/>
+                  </a:lnTo>
+                  <a:lnTo>
+                    <a:pt x="4678381" y="1251757"/>
+                  </a:lnTo>
+                  <a:lnTo>
+                    <a:pt x="4748725" y="1252185"/>
+                  </a:lnTo>
+                  <a:lnTo>
+                    <a:pt x="4819070" y="1252579"/>
+                  </a:lnTo>
+                  <a:lnTo>
+                    <a:pt x="4889414" y="1252942"/>
+                  </a:lnTo>
+                  <a:lnTo>
+                    <a:pt x="4959759" y="1253277"/>
+                  </a:lnTo>
+                </a:path>
+              </a:pathLst>
+            </a:custGeom>
+            <a:ln w="27101" cap="flat">
+              <a:solidFill>
+                <a:srgbClr val="FF8C00">
+                  <a:alpha val="100000"/>
+                </a:srgbClr>
+              </a:solidFill>
+              <a:prstDash val="solid"/>
+              <a:round/>
+            </a:ln>
+          </p:spPr>
+          <p:txBody>
+            <a:bodyPr/>
+            <a:lstStyle/>
+            <a:p/>
+          </p:txBody>
+        </p:sp>
+        <p:sp>
+          <p:nvSpPr>
+            <p:cNvPr id="71" name="pl71"/>
+            <p:cNvSpPr/>
+            <p:nvPr/>
+          </p:nvSpPr>
+          <p:spPr>
+            <a:xfrm>
+              <a:off x="887106" y="5294352"/>
+              <a:ext cx="7660515" cy="0"/>
+            </a:xfrm>
+            <a:custGeom>
+              <a:avLst/>
+              <a:pathLst>
+                <a:path w="7660515" h="0">
+                  <a:moveTo>
+                    <a:pt x="0" y="0"/>
+                  </a:moveTo>
+                  <a:lnTo>
+                    <a:pt x="7660515" y="0"/>
+                  </a:lnTo>
+                  <a:lnTo>
+                    <a:pt x="7660515" y="0"/>
+                  </a:lnTo>
+                </a:path>
+              </a:pathLst>
+            </a:custGeom>
+            <a:ln w="13550" cap="flat">
+              <a:solidFill>
+                <a:srgbClr val="7F7F7F">
+                  <a:alpha val="100000"/>
+                </a:srgbClr>
+              </a:solidFill>
+              <a:prstDash val="dash"/>
+              <a:round/>
+            </a:ln>
+          </p:spPr>
+          <p:txBody>
+            <a:bodyPr/>
+            <a:lstStyle/>
+            <a:p/>
+          </p:txBody>
+        </p:sp>
+        <p:sp>
+          <p:nvSpPr>
+            <p:cNvPr id="72" name="pl72"/>
+            <p:cNvSpPr/>
+            <p:nvPr/>
+          </p:nvSpPr>
+          <p:spPr>
+            <a:xfrm>
+              <a:off x="4472829" y="4336484"/>
+              <a:ext cx="0" cy="1317069"/>
+            </a:xfrm>
+            <a:custGeom>
+              <a:avLst/>
+              <a:pathLst>
+                <a:path w="0" h="1317069">
+                  <a:moveTo>
+                    <a:pt x="0" y="1317069"/>
+                  </a:moveTo>
+                  <a:lnTo>
+                    <a:pt x="0" y="0"/>
+                  </a:lnTo>
+                  <a:lnTo>
+                    <a:pt x="0" y="0"/>
+                  </a:lnTo>
+                </a:path>
+              </a:pathLst>
+            </a:custGeom>
+            <a:ln w="13550" cap="flat">
+              <a:solidFill>
+                <a:srgbClr val="666666">
+                  <a:alpha val="100000"/>
+                </a:srgbClr>
+              </a:solidFill>
+              <a:prstDash val="dot"/>
+              <a:round/>
+            </a:ln>
+          </p:spPr>
+          <p:txBody>
+            <a:bodyPr/>
+            <a:lstStyle/>
+            <a:p/>
+          </p:txBody>
+        </p:sp>
+        <p:sp>
+          <p:nvSpPr>
+            <p:cNvPr id="73" name="tx73"/>
+            <p:cNvSpPr/>
+            <p:nvPr/>
+          </p:nvSpPr>
+          <p:spPr>
+            <a:xfrm>
+              <a:off x="762297" y="5553636"/>
+              <a:ext cx="62179" cy="80101"/>
+            </a:xfrm>
+            <a:prstGeom prst="rect">
+              <a:avLst/>
+            </a:prstGeom>
+            <a:noFill/>
+          </p:spPr>
+          <p:txBody>
+            <a:bodyPr lIns="0" rIns="0" tIns="0" bIns="0" anchorCtr="1" anchor="ctr" wrap="none"/>
+            <a:lstStyle/>
+            <a:p>
+              <a:pPr algn="l" marL="0" marR="0" indent="0">
+                <a:lnSpc>
+                  <a:spcPts val="880"/>
+                </a:lnSpc>
+                <a:spcBef>
+                  <a:spcPts val="0"/>
+                </a:spcBef>
+                <a:spcAft>
+                  <a:spcPts val="0"/>
+                </a:spcAft>
+              </a:pPr>
+              <a:r>
+                <a:rPr sz="880">
+                  <a:solidFill>
+                    <a:srgbClr val="4D4D4D">
+                      <a:alpha val="100000"/>
+                    </a:srgbClr>
+                  </a:solidFill>
+                  <a:latin typeface="Helvetica"/>
+                  <a:cs typeface="Helvetica"/>
+                </a:rPr>
+                <a:t>0</a:t>
+              </a:r>
+            </a:p>
+          </p:txBody>
+        </p:sp>
+        <p:sp>
+          <p:nvSpPr>
+            <p:cNvPr id="74" name="tx74"/>
+            <p:cNvSpPr/>
+            <p:nvPr/>
+          </p:nvSpPr>
+          <p:spPr>
+            <a:xfrm>
+              <a:off x="762297" y="5254302"/>
+              <a:ext cx="62179" cy="80101"/>
+            </a:xfrm>
+            <a:prstGeom prst="rect">
+              <a:avLst/>
+            </a:prstGeom>
+            <a:noFill/>
+          </p:spPr>
+          <p:txBody>
+            <a:bodyPr lIns="0" rIns="0" tIns="0" bIns="0" anchorCtr="1" anchor="ctr" wrap="none"/>
+            <a:lstStyle/>
+            <a:p>
+              <a:pPr algn="l" marL="0" marR="0" indent="0">
+                <a:lnSpc>
+                  <a:spcPts val="880"/>
+                </a:lnSpc>
+                <a:spcBef>
+                  <a:spcPts val="0"/>
+                </a:spcBef>
+                <a:spcAft>
+                  <a:spcPts val="0"/>
+                </a:spcAft>
+              </a:pPr>
+              <a:r>
+                <a:rPr sz="880">
+                  <a:solidFill>
+                    <a:srgbClr val="4D4D4D">
+                      <a:alpha val="100000"/>
+                    </a:srgbClr>
+                  </a:solidFill>
+                  <a:latin typeface="Helvetica"/>
+                  <a:cs typeface="Helvetica"/>
+                </a:rPr>
+                <a:t>1</a:t>
+              </a:r>
+            </a:p>
+          </p:txBody>
+        </p:sp>
+        <p:sp>
+          <p:nvSpPr>
+            <p:cNvPr id="75" name="tx75"/>
+            <p:cNvSpPr/>
+            <p:nvPr/>
+          </p:nvSpPr>
+          <p:spPr>
+            <a:xfrm>
+              <a:off x="762297" y="4954968"/>
+              <a:ext cx="62179" cy="80101"/>
+            </a:xfrm>
+            <a:prstGeom prst="rect">
+              <a:avLst/>
+            </a:prstGeom>
+            <a:noFill/>
+          </p:spPr>
+          <p:txBody>
+            <a:bodyPr lIns="0" rIns="0" tIns="0" bIns="0" anchorCtr="1" anchor="ctr" wrap="none"/>
+            <a:lstStyle/>
+            <a:p>
+              <a:pPr algn="l" marL="0" marR="0" indent="0">
+                <a:lnSpc>
+                  <a:spcPts val="880"/>
+                </a:lnSpc>
+                <a:spcBef>
+                  <a:spcPts val="0"/>
+                </a:spcBef>
+                <a:spcAft>
+                  <a:spcPts val="0"/>
+                </a:spcAft>
+              </a:pPr>
+              <a:r>
+                <a:rPr sz="880">
+                  <a:solidFill>
+                    <a:srgbClr val="4D4D4D">
+                      <a:alpha val="100000"/>
+                    </a:srgbClr>
+                  </a:solidFill>
+                  <a:latin typeface="Helvetica"/>
+                  <a:cs typeface="Helvetica"/>
+                </a:rPr>
+                <a:t>2</a:t>
+              </a:r>
+            </a:p>
+          </p:txBody>
+        </p:sp>
+        <p:sp>
+          <p:nvSpPr>
+            <p:cNvPr id="76" name="tx76"/>
+            <p:cNvSpPr/>
+            <p:nvPr/>
+          </p:nvSpPr>
+          <p:spPr>
+            <a:xfrm>
+              <a:off x="762297" y="4655634"/>
+              <a:ext cx="62179" cy="80101"/>
+            </a:xfrm>
+            <a:prstGeom prst="rect">
+              <a:avLst/>
+            </a:prstGeom>
+            <a:noFill/>
+          </p:spPr>
+          <p:txBody>
+            <a:bodyPr lIns="0" rIns="0" tIns="0" bIns="0" anchorCtr="1" anchor="ctr" wrap="none"/>
+            <a:lstStyle/>
+            <a:p>
+              <a:pPr algn="l" marL="0" marR="0" indent="0">
+                <a:lnSpc>
+                  <a:spcPts val="880"/>
+                </a:lnSpc>
+                <a:spcBef>
+                  <a:spcPts val="0"/>
+                </a:spcBef>
+                <a:spcAft>
+                  <a:spcPts val="0"/>
+                </a:spcAft>
+              </a:pPr>
+              <a:r>
+                <a:rPr sz="880">
+                  <a:solidFill>
+                    <a:srgbClr val="4D4D4D">
+                      <a:alpha val="100000"/>
+                    </a:srgbClr>
+                  </a:solidFill>
+                  <a:latin typeface="Helvetica"/>
+                  <a:cs typeface="Helvetica"/>
+                </a:rPr>
+                <a:t>3</a:t>
+              </a:r>
+            </a:p>
+          </p:txBody>
+        </p:sp>
+        <p:sp>
+          <p:nvSpPr>
+            <p:cNvPr id="77" name="tx77"/>
+            <p:cNvSpPr/>
+            <p:nvPr/>
+          </p:nvSpPr>
+          <p:spPr>
+            <a:xfrm>
+              <a:off x="762297" y="4356300"/>
+              <a:ext cx="62179" cy="80101"/>
+            </a:xfrm>
+            <a:prstGeom prst="rect">
+              <a:avLst/>
+            </a:prstGeom>
+            <a:noFill/>
+          </p:spPr>
+          <p:txBody>
+            <a:bodyPr lIns="0" rIns="0" tIns="0" bIns="0" anchorCtr="1" anchor="ctr" wrap="none"/>
+            <a:lstStyle/>
+            <a:p>
+              <a:pPr algn="l" marL="0" marR="0" indent="0">
+                <a:lnSpc>
+                  <a:spcPts val="880"/>
+                </a:lnSpc>
+                <a:spcBef>
+                  <a:spcPts val="0"/>
+                </a:spcBef>
+                <a:spcAft>
+                  <a:spcPts val="0"/>
+                </a:spcAft>
+              </a:pPr>
+              <a:r>
+                <a:rPr sz="880">
+                  <a:solidFill>
+                    <a:srgbClr val="4D4D4D">
+                      <a:alpha val="100000"/>
+                    </a:srgbClr>
+                  </a:solidFill>
+                  <a:latin typeface="Helvetica"/>
+                  <a:cs typeface="Helvetica"/>
+                </a:rPr>
+                <a:t>4</a:t>
+              </a:r>
+            </a:p>
+          </p:txBody>
+        </p:sp>
+        <p:sp>
+          <p:nvSpPr>
+            <p:cNvPr id="78" name="tx78"/>
+            <p:cNvSpPr/>
+            <p:nvPr/>
+          </p:nvSpPr>
+          <p:spPr>
+            <a:xfrm>
+              <a:off x="1306098" y="5716183"/>
+              <a:ext cx="161574" cy="80101"/>
+            </a:xfrm>
+            <a:prstGeom prst="rect">
+              <a:avLst/>
+            </a:prstGeom>
+            <a:noFill/>
+          </p:spPr>
+          <p:txBody>
+            <a:bodyPr lIns="0" rIns="0" tIns="0" bIns="0" anchorCtr="1" anchor="ctr" wrap="none"/>
+            <a:lstStyle/>
+            <a:p>
+              <a:pPr algn="l" marL="0" marR="0" indent="0">
+                <a:lnSpc>
+                  <a:spcPts val="880"/>
+                </a:lnSpc>
+                <a:spcBef>
+                  <a:spcPts val="0"/>
+                </a:spcBef>
+                <a:spcAft>
+                  <a:spcPts val="0"/>
+                </a:spcAft>
+              </a:pPr>
+              <a:r>
+                <a:rPr sz="880">
+                  <a:solidFill>
+                    <a:srgbClr val="4D4D4D">
+                      <a:alpha val="100000"/>
+                    </a:srgbClr>
+                  </a:solidFill>
+                  <a:latin typeface="Helvetica"/>
+                  <a:cs typeface="Helvetica"/>
+                </a:rPr>
+                <a:t>-40</a:t>
+              </a:r>
+            </a:p>
+          </p:txBody>
+        </p:sp>
+        <p:sp>
+          <p:nvSpPr>
+            <p:cNvPr id="79" name="tx79"/>
+            <p:cNvSpPr/>
+            <p:nvPr/>
+          </p:nvSpPr>
+          <p:spPr>
+            <a:xfrm>
+              <a:off x="2113264" y="5716183"/>
+              <a:ext cx="161574" cy="80101"/>
+            </a:xfrm>
+            <a:prstGeom prst="rect">
+              <a:avLst/>
+            </a:prstGeom>
+            <a:noFill/>
+          </p:spPr>
+          <p:txBody>
+            <a:bodyPr lIns="0" rIns="0" tIns="0" bIns="0" anchorCtr="1" anchor="ctr" wrap="none"/>
+            <a:lstStyle/>
+            <a:p>
+              <a:pPr algn="l" marL="0" marR="0" indent="0">
+                <a:lnSpc>
+                  <a:spcPts val="880"/>
+                </a:lnSpc>
+                <a:spcBef>
+                  <a:spcPts val="0"/>
+                </a:spcBef>
+                <a:spcAft>
+                  <a:spcPts val="0"/>
+                </a:spcAft>
+              </a:pPr>
+              <a:r>
+                <a:rPr sz="880">
+                  <a:solidFill>
+                    <a:srgbClr val="4D4D4D">
+                      <a:alpha val="100000"/>
+                    </a:srgbClr>
+                  </a:solidFill>
+                  <a:latin typeface="Helvetica"/>
+                  <a:cs typeface="Helvetica"/>
+                </a:rPr>
+                <a:t>-30</a:t>
+              </a:r>
+            </a:p>
+          </p:txBody>
+        </p:sp>
+        <p:sp>
+          <p:nvSpPr>
+            <p:cNvPr id="80" name="tx80"/>
+            <p:cNvSpPr/>
+            <p:nvPr/>
+          </p:nvSpPr>
+          <p:spPr>
+            <a:xfrm>
+              <a:off x="2920429" y="5716183"/>
+              <a:ext cx="161574" cy="80101"/>
+            </a:xfrm>
+            <a:prstGeom prst="rect">
+              <a:avLst/>
+            </a:prstGeom>
+            <a:noFill/>
+          </p:spPr>
+          <p:txBody>
+            <a:bodyPr lIns="0" rIns="0" tIns="0" bIns="0" anchorCtr="1" anchor="ctr" wrap="none"/>
+            <a:lstStyle/>
+            <a:p>
+              <a:pPr algn="l" marL="0" marR="0" indent="0">
+                <a:lnSpc>
+                  <a:spcPts val="880"/>
+                </a:lnSpc>
+                <a:spcBef>
+                  <a:spcPts val="0"/>
+                </a:spcBef>
+                <a:spcAft>
+                  <a:spcPts val="0"/>
+                </a:spcAft>
+              </a:pPr>
+              <a:r>
+                <a:rPr sz="880">
+                  <a:solidFill>
+                    <a:srgbClr val="4D4D4D">
+                      <a:alpha val="100000"/>
+                    </a:srgbClr>
+                  </a:solidFill>
+                  <a:latin typeface="Helvetica"/>
+                  <a:cs typeface="Helvetica"/>
+                </a:rPr>
+                <a:t>-20</a:t>
+              </a:r>
+            </a:p>
+          </p:txBody>
+        </p:sp>
+        <p:sp>
+          <p:nvSpPr>
+            <p:cNvPr id="81" name="tx81"/>
+            <p:cNvSpPr/>
+            <p:nvPr/>
+          </p:nvSpPr>
+          <p:spPr>
+            <a:xfrm>
+              <a:off x="3727595" y="5716183"/>
+              <a:ext cx="161574" cy="80101"/>
+            </a:xfrm>
+            <a:prstGeom prst="rect">
+              <a:avLst/>
+            </a:prstGeom>
+            <a:noFill/>
+          </p:spPr>
+          <p:txBody>
+            <a:bodyPr lIns="0" rIns="0" tIns="0" bIns="0" anchorCtr="1" anchor="ctr" wrap="none"/>
+            <a:lstStyle/>
+            <a:p>
+              <a:pPr algn="l" marL="0" marR="0" indent="0">
+                <a:lnSpc>
+                  <a:spcPts val="880"/>
+                </a:lnSpc>
+                <a:spcBef>
+                  <a:spcPts val="0"/>
+                </a:spcBef>
+                <a:spcAft>
+                  <a:spcPts val="0"/>
+                </a:spcAft>
+              </a:pPr>
+              <a:r>
+                <a:rPr sz="880">
+                  <a:solidFill>
+                    <a:srgbClr val="4D4D4D">
+                      <a:alpha val="100000"/>
+                    </a:srgbClr>
+                  </a:solidFill>
+                  <a:latin typeface="Helvetica"/>
+                  <a:cs typeface="Helvetica"/>
+                </a:rPr>
+                <a:t>-10</a:t>
+              </a:r>
+            </a:p>
+          </p:txBody>
+        </p:sp>
+        <p:sp>
+          <p:nvSpPr>
+            <p:cNvPr id="82" name="tx82"/>
+            <p:cNvSpPr/>
+            <p:nvPr/>
+          </p:nvSpPr>
+          <p:spPr>
+            <a:xfrm>
+              <a:off x="4584458" y="5716183"/>
+              <a:ext cx="62179" cy="80101"/>
+            </a:xfrm>
+            <a:prstGeom prst="rect">
+              <a:avLst/>
+            </a:prstGeom>
+            <a:noFill/>
+          </p:spPr>
+          <p:txBody>
+            <a:bodyPr lIns="0" rIns="0" tIns="0" bIns="0" anchorCtr="1" anchor="ctr" wrap="none"/>
+            <a:lstStyle/>
+            <a:p>
+              <a:pPr algn="l" marL="0" marR="0" indent="0">
+                <a:lnSpc>
+                  <a:spcPts val="880"/>
+                </a:lnSpc>
+                <a:spcBef>
+                  <a:spcPts val="0"/>
+                </a:spcBef>
+                <a:spcAft>
+                  <a:spcPts val="0"/>
+                </a:spcAft>
+              </a:pPr>
+              <a:r>
+                <a:rPr sz="880">
+                  <a:solidFill>
+                    <a:srgbClr val="4D4D4D">
+                      <a:alpha val="100000"/>
+                    </a:srgbClr>
+                  </a:solidFill>
+                  <a:latin typeface="Helvetica"/>
+                  <a:cs typeface="Helvetica"/>
+                </a:rPr>
+                <a:t>0</a:t>
+              </a:r>
+            </a:p>
+          </p:txBody>
+        </p:sp>
+        <p:sp>
+          <p:nvSpPr>
+            <p:cNvPr id="83" name="tx83"/>
+            <p:cNvSpPr/>
+            <p:nvPr/>
+          </p:nvSpPr>
+          <p:spPr>
+            <a:xfrm>
+              <a:off x="5360534" y="5716183"/>
+              <a:ext cx="124358" cy="80101"/>
+            </a:xfrm>
+            <a:prstGeom prst="rect">
+              <a:avLst/>
+            </a:prstGeom>
+            <a:noFill/>
+          </p:spPr>
+          <p:txBody>
+            <a:bodyPr lIns="0" rIns="0" tIns="0" bIns="0" anchorCtr="1" anchor="ctr" wrap="none"/>
+            <a:lstStyle/>
+            <a:p>
+              <a:pPr algn="l" marL="0" marR="0" indent="0">
+                <a:lnSpc>
+                  <a:spcPts val="880"/>
+                </a:lnSpc>
+                <a:spcBef>
+                  <a:spcPts val="0"/>
+                </a:spcBef>
+                <a:spcAft>
+                  <a:spcPts val="0"/>
+                </a:spcAft>
+              </a:pPr>
+              <a:r>
+                <a:rPr sz="880">
+                  <a:solidFill>
+                    <a:srgbClr val="4D4D4D">
+                      <a:alpha val="100000"/>
+                    </a:srgbClr>
+                  </a:solidFill>
+                  <a:latin typeface="Helvetica"/>
+                  <a:cs typeface="Helvetica"/>
+                </a:rPr>
+                <a:t>10</a:t>
+              </a:r>
+            </a:p>
+          </p:txBody>
+        </p:sp>
+        <p:sp>
+          <p:nvSpPr>
+            <p:cNvPr id="84" name="tx84"/>
+            <p:cNvSpPr/>
+            <p:nvPr/>
+          </p:nvSpPr>
+          <p:spPr>
+            <a:xfrm>
+              <a:off x="6167699" y="5716183"/>
+              <a:ext cx="124358" cy="80101"/>
+            </a:xfrm>
+            <a:prstGeom prst="rect">
+              <a:avLst/>
+            </a:prstGeom>
+            <a:noFill/>
+          </p:spPr>
+          <p:txBody>
+            <a:bodyPr lIns="0" rIns="0" tIns="0" bIns="0" anchorCtr="1" anchor="ctr" wrap="none"/>
+            <a:lstStyle/>
+            <a:p>
+              <a:pPr algn="l" marL="0" marR="0" indent="0">
+                <a:lnSpc>
+                  <a:spcPts val="880"/>
+                </a:lnSpc>
+                <a:spcBef>
+                  <a:spcPts val="0"/>
+                </a:spcBef>
+                <a:spcAft>
+                  <a:spcPts val="0"/>
+                </a:spcAft>
+              </a:pPr>
+              <a:r>
+                <a:rPr sz="880">
+                  <a:solidFill>
+                    <a:srgbClr val="4D4D4D">
+                      <a:alpha val="100000"/>
+                    </a:srgbClr>
+                  </a:solidFill>
+                  <a:latin typeface="Helvetica"/>
+                  <a:cs typeface="Helvetica"/>
+                </a:rPr>
+                <a:t>20</a:t>
+              </a:r>
+            </a:p>
+          </p:txBody>
+        </p:sp>
+        <p:sp>
+          <p:nvSpPr>
+            <p:cNvPr id="85" name="tx85"/>
+            <p:cNvSpPr/>
+            <p:nvPr/>
+          </p:nvSpPr>
+          <p:spPr>
+            <a:xfrm>
+              <a:off x="6974865" y="5716183"/>
+              <a:ext cx="124358" cy="80101"/>
+            </a:xfrm>
+            <a:prstGeom prst="rect">
+              <a:avLst/>
+            </a:prstGeom>
+            <a:noFill/>
+          </p:spPr>
+          <p:txBody>
+            <a:bodyPr lIns="0" rIns="0" tIns="0" bIns="0" anchorCtr="1" anchor="ctr" wrap="none"/>
+            <a:lstStyle/>
+            <a:p>
+              <a:pPr algn="l" marL="0" marR="0" indent="0">
+                <a:lnSpc>
+                  <a:spcPts val="880"/>
+                </a:lnSpc>
+                <a:spcBef>
+                  <a:spcPts val="0"/>
+                </a:spcBef>
+                <a:spcAft>
+                  <a:spcPts val="0"/>
+                </a:spcAft>
+              </a:pPr>
+              <a:r>
+                <a:rPr sz="880">
+                  <a:solidFill>
+                    <a:srgbClr val="4D4D4D">
+                      <a:alpha val="100000"/>
+                    </a:srgbClr>
+                  </a:solidFill>
+                  <a:latin typeface="Helvetica"/>
+                  <a:cs typeface="Helvetica"/>
+                </a:rPr>
+                <a:t>30</a:t>
+              </a:r>
+            </a:p>
+          </p:txBody>
+        </p:sp>
+        <p:sp>
+          <p:nvSpPr>
+            <p:cNvPr id="86" name="tx86"/>
+            <p:cNvSpPr/>
+            <p:nvPr/>
+          </p:nvSpPr>
+          <p:spPr>
+            <a:xfrm>
+              <a:off x="7782030" y="5716183"/>
+              <a:ext cx="124358" cy="80101"/>
+            </a:xfrm>
+            <a:prstGeom prst="rect">
+              <a:avLst/>
+            </a:prstGeom>
+            <a:noFill/>
+          </p:spPr>
+          <p:txBody>
+            <a:bodyPr lIns="0" rIns="0" tIns="0" bIns="0" anchorCtr="1" anchor="ctr" wrap="none"/>
+            <a:lstStyle/>
+            <a:p>
+              <a:pPr algn="l" marL="0" marR="0" indent="0">
+                <a:lnSpc>
+                  <a:spcPts val="880"/>
+                </a:lnSpc>
+                <a:spcBef>
+                  <a:spcPts val="0"/>
+                </a:spcBef>
+                <a:spcAft>
+                  <a:spcPts val="0"/>
+                </a:spcAft>
+              </a:pPr>
+              <a:r>
+                <a:rPr sz="880">
+                  <a:solidFill>
+                    <a:srgbClr val="4D4D4D">
+                      <a:alpha val="100000"/>
+                    </a:srgbClr>
+                  </a:solidFill>
+                  <a:latin typeface="Helvetica"/>
+                  <a:cs typeface="Helvetica"/>
+                </a:rPr>
+                <a:t>40</a:t>
+              </a:r>
+            </a:p>
+          </p:txBody>
+        </p:sp>
+        <p:sp>
+          <p:nvSpPr>
+            <p:cNvPr id="87" name="tx87"/>
+            <p:cNvSpPr/>
+            <p:nvPr/>
+          </p:nvSpPr>
+          <p:spPr>
+            <a:xfrm>
+              <a:off x="2928340" y="5855859"/>
+              <a:ext cx="3578047" cy="100218"/>
+            </a:xfrm>
+            <a:prstGeom prst="rect">
+              <a:avLst/>
+            </a:prstGeom>
+            <a:noFill/>
+          </p:spPr>
+          <p:txBody>
+            <a:bodyPr lIns="0" rIns="0" tIns="0" bIns="0" anchorCtr="1" anchor="ctr" wrap="none"/>
+            <a:lstStyle/>
+            <a:p>
+              <a:pPr algn="l" marL="0" marR="0" indent="0">
+                <a:lnSpc>
+                  <a:spcPts val="1100"/>
+                </a:lnSpc>
+                <a:spcBef>
+                  <a:spcPts val="0"/>
+                </a:spcBef>
+                <a:spcAft>
+                  <a:spcPts val="0"/>
+                </a:spcAft>
+              </a:pPr>
+              <a:r>
+                <a:rPr sz="1100">
+                  <a:solidFill>
+                    <a:srgbClr val="000000">
+                      <a:alpha val="100000"/>
+                    </a:srgbClr>
+                  </a:solidFill>
+                  <a:latin typeface="Helvetica"/>
+                  <a:cs typeface="Helvetica"/>
+                </a:rPr>
+                <a:t>eGFR difference (%): 100 × (CKD-EPI Cr-Cys − CG) / CG</a:t>
+              </a:r>
+            </a:p>
+          </p:txBody>
+        </p:sp>
+        <p:sp>
+          <p:nvSpPr>
+            <p:cNvPr id="88" name="tx88"/>
+            <p:cNvSpPr/>
+            <p:nvPr/>
+          </p:nvSpPr>
+          <p:spPr>
+            <a:xfrm rot="-5400000">
+              <a:off x="138035" y="4944909"/>
+              <a:ext cx="1016904" cy="100218"/>
+            </a:xfrm>
+            <a:prstGeom prst="rect">
+              <a:avLst/>
+            </a:prstGeom>
+            <a:noFill/>
+          </p:spPr>
+          <p:txBody>
+            <a:bodyPr lIns="0" rIns="0" tIns="0" bIns="0" anchorCtr="1" anchor="ctr" wrap="none"/>
+            <a:lstStyle/>
+            <a:p>
+              <a:pPr algn="l" marL="0" marR="0" indent="0">
+                <a:lnSpc>
+                  <a:spcPts val="1100"/>
+                </a:lnSpc>
+                <a:spcBef>
+                  <a:spcPts val="0"/>
+                </a:spcBef>
+                <a:spcAft>
+                  <a:spcPts val="0"/>
+                </a:spcAft>
+              </a:pPr>
+              <a:r>
+                <a:rPr sz="1100">
+                  <a:solidFill>
+                    <a:srgbClr val="000000">
+                      <a:alpha val="100000"/>
+                    </a:srgbClr>
+                  </a:solidFill>
+                  <a:latin typeface="Helvetica"/>
+                  <a:cs typeface="Helvetica"/>
+                </a:rPr>
+                <a:t>subHR (95% CI)</a:t>
+              </a:r>
+            </a:p>
+          </p:txBody>
+        </p:sp>
+        <p:sp>
+          <p:nvSpPr>
+            <p:cNvPr id="89" name="tx89"/>
+            <p:cNvSpPr/>
+            <p:nvPr/>
+          </p:nvSpPr>
+          <p:spPr>
+            <a:xfrm>
+              <a:off x="887106" y="4159544"/>
+              <a:ext cx="6512265" cy="82021"/>
+            </a:xfrm>
+            <a:prstGeom prst="rect">
+              <a:avLst/>
+            </a:prstGeom>
+            <a:noFill/>
+          </p:spPr>
+          <p:txBody>
+            <a:bodyPr lIns="0" rIns="0" tIns="0" bIns="0" anchorCtr="1" anchor="ctr" wrap="none"/>
+            <a:lstStyle/>
+            <a:p>
+              <a:pPr algn="l" marL="0" marR="0" indent="0">
+                <a:lnSpc>
+                  <a:spcPts val="900"/>
+                </a:lnSpc>
+                <a:spcBef>
+                  <a:spcPts val="0"/>
+                </a:spcBef>
+                <a:spcAft>
+                  <a:spcPts val="0"/>
+                </a:spcAft>
+              </a:pPr>
+              <a:r>
+                <a:rPr sz="900">
+                  <a:solidFill>
+                    <a:srgbClr val="404040">
+                      <a:alpha val="100000"/>
+                    </a:srgbClr>
+                  </a:solidFill>
+                  <a:latin typeface="Helvetica"/>
+                  <a:cs typeface="Helvetica"/>
+                </a:rPr>
+                <a:t>subHR per 10 % decline: 2.56 (1.29-5.08), p = 0.007  |  per IQR decline (Δ = 29.5 %): 16.00 (2.11-121.46)  |  IQR: [-15.6, 13.9] %</a:t>
+              </a:r>
+            </a:p>
+          </p:txBody>
+        </p:sp>
+        <p:sp>
+          <p:nvSpPr>
+            <p:cNvPr id="90" name="tx90"/>
+            <p:cNvSpPr/>
+            <p:nvPr/>
+          </p:nvSpPr>
+          <p:spPr>
+            <a:xfrm>
+              <a:off x="887106" y="3932770"/>
               <a:ext cx="1963308" cy="120152"/>
             </a:xfrm>
             <a:prstGeom prst="rect">
